--- a/deliverables/vk-education-focus.pptx
+++ b/deliverables/vk-education-focus.pptx
@@ -1476,7 +1476,7 @@
           <a:lstStyle/>
           <a:p>
             <a:r>
-              <a:t>Этот слайд представляет инициативу по внедрению ИИ-помощника для автоматизации ответов сотрудникам и сокращения времени поиска инструкций.</a:t>
+              <a:t>Слайд вводит инициативу по внедрению ИИ-помощника для автоматизации ответов сотрудникам на вопросы по регламентам.</a:t>
             </a:r>
           </a:p>
         </p:txBody>
@@ -1546,7 +1546,7 @@
           <a:lstStyle/>
           <a:p>
             <a:r>
-              <a:t>Сейчас поиск информации занимает до 30 минут, что существенно замедляет работу сотрудников.</a:t>
+              <a:t>Сейчас поиск информации занимает до 30 минут, а треть обращений дублирует одни и те же вопросы.</a:t>
             </a:r>
           </a:p>
         </p:txBody>
@@ -1616,7 +1616,7 @@
           <a:lstStyle/>
           <a:p>
             <a:r>
-              <a:t>Значительная часть обращений дублирует вопросы по инструкциям, создавая лишнюю нагрузку на поддержку.</a:t>
+              <a:t>Пилотный проект охватывает 150 сотрудников двух подразделений в течение шести недель.</a:t>
             </a:r>
           </a:p>
         </p:txBody>
@@ -1686,7 +1686,7 @@
           <a:lstStyle/>
           <a:p>
             <a:r>
-              <a:t>Текущая ситуация приводит к значительным потерям времени сотрудников и избыточной нагрузке на службу поддержки, что негативно сказывается на бизнес-процессах.</a:t>
+              <a:t>Функция автоматически отвечает сотрудникам на запросы по регламентам и сразу показывает ссылку на исходный документ.</a:t>
             </a:r>
           </a:p>
         </p:txBody>
@@ -1756,7 +1756,7 @@
           <a:lstStyle/>
           <a:p>
             <a:r>
-              <a:t>ИИ-помощник автоматически отвечает сотрудникам на вопросы по регламентам и предоставляет ссылку на исходный документ.</a:t>
+              <a:t>Система обеспечивает безопасность, обрабатывая данные внутри контура без их вывода наружу.</a:t>
             </a:r>
           </a:p>
         </p:txBody>
@@ -1826,7 +1826,7 @@
           <a:lstStyle/>
           <a:p>
             <a:r>
-              <a:t>Мы используем модель с открытыми весами, которая работает исключительно внутри контура компании, гарантируя, что документы не покидают внутреннюю инфраструктуру.</a:t>
+              <a:t>Если ИИ не находит подтверждённый ответ, запрос автоматически передаётся специалисту с полным контекстом диалога.</a:t>
             </a:r>
           </a:p>
         </p:txBody>
@@ -1896,7 +1896,7 @@
           <a:lstStyle/>
           <a:p>
             <a:r>
-              <a:t>При отсутствии готового ответа в базе знаний система автоматически перенаправляет вопрос эксперту, передавая ему весь контекст диалога.</a:t>
+              <a:t>Эта слайд определяет ключевые метрики для оценки эффективности пилота ИИ-помощника.</a:t>
             </a:r>
           </a:p>
         </p:txBody>
@@ -1966,7 +1966,7 @@
           <a:lstStyle/>
           <a:p>
             <a:r>
-              <a:t>Пилотный запуск охватывает два подразделения с общим количеством 150 сотрудников для проверки гипотезы.</a:t>
+              <a:t>Пилот охватывает 150 сотрудников двух подразделений и длится 6 недель.</a:t>
             </a:r>
           </a:p>
         </p:txBody>
@@ -2036,7 +2036,7 @@
           <a:lstStyle/>
           <a:p>
             <a:r>
-              <a:t>Срок проведения пилота составляет шесть недель, что позволит получить достаточную статистическую выборку для оценки эффективности.</a:t>
+              <a:t>Мы будем отслеживать время поиска инструкций и долю обращений, решенных без участия специалиста, чтобы оценить эффективность пилота.</a:t>
             </a:r>
           </a:p>
         </p:txBody>
@@ -2106,7 +2106,7 @@
           <a:lstStyle/>
           <a:p>
             <a:r>
-              <a:t>Успех пилота будет измеряться временем поиска ответа и долей обращений, закрытых без участия специалиста.</a:t>
+              <a:t>Мы используем модель с открытыми весами, которая работает исключительно внутри корпоративного контура, гарантируя, что документы не покидают периметр безопасности.</a:t>
             </a:r>
           </a:p>
         </p:txBody>
@@ -2176,7 +2176,7 @@
           <a:lstStyle/>
           <a:p>
             <a:r>
-              <a:t>Для реализации проекта необходимо выделить команду из трех человек, которые займутся настройкой и мониторингом пилота.</a:t>
+              <a:t>Нам необходимо ваше одобрение для старта пилота и выделение команды из трех человек.</a:t>
             </a:r>
           </a:p>
         </p:txBody>
@@ -2246,7 +2246,7 @@
           <a:lstStyle/>
           <a:p>
             <a:r>
-              <a:t>Для реализации проекта требуется одобрение пилота и выделение команды из трех человек.</a:t>
+              <a:t>Мы просим одобрить пилот и выделить команду из трех человек для реализации проекта.</a:t>
             </a:r>
           </a:p>
         </p:txBody>
@@ -8676,7 +8676,7 @@
                   <a:srgbClr val="000000"/>
                 </a:solidFill>
               </a:rPr>
-              <a:t>Внедрение ИИ-помощника для автоматизации ответов сотрудникам</a:t>
+              <a:t>Автоматизация ответов сотрудников по регламентам</a:t>
             </a:r>
             <a:endParaRPr/>
           </a:p>
@@ -8717,7 +8717,7 @@
                 <a:spcPts val="0"/>
               </a:spcBef>
               <a:spcAft>
-                <a:spcPts val="480"/>
+                <a:spcPts val="359"/>
               </a:spcAft>
               <a:buClr>
                 <a:schemeClr val="lt2"/>
@@ -8727,12 +8727,12 @@
               <a:buNone/>
             </a:pPr>
             <a:r>
-              <a:rPr sz="3200">
+              <a:rPr sz="2400">
                 <a:solidFill>
                   <a:srgbClr val="000000"/>
                 </a:solidFill>
               </a:rPr>
-              <a:t>Сокращение времени поиска инструкций до 30 минут</a:t>
+              <a:t>Сокращение времени поиска инструкций и снижение нагрузки на поддержку</a:t>
             </a:r>
             <a:endParaRPr/>
           </a:p>
@@ -8795,14 +8795,14 @@
                   <a:srgbClr val="000000"/>
                 </a:solidFill>
               </a:rPr>
-              <a:t>Успех измеряется временем поиска ответа и долей закрытых обращений без специалиста</a:t>
+              <a:t>Модель с открытыми весами работает внутри контура, документы не покидают периметр</a:t>
             </a:r>
           </a:p>
         </p:txBody>
       </p:sp>
       <p:grpSp>
         <p:nvGrpSpPr>
-          <p:cNvPr id="2" name="BrandDeck Diagram icon_grid" descr="icon_grid: Время поиска ответа и доля закрытых обращений без специалиста.; Эти метрики подтвердят эффективность пилота за 6 недель.; Результаты покажут сокращение нагрузки на поддержку."/>
+          <p:cNvPr id="2" name="BrandDeck Diagram icon_grid" descr="icon_grid: Модель с открытыми весами работает строго внутри контура компании.; Документы не покидают периметр и не уходят наружу.; Обеспечивается безопасность данных при обработке запросов."/>
           <p:cNvGrpSpPr/>
           <p:nvPr/>
         </p:nvGrpSpPr>
@@ -8876,7 +8876,7 @@
         </p:sp>
         <p:sp>
           <p:nvSpPr>
-            <p:cNvPr id="6" name="BrandDeck Icon clock"/>
+            <p:cNvPr id="6" name="BrandDeck Icon brain"/>
             <p:cNvSpPr/>
             <p:nvPr/>
           </p:nvSpPr>
@@ -8894,40 +8894,190 @@
               <a:pathLst>
                 <a:path w="24000" h="24000" fill="none">
                   <a:moveTo>
-                    <a:pt x="22000" y="12000"/>
+                    <a:pt x="12000" y="5000"/>
                   </a:moveTo>
                   <a:cubicBezTo>
-                    <a:pt x="22000" y="17523"/>
-                    <a:pt x="17523" y="22000"/>
-                    <a:pt x="12000" y="22000"/>
+                    <a:pt x="12003" y="3911"/>
+                    <a:pt x="11416" y="2906"/>
+                    <a:pt x="10466" y="2374"/>
                   </a:cubicBezTo>
                   <a:cubicBezTo>
-                    <a:pt x="6477" y="22000"/>
-                    <a:pt x="2000" y="17523"/>
-                    <a:pt x="2000" y="12000"/>
+                    <a:pt x="9516" y="1842"/>
+                    <a:pt x="8353" y="1866"/>
+                    <a:pt x="7426" y="2437"/>
                   </a:cubicBezTo>
                   <a:cubicBezTo>
-                    <a:pt x="2000" y="6477"/>
-                    <a:pt x="6477" y="2000"/>
-                    <a:pt x="12000" y="2000"/>
+                    <a:pt x="6499" y="3009"/>
+                    <a:pt x="5954" y="4037"/>
+                    <a:pt x="6003" y="5125"/>
                   </a:cubicBezTo>
                   <a:cubicBezTo>
-                    <a:pt x="17523" y="2000"/>
-                    <a:pt x="22000" y="6477"/>
-                    <a:pt x="22000" y="12000"/>
+                    <a:pt x="4812" y="5431"/>
+                    <a:pt x="3828" y="6268"/>
+                    <a:pt x="3335" y="7395"/>
+                  </a:cubicBezTo>
+                  <a:cubicBezTo>
+                    <a:pt x="2842" y="8521"/>
+                    <a:pt x="2894" y="9812"/>
+                    <a:pt x="3477" y="10895"/>
+                  </a:cubicBezTo>
+                  <a:cubicBezTo>
+                    <a:pt x="2450" y="11729"/>
+                    <a:pt x="1902" y="13018"/>
+                    <a:pt x="2013" y="14336"/>
+                  </a:cubicBezTo>
+                  <a:cubicBezTo>
+                    <a:pt x="2125" y="15654"/>
+                    <a:pt x="2881" y="16833"/>
+                    <a:pt x="4033" y="17483"/>
+                  </a:cubicBezTo>
+                  <a:cubicBezTo>
+                    <a:pt x="3842" y="18961"/>
+                    <a:pt x="4488" y="20422"/>
+                    <a:pt x="5710" y="21275"/>
+                  </a:cubicBezTo>
+                  <a:cubicBezTo>
+                    <a:pt x="6931" y="22128"/>
+                    <a:pt x="8526" y="22232"/>
+                    <a:pt x="9847" y="21544"/>
+                  </a:cubicBezTo>
+                  <a:cubicBezTo>
+                    <a:pt x="11169" y="20856"/>
+                    <a:pt x="11998" y="19490"/>
+                    <a:pt x="12000" y="18000"/>
                   </a:cubicBezTo>
                   <a:close/>
                 </a:path>
                 <a:path w="24000" h="24000" fill="none">
                   <a:moveTo>
-                    <a:pt x="12000" y="6000"/>
+                    <a:pt x="12000" y="5000"/>
                   </a:moveTo>
-                  <a:lnTo>
-                    <a:pt x="12000" y="12000"/>
-                  </a:lnTo>
-                  <a:lnTo>
-                    <a:pt x="16000" y="14000"/>
-                  </a:lnTo>
+                  <a:cubicBezTo>
+                    <a:pt x="11997" y="3911"/>
+                    <a:pt x="12584" y="2906"/>
+                    <a:pt x="13534" y="2374"/>
+                  </a:cubicBezTo>
+                  <a:cubicBezTo>
+                    <a:pt x="14484" y="1842"/>
+                    <a:pt x="15647" y="1866"/>
+                    <a:pt x="16574" y="2437"/>
+                  </a:cubicBezTo>
+                  <a:cubicBezTo>
+                    <a:pt x="17501" y="3009"/>
+                    <a:pt x="18046" y="4037"/>
+                    <a:pt x="17997" y="5125"/>
+                  </a:cubicBezTo>
+                  <a:cubicBezTo>
+                    <a:pt x="19188" y="5431"/>
+                    <a:pt x="20172" y="6268"/>
+                    <a:pt x="20665" y="7395"/>
+                  </a:cubicBezTo>
+                  <a:cubicBezTo>
+                    <a:pt x="21158" y="8521"/>
+                    <a:pt x="21106" y="9812"/>
+                    <a:pt x="20523" y="10895"/>
+                  </a:cubicBezTo>
+                  <a:cubicBezTo>
+                    <a:pt x="21550" y="11729"/>
+                    <a:pt x="22098" y="13018"/>
+                    <a:pt x="21987" y="14336"/>
+                  </a:cubicBezTo>
+                  <a:cubicBezTo>
+                    <a:pt x="21875" y="15654"/>
+                    <a:pt x="21119" y="16833"/>
+                    <a:pt x="19967" y="17483"/>
+                  </a:cubicBezTo>
+                  <a:cubicBezTo>
+                    <a:pt x="20158" y="18961"/>
+                    <a:pt x="19512" y="20422"/>
+                    <a:pt x="18290" y="21275"/>
+                  </a:cubicBezTo>
+                  <a:cubicBezTo>
+                    <a:pt x="17069" y="22128"/>
+                    <a:pt x="15474" y="22232"/>
+                    <a:pt x="14153" y="21544"/>
+                  </a:cubicBezTo>
+                  <a:cubicBezTo>
+                    <a:pt x="12831" y="20856"/>
+                    <a:pt x="12002" y="19490"/>
+                    <a:pt x="12000" y="18000"/>
+                  </a:cubicBezTo>
+                  <a:close/>
+                </a:path>
+                <a:path w="24000" h="24000" fill="none">
+                  <a:moveTo>
+                    <a:pt x="15000" y="13000"/>
+                  </a:moveTo>
+                  <a:cubicBezTo>
+                    <a:pt x="13283" y="12396"/>
+                    <a:pt x="12099" y="10817"/>
+                    <a:pt x="12000" y="9000"/>
+                  </a:cubicBezTo>
+                  <a:cubicBezTo>
+                    <a:pt x="11901" y="10817"/>
+                    <a:pt x="10717" y="12396"/>
+                    <a:pt x="9000" y="13000"/>
+                  </a:cubicBezTo>
+                </a:path>
+                <a:path w="24000" h="24000" fill="none">
+                  <a:moveTo>
+                    <a:pt x="17599" y="6500"/>
+                  </a:moveTo>
+                  <a:cubicBezTo>
+                    <a:pt x="17841" y="6081"/>
+                    <a:pt x="17978" y="5609"/>
+                    <a:pt x="17998" y="5125"/>
+                  </a:cubicBezTo>
+                </a:path>
+                <a:path w="24000" h="24000" fill="none">
+                  <a:moveTo>
+                    <a:pt x="6003" y="5125"/>
+                  </a:moveTo>
+                  <a:cubicBezTo>
+                    <a:pt x="6023" y="5609"/>
+                    <a:pt x="6159" y="6080"/>
+                    <a:pt x="6401" y="6500"/>
+                  </a:cubicBezTo>
+                </a:path>
+                <a:path w="24000" h="24000" fill="none">
+                  <a:moveTo>
+                    <a:pt x="3477" y="10896"/>
+                  </a:moveTo>
+                  <a:cubicBezTo>
+                    <a:pt x="3660" y="10747"/>
+                    <a:pt x="3856" y="10614"/>
+                    <a:pt x="4062" y="10500"/>
+                  </a:cubicBezTo>
+                </a:path>
+                <a:path w="24000" h="24000" fill="none">
+                  <a:moveTo>
+                    <a:pt x="19938" y="10500"/>
+                  </a:moveTo>
+                  <a:cubicBezTo>
+                    <a:pt x="20144" y="10614"/>
+                    <a:pt x="20340" y="10747"/>
+                    <a:pt x="20523" y="10896"/>
+                  </a:cubicBezTo>
+                </a:path>
+                <a:path w="24000" h="24000" fill="none">
+                  <a:moveTo>
+                    <a:pt x="6000" y="18000"/>
+                  </a:moveTo>
+                  <a:cubicBezTo>
+                    <a:pt x="5311" y="18000"/>
+                    <a:pt x="4633" y="17823"/>
+                    <a:pt x="4033" y="17484"/>
+                  </a:cubicBezTo>
+                </a:path>
+                <a:path w="24000" h="24000" fill="none">
+                  <a:moveTo>
+                    <a:pt x="19967" y="17484"/>
+                  </a:moveTo>
+                  <a:cubicBezTo>
+                    <a:pt x="19367" y="17823"/>
+                    <a:pt x="18689" y="18000"/>
+                    <a:pt x="18000" y="18000"/>
+                  </a:cubicBezTo>
                 </a:path>
               </a:pathLst>
             </a:custGeom>
@@ -8981,7 +9131,7 @@
                   </a:solidFill>
                   <a:latin typeface="Play"/>
                 </a:rPr>
-                <a:t>Время поиска ответа и доля закрытых обращений без специалиста.</a:t>
+                <a:t>Модель с открытыми весами работает строго внутри контура компании.</a:t>
               </a:r>
             </a:p>
           </p:txBody>
@@ -9048,7 +9198,7 @@
         </p:sp>
         <p:sp>
           <p:nvSpPr>
-            <p:cNvPr id="10" name="BrandDeck Icon chart-column"/>
+            <p:cNvPr id="10" name="BrandDeck Icon file-text"/>
             <p:cNvSpPr/>
             <p:nvPr/>
           </p:nvSpPr>
@@ -9066,42 +9216,75 @@
               <a:pathLst>
                 <a:path w="24000" h="24000" fill="none">
                   <a:moveTo>
-                    <a:pt x="3000" y="3000"/>
+                    <a:pt x="15000" y="2000"/>
                   </a:moveTo>
                   <a:lnTo>
-                    <a:pt x="3000" y="19000"/>
+                    <a:pt x="6000" y="2000"/>
                   </a:lnTo>
                   <a:cubicBezTo>
-                    <a:pt x="3000" y="20105"/>
-                    <a:pt x="3895" y="21000"/>
-                    <a:pt x="5000" y="21000"/>
+                    <a:pt x="4895" y="2000"/>
+                    <a:pt x="4000" y="2895"/>
+                    <a:pt x="4000" y="4000"/>
                   </a:cubicBezTo>
                   <a:lnTo>
-                    <a:pt x="21000" y="21000"/>
+                    <a:pt x="4000" y="20000"/>
+                  </a:lnTo>
+                  <a:cubicBezTo>
+                    <a:pt x="4000" y="21105"/>
+                    <a:pt x="4895" y="22000"/>
+                    <a:pt x="6000" y="22000"/>
+                  </a:cubicBezTo>
+                  <a:lnTo>
+                    <a:pt x="18000" y="22000"/>
+                  </a:lnTo>
+                  <a:cubicBezTo>
+                    <a:pt x="19105" y="22000"/>
+                    <a:pt x="20000" y="21105"/>
+                    <a:pt x="20000" y="20000"/>
+                  </a:cubicBezTo>
+                  <a:lnTo>
+                    <a:pt x="20000" y="7000"/>
+                  </a:lnTo>
+                  <a:close/>
+                </a:path>
+                <a:path w="24000" h="24000" fill="none">
+                  <a:moveTo>
+                    <a:pt x="14000" y="2000"/>
+                  </a:moveTo>
+                  <a:lnTo>
+                    <a:pt x="14000" y="6000"/>
+                  </a:lnTo>
+                  <a:cubicBezTo>
+                    <a:pt x="14000" y="7105"/>
+                    <a:pt x="14895" y="8000"/>
+                    <a:pt x="16000" y="8000"/>
+                  </a:cubicBezTo>
+                  <a:lnTo>
+                    <a:pt x="20000" y="8000"/>
                   </a:lnTo>
                 </a:path>
                 <a:path w="24000" h="24000" fill="none">
                   <a:moveTo>
-                    <a:pt x="18000" y="17000"/>
+                    <a:pt x="10000" y="9000"/>
                   </a:moveTo>
                   <a:lnTo>
-                    <a:pt x="18000" y="9000"/>
+                    <a:pt x="8000" y="9000"/>
                   </a:lnTo>
                 </a:path>
                 <a:path w="24000" h="24000" fill="none">
                   <a:moveTo>
-                    <a:pt x="13000" y="17000"/>
+                    <a:pt x="16000" y="13000"/>
                   </a:moveTo>
                   <a:lnTo>
-                    <a:pt x="13000" y="5000"/>
+                    <a:pt x="8000" y="13000"/>
                   </a:lnTo>
                 </a:path>
                 <a:path w="24000" h="24000" fill="none">
                   <a:moveTo>
-                    <a:pt x="8000" y="17000"/>
+                    <a:pt x="16000" y="17000"/>
                   </a:moveTo>
                   <a:lnTo>
-                    <a:pt x="8000" y="14000"/>
+                    <a:pt x="8000" y="17000"/>
                   </a:lnTo>
                 </a:path>
               </a:pathLst>
@@ -9156,7 +9339,7 @@
                   </a:solidFill>
                   <a:latin typeface="Play"/>
                 </a:rPr>
-                <a:t>Эти метрики подтвердят эффективность пилота за 6 недель.</a:t>
+                <a:t>Документы не покидают периметр и не уходят наружу.</a:t>
               </a:r>
             </a:p>
           </p:txBody>
@@ -9223,7 +9406,7 @@
         </p:sp>
         <p:sp>
           <p:nvSpPr>
-            <p:cNvPr id="14" name="BrandDeck Icon trophy"/>
+            <p:cNvPr id="14" name="BrandDeck Icon shield-check"/>
             <p:cNvSpPr/>
             <p:nvPr/>
           </p:nvSpPr>
@@ -9241,114 +9424,63 @@
               <a:pathLst>
                 <a:path w="24000" h="24000" fill="none">
                   <a:moveTo>
-                    <a:pt x="6000" y="9000"/>
+                    <a:pt x="20000" y="13000"/>
                   </a:moveTo>
+                  <a:cubicBezTo>
+                    <a:pt x="20000" y="18000"/>
+                    <a:pt x="16500" y="20500"/>
+                    <a:pt x="12340" y="21950"/>
+                  </a:cubicBezTo>
+                  <a:cubicBezTo>
+                    <a:pt x="12122" y="22024"/>
+                    <a:pt x="11886" y="22020"/>
+                    <a:pt x="11670" y="21940"/>
+                  </a:cubicBezTo>
+                  <a:cubicBezTo>
+                    <a:pt x="7500" y="20500"/>
+                    <a:pt x="4000" y="18000"/>
+                    <a:pt x="4000" y="13000"/>
+                  </a:cubicBezTo>
                   <a:lnTo>
-                    <a:pt x="4500" y="9000"/>
+                    <a:pt x="4000" y="6000"/>
                   </a:lnTo>
                   <a:cubicBezTo>
-                    <a:pt x="3119" y="9000"/>
-                    <a:pt x="2000" y="7881"/>
-                    <a:pt x="2000" y="6500"/>
+                    <a:pt x="4000" y="5448"/>
+                    <a:pt x="4448" y="5000"/>
+                    <a:pt x="5000" y="5000"/>
                   </a:cubicBezTo>
                   <a:cubicBezTo>
-                    <a:pt x="2000" y="5119"/>
-                    <a:pt x="3119" y="4000"/>
-                    <a:pt x="4500" y="4000"/>
+                    <a:pt x="7000" y="5000"/>
+                    <a:pt x="9500" y="3800"/>
+                    <a:pt x="11240" y="2280"/>
                   </a:cubicBezTo>
-                  <a:lnTo>
-                    <a:pt x="6000" y="4000"/>
-                  </a:lnTo>
+                  <a:cubicBezTo>
+                    <a:pt x="11678" y="1906"/>
+                    <a:pt x="12322" y="1906"/>
+                    <a:pt x="12760" y="2280"/>
+                  </a:cubicBezTo>
+                  <a:cubicBezTo>
+                    <a:pt x="14510" y="3810"/>
+                    <a:pt x="17000" y="5000"/>
+                    <a:pt x="19000" y="5000"/>
+                  </a:cubicBezTo>
+                  <a:cubicBezTo>
+                    <a:pt x="19552" y="5000"/>
+                    <a:pt x="20000" y="5448"/>
+                    <a:pt x="20000" y="6000"/>
+                  </a:cubicBezTo>
+                  <a:close/>
                 </a:path>
                 <a:path w="24000" h="24000" fill="none">
                   <a:moveTo>
-                    <a:pt x="18000" y="9000"/>
+                    <a:pt x="9000" y="12000"/>
                   </a:moveTo>
                   <a:lnTo>
-                    <a:pt x="19500" y="9000"/>
-                  </a:lnTo>
-                  <a:cubicBezTo>
-                    <a:pt x="20881" y="9000"/>
-                    <a:pt x="22000" y="7881"/>
-                    <a:pt x="22000" y="6500"/>
-                  </a:cubicBezTo>
-                  <a:cubicBezTo>
-                    <a:pt x="22000" y="5119"/>
-                    <a:pt x="20881" y="4000"/>
-                    <a:pt x="19500" y="4000"/>
-                  </a:cubicBezTo>
-                  <a:lnTo>
-                    <a:pt x="18000" y="4000"/>
-                  </a:lnTo>
-                </a:path>
-                <a:path w="24000" h="24000" fill="none">
-                  <a:moveTo>
-                    <a:pt x="4000" y="22000"/>
-                  </a:moveTo>
-                  <a:lnTo>
-                    <a:pt x="20000" y="22000"/>
-                  </a:lnTo>
-                </a:path>
-                <a:path w="24000" h="24000" fill="none">
-                  <a:moveTo>
-                    <a:pt x="10000" y="14660"/>
-                  </a:moveTo>
-                  <a:lnTo>
-                    <a:pt x="10000" y="17000"/>
-                  </a:lnTo>
-                  <a:cubicBezTo>
-                    <a:pt x="10000" y="17550"/>
-                    <a:pt x="9530" y="17980"/>
-                    <a:pt x="9030" y="18210"/>
-                  </a:cubicBezTo>
-                  <a:cubicBezTo>
-                    <a:pt x="7850" y="18750"/>
-                    <a:pt x="7000" y="20240"/>
-                    <a:pt x="7000" y="22000"/>
-                  </a:cubicBezTo>
-                </a:path>
-                <a:path w="24000" h="24000" fill="none">
-                  <a:moveTo>
-                    <a:pt x="14000" y="14660"/>
-                  </a:moveTo>
-                  <a:lnTo>
-                    <a:pt x="14000" y="17000"/>
-                  </a:lnTo>
-                  <a:cubicBezTo>
-                    <a:pt x="14000" y="17550"/>
-                    <a:pt x="14470" y="17980"/>
-                    <a:pt x="14970" y="18210"/>
-                  </a:cubicBezTo>
-                  <a:cubicBezTo>
-                    <a:pt x="16150" y="18750"/>
-                    <a:pt x="17000" y="20240"/>
-                    <a:pt x="17000" y="22000"/>
-                  </a:cubicBezTo>
-                </a:path>
-                <a:path w="24000" h="24000" fill="none">
-                  <a:moveTo>
-                    <a:pt x="18000" y="2000"/>
-                  </a:moveTo>
-                  <a:lnTo>
-                    <a:pt x="6000" y="2000"/>
+                    <a:pt x="11000" y="14000"/>
                   </a:lnTo>
                   <a:lnTo>
-                    <a:pt x="6000" y="9000"/>
+                    <a:pt x="15000" y="10000"/>
                   </a:lnTo>
-                  <a:cubicBezTo>
-                    <a:pt x="6000" y="12314"/>
-                    <a:pt x="8686" y="15000"/>
-                    <a:pt x="12000" y="15000"/>
-                  </a:cubicBezTo>
-                  <a:cubicBezTo>
-                    <a:pt x="15314" y="15000"/>
-                    <a:pt x="18000" y="12314"/>
-                    <a:pt x="18000" y="9000"/>
-                  </a:cubicBezTo>
-                  <a:lnTo>
-                    <a:pt x="18000" y="2000"/>
-                  </a:lnTo>
-                  <a:close/>
                 </a:path>
               </a:pathLst>
             </a:custGeom>
@@ -9402,7 +9534,7 @@
                   </a:solidFill>
                   <a:latin typeface="Play"/>
                 </a:rPr>
-                <a:t>Результаты покажут сокращение нагрузки на поддержку.</a:t>
+                <a:t>Обеспечивается безопасность данных при обработке запросов.</a:t>
               </a:r>
             </a:p>
           </p:txBody>
@@ -9468,7 +9600,7 @@
                 <a:spcPts val="0"/>
               </a:spcBef>
               <a:spcAft>
-                <a:spcPts val="359"/>
+                <a:spcPts val="270"/>
               </a:spcAft>
               <a:buClr>
                 <a:schemeClr val="accent1"/>
@@ -9478,12 +9610,12 @@
               <a:buNone/>
             </a:pPr>
             <a:r>
-              <a:rPr sz="2400">
+              <a:rPr sz="1800">
                 <a:solidFill>
                   <a:srgbClr val="000000"/>
                 </a:solidFill>
               </a:rPr>
-              <a:t>Для реализации требуется команда из 3 человек</a:t>
+              <a:t>Требуется одобрение пилота и выделение команды из 3 человек для реализации</a:t>
             </a:r>
             <a:endParaRPr/>
           </a:p>
@@ -9491,16 +9623,16 @@
       </p:sp>
       <p:grpSp>
         <p:nvGrpSpPr>
-          <p:cNvPr id="2" name="BrandDeck Diagram icon_grid" descr="icon_grid: Для запуска пилота требуется команда из 3 человек.; Специалисты займутся настройкой модели и интеграцией с порталом.; Команда будет отвечать на вопросы и анализировать результаты пилота."/>
+          <p:cNvPr id="2" name="BrandDeck Diagram icon_grid" descr="icon_grid: Просим одобрить запуск пилота.; Требуется выделение команды из 3 человек.; Срок пилота: 6 недель."/>
           <p:cNvGrpSpPr/>
           <p:nvPr/>
         </p:nvGrpSpPr>
         <p:grpSpPr>
           <a:xfrm>
-            <a:off x="677334" y="2912953"/>
-            <a:ext cx="10855853" cy="2782924"/>
-            <a:chOff x="677334" y="2912953"/>
-            <a:chExt cx="10855853" cy="2782924"/>
+            <a:off x="677334" y="2603500"/>
+            <a:ext cx="10855853" cy="3597276"/>
+            <a:chOff x="677334" y="2603500"/>
+            <a:chExt cx="10855853" cy="3597276"/>
           </a:xfrm>
         </p:grpSpPr>
         <p:sp>
@@ -9511,8 +9643,8 @@
           </p:nvSpPr>
           <p:spPr>
             <a:xfrm>
-              <a:off x="677334" y="2912953"/>
-              <a:ext cx="5319368" cy="1282903"/>
+              <a:off x="677334" y="2603500"/>
+              <a:ext cx="3473873" cy="3597276"/>
             </a:xfrm>
             <a:prstGeom prst="roundRect">
               <a:avLst>
@@ -9542,8 +9674,8 @@
           </p:nvSpPr>
           <p:spPr>
             <a:xfrm>
-              <a:off x="896790" y="3317794"/>
-              <a:ext cx="473222" cy="473222"/>
+              <a:off x="896789" y="2822956"/>
+              <a:ext cx="603504" cy="603504"/>
             </a:xfrm>
             <a:prstGeom prst="ellipse">
               <a:avLst/>
@@ -9571,8 +9703,8 @@
           </p:nvSpPr>
           <p:spPr>
             <a:xfrm>
-              <a:off x="1000898" y="3421903"/>
-              <a:ext cx="265004" cy="265004"/>
+              <a:off x="1029560" y="2955726"/>
+              <a:ext cx="337962" cy="337962"/>
             </a:xfrm>
             <a:custGeom>
               <a:avLst/>
@@ -9675,7 +9807,7 @@
               </a:pathLst>
             </a:custGeom>
             <a:noFill/>
-            <a:ln w="22083" cap="rnd">
+            <a:ln w="28163" cap="rnd">
               <a:solidFill>
                 <a:srgbClr val="FFFFFF"/>
               </a:solidFill>
@@ -9698,8 +9830,8 @@
           </p:nvSpPr>
           <p:spPr>
             <a:xfrm>
-              <a:off x="1501685" y="3044627"/>
-              <a:ext cx="4275560" cy="1019556"/>
+              <a:off x="830953" y="3580079"/>
+              <a:ext cx="3166634" cy="2510968"/>
             </a:xfrm>
             <a:prstGeom prst="rect">
               <a:avLst/>
@@ -9707,7 +9839,7 @@
             <a:noFill/>
           </p:spPr>
           <p:txBody>
-            <a:bodyPr wrap="square" anchor="ctr" lIns="36576" tIns="18288" rIns="36576" bIns="18288">
+            <a:bodyPr wrap="square" anchor="t" lIns="36576" tIns="18288" rIns="36576" bIns="18288">
               <a:noAutofit/>
             </a:bodyPr>
             <a:lstStyle/>
@@ -9724,7 +9856,7 @@
                   </a:solidFill>
                   <a:latin typeface="Play"/>
                 </a:rPr>
-                <a:t>Для запуска пилота требуется команда из 3 человек.</a:t>
+                <a:t>Просим одобрить запуск пилота.</a:t>
               </a:r>
             </a:p>
           </p:txBody>
@@ -9737,8 +9869,8 @@
           </p:nvSpPr>
           <p:spPr>
             <a:xfrm>
-              <a:off x="6213819" y="2912953"/>
-              <a:ext cx="5319368" cy="1282903"/>
+              <a:off x="4368324" y="2603500"/>
+              <a:ext cx="3473873" cy="3597276"/>
             </a:xfrm>
             <a:prstGeom prst="roundRect">
               <a:avLst>
@@ -9768,8 +9900,8 @@
           </p:nvSpPr>
           <p:spPr>
             <a:xfrm>
-              <a:off x="6433275" y="3317794"/>
-              <a:ext cx="473222" cy="473222"/>
+              <a:off x="4587780" y="2822956"/>
+              <a:ext cx="603504" cy="603504"/>
             </a:xfrm>
             <a:prstGeom prst="ellipse">
               <a:avLst/>
@@ -9791,199 +9923,14 @@
         </p:sp>
         <p:sp>
           <p:nvSpPr>
-            <p:cNvPr id="550" name="BrandDeck Icon user"/>
+            <p:cNvPr id="550" name="BrandDeck Icon users"/>
             <p:cNvSpPr/>
             <p:nvPr/>
           </p:nvSpPr>
           <p:spPr>
             <a:xfrm>
-              <a:off x="6537384" y="3421903"/>
-              <a:ext cx="265004" cy="265004"/>
-            </a:xfrm>
-            <a:custGeom>
-              <a:avLst/>
-              <a:gdLst/>
-              <a:ahLst/>
-              <a:cxnLst/>
-              <a:rect l="l" t="t" r="r" b="b"/>
-              <a:pathLst>
-                <a:path w="24000" h="24000" fill="none">
-                  <a:moveTo>
-                    <a:pt x="19000" y="21000"/>
-                  </a:moveTo>
-                  <a:lnTo>
-                    <a:pt x="19000" y="19000"/>
-                  </a:lnTo>
-                  <a:cubicBezTo>
-                    <a:pt x="19000" y="16791"/>
-                    <a:pt x="17209" y="15000"/>
-                    <a:pt x="15000" y="15000"/>
-                  </a:cubicBezTo>
-                  <a:lnTo>
-                    <a:pt x="9000" y="15000"/>
-                  </a:lnTo>
-                  <a:cubicBezTo>
-                    <a:pt x="6791" y="15000"/>
-                    <a:pt x="5000" y="16791"/>
-                    <a:pt x="5000" y="19000"/>
-                  </a:cubicBezTo>
-                  <a:lnTo>
-                    <a:pt x="5000" y="21000"/>
-                  </a:lnTo>
-                </a:path>
-                <a:path w="24000" h="24000" fill="none">
-                  <a:moveTo>
-                    <a:pt x="16000" y="7000"/>
-                  </a:moveTo>
-                  <a:cubicBezTo>
-                    <a:pt x="16000" y="9209"/>
-                    <a:pt x="14209" y="11000"/>
-                    <a:pt x="12000" y="11000"/>
-                  </a:cubicBezTo>
-                  <a:cubicBezTo>
-                    <a:pt x="9791" y="11000"/>
-                    <a:pt x="8000" y="9209"/>
-                    <a:pt x="8000" y="7000"/>
-                  </a:cubicBezTo>
-                  <a:cubicBezTo>
-                    <a:pt x="8000" y="4791"/>
-                    <a:pt x="9791" y="3000"/>
-                    <a:pt x="12000" y="3000"/>
-                  </a:cubicBezTo>
-                  <a:cubicBezTo>
-                    <a:pt x="14209" y="3000"/>
-                    <a:pt x="16000" y="4791"/>
-                    <a:pt x="16000" y="7000"/>
-                  </a:cubicBezTo>
-                  <a:close/>
-                </a:path>
-              </a:pathLst>
-            </a:custGeom>
-            <a:noFill/>
-            <a:ln w="22083" cap="rnd">
-              <a:solidFill>
-                <a:srgbClr val="FFFFFF"/>
-              </a:solidFill>
-              <a:round/>
-            </a:ln>
-          </p:spPr>
-          <p:txBody>
-            <a:bodyPr rtlCol="0" anchor="ctr"/>
-            <a:lstStyle/>
-            <a:p>
-              <a:pPr algn="ctr"/>
-            </a:p>
-          </p:txBody>
-        </p:sp>
-        <p:sp>
-          <p:nvSpPr>
-            <p:cNvPr id="551" name="BrandDeck Diagram Text 2"/>
-            <p:cNvSpPr txBox="1"/>
-            <p:nvPr/>
-          </p:nvSpPr>
-          <p:spPr>
-            <a:xfrm>
-              <a:off x="7038171" y="3044627"/>
-              <a:ext cx="4275560" cy="1019556"/>
-            </a:xfrm>
-            <a:prstGeom prst="rect">
-              <a:avLst/>
-            </a:prstGeom>
-            <a:noFill/>
-          </p:spPr>
-          <p:txBody>
-            <a:bodyPr wrap="square" anchor="ctr" lIns="36576" tIns="18288" rIns="36576" bIns="18288">
-              <a:noAutofit/>
-            </a:bodyPr>
-            <a:lstStyle/>
-            <a:p>
-              <a:pPr algn="l">
-                <a:lnSpc>
-                  <a:spcPct val="110000"/>
-                </a:lnSpc>
-              </a:pPr>
-              <a:r>
-                <a:rPr sz="1800" b="0">
-                  <a:solidFill>
-                    <a:srgbClr val="000000"/>
-                  </a:solidFill>
-                  <a:latin typeface="Play"/>
-                </a:rPr>
-                <a:t>Специалисты займутся настройкой модели и интеграцией с порталом.</a:t>
-              </a:r>
-            </a:p>
-          </p:txBody>
-        </p:sp>
-        <p:sp>
-          <p:nvSpPr>
-            <p:cNvPr id="552" name="BrandDeck Diagram Card 3"/>
-            <p:cNvSpPr/>
-            <p:nvPr/>
-          </p:nvSpPr>
-          <p:spPr>
-            <a:xfrm>
-              <a:off x="677334" y="4412974"/>
-              <a:ext cx="5319368" cy="1282903"/>
-            </a:xfrm>
-            <a:prstGeom prst="roundRect">
-              <a:avLst>
-                <a:gd name="adj" fmla="val 8000"/>
-              </a:avLst>
-            </a:prstGeom>
-            <a:solidFill>
-              <a:srgbClr val="EDF5FF"/>
-            </a:solidFill>
-            <a:ln>
-              <a:noFill/>
-            </a:ln>
-          </p:spPr>
-          <p:txBody>
-            <a:bodyPr rtlCol="0" anchor="ctr"/>
-            <a:lstStyle/>
-            <a:p>
-              <a:pPr algn="ctr"/>
-            </a:p>
-          </p:txBody>
-        </p:sp>
-        <p:sp>
-          <p:nvSpPr>
-            <p:cNvPr id="553" name="BrandDeck Diagram Icon 3 Badge"/>
-            <p:cNvSpPr/>
-            <p:nvPr/>
-          </p:nvSpPr>
-          <p:spPr>
-            <a:xfrm>
-              <a:off x="896790" y="4817814"/>
-              <a:ext cx="473222" cy="473222"/>
-            </a:xfrm>
-            <a:prstGeom prst="ellipse">
-              <a:avLst/>
-            </a:prstGeom>
-            <a:solidFill>
-              <a:srgbClr val="006DEB"/>
-            </a:solidFill>
-            <a:ln>
-              <a:noFill/>
-            </a:ln>
-          </p:spPr>
-          <p:txBody>
-            <a:bodyPr rtlCol="0" anchor="ctr"/>
-            <a:lstStyle/>
-            <a:p>
-              <a:pPr algn="ctr"/>
-            </a:p>
-          </p:txBody>
-        </p:sp>
-        <p:sp>
-          <p:nvSpPr>
-            <p:cNvPr id="554" name="BrandDeck Icon users"/>
-            <p:cNvSpPr/>
-            <p:nvPr/>
-          </p:nvSpPr>
-          <p:spPr>
-            <a:xfrm>
-              <a:off x="1000898" y="4921923"/>
-              <a:ext cx="265004" cy="265004"/>
+              <a:off x="4720551" y="2955726"/>
+              <a:ext cx="337962" cy="337962"/>
             </a:xfrm>
             <a:custGeom>
               <a:avLst/>
@@ -10073,7 +10020,7 @@
               </a:pathLst>
             </a:custGeom>
             <a:noFill/>
-            <a:ln w="22083" cap="rnd">
+            <a:ln w="28163" cap="rnd">
               <a:solidFill>
                 <a:srgbClr val="FFFFFF"/>
               </a:solidFill>
@@ -10090,14 +10037,14 @@
         </p:sp>
         <p:sp>
           <p:nvSpPr>
-            <p:cNvPr id="555" name="BrandDeck Diagram Text 3"/>
+            <p:cNvPr id="551" name="BrandDeck Diagram Text 2"/>
             <p:cNvSpPr txBox="1"/>
             <p:nvPr/>
           </p:nvSpPr>
           <p:spPr>
             <a:xfrm>
-              <a:off x="1501685" y="4544647"/>
-              <a:ext cx="4275560" cy="1019556"/>
+              <a:off x="4521943" y="3580079"/>
+              <a:ext cx="3166634" cy="2510968"/>
             </a:xfrm>
             <a:prstGeom prst="rect">
               <a:avLst/>
@@ -10105,7 +10052,7 @@
             <a:noFill/>
           </p:spPr>
           <p:txBody>
-            <a:bodyPr wrap="square" anchor="ctr" lIns="36576" tIns="18288" rIns="36576" bIns="18288">
+            <a:bodyPr wrap="square" anchor="t" lIns="36576" tIns="18288" rIns="36576" bIns="18288">
               <a:noAutofit/>
             </a:bodyPr>
             <a:lstStyle/>
@@ -10122,7 +10069,188 @@
                   </a:solidFill>
                   <a:latin typeface="Play"/>
                 </a:rPr>
-                <a:t>Команда будет отвечать на вопросы и анализировать результаты пилота.</a:t>
+                <a:t>Требуется выделение команды из 3 человек.</a:t>
+              </a:r>
+            </a:p>
+          </p:txBody>
+        </p:sp>
+        <p:sp>
+          <p:nvSpPr>
+            <p:cNvPr id="552" name="BrandDeck Diagram Card 3"/>
+            <p:cNvSpPr/>
+            <p:nvPr/>
+          </p:nvSpPr>
+          <p:spPr>
+            <a:xfrm>
+              <a:off x="8059314" y="2603500"/>
+              <a:ext cx="3473873" cy="3597276"/>
+            </a:xfrm>
+            <a:prstGeom prst="roundRect">
+              <a:avLst>
+                <a:gd name="adj" fmla="val 8000"/>
+              </a:avLst>
+            </a:prstGeom>
+            <a:solidFill>
+              <a:srgbClr val="EDF5FF"/>
+            </a:solidFill>
+            <a:ln>
+              <a:noFill/>
+            </a:ln>
+          </p:spPr>
+          <p:txBody>
+            <a:bodyPr rtlCol="0" anchor="ctr"/>
+            <a:lstStyle/>
+            <a:p>
+              <a:pPr algn="ctr"/>
+            </a:p>
+          </p:txBody>
+        </p:sp>
+        <p:sp>
+          <p:nvSpPr>
+            <p:cNvPr id="553" name="BrandDeck Diagram Icon 3 Badge"/>
+            <p:cNvSpPr/>
+            <p:nvPr/>
+          </p:nvSpPr>
+          <p:spPr>
+            <a:xfrm>
+              <a:off x="8278770" y="2822956"/>
+              <a:ext cx="603504" cy="603504"/>
+            </a:xfrm>
+            <a:prstGeom prst="ellipse">
+              <a:avLst/>
+            </a:prstGeom>
+            <a:solidFill>
+              <a:srgbClr val="006DEB"/>
+            </a:solidFill>
+            <a:ln>
+              <a:noFill/>
+            </a:ln>
+          </p:spPr>
+          <p:txBody>
+            <a:bodyPr rtlCol="0" anchor="ctr"/>
+            <a:lstStyle/>
+            <a:p>
+              <a:pPr algn="ctr"/>
+            </a:p>
+          </p:txBody>
+        </p:sp>
+        <p:sp>
+          <p:nvSpPr>
+            <p:cNvPr id="554" name="BrandDeck Icon clock"/>
+            <p:cNvSpPr/>
+            <p:nvPr/>
+          </p:nvSpPr>
+          <p:spPr>
+            <a:xfrm>
+              <a:off x="8411541" y="2955726"/>
+              <a:ext cx="337962" cy="337962"/>
+            </a:xfrm>
+            <a:custGeom>
+              <a:avLst/>
+              <a:gdLst/>
+              <a:ahLst/>
+              <a:cxnLst/>
+              <a:rect l="l" t="t" r="r" b="b"/>
+              <a:pathLst>
+                <a:path w="24000" h="24000" fill="none">
+                  <a:moveTo>
+                    <a:pt x="22000" y="12000"/>
+                  </a:moveTo>
+                  <a:cubicBezTo>
+                    <a:pt x="22000" y="17523"/>
+                    <a:pt x="17523" y="22000"/>
+                    <a:pt x="12000" y="22000"/>
+                  </a:cubicBezTo>
+                  <a:cubicBezTo>
+                    <a:pt x="6477" y="22000"/>
+                    <a:pt x="2000" y="17523"/>
+                    <a:pt x="2000" y="12000"/>
+                  </a:cubicBezTo>
+                  <a:cubicBezTo>
+                    <a:pt x="2000" y="6477"/>
+                    <a:pt x="6477" y="2000"/>
+                    <a:pt x="12000" y="2000"/>
+                  </a:cubicBezTo>
+                  <a:cubicBezTo>
+                    <a:pt x="17523" y="2000"/>
+                    <a:pt x="22000" y="6477"/>
+                    <a:pt x="22000" y="12000"/>
+                  </a:cubicBezTo>
+                  <a:close/>
+                </a:path>
+                <a:path w="24000" h="24000" fill="none">
+                  <a:moveTo>
+                    <a:pt x="12000" y="6000"/>
+                  </a:moveTo>
+                  <a:lnTo>
+                    <a:pt x="12000" y="12000"/>
+                  </a:lnTo>
+                  <a:lnTo>
+                    <a:pt x="16000" y="14000"/>
+                  </a:lnTo>
+                </a:path>
+              </a:pathLst>
+            </a:custGeom>
+            <a:noFill/>
+            <a:ln w="28163" cap="rnd">
+              <a:solidFill>
+                <a:srgbClr val="FFFFFF"/>
+              </a:solidFill>
+              <a:round/>
+            </a:ln>
+          </p:spPr>
+          <p:txBody>
+            <a:bodyPr rtlCol="0" anchor="ctr"/>
+            <a:lstStyle/>
+            <a:p>
+              <a:pPr algn="ctr"/>
+            </a:p>
+          </p:txBody>
+        </p:sp>
+        <p:sp>
+          <p:nvSpPr>
+            <p:cNvPr id="555" name="BrandDeck Diagram Text 3"/>
+            <p:cNvSpPr txBox="1"/>
+            <p:nvPr/>
+          </p:nvSpPr>
+          <p:spPr>
+            <a:xfrm>
+              <a:off x="8212933" y="3580079"/>
+              <a:ext cx="3166634" cy="2510968"/>
+            </a:xfrm>
+            <a:prstGeom prst="rect">
+              <a:avLst/>
+            </a:prstGeom>
+            <a:noFill/>
+          </p:spPr>
+          <p:txBody>
+            <a:bodyPr wrap="square" anchor="t" lIns="36576" tIns="18288" rIns="36576" bIns="18288">
+              <a:noAutofit/>
+            </a:bodyPr>
+            <a:lstStyle/>
+            <a:p>
+              <a:pPr algn="l">
+                <a:lnSpc>
+                  <a:spcPct val="110000"/>
+                </a:lnSpc>
+              </a:pPr>
+              <a:r>
+                <a:rPr sz="1800" b="1">
+                  <a:solidFill>
+                    <a:srgbClr val="000000"/>
+                  </a:solidFill>
+                  <a:latin typeface="Play"/>
+                </a:rPr>
+                <a:t>Срок пилота:</a:t>
+              </a:r>
+              <a:r>
+                <a:rPr sz="1800" b="0">
+                  <a:solidFill>
+                    <a:srgbClr val="000000"/>
+                  </a:solidFill>
+                  <a:latin typeface="Play"/>
+                </a:rPr>
+                <a:t> 6 недель.</a:t>
               </a:r>
             </a:p>
           </p:txBody>
@@ -10176,7 +10304,7 @@
             </a:pPr>
             <a:r>
               <a:rPr sz="1600"/>
-              <a:t>Одобрить запуск пилота для 2 подразделений и 150 сотрудников.</a:t>
+              <a:t>Просим одобрить запуск пилота с командой из 3 человек.</a:t>
             </a:r>
           </a:p>
           <a:p>
@@ -10193,7 +10321,7 @@
             </a:pPr>
             <a:r>
               <a:rPr sz="1600"/>
-              <a:t>Выделить команду из 3 человек для реализации проекта.</a:t>
+              <a:t>Пилот продлится 6 недель в двух подразделениях.</a:t>
             </a:r>
           </a:p>
           <a:p>
@@ -10210,7 +10338,7 @@
             </a:pPr>
             <a:r>
               <a:rPr sz="1600"/>
-              <a:t>Начать пилотный этап в течение 6 недель.</a:t>
+              <a:t>Измерим время поиска ответа и долю закрытых обращений.</a:t>
             </a:r>
           </a:p>
         </p:txBody>
@@ -10254,7 +10382,7 @@
                   <a:srgbClr val="000000"/>
                 </a:solidFill>
               </a:rPr>
-              <a:t>Одобрить пилот и выделить команду из 3 человек</a:t>
+              <a:t>Просим одобрить пилот и выделить команду из 3 человек</a:t>
             </a:r>
           </a:p>
         </p:txBody>
@@ -10268,261 +10396,6 @@
 </file>
 
 <file path=ppt/slides/slide2.xml><?xml version="1.0" encoding="utf-8"?>
-<p:sld xmlns:a="http://schemas.openxmlformats.org/drawingml/2006/main" xmlns:p="http://schemas.openxmlformats.org/presentationml/2006/main" xmlns:r="http://schemas.openxmlformats.org/officeDocument/2006/relationships">
-  <p:cSld>
-    <p:spTree>
-      <p:nvGrpSpPr>
-        <p:cNvPr id="1" name=""/>
-        <p:cNvGrpSpPr/>
-        <p:nvPr/>
-      </p:nvGrpSpPr>
-      <p:grpSpPr/>
-      <p:sp>
-        <p:nvSpPr>
-          <p:cNvPr id="1060" name="BrandDeck Text 1060"/>
-          <p:cNvSpPr txBox="1"/>
-          <p:nvPr>
-            <p:ph type="title"/>
-          </p:nvPr>
-        </p:nvSpPr>
-        <p:spPr>
-          <a:xfrm>
-            <a:off x="677334" y="692150"/>
-            <a:ext cx="10855854" cy="644241"/>
-          </a:xfrm>
-          <a:prstGeom prst="rect">
-            <a:avLst/>
-          </a:prstGeom>
-          <a:noFill/>
-          <a:ln>
-            <a:noFill/>
-          </a:ln>
-        </p:spPr>
-        <p:txBody>
-          <a:bodyPr anchorCtr="0" anchor="t" bIns="0" lIns="0" spcFirstLastPara="1" rIns="0" wrap="square" tIns="0">
-            <a:normAutofit/>
-          </a:bodyPr>
-          <a:lstStyle/>
-          <a:p>
-            <a:pPr indent="0" marL="0" rtl="0" algn="l">
-              <a:lnSpc>
-                <a:spcPct val="115000"/>
-              </a:lnSpc>
-              <a:spcBef>
-                <a:spcPts val="0"/>
-              </a:spcBef>
-              <a:spcAft>
-                <a:spcPts val="359"/>
-              </a:spcAft>
-              <a:buClr>
-                <a:schemeClr val="accent1"/>
-              </a:buClr>
-              <a:buSzPts val="3600"/>
-              <a:buFont typeface="Play"/>
-              <a:buNone/>
-            </a:pPr>
-            <a:r>
-              <a:rPr sz="2400">
-                <a:solidFill>
-                  <a:srgbClr val="000000"/>
-                </a:solidFill>
-              </a:rPr>
-              <a:t>Сотрудники теряют до 30 минут на поиск инструкций</a:t>
-            </a:r>
-            <a:endParaRPr/>
-          </a:p>
-        </p:txBody>
-      </p:sp>
-      <p:pic>
-        <p:nvPicPr>
-          <p:cNvPr id="1072" name="BrandDeck Image" descr="сотрудник специалист поддержки"/>
-          <p:cNvPicPr>
-            <a:picLocks noChangeAspect="1"/>
-          </p:cNvPicPr>
-          <p:nvPr/>
-        </p:nvPicPr>
-        <p:blipFill>
-          <a:blip r:embed="rId3"/>
-          <a:srcRect l="5955" r="5955"/>
-          <a:stretch>
-            <a:fillRect/>
-          </a:stretch>
-        </p:blipFill>
-        <p:spPr>
-          <a:xfrm>
-            <a:off x="671514" y="1773238"/>
-            <a:ext cx="6929992" cy="4427537"/>
-          </a:xfrm>
-          <a:prstGeom prst="rect">
-            <a:avLst/>
-          </a:prstGeom>
-        </p:spPr>
-      </p:pic>
-      <p:sp>
-        <p:nvSpPr>
-          <p:cNvPr id="1069" name="Google Shape;1069;p83"/>
-          <p:cNvSpPr txBox="1"/>
-          <p:nvPr/>
-        </p:nvSpPr>
-        <p:spPr>
-          <a:xfrm>
-            <a:off x="8355728" y="627078"/>
-            <a:ext cx="3409196" cy="3951457"/>
-          </a:xfrm>
-          <a:prstGeom prst="rect">
-            <a:avLst/>
-          </a:prstGeom>
-          <a:noFill/>
-          <a:ln>
-            <a:noFill/>
-          </a:ln>
-        </p:spPr>
-        <p:txBody>
-          <a:bodyPr anchorCtr="0" anchor="t" bIns="36000" lIns="36000" spcFirstLastPara="1" rIns="36000" wrap="square" tIns="36000">
-            <a:normAutofit/>
-          </a:bodyPr>
-          <a:lstStyle/>
-          <a:p>
-            <a:pPr indent="0" lvl="0" marL="0" marR="0" rtl="0" algn="l">
-              <a:lnSpc>
-                <a:spcPct val="110000"/>
-              </a:lnSpc>
-              <a:spcBef>
-                <a:spcPts val="0"/>
-              </a:spcBef>
-              <a:spcAft>
-                <a:spcPts val="0"/>
-              </a:spcAft>
-              <a:buNone/>
-            </a:pPr>
-            <a:endParaRPr/>
-          </a:p>
-        </p:txBody>
-      </p:sp>
-      <p:cxnSp>
-        <p:nvCxnSpPr>
-          <p:cNvPr id="1070" name="Google Shape;1070;p83"/>
-          <p:cNvCxnSpPr/>
-          <p:nvPr/>
-        </p:nvCxnSpPr>
-        <p:spPr>
-          <a:xfrm flipH="1">
-            <a:off x="8111315" y="692150"/>
-            <a:ext cx="9261" cy="5508625"/>
-          </a:xfrm>
-          <a:prstGeom prst="straightConnector1">
-            <a:avLst/>
-          </a:prstGeom>
-          <a:noFill/>
-          <a:ln cap="flat" cmpd="sng" w="9525">
-            <a:solidFill>
-              <a:srgbClr val="F4F8FB"/>
-            </a:solidFill>
-            <a:prstDash val="solid"/>
-            <a:miter lim="8000"/>
-            <a:headEnd len="sm" w="sm" type="none"/>
-            <a:tailEnd len="sm" w="sm" type="none"/>
-          </a:ln>
-        </p:spPr>
-      </p:cxnSp>
-      <p:sp>
-        <p:nvSpPr>
-          <p:cNvPr id="1071" name="BrandDeck Body"/>
-          <p:cNvSpPr txBox="1"/>
-          <p:nvPr/>
-        </p:nvSpPr>
-        <p:spPr>
-          <a:xfrm>
-            <a:off x="8355728" y="1473551"/>
-            <a:ext cx="3409196" cy="3104984"/>
-          </a:xfrm>
-          <a:prstGeom prst="rect">
-            <a:avLst/>
-          </a:prstGeom>
-          <a:noFill/>
-        </p:spPr>
-        <p:txBody>
-          <a:bodyPr wrap="square" anchor="t" lIns="36576" rIns="36576" tIns="18288" bIns="18288">
-            <a:normAutofit/>
-          </a:bodyPr>
-          <a:lstStyle/>
-          <a:p>
-            <a:pPr algn="l">
-              <a:lnSpc>
-                <a:spcPct val="115000"/>
-              </a:lnSpc>
-              <a:spcBef>
-                <a:spcPts val="0"/>
-              </a:spcBef>
-              <a:spcAft>
-                <a:spcPts val="210"/>
-              </a:spcAft>
-            </a:pPr>
-            <a:r>
-              <a:rPr sz="1400">
-                <a:solidFill>
-                  <a:srgbClr val="000000"/>
-                </a:solidFill>
-                <a:latin typeface="Play"/>
-              </a:rPr>
-              <a:t>• Сотрудники тратят до 30 минут на поиск нужной инструкции.</a:t>
-            </a:r>
-          </a:p>
-          <a:p>
-            <a:pPr algn="l">
-              <a:lnSpc>
-                <a:spcPct val="115000"/>
-              </a:lnSpc>
-              <a:spcBef>
-                <a:spcPts val="0"/>
-              </a:spcBef>
-              <a:spcAft>
-                <a:spcPts val="210"/>
-              </a:spcAft>
-            </a:pPr>
-            <a:r>
-              <a:rPr sz="1400">
-                <a:solidFill>
-                  <a:srgbClr val="000000"/>
-                </a:solidFill>
-                <a:latin typeface="Play"/>
-              </a:rPr>
-              <a:t>• Ручной поиск регламентов снижает общую эффективность работы.</a:t>
-            </a:r>
-          </a:p>
-          <a:p>
-            <a:pPr algn="l">
-              <a:lnSpc>
-                <a:spcPct val="115000"/>
-              </a:lnSpc>
-              <a:spcBef>
-                <a:spcPts val="0"/>
-              </a:spcBef>
-              <a:spcAft>
-                <a:spcPts val="210"/>
-              </a:spcAft>
-            </a:pPr>
-            <a:r>
-              <a:rPr sz="1400">
-                <a:solidFill>
-                  <a:srgbClr val="000000"/>
-                </a:solidFill>
-                <a:latin typeface="Play"/>
-              </a:rPr>
-              <a:t>• Длительное время поиска отвлекает от выполнения основных задач.</a:t>
-            </a:r>
-          </a:p>
-        </p:txBody>
-      </p:sp>
-    </p:spTree>
-  </p:cSld>
-  <p:clrMapOvr>
-    <a:masterClrMapping/>
-  </p:clrMapOvr>
-</p:sld>
-</file>
-
-<file path=ppt/slides/slide3.xml><?xml version="1.0" encoding="utf-8"?>
 <p:sld xmlns:a="http://schemas.openxmlformats.org/drawingml/2006/main" xmlns:p="http://schemas.openxmlformats.org/presentationml/2006/main" xmlns:r="http://schemas.openxmlformats.org/officeDocument/2006/relationships">
   <p:cSld>
     <p:spTree>
@@ -10562,32 +10435,32 @@
                 <a:spcPts val="0"/>
               </a:spcBef>
               <a:spcAft>
-                <a:spcPts val="359"/>
+                <a:spcPts val="240"/>
               </a:spcAft>
             </a:pPr>
             <a:r>
-              <a:rPr sz="2400">
+              <a:rPr sz="1600">
                 <a:solidFill>
                   <a:srgbClr val="000000"/>
                 </a:solidFill>
               </a:rPr>
-              <a:t>Треть обращений в поддержку — повторяющиеся вопросы</a:t>
+              <a:t>Сотрудники тратят до 30 минут на поиск инструкции, а треть обращений — повторяющиеся вопросы</a:t>
             </a:r>
           </a:p>
         </p:txBody>
       </p:sp>
       <p:grpSp>
         <p:nvGrpSpPr>
-          <p:cNvPr id="2" name="BrandDeck Diagram icon_grid" descr="icon_grid: Треть обращений в поддержку — повторяющиеся вопросы.; Запросы касаются регламентов и инструкций.; Нагрузка на поддержку растет из-за дублирования."/>
+          <p:cNvPr id="2" name="BrandDeck Diagram icon_grid" descr="icon_grid: Сотрудники тратят до 30 минут на поиск инструкции.; Треть всех обращений в поддержку — повторяющиеся вопросы.; Это создает высокую нагрузку на специалистов поддержки."/>
           <p:cNvGrpSpPr/>
           <p:nvPr/>
         </p:nvGrpSpPr>
         <p:grpSpPr>
           <a:xfrm>
-            <a:off x="658813" y="2513725"/>
-            <a:ext cx="10874374" cy="2499296"/>
-            <a:chOff x="658813" y="2513725"/>
-            <a:chExt cx="10874374" cy="2499296"/>
+            <a:off x="658813" y="2405806"/>
+            <a:ext cx="10874374" cy="2783294"/>
+            <a:chOff x="658813" y="2405806"/>
+            <a:chExt cx="10874374" cy="2783294"/>
           </a:xfrm>
         </p:grpSpPr>
         <p:sp>
@@ -10598,8 +10471,8 @@
           </p:nvSpPr>
           <p:spPr>
             <a:xfrm>
-              <a:off x="658813" y="2513725"/>
-              <a:ext cx="5328443" cy="1140904"/>
+              <a:off x="658813" y="2405806"/>
+              <a:ext cx="5328443" cy="1282903"/>
             </a:xfrm>
             <a:prstGeom prst="roundRect">
               <a:avLst>
@@ -10629,7 +10502,7 @@
           </p:nvSpPr>
           <p:spPr>
             <a:xfrm>
-              <a:off x="878269" y="2788045"/>
+              <a:off x="878269" y="2751126"/>
               <a:ext cx="592264" cy="592264"/>
             </a:xfrm>
             <a:prstGeom prst="ellipse">
@@ -10652,13 +10525,226 @@
         </p:sp>
         <p:sp>
           <p:nvSpPr>
-            <p:cNvPr id="6" name="BrandDeck Icon headset"/>
+            <p:cNvPr id="6" name="BrandDeck Icon users"/>
             <p:cNvSpPr/>
             <p:nvPr/>
           </p:nvSpPr>
           <p:spPr>
             <a:xfrm>
-              <a:off x="1008567" y="2918344"/>
+              <a:off x="1008567" y="2881424"/>
+              <a:ext cx="331668" cy="331668"/>
+            </a:xfrm>
+            <a:custGeom>
+              <a:avLst/>
+              <a:gdLst/>
+              <a:ahLst/>
+              <a:cxnLst/>
+              <a:rect l="l" t="t" r="r" b="b"/>
+              <a:pathLst>
+                <a:path w="24000" h="24000" fill="none">
+                  <a:moveTo>
+                    <a:pt x="16000" y="21000"/>
+                  </a:moveTo>
+                  <a:lnTo>
+                    <a:pt x="16000" y="19000"/>
+                  </a:lnTo>
+                  <a:cubicBezTo>
+                    <a:pt x="16000" y="16791"/>
+                    <a:pt x="14209" y="15000"/>
+                    <a:pt x="12000" y="15000"/>
+                  </a:cubicBezTo>
+                  <a:lnTo>
+                    <a:pt x="6000" y="15000"/>
+                  </a:lnTo>
+                  <a:cubicBezTo>
+                    <a:pt x="3791" y="15000"/>
+                    <a:pt x="2000" y="16791"/>
+                    <a:pt x="2000" y="19000"/>
+                  </a:cubicBezTo>
+                  <a:lnTo>
+                    <a:pt x="2000" y="21000"/>
+                  </a:lnTo>
+                </a:path>
+                <a:path w="24000" h="24000" fill="none">
+                  <a:moveTo>
+                    <a:pt x="13000" y="7000"/>
+                  </a:moveTo>
+                  <a:cubicBezTo>
+                    <a:pt x="13000" y="9209"/>
+                    <a:pt x="11209" y="11000"/>
+                    <a:pt x="9000" y="11000"/>
+                  </a:cubicBezTo>
+                  <a:cubicBezTo>
+                    <a:pt x="6791" y="11000"/>
+                    <a:pt x="5000" y="9209"/>
+                    <a:pt x="5000" y="7000"/>
+                  </a:cubicBezTo>
+                  <a:cubicBezTo>
+                    <a:pt x="5000" y="4791"/>
+                    <a:pt x="6791" y="3000"/>
+                    <a:pt x="9000" y="3000"/>
+                  </a:cubicBezTo>
+                  <a:cubicBezTo>
+                    <a:pt x="11209" y="3000"/>
+                    <a:pt x="13000" y="4791"/>
+                    <a:pt x="13000" y="7000"/>
+                  </a:cubicBezTo>
+                  <a:close/>
+                </a:path>
+                <a:path w="24000" h="24000" fill="none">
+                  <a:moveTo>
+                    <a:pt x="22000" y="21000"/>
+                  </a:moveTo>
+                  <a:lnTo>
+                    <a:pt x="22000" y="19000"/>
+                  </a:lnTo>
+                  <a:cubicBezTo>
+                    <a:pt x="21999" y="17177"/>
+                    <a:pt x="20765" y="15586"/>
+                    <a:pt x="19000" y="15130"/>
+                  </a:cubicBezTo>
+                </a:path>
+                <a:path w="24000" h="24000" fill="none">
+                  <a:moveTo>
+                    <a:pt x="16000" y="3130"/>
+                  </a:moveTo>
+                  <a:cubicBezTo>
+                    <a:pt x="17770" y="3583"/>
+                    <a:pt x="19008" y="5178"/>
+                    <a:pt x="19008" y="7005"/>
+                  </a:cubicBezTo>
+                  <a:cubicBezTo>
+                    <a:pt x="19008" y="8832"/>
+                    <a:pt x="17770" y="10427"/>
+                    <a:pt x="16000" y="10880"/>
+                  </a:cubicBezTo>
+                </a:path>
+              </a:pathLst>
+            </a:custGeom>
+            <a:noFill/>
+            <a:ln w="27639" cap="rnd">
+              <a:solidFill>
+                <a:srgbClr val="FFFFFF"/>
+              </a:solidFill>
+              <a:round/>
+            </a:ln>
+          </p:spPr>
+          <p:txBody>
+            <a:bodyPr rtlCol="0" anchor="ctr"/>
+            <a:lstStyle/>
+            <a:p>
+              <a:pPr algn="ctr"/>
+            </a:p>
+          </p:txBody>
+        </p:sp>
+        <p:sp>
+          <p:nvSpPr>
+            <p:cNvPr id="7" name="BrandDeck Diagram Text 1"/>
+            <p:cNvSpPr txBox="1"/>
+            <p:nvPr/>
+          </p:nvSpPr>
+          <p:spPr>
+            <a:xfrm>
+              <a:off x="1602207" y="2537480"/>
+              <a:ext cx="4165593" cy="1019556"/>
+            </a:xfrm>
+            <a:prstGeom prst="rect">
+              <a:avLst/>
+            </a:prstGeom>
+            <a:noFill/>
+          </p:spPr>
+          <p:txBody>
+            <a:bodyPr wrap="square" anchor="ctr" lIns="36576" tIns="18288" rIns="36576" bIns="18288">
+              <a:noAutofit/>
+            </a:bodyPr>
+            <a:lstStyle/>
+            <a:p>
+              <a:pPr algn="l">
+                <a:lnSpc>
+                  <a:spcPct val="110000"/>
+                </a:lnSpc>
+              </a:pPr>
+              <a:r>
+                <a:rPr sz="1800" b="0">
+                  <a:solidFill>
+                    <a:srgbClr val="000000"/>
+                  </a:solidFill>
+                  <a:latin typeface="Play"/>
+                </a:rPr>
+                <a:t>Сотрудники тратят до 30 минут на поиск инструкции.</a:t>
+              </a:r>
+            </a:p>
+          </p:txBody>
+        </p:sp>
+        <p:sp>
+          <p:nvSpPr>
+            <p:cNvPr id="8" name="BrandDeck Diagram Card 2"/>
+            <p:cNvSpPr/>
+            <p:nvPr/>
+          </p:nvSpPr>
+          <p:spPr>
+            <a:xfrm>
+              <a:off x="6204744" y="2405806"/>
+              <a:ext cx="5328443" cy="1282903"/>
+            </a:xfrm>
+            <a:prstGeom prst="roundRect">
+              <a:avLst>
+                <a:gd name="adj" fmla="val 8000"/>
+              </a:avLst>
+            </a:prstGeom>
+            <a:solidFill>
+              <a:srgbClr val="EDF5FF"/>
+            </a:solidFill>
+            <a:ln>
+              <a:noFill/>
+            </a:ln>
+          </p:spPr>
+          <p:txBody>
+            <a:bodyPr rtlCol="0" anchor="ctr"/>
+            <a:lstStyle/>
+            <a:p>
+              <a:pPr algn="ctr"/>
+            </a:p>
+          </p:txBody>
+        </p:sp>
+        <p:sp>
+          <p:nvSpPr>
+            <p:cNvPr id="9" name="BrandDeck Diagram Icon 2 Badge"/>
+            <p:cNvSpPr/>
+            <p:nvPr/>
+          </p:nvSpPr>
+          <p:spPr>
+            <a:xfrm>
+              <a:off x="6424200" y="2751126"/>
+              <a:ext cx="592264" cy="592264"/>
+            </a:xfrm>
+            <a:prstGeom prst="ellipse">
+              <a:avLst/>
+            </a:prstGeom>
+            <a:solidFill>
+              <a:srgbClr val="006DEB"/>
+            </a:solidFill>
+            <a:ln>
+              <a:noFill/>
+            </a:ln>
+          </p:spPr>
+          <p:txBody>
+            <a:bodyPr rtlCol="0" anchor="ctr"/>
+            <a:lstStyle/>
+            <a:p>
+              <a:pPr algn="ctr"/>
+            </a:p>
+          </p:txBody>
+        </p:sp>
+        <p:sp>
+          <p:nvSpPr>
+            <p:cNvPr id="10" name="BrandDeck Icon headset"/>
+            <p:cNvSpPr/>
+            <p:nvPr/>
+          </p:nvSpPr>
+          <p:spPr>
+            <a:xfrm>
+              <a:off x="6554498" y="2881424"/>
               <a:ext cx="331668" cy="331668"/>
             </a:xfrm>
             <a:custGeom>
@@ -10781,14 +10867,14 @@
         </p:sp>
         <p:sp>
           <p:nvSpPr>
-            <p:cNvPr id="7" name="BrandDeck Diagram Text 1"/>
+            <p:cNvPr id="11" name="BrandDeck Diagram Text 2"/>
             <p:cNvSpPr txBox="1"/>
             <p:nvPr/>
           </p:nvSpPr>
           <p:spPr>
             <a:xfrm>
-              <a:off x="1602207" y="2645399"/>
-              <a:ext cx="4165593" cy="877557"/>
+              <a:off x="7148138" y="2537480"/>
+              <a:ext cx="4165593" cy="1019556"/>
             </a:xfrm>
             <a:prstGeom prst="rect">
               <a:avLst/>
@@ -10813,7 +10899,7 @@
                   </a:solidFill>
                   <a:latin typeface="Play"/>
                 </a:rPr>
-                <a:t>Треть обращений в поддержку —</a:t>
+                <a:t>Треть всех обращений в поддержку —</a:t>
               </a:r>
               <a:r>
                 <a:rPr sz="1800" b="0">
@@ -10829,222 +10915,14 @@
         </p:sp>
         <p:sp>
           <p:nvSpPr>
-            <p:cNvPr id="8" name="BrandDeck Diagram Card 2"/>
-            <p:cNvSpPr/>
-            <p:nvPr/>
-          </p:nvSpPr>
-          <p:spPr>
-            <a:xfrm>
-              <a:off x="6204744" y="2513725"/>
-              <a:ext cx="5328443" cy="1140904"/>
-            </a:xfrm>
-            <a:prstGeom prst="roundRect">
-              <a:avLst>
-                <a:gd name="adj" fmla="val 8000"/>
-              </a:avLst>
-            </a:prstGeom>
-            <a:solidFill>
-              <a:srgbClr val="EDF5FF"/>
-            </a:solidFill>
-            <a:ln>
-              <a:noFill/>
-            </a:ln>
-          </p:spPr>
-          <p:txBody>
-            <a:bodyPr rtlCol="0" anchor="ctr"/>
-            <a:lstStyle/>
-            <a:p>
-              <a:pPr algn="ctr"/>
-            </a:p>
-          </p:txBody>
-        </p:sp>
-        <p:sp>
-          <p:nvSpPr>
-            <p:cNvPr id="9" name="BrandDeck Diagram Icon 2 Badge"/>
-            <p:cNvSpPr/>
-            <p:nvPr/>
-          </p:nvSpPr>
-          <p:spPr>
-            <a:xfrm>
-              <a:off x="6424200" y="2788045"/>
-              <a:ext cx="592264" cy="592264"/>
-            </a:xfrm>
-            <a:prstGeom prst="ellipse">
-              <a:avLst/>
-            </a:prstGeom>
-            <a:solidFill>
-              <a:srgbClr val="006DEB"/>
-            </a:solidFill>
-            <a:ln>
-              <a:noFill/>
-            </a:ln>
-          </p:spPr>
-          <p:txBody>
-            <a:bodyPr rtlCol="0" anchor="ctr"/>
-            <a:lstStyle/>
-            <a:p>
-              <a:pPr algn="ctr"/>
-            </a:p>
-          </p:txBody>
-        </p:sp>
-        <p:sp>
-          <p:nvSpPr>
-            <p:cNvPr id="10" name="BrandDeck Icon file-text"/>
-            <p:cNvSpPr/>
-            <p:nvPr/>
-          </p:nvSpPr>
-          <p:spPr>
-            <a:xfrm>
-              <a:off x="6554498" y="2918344"/>
-              <a:ext cx="331668" cy="331668"/>
-            </a:xfrm>
-            <a:custGeom>
-              <a:avLst/>
-              <a:gdLst/>
-              <a:ahLst/>
-              <a:cxnLst/>
-              <a:rect l="l" t="t" r="r" b="b"/>
-              <a:pathLst>
-                <a:path w="24000" h="24000" fill="none">
-                  <a:moveTo>
-                    <a:pt x="15000" y="2000"/>
-                  </a:moveTo>
-                  <a:lnTo>
-                    <a:pt x="6000" y="2000"/>
-                  </a:lnTo>
-                  <a:cubicBezTo>
-                    <a:pt x="4895" y="2000"/>
-                    <a:pt x="4000" y="2895"/>
-                    <a:pt x="4000" y="4000"/>
-                  </a:cubicBezTo>
-                  <a:lnTo>
-                    <a:pt x="4000" y="20000"/>
-                  </a:lnTo>
-                  <a:cubicBezTo>
-                    <a:pt x="4000" y="21105"/>
-                    <a:pt x="4895" y="22000"/>
-                    <a:pt x="6000" y="22000"/>
-                  </a:cubicBezTo>
-                  <a:lnTo>
-                    <a:pt x="18000" y="22000"/>
-                  </a:lnTo>
-                  <a:cubicBezTo>
-                    <a:pt x="19105" y="22000"/>
-                    <a:pt x="20000" y="21105"/>
-                    <a:pt x="20000" y="20000"/>
-                  </a:cubicBezTo>
-                  <a:lnTo>
-                    <a:pt x="20000" y="7000"/>
-                  </a:lnTo>
-                  <a:close/>
-                </a:path>
-                <a:path w="24000" h="24000" fill="none">
-                  <a:moveTo>
-                    <a:pt x="14000" y="2000"/>
-                  </a:moveTo>
-                  <a:lnTo>
-                    <a:pt x="14000" y="6000"/>
-                  </a:lnTo>
-                  <a:cubicBezTo>
-                    <a:pt x="14000" y="7105"/>
-                    <a:pt x="14895" y="8000"/>
-                    <a:pt x="16000" y="8000"/>
-                  </a:cubicBezTo>
-                  <a:lnTo>
-                    <a:pt x="20000" y="8000"/>
-                  </a:lnTo>
-                </a:path>
-                <a:path w="24000" h="24000" fill="none">
-                  <a:moveTo>
-                    <a:pt x="10000" y="9000"/>
-                  </a:moveTo>
-                  <a:lnTo>
-                    <a:pt x="8000" y="9000"/>
-                  </a:lnTo>
-                </a:path>
-                <a:path w="24000" h="24000" fill="none">
-                  <a:moveTo>
-                    <a:pt x="16000" y="13000"/>
-                  </a:moveTo>
-                  <a:lnTo>
-                    <a:pt x="8000" y="13000"/>
-                  </a:lnTo>
-                </a:path>
-                <a:path w="24000" h="24000" fill="none">
-                  <a:moveTo>
-                    <a:pt x="16000" y="17000"/>
-                  </a:moveTo>
-                  <a:lnTo>
-                    <a:pt x="8000" y="17000"/>
-                  </a:lnTo>
-                </a:path>
-              </a:pathLst>
-            </a:custGeom>
-            <a:noFill/>
-            <a:ln w="27639" cap="rnd">
-              <a:solidFill>
-                <a:srgbClr val="FFFFFF"/>
-              </a:solidFill>
-              <a:round/>
-            </a:ln>
-          </p:spPr>
-          <p:txBody>
-            <a:bodyPr rtlCol="0" anchor="ctr"/>
-            <a:lstStyle/>
-            <a:p>
-              <a:pPr algn="ctr"/>
-            </a:p>
-          </p:txBody>
-        </p:sp>
-        <p:sp>
-          <p:nvSpPr>
-            <p:cNvPr id="11" name="BrandDeck Diagram Text 2"/>
-            <p:cNvSpPr txBox="1"/>
-            <p:nvPr/>
-          </p:nvSpPr>
-          <p:spPr>
-            <a:xfrm>
-              <a:off x="7148138" y="2645399"/>
-              <a:ext cx="4165593" cy="877557"/>
-            </a:xfrm>
-            <a:prstGeom prst="rect">
-              <a:avLst/>
-            </a:prstGeom>
-            <a:noFill/>
-          </p:spPr>
-          <p:txBody>
-            <a:bodyPr wrap="square" anchor="ctr" lIns="36576" tIns="18288" rIns="36576" bIns="18288">
-              <a:noAutofit/>
-            </a:bodyPr>
-            <a:lstStyle/>
-            <a:p>
-              <a:pPr algn="l">
-                <a:lnSpc>
-                  <a:spcPct val="110000"/>
-                </a:lnSpc>
-              </a:pPr>
-              <a:r>
-                <a:rPr sz="1800" b="0">
-                  <a:solidFill>
-                    <a:srgbClr val="000000"/>
-                  </a:solidFill>
-                  <a:latin typeface="Play"/>
-                </a:rPr>
-                <a:t>Запросы касаются регламентов и инструкций.</a:t>
-              </a:r>
-            </a:p>
-          </p:txBody>
-        </p:sp>
-        <p:sp>
-          <p:nvSpPr>
             <p:cNvPr id="12" name="BrandDeck Diagram Card 3"/>
             <p:cNvSpPr/>
             <p:nvPr/>
           </p:nvSpPr>
           <p:spPr>
             <a:xfrm>
-              <a:off x="658813" y="3872117"/>
-              <a:ext cx="5328443" cy="1140904"/>
+              <a:off x="658813" y="3906197"/>
+              <a:ext cx="5328443" cy="1282903"/>
             </a:xfrm>
             <a:prstGeom prst="roundRect">
               <a:avLst>
@@ -11074,7 +10952,7 @@
           </p:nvSpPr>
           <p:spPr>
             <a:xfrm>
-              <a:off x="878269" y="4146437"/>
+              <a:off x="878269" y="4251516"/>
               <a:ext cx="592264" cy="592264"/>
             </a:xfrm>
             <a:prstGeom prst="ellipse">
@@ -11103,7 +10981,7 @@
           </p:nvSpPr>
           <p:spPr>
             <a:xfrm>
-              <a:off x="1008567" y="4276736"/>
+              <a:off x="1008567" y="4381815"/>
               <a:ext cx="331668" cy="331668"/>
             </a:xfrm>
             <a:custGeom>
@@ -11167,8 +11045,8 @@
           </p:nvSpPr>
           <p:spPr>
             <a:xfrm>
-              <a:off x="1602207" y="4003791"/>
-              <a:ext cx="4165593" cy="877557"/>
+              <a:off x="1602207" y="4037871"/>
+              <a:ext cx="4165593" cy="1019556"/>
             </a:xfrm>
             <a:prstGeom prst="rect">
               <a:avLst/>
@@ -11193,7 +11071,7 @@
                   </a:solidFill>
                   <a:latin typeface="Play"/>
                 </a:rPr>
-                <a:t>Нагрузка на поддержку растет из-за дублирования.</a:t>
+                <a:t>Это создает высокую нагрузку на специалистов поддержки.</a:t>
               </a:r>
             </a:p>
           </p:txBody>
@@ -11207,7 +11085,7 @@
 </p:sld>
 </file>
 
-<file path=ppt/slides/slide4.xml><?xml version="1.0" encoding="utf-8"?>
+<file path=ppt/slides/slide3.xml><?xml version="1.0" encoding="utf-8"?>
 <p:sld xmlns:a="http://schemas.openxmlformats.org/drawingml/2006/main" xmlns:p="http://schemas.openxmlformats.org/presentationml/2006/main" xmlns:r="http://schemas.openxmlformats.org/officeDocument/2006/relationships">
   <p:cSld>
     <p:spTree>
@@ -11247,32 +11125,32 @@
                 <a:spcPts val="0"/>
               </a:spcBef>
               <a:spcAft>
-                <a:spcPts val="359"/>
+                <a:spcPts val="240"/>
               </a:spcAft>
             </a:pPr>
             <a:r>
-              <a:rPr sz="2400">
+              <a:rPr sz="1600">
                 <a:solidFill>
                   <a:srgbClr val="000000"/>
                 </a:solidFill>
               </a:rPr>
-              <a:t>Потеря времени и нагрузка на поддержку мешают бизнесу</a:t>
+              <a:t>Влияет на 150 сотрудников двух подразделений при ежедневном обращении к регламентам</a:t>
             </a:r>
           </a:p>
         </p:txBody>
       </p:sp>
       <p:grpSp>
         <p:nvGrpSpPr>
-          <p:cNvPr id="2" name="BrandDeck Diagram icon_grid" descr="icon_grid: До 30 минут тратится на поиск инструкции вместо работы.; Треть обращений — повторяющиеся вопросы, нагружающие поддержку.; Ручной поиск снижает общую эффективность внутренних процессов."/>
+          <p:cNvPr id="2" name="BrandDeck Diagram icon_grid" descr="icon_grid: 150 сотрудников Два подразделения; 6 недель Период пилота"/>
           <p:cNvGrpSpPr/>
           <p:nvPr/>
         </p:nvGrpSpPr>
         <p:grpSpPr>
           <a:xfrm>
-            <a:off x="658813" y="2405806"/>
-            <a:ext cx="10874374" cy="2783294"/>
-            <a:chOff x="658813" y="2405806"/>
-            <a:chExt cx="10874374" cy="2783294"/>
+            <a:off x="658813" y="1773238"/>
+            <a:ext cx="10874374" cy="4447949"/>
+            <a:chOff x="658813" y="1773238"/>
+            <a:chExt cx="10874374" cy="4447949"/>
           </a:xfrm>
         </p:grpSpPr>
         <p:sp>
@@ -11283,8 +11161,8 @@
           </p:nvSpPr>
           <p:spPr>
             <a:xfrm>
-              <a:off x="658813" y="2405806"/>
-              <a:ext cx="5328443" cy="1282903"/>
+              <a:off x="658813" y="1773238"/>
+              <a:ext cx="5328443" cy="4447949"/>
             </a:xfrm>
             <a:prstGeom prst="roundRect">
               <a:avLst>
@@ -11314,8 +11192,8 @@
           </p:nvSpPr>
           <p:spPr>
             <a:xfrm>
-              <a:off x="878269" y="2751126"/>
-              <a:ext cx="592264" cy="592264"/>
+              <a:off x="878269" y="1992694"/>
+              <a:ext cx="603504" cy="603504"/>
             </a:xfrm>
             <a:prstGeom prst="ellipse">
               <a:avLst/>
@@ -11337,2381 +11215,13 @@
         </p:sp>
         <p:sp>
           <p:nvSpPr>
-            <p:cNvPr id="6" name="BrandDeck Icon clock"/>
+            <p:cNvPr id="6" name="BrandDeck Icon users"/>
             <p:cNvSpPr/>
             <p:nvPr/>
           </p:nvSpPr>
           <p:spPr>
             <a:xfrm>
-              <a:off x="1008567" y="2881424"/>
-              <a:ext cx="331668" cy="331668"/>
-            </a:xfrm>
-            <a:custGeom>
-              <a:avLst/>
-              <a:gdLst/>
-              <a:ahLst/>
-              <a:cxnLst/>
-              <a:rect l="l" t="t" r="r" b="b"/>
-              <a:pathLst>
-                <a:path w="24000" h="24000" fill="none">
-                  <a:moveTo>
-                    <a:pt x="22000" y="12000"/>
-                  </a:moveTo>
-                  <a:cubicBezTo>
-                    <a:pt x="22000" y="17523"/>
-                    <a:pt x="17523" y="22000"/>
-                    <a:pt x="12000" y="22000"/>
-                  </a:cubicBezTo>
-                  <a:cubicBezTo>
-                    <a:pt x="6477" y="22000"/>
-                    <a:pt x="2000" y="17523"/>
-                    <a:pt x="2000" y="12000"/>
-                  </a:cubicBezTo>
-                  <a:cubicBezTo>
-                    <a:pt x="2000" y="6477"/>
-                    <a:pt x="6477" y="2000"/>
-                    <a:pt x="12000" y="2000"/>
-                  </a:cubicBezTo>
-                  <a:cubicBezTo>
-                    <a:pt x="17523" y="2000"/>
-                    <a:pt x="22000" y="6477"/>
-                    <a:pt x="22000" y="12000"/>
-                  </a:cubicBezTo>
-                  <a:close/>
-                </a:path>
-                <a:path w="24000" h="24000" fill="none">
-                  <a:moveTo>
-                    <a:pt x="12000" y="6000"/>
-                  </a:moveTo>
-                  <a:lnTo>
-                    <a:pt x="12000" y="12000"/>
-                  </a:lnTo>
-                  <a:lnTo>
-                    <a:pt x="16000" y="14000"/>
-                  </a:lnTo>
-                </a:path>
-              </a:pathLst>
-            </a:custGeom>
-            <a:noFill/>
-            <a:ln w="27639" cap="rnd">
-              <a:solidFill>
-                <a:srgbClr val="FFFFFF"/>
-              </a:solidFill>
-              <a:round/>
-            </a:ln>
-          </p:spPr>
-          <p:txBody>
-            <a:bodyPr rtlCol="0" anchor="ctr"/>
-            <a:lstStyle/>
-            <a:p>
-              <a:pPr algn="ctr"/>
-            </a:p>
-          </p:txBody>
-        </p:sp>
-        <p:sp>
-          <p:nvSpPr>
-            <p:cNvPr id="7" name="BrandDeck Diagram Text 1"/>
-            <p:cNvSpPr txBox="1"/>
-            <p:nvPr/>
-          </p:nvSpPr>
-          <p:spPr>
-            <a:xfrm>
-              <a:off x="1602207" y="2537480"/>
-              <a:ext cx="4165593" cy="1019556"/>
-            </a:xfrm>
-            <a:prstGeom prst="rect">
-              <a:avLst/>
-            </a:prstGeom>
-            <a:noFill/>
-          </p:spPr>
-          <p:txBody>
-            <a:bodyPr wrap="square" anchor="ctr" lIns="36576" tIns="18288" rIns="36576" bIns="18288">
-              <a:noAutofit/>
-            </a:bodyPr>
-            <a:lstStyle/>
-            <a:p>
-              <a:pPr algn="l">
-                <a:lnSpc>
-                  <a:spcPct val="110000"/>
-                </a:lnSpc>
-              </a:pPr>
-              <a:r>
-                <a:rPr sz="1800" b="0">
-                  <a:solidFill>
-                    <a:srgbClr val="000000"/>
-                  </a:solidFill>
-                  <a:latin typeface="Play"/>
-                </a:rPr>
-                <a:t>До 30 минут тратится на поиск инструкции вместо работы.</a:t>
-              </a:r>
-            </a:p>
-          </p:txBody>
-        </p:sp>
-        <p:sp>
-          <p:nvSpPr>
-            <p:cNvPr id="8" name="BrandDeck Diagram Card 2"/>
-            <p:cNvSpPr/>
-            <p:nvPr/>
-          </p:nvSpPr>
-          <p:spPr>
-            <a:xfrm>
-              <a:off x="6204744" y="2405806"/>
-              <a:ext cx="5328443" cy="1282903"/>
-            </a:xfrm>
-            <a:prstGeom prst="roundRect">
-              <a:avLst>
-                <a:gd name="adj" fmla="val 8000"/>
-              </a:avLst>
-            </a:prstGeom>
-            <a:solidFill>
-              <a:srgbClr val="EDF5FF"/>
-            </a:solidFill>
-            <a:ln>
-              <a:noFill/>
-            </a:ln>
-          </p:spPr>
-          <p:txBody>
-            <a:bodyPr rtlCol="0" anchor="ctr"/>
-            <a:lstStyle/>
-            <a:p>
-              <a:pPr algn="ctr"/>
-            </a:p>
-          </p:txBody>
-        </p:sp>
-        <p:sp>
-          <p:nvSpPr>
-            <p:cNvPr id="9" name="BrandDeck Diagram Icon 2 Badge"/>
-            <p:cNvSpPr/>
-            <p:nvPr/>
-          </p:nvSpPr>
-          <p:spPr>
-            <a:xfrm>
-              <a:off x="6424200" y="2751126"/>
-              <a:ext cx="592264" cy="592264"/>
-            </a:xfrm>
-            <a:prstGeom prst="ellipse">
-              <a:avLst/>
-            </a:prstGeom>
-            <a:solidFill>
-              <a:srgbClr val="006DEB"/>
-            </a:solidFill>
-            <a:ln>
-              <a:noFill/>
-            </a:ln>
-          </p:spPr>
-          <p:txBody>
-            <a:bodyPr rtlCol="0" anchor="ctr"/>
-            <a:lstStyle/>
-            <a:p>
-              <a:pPr algn="ctr"/>
-            </a:p>
-          </p:txBody>
-        </p:sp>
-        <p:sp>
-          <p:nvSpPr>
-            <p:cNvPr id="10" name="BrandDeck Icon headset"/>
-            <p:cNvSpPr/>
-            <p:nvPr/>
-          </p:nvSpPr>
-          <p:spPr>
-            <a:xfrm>
-              <a:off x="6554498" y="2881424"/>
-              <a:ext cx="331668" cy="331668"/>
-            </a:xfrm>
-            <a:custGeom>
-              <a:avLst/>
-              <a:gdLst/>
-              <a:ahLst/>
-              <a:cxnLst/>
-              <a:rect l="l" t="t" r="r" b="b"/>
-              <a:pathLst>
-                <a:path w="24000" h="24000" fill="none">
-                  <a:moveTo>
-                    <a:pt x="3000" y="11000"/>
-                  </a:moveTo>
-                  <a:lnTo>
-                    <a:pt x="6000" y="11000"/>
-                  </a:lnTo>
-                  <a:cubicBezTo>
-                    <a:pt x="7105" y="11000"/>
-                    <a:pt x="8000" y="11895"/>
-                    <a:pt x="8000" y="13000"/>
-                  </a:cubicBezTo>
-                  <a:lnTo>
-                    <a:pt x="8000" y="16000"/>
-                  </a:lnTo>
-                  <a:cubicBezTo>
-                    <a:pt x="8000" y="17105"/>
-                    <a:pt x="7105" y="18000"/>
-                    <a:pt x="6000" y="18000"/>
-                  </a:cubicBezTo>
-                  <a:lnTo>
-                    <a:pt x="5000" y="18000"/>
-                  </a:lnTo>
-                  <a:cubicBezTo>
-                    <a:pt x="3895" y="18000"/>
-                    <a:pt x="3000" y="17105"/>
-                    <a:pt x="3000" y="16000"/>
-                  </a:cubicBezTo>
-                  <a:lnTo>
-                    <a:pt x="3000" y="11000"/>
-                  </a:lnTo>
-                  <a:close/>
-                  <a:moveTo>
-                    <a:pt x="3000" y="11000"/>
-                  </a:moveTo>
-                  <a:cubicBezTo>
-                    <a:pt x="3000" y="6029"/>
-                    <a:pt x="7029" y="2000"/>
-                    <a:pt x="12000" y="2000"/>
-                  </a:cubicBezTo>
-                  <a:cubicBezTo>
-                    <a:pt x="16971" y="2000"/>
-                    <a:pt x="21000" y="6029"/>
-                    <a:pt x="21000" y="11000"/>
-                  </a:cubicBezTo>
-                  <a:moveTo>
-                    <a:pt x="21000" y="11000"/>
-                  </a:moveTo>
-                  <a:lnTo>
-                    <a:pt x="21000" y="16000"/>
-                  </a:lnTo>
-                  <a:cubicBezTo>
-                    <a:pt x="21000" y="17105"/>
-                    <a:pt x="20105" y="18000"/>
-                    <a:pt x="19000" y="18000"/>
-                  </a:cubicBezTo>
-                  <a:lnTo>
-                    <a:pt x="18000" y="18000"/>
-                  </a:lnTo>
-                  <a:cubicBezTo>
-                    <a:pt x="16895" y="18000"/>
-                    <a:pt x="16000" y="17105"/>
-                    <a:pt x="16000" y="16000"/>
-                  </a:cubicBezTo>
-                  <a:lnTo>
-                    <a:pt x="16000" y="13000"/>
-                  </a:lnTo>
-                  <a:cubicBezTo>
-                    <a:pt x="16000" y="11895"/>
-                    <a:pt x="16895" y="11000"/>
-                    <a:pt x="18000" y="11000"/>
-                  </a:cubicBezTo>
-                  <a:lnTo>
-                    <a:pt x="21000" y="11000"/>
-                  </a:lnTo>
-                  <a:close/>
-                </a:path>
-                <a:path w="24000" h="24000" fill="none">
-                  <a:moveTo>
-                    <a:pt x="21000" y="16000"/>
-                  </a:moveTo>
-                  <a:lnTo>
-                    <a:pt x="21000" y="18000"/>
-                  </a:lnTo>
-                  <a:cubicBezTo>
-                    <a:pt x="21000" y="20209"/>
-                    <a:pt x="19209" y="22000"/>
-                    <a:pt x="17000" y="22000"/>
-                  </a:cubicBezTo>
-                  <a:lnTo>
-                    <a:pt x="12000" y="22000"/>
-                  </a:lnTo>
-                </a:path>
-              </a:pathLst>
-            </a:custGeom>
-            <a:noFill/>
-            <a:ln w="27639" cap="rnd">
-              <a:solidFill>
-                <a:srgbClr val="FFFFFF"/>
-              </a:solidFill>
-              <a:round/>
-            </a:ln>
-          </p:spPr>
-          <p:txBody>
-            <a:bodyPr rtlCol="0" anchor="ctr"/>
-            <a:lstStyle/>
-            <a:p>
-              <a:pPr algn="ctr"/>
-            </a:p>
-          </p:txBody>
-        </p:sp>
-        <p:sp>
-          <p:nvSpPr>
-            <p:cNvPr id="11" name="BrandDeck Diagram Text 2"/>
-            <p:cNvSpPr txBox="1"/>
-            <p:nvPr/>
-          </p:nvSpPr>
-          <p:spPr>
-            <a:xfrm>
-              <a:off x="7148138" y="2537480"/>
-              <a:ext cx="4165593" cy="1019556"/>
-            </a:xfrm>
-            <a:prstGeom prst="rect">
-              <a:avLst/>
-            </a:prstGeom>
-            <a:noFill/>
-          </p:spPr>
-          <p:txBody>
-            <a:bodyPr wrap="square" anchor="ctr" lIns="36576" tIns="18288" rIns="36576" bIns="18288">
-              <a:noAutofit/>
-            </a:bodyPr>
-            <a:lstStyle/>
-            <a:p>
-              <a:pPr algn="l">
-                <a:lnSpc>
-                  <a:spcPct val="110000"/>
-                </a:lnSpc>
-              </a:pPr>
-              <a:r>
-                <a:rPr sz="1800" b="1">
-                  <a:solidFill>
-                    <a:srgbClr val="000000"/>
-                  </a:solidFill>
-                  <a:latin typeface="Play"/>
-                </a:rPr>
-                <a:t>Треть обращений —</a:t>
-              </a:r>
-              <a:r>
-                <a:rPr sz="1800" b="0">
-                  <a:solidFill>
-                    <a:srgbClr val="000000"/>
-                  </a:solidFill>
-                  <a:latin typeface="Play"/>
-                </a:rPr>
-                <a:t> повторяющиеся вопросы, нагружающие поддержку.</a:t>
-              </a:r>
-            </a:p>
-          </p:txBody>
-        </p:sp>
-        <p:sp>
-          <p:nvSpPr>
-            <p:cNvPr id="12" name="BrandDeck Diagram Card 3"/>
-            <p:cNvSpPr/>
-            <p:nvPr/>
-          </p:nvSpPr>
-          <p:spPr>
-            <a:xfrm>
-              <a:off x="658813" y="3906197"/>
-              <a:ext cx="5328443" cy="1282903"/>
-            </a:xfrm>
-            <a:prstGeom prst="roundRect">
-              <a:avLst>
-                <a:gd name="adj" fmla="val 8000"/>
-              </a:avLst>
-            </a:prstGeom>
-            <a:solidFill>
-              <a:srgbClr val="EDF5FF"/>
-            </a:solidFill>
-            <a:ln>
-              <a:noFill/>
-            </a:ln>
-          </p:spPr>
-          <p:txBody>
-            <a:bodyPr rtlCol="0" anchor="ctr"/>
-            <a:lstStyle/>
-            <a:p>
-              <a:pPr algn="ctr"/>
-            </a:p>
-          </p:txBody>
-        </p:sp>
-        <p:sp>
-          <p:nvSpPr>
-            <p:cNvPr id="13" name="BrandDeck Diagram Icon 3 Badge"/>
-            <p:cNvSpPr/>
-            <p:nvPr/>
-          </p:nvSpPr>
-          <p:spPr>
-            <a:xfrm>
-              <a:off x="878269" y="4251516"/>
-              <a:ext cx="592264" cy="592264"/>
-            </a:xfrm>
-            <a:prstGeom prst="ellipse">
-              <a:avLst/>
-            </a:prstGeom>
-            <a:solidFill>
-              <a:srgbClr val="006DEB"/>
-            </a:solidFill>
-            <a:ln>
-              <a:noFill/>
-            </a:ln>
-          </p:spPr>
-          <p:txBody>
-            <a:bodyPr rtlCol="0" anchor="ctr"/>
-            <a:lstStyle/>
-            <a:p>
-              <a:pPr algn="ctr"/>
-            </a:p>
-          </p:txBody>
-        </p:sp>
-        <p:sp>
-          <p:nvSpPr>
-            <p:cNvPr id="14" name="BrandDeck Icon gauge"/>
-            <p:cNvSpPr/>
-            <p:nvPr/>
-          </p:nvSpPr>
-          <p:spPr>
-            <a:xfrm>
-              <a:off x="1008567" y="4381815"/>
-              <a:ext cx="331668" cy="331668"/>
-            </a:xfrm>
-            <a:custGeom>
-              <a:avLst/>
-              <a:gdLst/>
-              <a:ahLst/>
-              <a:cxnLst/>
-              <a:rect l="l" t="t" r="r" b="b"/>
-              <a:pathLst>
-                <a:path w="24000" h="24000" fill="none">
-                  <a:moveTo>
-                    <a:pt x="12000" y="14000"/>
-                  </a:moveTo>
-                  <a:lnTo>
-                    <a:pt x="16000" y="10000"/>
-                  </a:lnTo>
-                </a:path>
-                <a:path w="24000" h="24000" fill="none">
-                  <a:moveTo>
-                    <a:pt x="3340" y="19000"/>
-                  </a:moveTo>
-                  <a:cubicBezTo>
-                    <a:pt x="913" y="14797"/>
-                    <a:pt x="1854" y="9459"/>
-                    <a:pt x="5572" y="6339"/>
-                  </a:cubicBezTo>
-                  <a:cubicBezTo>
-                    <a:pt x="9290" y="3220"/>
-                    <a:pt x="14710" y="3220"/>
-                    <a:pt x="18428" y="6339"/>
-                  </a:cubicBezTo>
-                  <a:cubicBezTo>
-                    <a:pt x="22146" y="9459"/>
-                    <a:pt x="23087" y="14797"/>
-                    <a:pt x="20660" y="19000"/>
-                  </a:cubicBezTo>
-                </a:path>
-              </a:pathLst>
-            </a:custGeom>
-            <a:noFill/>
-            <a:ln w="27639" cap="rnd">
-              <a:solidFill>
-                <a:srgbClr val="FFFFFF"/>
-              </a:solidFill>
-              <a:round/>
-            </a:ln>
-          </p:spPr>
-          <p:txBody>
-            <a:bodyPr rtlCol="0" anchor="ctr"/>
-            <a:lstStyle/>
-            <a:p>
-              <a:pPr algn="ctr"/>
-            </a:p>
-          </p:txBody>
-        </p:sp>
-        <p:sp>
-          <p:nvSpPr>
-            <p:cNvPr id="15" name="BrandDeck Diagram Text 3"/>
-            <p:cNvSpPr txBox="1"/>
-            <p:nvPr/>
-          </p:nvSpPr>
-          <p:spPr>
-            <a:xfrm>
-              <a:off x="1602207" y="4037871"/>
-              <a:ext cx="4165593" cy="1019556"/>
-            </a:xfrm>
-            <a:prstGeom prst="rect">
-              <a:avLst/>
-            </a:prstGeom>
-            <a:noFill/>
-          </p:spPr>
-          <p:txBody>
-            <a:bodyPr wrap="square" anchor="ctr" lIns="36576" tIns="18288" rIns="36576" bIns="18288">
-              <a:noAutofit/>
-            </a:bodyPr>
-            <a:lstStyle/>
-            <a:p>
-              <a:pPr algn="l">
-                <a:lnSpc>
-                  <a:spcPct val="110000"/>
-                </a:lnSpc>
-              </a:pPr>
-              <a:r>
-                <a:rPr sz="1800" b="0">
-                  <a:solidFill>
-                    <a:srgbClr val="000000"/>
-                  </a:solidFill>
-                  <a:latin typeface="Play"/>
-                </a:rPr>
-                <a:t>Ручной поиск снижает общую эффективность внутренних процессов.</a:t>
-              </a:r>
-            </a:p>
-          </p:txBody>
-        </p:sp>
-      </p:grpSp>
-    </p:spTree>
-  </p:cSld>
-  <p:clrMapOvr>
-    <a:masterClrMapping/>
-  </p:clrMapOvr>
-</p:sld>
-</file>
-
-<file path=ppt/slides/slide5.xml><?xml version="1.0" encoding="utf-8"?>
-<p:sld xmlns:a="http://schemas.openxmlformats.org/drawingml/2006/main" xmlns:p="http://schemas.openxmlformats.org/presentationml/2006/main" xmlns:r="http://schemas.openxmlformats.org/officeDocument/2006/relationships">
-  <p:cSld>
-    <p:spTree>
-      <p:nvGrpSpPr>
-        <p:cNvPr id="1" name=""/>
-        <p:cNvGrpSpPr/>
-        <p:nvPr/>
-      </p:nvGrpSpPr>
-      <p:grpSpPr/>
-      <p:sp>
-        <p:nvSpPr>
-          <p:cNvPr id="3" name="BrandDeck Text 3"/>
-          <p:cNvSpPr>
-            <a:spLocks noGrp="1"/>
-          </p:cNvSpPr>
-          <p:nvPr>
-            <p:ph type="title"/>
-          </p:nvPr>
-        </p:nvSpPr>
-        <p:spPr>
-          <a:xfrm>
-            <a:off x="677334" y="692150"/>
-            <a:ext cx="10855854" cy="644241"/>
-          </a:xfrm>
-        </p:spPr>
-        <p:txBody>
-          <a:bodyPr wrap="square" anchor="t">
-            <a:normAutofit/>
-          </a:bodyPr>
-          <a:lstStyle/>
-          <a:p>
-            <a:pPr algn="l">
-              <a:lnSpc>
-                <a:spcPct val="115000"/>
-              </a:lnSpc>
-              <a:spcBef>
-                <a:spcPts val="0"/>
-              </a:spcBef>
-              <a:spcAft>
-                <a:spcPts val="270"/>
-              </a:spcAft>
-            </a:pPr>
-            <a:r>
-              <a:rPr sz="1800">
-                <a:solidFill>
-                  <a:srgbClr val="000000"/>
-                </a:solidFill>
-              </a:rPr>
-              <a:t>ИИ-помощник отвечает на вопросы по регламентам и дает ссылку на документ</a:t>
-            </a:r>
-          </a:p>
-        </p:txBody>
-      </p:sp>
-      <p:grpSp>
-        <p:nvGrpSpPr>
-          <p:cNvPr id="2" name="BrandDeck Diagram icon_grid" descr="icon_grid: Система отвечает на вопросы по регламентам.; В ответе всегда указывается ссылка на документ.; Ответ формируется автоматически без участия людей."/>
-          <p:cNvGrpSpPr/>
-          <p:nvPr/>
-        </p:nvGrpSpPr>
-        <p:grpSpPr>
-          <a:xfrm>
-            <a:off x="658813" y="2405806"/>
-            <a:ext cx="10874374" cy="2783294"/>
-            <a:chOff x="658813" y="2405806"/>
-            <a:chExt cx="10874374" cy="2783294"/>
-          </a:xfrm>
-        </p:grpSpPr>
-        <p:sp>
-          <p:nvSpPr>
-            <p:cNvPr id="4" name="BrandDeck Diagram Card 1"/>
-            <p:cNvSpPr/>
-            <p:nvPr/>
-          </p:nvSpPr>
-          <p:spPr>
-            <a:xfrm>
-              <a:off x="658813" y="2405806"/>
-              <a:ext cx="5328443" cy="1282903"/>
-            </a:xfrm>
-            <a:prstGeom prst="roundRect">
-              <a:avLst>
-                <a:gd name="adj" fmla="val 8000"/>
-              </a:avLst>
-            </a:prstGeom>
-            <a:solidFill>
-              <a:srgbClr val="EDF5FF"/>
-            </a:solidFill>
-            <a:ln>
-              <a:noFill/>
-            </a:ln>
-          </p:spPr>
-          <p:txBody>
-            <a:bodyPr rtlCol="0" anchor="ctr"/>
-            <a:lstStyle/>
-            <a:p>
-              <a:pPr algn="ctr"/>
-            </a:p>
-          </p:txBody>
-        </p:sp>
-        <p:sp>
-          <p:nvSpPr>
-            <p:cNvPr id="5" name="BrandDeck Diagram Icon 1 Badge"/>
-            <p:cNvSpPr/>
-            <p:nvPr/>
-          </p:nvSpPr>
-          <p:spPr>
-            <a:xfrm>
-              <a:off x="878269" y="2751126"/>
-              <a:ext cx="592264" cy="592264"/>
-            </a:xfrm>
-            <a:prstGeom prst="ellipse">
-              <a:avLst/>
-            </a:prstGeom>
-            <a:solidFill>
-              <a:srgbClr val="006DEB"/>
-            </a:solidFill>
-            <a:ln>
-              <a:noFill/>
-            </a:ln>
-          </p:spPr>
-          <p:txBody>
-            <a:bodyPr rtlCol="0" anchor="ctr"/>
-            <a:lstStyle/>
-            <a:p>
-              <a:pPr algn="ctr"/>
-            </a:p>
-          </p:txBody>
-        </p:sp>
-        <p:sp>
-          <p:nvSpPr>
-            <p:cNvPr id="6" name="BrandDeck Icon circle-help"/>
-            <p:cNvSpPr/>
-            <p:nvPr/>
-          </p:nvSpPr>
-          <p:spPr>
-            <a:xfrm>
-              <a:off x="1008567" y="2881424"/>
-              <a:ext cx="331668" cy="331668"/>
-            </a:xfrm>
-            <a:custGeom>
-              <a:avLst/>
-              <a:gdLst/>
-              <a:ahLst/>
-              <a:cxnLst/>
-              <a:rect l="l" t="t" r="r" b="b"/>
-              <a:pathLst>
-                <a:path w="24000" h="24000" fill="none">
-                  <a:moveTo>
-                    <a:pt x="22000" y="12000"/>
-                  </a:moveTo>
-                  <a:cubicBezTo>
-                    <a:pt x="22000" y="17523"/>
-                    <a:pt x="17523" y="22000"/>
-                    <a:pt x="12000" y="22000"/>
-                  </a:cubicBezTo>
-                  <a:cubicBezTo>
-                    <a:pt x="6477" y="22000"/>
-                    <a:pt x="2000" y="17523"/>
-                    <a:pt x="2000" y="12000"/>
-                  </a:cubicBezTo>
-                  <a:cubicBezTo>
-                    <a:pt x="2000" y="6477"/>
-                    <a:pt x="6477" y="2000"/>
-                    <a:pt x="12000" y="2000"/>
-                  </a:cubicBezTo>
-                  <a:cubicBezTo>
-                    <a:pt x="17523" y="2000"/>
-                    <a:pt x="22000" y="6477"/>
-                    <a:pt x="22000" y="12000"/>
-                  </a:cubicBezTo>
-                  <a:close/>
-                </a:path>
-                <a:path w="24000" h="24000" fill="none">
-                  <a:moveTo>
-                    <a:pt x="9090" y="9000"/>
-                  </a:moveTo>
-                  <a:cubicBezTo>
-                    <a:pt x="9575" y="7620"/>
-                    <a:pt x="10985" y="6791"/>
-                    <a:pt x="12427" y="7039"/>
-                  </a:cubicBezTo>
-                  <a:cubicBezTo>
-                    <a:pt x="13869" y="7286"/>
-                    <a:pt x="14922" y="8537"/>
-                    <a:pt x="14920" y="10000"/>
-                  </a:cubicBezTo>
-                  <a:cubicBezTo>
-                    <a:pt x="14920" y="12000"/>
-                    <a:pt x="11920" y="13000"/>
-                    <a:pt x="11920" y="13000"/>
-                  </a:cubicBezTo>
-                </a:path>
-                <a:path w="24000" h="24000" fill="none">
-                  <a:moveTo>
-                    <a:pt x="12000" y="17000"/>
-                  </a:moveTo>
-                  <a:lnTo>
-                    <a:pt x="12010" y="17000"/>
-                  </a:lnTo>
-                </a:path>
-              </a:pathLst>
-            </a:custGeom>
-            <a:noFill/>
-            <a:ln w="27639" cap="rnd">
-              <a:solidFill>
-                <a:srgbClr val="FFFFFF"/>
-              </a:solidFill>
-              <a:round/>
-            </a:ln>
-          </p:spPr>
-          <p:txBody>
-            <a:bodyPr rtlCol="0" anchor="ctr"/>
-            <a:lstStyle/>
-            <a:p>
-              <a:pPr algn="ctr"/>
-            </a:p>
-          </p:txBody>
-        </p:sp>
-        <p:sp>
-          <p:nvSpPr>
-            <p:cNvPr id="7" name="BrandDeck Diagram Text 1"/>
-            <p:cNvSpPr txBox="1"/>
-            <p:nvPr/>
-          </p:nvSpPr>
-          <p:spPr>
-            <a:xfrm>
-              <a:off x="1602207" y="2537480"/>
-              <a:ext cx="4165593" cy="1019556"/>
-            </a:xfrm>
-            <a:prstGeom prst="rect">
-              <a:avLst/>
-            </a:prstGeom>
-            <a:noFill/>
-          </p:spPr>
-          <p:txBody>
-            <a:bodyPr wrap="square" anchor="ctr" lIns="36576" tIns="18288" rIns="36576" bIns="18288">
-              <a:noAutofit/>
-            </a:bodyPr>
-            <a:lstStyle/>
-            <a:p>
-              <a:pPr algn="l">
-                <a:lnSpc>
-                  <a:spcPct val="110000"/>
-                </a:lnSpc>
-              </a:pPr>
-              <a:r>
-                <a:rPr sz="1800" b="0">
-                  <a:solidFill>
-                    <a:srgbClr val="000000"/>
-                  </a:solidFill>
-                  <a:latin typeface="Play"/>
-                </a:rPr>
-                <a:t>Система отвечает на вопросы по регламентам.</a:t>
-              </a:r>
-            </a:p>
-          </p:txBody>
-        </p:sp>
-        <p:sp>
-          <p:nvSpPr>
-            <p:cNvPr id="8" name="BrandDeck Diagram Card 2"/>
-            <p:cNvSpPr/>
-            <p:nvPr/>
-          </p:nvSpPr>
-          <p:spPr>
-            <a:xfrm>
-              <a:off x="6204744" y="2405806"/>
-              <a:ext cx="5328443" cy="1282903"/>
-            </a:xfrm>
-            <a:prstGeom prst="roundRect">
-              <a:avLst>
-                <a:gd name="adj" fmla="val 8000"/>
-              </a:avLst>
-            </a:prstGeom>
-            <a:solidFill>
-              <a:srgbClr val="EDF5FF"/>
-            </a:solidFill>
-            <a:ln>
-              <a:noFill/>
-            </a:ln>
-          </p:spPr>
-          <p:txBody>
-            <a:bodyPr rtlCol="0" anchor="ctr"/>
-            <a:lstStyle/>
-            <a:p>
-              <a:pPr algn="ctr"/>
-            </a:p>
-          </p:txBody>
-        </p:sp>
-        <p:sp>
-          <p:nvSpPr>
-            <p:cNvPr id="9" name="BrandDeck Diagram Icon 2 Badge"/>
-            <p:cNvSpPr/>
-            <p:nvPr/>
-          </p:nvSpPr>
-          <p:spPr>
-            <a:xfrm>
-              <a:off x="6424200" y="2751126"/>
-              <a:ext cx="592264" cy="592264"/>
-            </a:xfrm>
-            <a:prstGeom prst="ellipse">
-              <a:avLst/>
-            </a:prstGeom>
-            <a:solidFill>
-              <a:srgbClr val="006DEB"/>
-            </a:solidFill>
-            <a:ln>
-              <a:noFill/>
-            </a:ln>
-          </p:spPr>
-          <p:txBody>
-            <a:bodyPr rtlCol="0" anchor="ctr"/>
-            <a:lstStyle/>
-            <a:p>
-              <a:pPr algn="ctr"/>
-            </a:p>
-          </p:txBody>
-        </p:sp>
-        <p:sp>
-          <p:nvSpPr>
-            <p:cNvPr id="10" name="BrandDeck Icon file-text"/>
-            <p:cNvSpPr/>
-            <p:nvPr/>
-          </p:nvSpPr>
-          <p:spPr>
-            <a:xfrm>
-              <a:off x="6554498" y="2881424"/>
-              <a:ext cx="331668" cy="331668"/>
-            </a:xfrm>
-            <a:custGeom>
-              <a:avLst/>
-              <a:gdLst/>
-              <a:ahLst/>
-              <a:cxnLst/>
-              <a:rect l="l" t="t" r="r" b="b"/>
-              <a:pathLst>
-                <a:path w="24000" h="24000" fill="none">
-                  <a:moveTo>
-                    <a:pt x="15000" y="2000"/>
-                  </a:moveTo>
-                  <a:lnTo>
-                    <a:pt x="6000" y="2000"/>
-                  </a:lnTo>
-                  <a:cubicBezTo>
-                    <a:pt x="4895" y="2000"/>
-                    <a:pt x="4000" y="2895"/>
-                    <a:pt x="4000" y="4000"/>
-                  </a:cubicBezTo>
-                  <a:lnTo>
-                    <a:pt x="4000" y="20000"/>
-                  </a:lnTo>
-                  <a:cubicBezTo>
-                    <a:pt x="4000" y="21105"/>
-                    <a:pt x="4895" y="22000"/>
-                    <a:pt x="6000" y="22000"/>
-                  </a:cubicBezTo>
-                  <a:lnTo>
-                    <a:pt x="18000" y="22000"/>
-                  </a:lnTo>
-                  <a:cubicBezTo>
-                    <a:pt x="19105" y="22000"/>
-                    <a:pt x="20000" y="21105"/>
-                    <a:pt x="20000" y="20000"/>
-                  </a:cubicBezTo>
-                  <a:lnTo>
-                    <a:pt x="20000" y="7000"/>
-                  </a:lnTo>
-                  <a:close/>
-                </a:path>
-                <a:path w="24000" h="24000" fill="none">
-                  <a:moveTo>
-                    <a:pt x="14000" y="2000"/>
-                  </a:moveTo>
-                  <a:lnTo>
-                    <a:pt x="14000" y="6000"/>
-                  </a:lnTo>
-                  <a:cubicBezTo>
-                    <a:pt x="14000" y="7105"/>
-                    <a:pt x="14895" y="8000"/>
-                    <a:pt x="16000" y="8000"/>
-                  </a:cubicBezTo>
-                  <a:lnTo>
-                    <a:pt x="20000" y="8000"/>
-                  </a:lnTo>
-                </a:path>
-                <a:path w="24000" h="24000" fill="none">
-                  <a:moveTo>
-                    <a:pt x="10000" y="9000"/>
-                  </a:moveTo>
-                  <a:lnTo>
-                    <a:pt x="8000" y="9000"/>
-                  </a:lnTo>
-                </a:path>
-                <a:path w="24000" h="24000" fill="none">
-                  <a:moveTo>
-                    <a:pt x="16000" y="13000"/>
-                  </a:moveTo>
-                  <a:lnTo>
-                    <a:pt x="8000" y="13000"/>
-                  </a:lnTo>
-                </a:path>
-                <a:path w="24000" h="24000" fill="none">
-                  <a:moveTo>
-                    <a:pt x="16000" y="17000"/>
-                  </a:moveTo>
-                  <a:lnTo>
-                    <a:pt x="8000" y="17000"/>
-                  </a:lnTo>
-                </a:path>
-              </a:pathLst>
-            </a:custGeom>
-            <a:noFill/>
-            <a:ln w="27639" cap="rnd">
-              <a:solidFill>
-                <a:srgbClr val="FFFFFF"/>
-              </a:solidFill>
-              <a:round/>
-            </a:ln>
-          </p:spPr>
-          <p:txBody>
-            <a:bodyPr rtlCol="0" anchor="ctr"/>
-            <a:lstStyle/>
-            <a:p>
-              <a:pPr algn="ctr"/>
-            </a:p>
-          </p:txBody>
-        </p:sp>
-        <p:sp>
-          <p:nvSpPr>
-            <p:cNvPr id="11" name="BrandDeck Diagram Text 2"/>
-            <p:cNvSpPr txBox="1"/>
-            <p:nvPr/>
-          </p:nvSpPr>
-          <p:spPr>
-            <a:xfrm>
-              <a:off x="7148138" y="2537480"/>
-              <a:ext cx="4165593" cy="1019556"/>
-            </a:xfrm>
-            <a:prstGeom prst="rect">
-              <a:avLst/>
-            </a:prstGeom>
-            <a:noFill/>
-          </p:spPr>
-          <p:txBody>
-            <a:bodyPr wrap="square" anchor="ctr" lIns="36576" tIns="18288" rIns="36576" bIns="18288">
-              <a:noAutofit/>
-            </a:bodyPr>
-            <a:lstStyle/>
-            <a:p>
-              <a:pPr algn="l">
-                <a:lnSpc>
-                  <a:spcPct val="110000"/>
-                </a:lnSpc>
-              </a:pPr>
-              <a:r>
-                <a:rPr sz="1800" b="0">
-                  <a:solidFill>
-                    <a:srgbClr val="000000"/>
-                  </a:solidFill>
-                  <a:latin typeface="Play"/>
-                </a:rPr>
-                <a:t>В ответе всегда указывается ссылка на документ.</a:t>
-              </a:r>
-            </a:p>
-          </p:txBody>
-        </p:sp>
-        <p:sp>
-          <p:nvSpPr>
-            <p:cNvPr id="12" name="BrandDeck Diagram Card 3"/>
-            <p:cNvSpPr/>
-            <p:nvPr/>
-          </p:nvSpPr>
-          <p:spPr>
-            <a:xfrm>
-              <a:off x="658813" y="3906197"/>
-              <a:ext cx="5328443" cy="1282903"/>
-            </a:xfrm>
-            <a:prstGeom prst="roundRect">
-              <a:avLst>
-                <a:gd name="adj" fmla="val 8000"/>
-              </a:avLst>
-            </a:prstGeom>
-            <a:solidFill>
-              <a:srgbClr val="EDF5FF"/>
-            </a:solidFill>
-            <a:ln>
-              <a:noFill/>
-            </a:ln>
-          </p:spPr>
-          <p:txBody>
-            <a:bodyPr rtlCol="0" anchor="ctr"/>
-            <a:lstStyle/>
-            <a:p>
-              <a:pPr algn="ctr"/>
-            </a:p>
-          </p:txBody>
-        </p:sp>
-        <p:sp>
-          <p:nvSpPr>
-            <p:cNvPr id="13" name="BrandDeck Diagram Icon 3 Badge"/>
-            <p:cNvSpPr/>
-            <p:nvPr/>
-          </p:nvSpPr>
-          <p:spPr>
-            <a:xfrm>
-              <a:off x="878269" y="4251516"/>
-              <a:ext cx="592264" cy="592264"/>
-            </a:xfrm>
-            <a:prstGeom prst="ellipse">
-              <a:avLst/>
-            </a:prstGeom>
-            <a:solidFill>
-              <a:srgbClr val="006DEB"/>
-            </a:solidFill>
-            <a:ln>
-              <a:noFill/>
-            </a:ln>
-          </p:spPr>
-          <p:txBody>
-            <a:bodyPr rtlCol="0" anchor="ctr"/>
-            <a:lstStyle/>
-            <a:p>
-              <a:pPr algn="ctr"/>
-            </a:p>
-          </p:txBody>
-        </p:sp>
-        <p:sp>
-          <p:nvSpPr>
-            <p:cNvPr id="14" name="BrandDeck Icon users"/>
-            <p:cNvSpPr/>
-            <p:nvPr/>
-          </p:nvSpPr>
-          <p:spPr>
-            <a:xfrm>
-              <a:off x="1008567" y="4381815"/>
-              <a:ext cx="331668" cy="331668"/>
-            </a:xfrm>
-            <a:custGeom>
-              <a:avLst/>
-              <a:gdLst/>
-              <a:ahLst/>
-              <a:cxnLst/>
-              <a:rect l="l" t="t" r="r" b="b"/>
-              <a:pathLst>
-                <a:path w="24000" h="24000" fill="none">
-                  <a:moveTo>
-                    <a:pt x="16000" y="21000"/>
-                  </a:moveTo>
-                  <a:lnTo>
-                    <a:pt x="16000" y="19000"/>
-                  </a:lnTo>
-                  <a:cubicBezTo>
-                    <a:pt x="16000" y="16791"/>
-                    <a:pt x="14209" y="15000"/>
-                    <a:pt x="12000" y="15000"/>
-                  </a:cubicBezTo>
-                  <a:lnTo>
-                    <a:pt x="6000" y="15000"/>
-                  </a:lnTo>
-                  <a:cubicBezTo>
-                    <a:pt x="3791" y="15000"/>
-                    <a:pt x="2000" y="16791"/>
-                    <a:pt x="2000" y="19000"/>
-                  </a:cubicBezTo>
-                  <a:lnTo>
-                    <a:pt x="2000" y="21000"/>
-                  </a:lnTo>
-                </a:path>
-                <a:path w="24000" h="24000" fill="none">
-                  <a:moveTo>
-                    <a:pt x="13000" y="7000"/>
-                  </a:moveTo>
-                  <a:cubicBezTo>
-                    <a:pt x="13000" y="9209"/>
-                    <a:pt x="11209" y="11000"/>
-                    <a:pt x="9000" y="11000"/>
-                  </a:cubicBezTo>
-                  <a:cubicBezTo>
-                    <a:pt x="6791" y="11000"/>
-                    <a:pt x="5000" y="9209"/>
-                    <a:pt x="5000" y="7000"/>
-                  </a:cubicBezTo>
-                  <a:cubicBezTo>
-                    <a:pt x="5000" y="4791"/>
-                    <a:pt x="6791" y="3000"/>
-                    <a:pt x="9000" y="3000"/>
-                  </a:cubicBezTo>
-                  <a:cubicBezTo>
-                    <a:pt x="11209" y="3000"/>
-                    <a:pt x="13000" y="4791"/>
-                    <a:pt x="13000" y="7000"/>
-                  </a:cubicBezTo>
-                  <a:close/>
-                </a:path>
-                <a:path w="24000" h="24000" fill="none">
-                  <a:moveTo>
-                    <a:pt x="22000" y="21000"/>
-                  </a:moveTo>
-                  <a:lnTo>
-                    <a:pt x="22000" y="19000"/>
-                  </a:lnTo>
-                  <a:cubicBezTo>
-                    <a:pt x="21999" y="17177"/>
-                    <a:pt x="20765" y="15586"/>
-                    <a:pt x="19000" y="15130"/>
-                  </a:cubicBezTo>
-                </a:path>
-                <a:path w="24000" h="24000" fill="none">
-                  <a:moveTo>
-                    <a:pt x="16000" y="3130"/>
-                  </a:moveTo>
-                  <a:cubicBezTo>
-                    <a:pt x="17770" y="3583"/>
-                    <a:pt x="19008" y="5178"/>
-                    <a:pt x="19008" y="7005"/>
-                  </a:cubicBezTo>
-                  <a:cubicBezTo>
-                    <a:pt x="19008" y="8832"/>
-                    <a:pt x="17770" y="10427"/>
-                    <a:pt x="16000" y="10880"/>
-                  </a:cubicBezTo>
-                </a:path>
-              </a:pathLst>
-            </a:custGeom>
-            <a:noFill/>
-            <a:ln w="27639" cap="rnd">
-              <a:solidFill>
-                <a:srgbClr val="FFFFFF"/>
-              </a:solidFill>
-              <a:round/>
-            </a:ln>
-          </p:spPr>
-          <p:txBody>
-            <a:bodyPr rtlCol="0" anchor="ctr"/>
-            <a:lstStyle/>
-            <a:p>
-              <a:pPr algn="ctr"/>
-            </a:p>
-          </p:txBody>
-        </p:sp>
-        <p:sp>
-          <p:nvSpPr>
-            <p:cNvPr id="15" name="BrandDeck Diagram Text 3"/>
-            <p:cNvSpPr txBox="1"/>
-            <p:nvPr/>
-          </p:nvSpPr>
-          <p:spPr>
-            <a:xfrm>
-              <a:off x="1602207" y="4037871"/>
-              <a:ext cx="4165593" cy="1019556"/>
-            </a:xfrm>
-            <a:prstGeom prst="rect">
-              <a:avLst/>
-            </a:prstGeom>
-            <a:noFill/>
-          </p:spPr>
-          <p:txBody>
-            <a:bodyPr wrap="square" anchor="ctr" lIns="36576" tIns="18288" rIns="36576" bIns="18288">
-              <a:noAutofit/>
-            </a:bodyPr>
-            <a:lstStyle/>
-            <a:p>
-              <a:pPr algn="l">
-                <a:lnSpc>
-                  <a:spcPct val="110000"/>
-                </a:lnSpc>
-              </a:pPr>
-              <a:r>
-                <a:rPr sz="1800" b="0">
-                  <a:solidFill>
-                    <a:srgbClr val="000000"/>
-                  </a:solidFill>
-                  <a:latin typeface="Play"/>
-                </a:rPr>
-                <a:t>Ответ формируется автоматически без участия людей.</a:t>
-              </a:r>
-            </a:p>
-          </p:txBody>
-        </p:sp>
-      </p:grpSp>
-    </p:spTree>
-  </p:cSld>
-  <p:clrMapOvr>
-    <a:masterClrMapping/>
-  </p:clrMapOvr>
-</p:sld>
-</file>
-
-<file path=ppt/slides/slide6.xml><?xml version="1.0" encoding="utf-8"?>
-<p:sld xmlns:a="http://schemas.openxmlformats.org/drawingml/2006/main" xmlns:p="http://schemas.openxmlformats.org/presentationml/2006/main" xmlns:r="http://schemas.openxmlformats.org/officeDocument/2006/relationships">
-  <p:cSld>
-    <p:spTree>
-      <p:nvGrpSpPr>
-        <p:cNvPr id="1" name=""/>
-        <p:cNvGrpSpPr/>
-        <p:nvPr/>
-      </p:nvGrpSpPr>
-      <p:grpSpPr/>
-      <p:sp>
-        <p:nvSpPr>
-          <p:cNvPr id="2" name="BrandDeck Text 2"/>
-          <p:cNvSpPr>
-            <a:spLocks noGrp="1"/>
-          </p:cNvSpPr>
-          <p:nvPr>
-            <p:ph type="title"/>
-          </p:nvPr>
-        </p:nvSpPr>
-        <p:spPr>
-          <a:xfrm>
-            <a:off x="658813" y="692150"/>
-            <a:ext cx="5254307" cy="1380285"/>
-          </a:xfrm>
-        </p:spPr>
-        <p:txBody>
-          <a:bodyPr wrap="square" anchor="t">
-            <a:normAutofit/>
-          </a:bodyPr>
-          <a:lstStyle/>
-          <a:p>
-            <a:pPr algn="l">
-              <a:lnSpc>
-                <a:spcPct val="115000"/>
-              </a:lnSpc>
-              <a:spcBef>
-                <a:spcPts val="0"/>
-              </a:spcBef>
-              <a:spcAft>
-                <a:spcPts val="359"/>
-              </a:spcAft>
-            </a:pPr>
-            <a:r>
-              <a:rPr sz="2400">
-                <a:solidFill>
-                  <a:srgbClr val="000000"/>
-                </a:solidFill>
-              </a:rPr>
-              <a:t>Модель с открытыми весами работает внутри контура компании</a:t>
-            </a:r>
-          </a:p>
-        </p:txBody>
-      </p:sp>
-      <p:sp>
-        <p:nvSpPr>
-          <p:cNvPr id="3" name="BrandDeck Text 3"/>
-          <p:cNvSpPr>
-            <a:spLocks noGrp="1"/>
-          </p:cNvSpPr>
-          <p:nvPr>
-            <p:ph type="body" idx="1"/>
-          </p:nvPr>
-        </p:nvSpPr>
-        <p:spPr/>
-        <p:txBody>
-          <a:bodyPr wrap="square" anchor="t">
-            <a:normAutofit/>
-          </a:bodyPr>
-          <a:lstStyle/>
-          <a:p>
-            <a:pPr>
-              <a:lnSpc>
-                <a:spcPct val="115000"/>
-              </a:lnSpc>
-              <a:spcBef>
-                <a:spcPts val="0"/>
-              </a:spcBef>
-              <a:spcAft>
-                <a:spcPts val="270"/>
-              </a:spcAft>
-            </a:pPr>
-            <a:r>
-              <a:rPr sz="1800">
-                <a:solidFill>
-                  <a:srgbClr val="000000"/>
-                </a:solidFill>
-              </a:rPr>
-              <a:t>Модель с открытыми весами работает внутри контура компании.</a:t>
-            </a:r>
-          </a:p>
-          <a:p>
-            <a:pPr>
-              <a:lnSpc>
-                <a:spcPct val="115000"/>
-              </a:lnSpc>
-              <a:spcBef>
-                <a:spcPts val="0"/>
-              </a:spcBef>
-              <a:spcAft>
-                <a:spcPts val="270"/>
-              </a:spcAft>
-            </a:pPr>
-            <a:r>
-              <a:rPr sz="1800">
-                <a:solidFill>
-                  <a:srgbClr val="000000"/>
-                </a:solidFill>
-              </a:rPr>
-              <a:t>Документы не покидают внутреннюю инфраструктуру.</a:t>
-            </a:r>
-          </a:p>
-          <a:p>
-            <a:pPr>
-              <a:lnSpc>
-                <a:spcPct val="115000"/>
-              </a:lnSpc>
-              <a:spcBef>
-                <a:spcPts val="0"/>
-              </a:spcBef>
-              <a:spcAft>
-                <a:spcPts val="270"/>
-              </a:spcAft>
-            </a:pPr>
-            <a:r>
-              <a:rPr sz="1800">
-                <a:solidFill>
-                  <a:srgbClr val="000000"/>
-                </a:solidFill>
-              </a:rPr>
-              <a:t>Обработка запросов происходит локально без передачи данных наружу.</a:t>
-            </a:r>
-          </a:p>
-        </p:txBody>
-      </p:sp>
-      <p:pic>
-        <p:nvPicPr>
-          <p:cNvPr id="4" name="BrandDeck Image" descr="внутренний контур серверная"/>
-          <p:cNvPicPr>
-            <a:picLocks noGrp="1" noChangeAspect="1"/>
-          </p:cNvPicPr>
-          <p:nvPr>
-            <p:ph type="pic" idx="2"/>
-          </p:nvPr>
-        </p:nvPicPr>
-        <p:blipFill>
-          <a:blip r:embed="rId2"/>
-          <a:srcRect l="24987" r="24987"/>
-          <a:stretch>
-            <a:fillRect/>
-          </a:stretch>
-        </p:blipFill>
-        <p:spPr/>
-      </p:pic>
-    </p:spTree>
-  </p:cSld>
-  <p:clrMapOvr>
-    <a:masterClrMapping/>
-  </p:clrMapOvr>
-</p:sld>
-</file>
-
-<file path=ppt/slides/slide7.xml><?xml version="1.0" encoding="utf-8"?>
-<p:sld xmlns:a="http://schemas.openxmlformats.org/drawingml/2006/main" xmlns:p="http://schemas.openxmlformats.org/presentationml/2006/main" xmlns:r="http://schemas.openxmlformats.org/officeDocument/2006/relationships">
-  <p:cSld>
-    <p:spTree>
-      <p:nvGrpSpPr>
-        <p:cNvPr id="1" name=""/>
-        <p:cNvGrpSpPr/>
-        <p:nvPr/>
-      </p:nvGrpSpPr>
-      <p:grpSpPr/>
-      <p:sp>
-        <p:nvSpPr>
-          <p:cNvPr id="3" name="BrandDeck Text 3"/>
-          <p:cNvSpPr>
-            <a:spLocks noGrp="1"/>
-          </p:cNvSpPr>
-          <p:nvPr>
-            <p:ph type="title"/>
-          </p:nvPr>
-        </p:nvSpPr>
-        <p:spPr>
-          <a:xfrm>
-            <a:off x="677334" y="692150"/>
-            <a:ext cx="10855854" cy="644241"/>
-          </a:xfrm>
-        </p:spPr>
-        <p:txBody>
-          <a:bodyPr wrap="square" anchor="t">
-            <a:normAutofit/>
-          </a:bodyPr>
-          <a:lstStyle/>
-          <a:p>
-            <a:pPr algn="l">
-              <a:lnSpc>
-                <a:spcPct val="115000"/>
-              </a:lnSpc>
-              <a:spcBef>
-                <a:spcPts val="0"/>
-              </a:spcBef>
-              <a:spcAft>
-                <a:spcPts val="254"/>
-              </a:spcAft>
-            </a:pPr>
-            <a:r>
-              <a:rPr sz="1700">
-                <a:solidFill>
-                  <a:srgbClr val="000000"/>
-                </a:solidFill>
-              </a:rPr>
-              <a:t>Отсутствие подтвержденного ответа перенаправляет вопрос специалисту с контекстом</a:t>
-            </a:r>
-          </a:p>
-        </p:txBody>
-      </p:sp>
-      <p:grpSp>
-        <p:nvGrpSpPr>
-          <p:cNvPr id="2" name="BrandDeck Diagram icon_grid" descr="icon_grid: Вопросы без ответа в базе передаются специалисту.; Система отправляет контекст запроса вместе с эскаляцией.; Специалист получает полную информацию для решения задачи."/>
-          <p:cNvGrpSpPr/>
-          <p:nvPr/>
-        </p:nvGrpSpPr>
-        <p:grpSpPr>
-          <a:xfrm>
-            <a:off x="658813" y="2405806"/>
-            <a:ext cx="10874374" cy="2783294"/>
-            <a:chOff x="658813" y="2405806"/>
-            <a:chExt cx="10874374" cy="2783294"/>
-          </a:xfrm>
-        </p:grpSpPr>
-        <p:sp>
-          <p:nvSpPr>
-            <p:cNvPr id="4" name="BrandDeck Diagram Card 1"/>
-            <p:cNvSpPr/>
-            <p:nvPr/>
-          </p:nvSpPr>
-          <p:spPr>
-            <a:xfrm>
-              <a:off x="658813" y="2405806"/>
-              <a:ext cx="5328443" cy="1282903"/>
-            </a:xfrm>
-            <a:prstGeom prst="roundRect">
-              <a:avLst>
-                <a:gd name="adj" fmla="val 8000"/>
-              </a:avLst>
-            </a:prstGeom>
-            <a:solidFill>
-              <a:srgbClr val="EDF5FF"/>
-            </a:solidFill>
-            <a:ln>
-              <a:noFill/>
-            </a:ln>
-          </p:spPr>
-          <p:txBody>
-            <a:bodyPr rtlCol="0" anchor="ctr"/>
-            <a:lstStyle/>
-            <a:p>
-              <a:pPr algn="ctr"/>
-            </a:p>
-          </p:txBody>
-        </p:sp>
-        <p:sp>
-          <p:nvSpPr>
-            <p:cNvPr id="5" name="BrandDeck Diagram Icon 1 Badge"/>
-            <p:cNvSpPr/>
-            <p:nvPr/>
-          </p:nvSpPr>
-          <p:spPr>
-            <a:xfrm>
-              <a:off x="878269" y="2751126"/>
-              <a:ext cx="592264" cy="592264"/>
-            </a:xfrm>
-            <a:prstGeom prst="ellipse">
-              <a:avLst/>
-            </a:prstGeom>
-            <a:solidFill>
-              <a:srgbClr val="006DEB"/>
-            </a:solidFill>
-            <a:ln>
-              <a:noFill/>
-            </a:ln>
-          </p:spPr>
-          <p:txBody>
-            <a:bodyPr rtlCol="0" anchor="ctr"/>
-            <a:lstStyle/>
-            <a:p>
-              <a:pPr algn="ctr"/>
-            </a:p>
-          </p:txBody>
-        </p:sp>
-        <p:sp>
-          <p:nvSpPr>
-            <p:cNvPr id="6" name="BrandDeck Icon circle-help"/>
-            <p:cNvSpPr/>
-            <p:nvPr/>
-          </p:nvSpPr>
-          <p:spPr>
-            <a:xfrm>
-              <a:off x="1008567" y="2881424"/>
-              <a:ext cx="331668" cy="331668"/>
-            </a:xfrm>
-            <a:custGeom>
-              <a:avLst/>
-              <a:gdLst/>
-              <a:ahLst/>
-              <a:cxnLst/>
-              <a:rect l="l" t="t" r="r" b="b"/>
-              <a:pathLst>
-                <a:path w="24000" h="24000" fill="none">
-                  <a:moveTo>
-                    <a:pt x="22000" y="12000"/>
-                  </a:moveTo>
-                  <a:cubicBezTo>
-                    <a:pt x="22000" y="17523"/>
-                    <a:pt x="17523" y="22000"/>
-                    <a:pt x="12000" y="22000"/>
-                  </a:cubicBezTo>
-                  <a:cubicBezTo>
-                    <a:pt x="6477" y="22000"/>
-                    <a:pt x="2000" y="17523"/>
-                    <a:pt x="2000" y="12000"/>
-                  </a:cubicBezTo>
-                  <a:cubicBezTo>
-                    <a:pt x="2000" y="6477"/>
-                    <a:pt x="6477" y="2000"/>
-                    <a:pt x="12000" y="2000"/>
-                  </a:cubicBezTo>
-                  <a:cubicBezTo>
-                    <a:pt x="17523" y="2000"/>
-                    <a:pt x="22000" y="6477"/>
-                    <a:pt x="22000" y="12000"/>
-                  </a:cubicBezTo>
-                  <a:close/>
-                </a:path>
-                <a:path w="24000" h="24000" fill="none">
-                  <a:moveTo>
-                    <a:pt x="9090" y="9000"/>
-                  </a:moveTo>
-                  <a:cubicBezTo>
-                    <a:pt x="9575" y="7620"/>
-                    <a:pt x="10985" y="6791"/>
-                    <a:pt x="12427" y="7039"/>
-                  </a:cubicBezTo>
-                  <a:cubicBezTo>
-                    <a:pt x="13869" y="7286"/>
-                    <a:pt x="14922" y="8537"/>
-                    <a:pt x="14920" y="10000"/>
-                  </a:cubicBezTo>
-                  <a:cubicBezTo>
-                    <a:pt x="14920" y="12000"/>
-                    <a:pt x="11920" y="13000"/>
-                    <a:pt x="11920" y="13000"/>
-                  </a:cubicBezTo>
-                </a:path>
-                <a:path w="24000" h="24000" fill="none">
-                  <a:moveTo>
-                    <a:pt x="12000" y="17000"/>
-                  </a:moveTo>
-                  <a:lnTo>
-                    <a:pt x="12010" y="17000"/>
-                  </a:lnTo>
-                </a:path>
-              </a:pathLst>
-            </a:custGeom>
-            <a:noFill/>
-            <a:ln w="27639" cap="rnd">
-              <a:solidFill>
-                <a:srgbClr val="FFFFFF"/>
-              </a:solidFill>
-              <a:round/>
-            </a:ln>
-          </p:spPr>
-          <p:txBody>
-            <a:bodyPr rtlCol="0" anchor="ctr"/>
-            <a:lstStyle/>
-            <a:p>
-              <a:pPr algn="ctr"/>
-            </a:p>
-          </p:txBody>
-        </p:sp>
-        <p:sp>
-          <p:nvSpPr>
-            <p:cNvPr id="7" name="BrandDeck Diagram Text 1"/>
-            <p:cNvSpPr txBox="1"/>
-            <p:nvPr/>
-          </p:nvSpPr>
-          <p:spPr>
-            <a:xfrm>
-              <a:off x="1602207" y="2537480"/>
-              <a:ext cx="4165593" cy="1019556"/>
-            </a:xfrm>
-            <a:prstGeom prst="rect">
-              <a:avLst/>
-            </a:prstGeom>
-            <a:noFill/>
-          </p:spPr>
-          <p:txBody>
-            <a:bodyPr wrap="square" anchor="ctr" lIns="36576" tIns="18288" rIns="36576" bIns="18288">
-              <a:noAutofit/>
-            </a:bodyPr>
-            <a:lstStyle/>
-            <a:p>
-              <a:pPr algn="l">
-                <a:lnSpc>
-                  <a:spcPct val="110000"/>
-                </a:lnSpc>
-              </a:pPr>
-              <a:r>
-                <a:rPr sz="1800" b="0">
-                  <a:solidFill>
-                    <a:srgbClr val="000000"/>
-                  </a:solidFill>
-                  <a:latin typeface="Play"/>
-                </a:rPr>
-                <a:t>Вопросы без ответа в базе передаются специалисту.</a:t>
-              </a:r>
-            </a:p>
-          </p:txBody>
-        </p:sp>
-        <p:sp>
-          <p:nvSpPr>
-            <p:cNvPr id="8" name="BrandDeck Diagram Card 2"/>
-            <p:cNvSpPr/>
-            <p:nvPr/>
-          </p:nvSpPr>
-          <p:spPr>
-            <a:xfrm>
-              <a:off x="6204744" y="2405806"/>
-              <a:ext cx="5328443" cy="1282903"/>
-            </a:xfrm>
-            <a:prstGeom prst="roundRect">
-              <a:avLst>
-                <a:gd name="adj" fmla="val 8000"/>
-              </a:avLst>
-            </a:prstGeom>
-            <a:solidFill>
-              <a:srgbClr val="EDF5FF"/>
-            </a:solidFill>
-            <a:ln>
-              <a:noFill/>
-            </a:ln>
-          </p:spPr>
-          <p:txBody>
-            <a:bodyPr rtlCol="0" anchor="ctr"/>
-            <a:lstStyle/>
-            <a:p>
-              <a:pPr algn="ctr"/>
-            </a:p>
-          </p:txBody>
-        </p:sp>
-        <p:sp>
-          <p:nvSpPr>
-            <p:cNvPr id="9" name="BrandDeck Diagram Icon 2 Badge"/>
-            <p:cNvSpPr/>
-            <p:nvPr/>
-          </p:nvSpPr>
-          <p:spPr>
-            <a:xfrm>
-              <a:off x="6424200" y="2751126"/>
-              <a:ext cx="592264" cy="592264"/>
-            </a:xfrm>
-            <a:prstGeom prst="ellipse">
-              <a:avLst/>
-            </a:prstGeom>
-            <a:solidFill>
-              <a:srgbClr val="006DEB"/>
-            </a:solidFill>
-            <a:ln>
-              <a:noFill/>
-            </a:ln>
-          </p:spPr>
-          <p:txBody>
-            <a:bodyPr rtlCol="0" anchor="ctr"/>
-            <a:lstStyle/>
-            <a:p>
-              <a:pPr algn="ctr"/>
-            </a:p>
-          </p:txBody>
-        </p:sp>
-        <p:sp>
-          <p:nvSpPr>
-            <p:cNvPr id="10" name="BrandDeck Icon send"/>
-            <p:cNvSpPr/>
-            <p:nvPr/>
-          </p:nvSpPr>
-          <p:spPr>
-            <a:xfrm>
-              <a:off x="6554498" y="2881424"/>
-              <a:ext cx="331668" cy="331668"/>
-            </a:xfrm>
-            <a:custGeom>
-              <a:avLst/>
-              <a:gdLst/>
-              <a:ahLst/>
-              <a:cxnLst/>
-              <a:rect l="l" t="t" r="r" b="b"/>
-              <a:pathLst>
-                <a:path w="24000" h="24000" fill="none">
-                  <a:moveTo>
-                    <a:pt x="14536" y="21686"/>
-                  </a:moveTo>
-                  <a:cubicBezTo>
-                    <a:pt x="14614" y="21880"/>
-                    <a:pt x="14804" y="22005"/>
-                    <a:pt x="15013" y="22000"/>
-                  </a:cubicBezTo>
-                  <a:cubicBezTo>
-                    <a:pt x="15222" y="21994"/>
-                    <a:pt x="15405" y="21860"/>
-                    <a:pt x="15473" y="21662"/>
-                  </a:cubicBezTo>
-                  <a:lnTo>
-                    <a:pt x="21973" y="2662"/>
-                  </a:lnTo>
-                  <a:cubicBezTo>
-                    <a:pt x="22038" y="2481"/>
-                    <a:pt x="21993" y="2279"/>
-                    <a:pt x="21857" y="2143"/>
-                  </a:cubicBezTo>
-                  <a:cubicBezTo>
-                    <a:pt x="21721" y="2007"/>
-                    <a:pt x="21519" y="1962"/>
-                    <a:pt x="21338" y="2027"/>
-                  </a:cubicBezTo>
-                  <a:lnTo>
-                    <a:pt x="2338" y="8527"/>
-                  </a:lnTo>
-                  <a:cubicBezTo>
-                    <a:pt x="2140" y="8595"/>
-                    <a:pt x="2006" y="8778"/>
-                    <a:pt x="2000" y="8987"/>
-                  </a:cubicBezTo>
-                  <a:cubicBezTo>
-                    <a:pt x="1995" y="9196"/>
-                    <a:pt x="2120" y="9386"/>
-                    <a:pt x="2314" y="9464"/>
-                  </a:cubicBezTo>
-                  <a:lnTo>
-                    <a:pt x="10244" y="12644"/>
-                  </a:lnTo>
-                  <a:cubicBezTo>
-                    <a:pt x="10751" y="12847"/>
-                    <a:pt x="11152" y="13248"/>
-                    <a:pt x="11356" y="13754"/>
-                  </a:cubicBezTo>
-                  <a:close/>
-                </a:path>
-                <a:path w="24000" h="24000" fill="none">
-                  <a:moveTo>
-                    <a:pt x="21854" y="2147"/>
-                  </a:moveTo>
-                  <a:lnTo>
-                    <a:pt x="10914" y="13086"/>
-                  </a:lnTo>
-                </a:path>
-              </a:pathLst>
-            </a:custGeom>
-            <a:noFill/>
-            <a:ln w="27639" cap="rnd">
-              <a:solidFill>
-                <a:srgbClr val="FFFFFF"/>
-              </a:solidFill>
-              <a:round/>
-            </a:ln>
-          </p:spPr>
-          <p:txBody>
-            <a:bodyPr rtlCol="0" anchor="ctr"/>
-            <a:lstStyle/>
-            <a:p>
-              <a:pPr algn="ctr"/>
-            </a:p>
-          </p:txBody>
-        </p:sp>
-        <p:sp>
-          <p:nvSpPr>
-            <p:cNvPr id="11" name="BrandDeck Diagram Text 2"/>
-            <p:cNvSpPr txBox="1"/>
-            <p:nvPr/>
-          </p:nvSpPr>
-          <p:spPr>
-            <a:xfrm>
-              <a:off x="7148138" y="2537480"/>
-              <a:ext cx="4165593" cy="1019556"/>
-            </a:xfrm>
-            <a:prstGeom prst="rect">
-              <a:avLst/>
-            </a:prstGeom>
-            <a:noFill/>
-          </p:spPr>
-          <p:txBody>
-            <a:bodyPr wrap="square" anchor="ctr" lIns="36576" tIns="18288" rIns="36576" bIns="18288">
-              <a:noAutofit/>
-            </a:bodyPr>
-            <a:lstStyle/>
-            <a:p>
-              <a:pPr algn="l">
-                <a:lnSpc>
-                  <a:spcPct val="110000"/>
-                </a:lnSpc>
-              </a:pPr>
-              <a:r>
-                <a:rPr sz="1800" b="0">
-                  <a:solidFill>
-                    <a:srgbClr val="000000"/>
-                  </a:solidFill>
-                  <a:latin typeface="Play"/>
-                </a:rPr>
-                <a:t>Система отправляет контекст запроса вместе с эскаляцией.</a:t>
-              </a:r>
-            </a:p>
-          </p:txBody>
-        </p:sp>
-        <p:sp>
-          <p:nvSpPr>
-            <p:cNvPr id="12" name="BrandDeck Diagram Card 3"/>
-            <p:cNvSpPr/>
-            <p:nvPr/>
-          </p:nvSpPr>
-          <p:spPr>
-            <a:xfrm>
-              <a:off x="658813" y="3906197"/>
-              <a:ext cx="5328443" cy="1282903"/>
-            </a:xfrm>
-            <a:prstGeom prst="roundRect">
-              <a:avLst>
-                <a:gd name="adj" fmla="val 8000"/>
-              </a:avLst>
-            </a:prstGeom>
-            <a:solidFill>
-              <a:srgbClr val="EDF5FF"/>
-            </a:solidFill>
-            <a:ln>
-              <a:noFill/>
-            </a:ln>
-          </p:spPr>
-          <p:txBody>
-            <a:bodyPr rtlCol="0" anchor="ctr"/>
-            <a:lstStyle/>
-            <a:p>
-              <a:pPr algn="ctr"/>
-            </a:p>
-          </p:txBody>
-        </p:sp>
-        <p:sp>
-          <p:nvSpPr>
-            <p:cNvPr id="13" name="BrandDeck Diagram Icon 3 Badge"/>
-            <p:cNvSpPr/>
-            <p:nvPr/>
-          </p:nvSpPr>
-          <p:spPr>
-            <a:xfrm>
-              <a:off x="878269" y="4251516"/>
-              <a:ext cx="592264" cy="592264"/>
-            </a:xfrm>
-            <a:prstGeom prst="ellipse">
-              <a:avLst/>
-            </a:prstGeom>
-            <a:solidFill>
-              <a:srgbClr val="006DEB"/>
-            </a:solidFill>
-            <a:ln>
-              <a:noFill/>
-            </a:ln>
-          </p:spPr>
-          <p:txBody>
-            <a:bodyPr rtlCol="0" anchor="ctr"/>
-            <a:lstStyle/>
-            <a:p>
-              <a:pPr algn="ctr"/>
-            </a:p>
-          </p:txBody>
-        </p:sp>
-        <p:sp>
-          <p:nvSpPr>
-            <p:cNvPr id="14" name="BrandDeck Icon user"/>
-            <p:cNvSpPr/>
-            <p:nvPr/>
-          </p:nvSpPr>
-          <p:spPr>
-            <a:xfrm>
-              <a:off x="1008567" y="4381815"/>
-              <a:ext cx="331668" cy="331668"/>
-            </a:xfrm>
-            <a:custGeom>
-              <a:avLst/>
-              <a:gdLst/>
-              <a:ahLst/>
-              <a:cxnLst/>
-              <a:rect l="l" t="t" r="r" b="b"/>
-              <a:pathLst>
-                <a:path w="24000" h="24000" fill="none">
-                  <a:moveTo>
-                    <a:pt x="19000" y="21000"/>
-                  </a:moveTo>
-                  <a:lnTo>
-                    <a:pt x="19000" y="19000"/>
-                  </a:lnTo>
-                  <a:cubicBezTo>
-                    <a:pt x="19000" y="16791"/>
-                    <a:pt x="17209" y="15000"/>
-                    <a:pt x="15000" y="15000"/>
-                  </a:cubicBezTo>
-                  <a:lnTo>
-                    <a:pt x="9000" y="15000"/>
-                  </a:lnTo>
-                  <a:cubicBezTo>
-                    <a:pt x="6791" y="15000"/>
-                    <a:pt x="5000" y="16791"/>
-                    <a:pt x="5000" y="19000"/>
-                  </a:cubicBezTo>
-                  <a:lnTo>
-                    <a:pt x="5000" y="21000"/>
-                  </a:lnTo>
-                </a:path>
-                <a:path w="24000" h="24000" fill="none">
-                  <a:moveTo>
-                    <a:pt x="16000" y="7000"/>
-                  </a:moveTo>
-                  <a:cubicBezTo>
-                    <a:pt x="16000" y="9209"/>
-                    <a:pt x="14209" y="11000"/>
-                    <a:pt x="12000" y="11000"/>
-                  </a:cubicBezTo>
-                  <a:cubicBezTo>
-                    <a:pt x="9791" y="11000"/>
-                    <a:pt x="8000" y="9209"/>
-                    <a:pt x="8000" y="7000"/>
-                  </a:cubicBezTo>
-                  <a:cubicBezTo>
-                    <a:pt x="8000" y="4791"/>
-                    <a:pt x="9791" y="3000"/>
-                    <a:pt x="12000" y="3000"/>
-                  </a:cubicBezTo>
-                  <a:cubicBezTo>
-                    <a:pt x="14209" y="3000"/>
-                    <a:pt x="16000" y="4791"/>
-                    <a:pt x="16000" y="7000"/>
-                  </a:cubicBezTo>
-                  <a:close/>
-                </a:path>
-              </a:pathLst>
-            </a:custGeom>
-            <a:noFill/>
-            <a:ln w="27639" cap="rnd">
-              <a:solidFill>
-                <a:srgbClr val="FFFFFF"/>
-              </a:solidFill>
-              <a:round/>
-            </a:ln>
-          </p:spPr>
-          <p:txBody>
-            <a:bodyPr rtlCol="0" anchor="ctr"/>
-            <a:lstStyle/>
-            <a:p>
-              <a:pPr algn="ctr"/>
-            </a:p>
-          </p:txBody>
-        </p:sp>
-        <p:sp>
-          <p:nvSpPr>
-            <p:cNvPr id="15" name="BrandDeck Diagram Text 3"/>
-            <p:cNvSpPr txBox="1"/>
-            <p:nvPr/>
-          </p:nvSpPr>
-          <p:spPr>
-            <a:xfrm>
-              <a:off x="1602207" y="4037871"/>
-              <a:ext cx="4165593" cy="1019556"/>
-            </a:xfrm>
-            <a:prstGeom prst="rect">
-              <a:avLst/>
-            </a:prstGeom>
-            <a:noFill/>
-          </p:spPr>
-          <p:txBody>
-            <a:bodyPr wrap="square" anchor="ctr" lIns="36576" tIns="18288" rIns="36576" bIns="18288">
-              <a:noAutofit/>
-            </a:bodyPr>
-            <a:lstStyle/>
-            <a:p>
-              <a:pPr algn="l">
-                <a:lnSpc>
-                  <a:spcPct val="110000"/>
-                </a:lnSpc>
-              </a:pPr>
-              <a:r>
-                <a:rPr sz="1800" b="0">
-                  <a:solidFill>
-                    <a:srgbClr val="000000"/>
-                  </a:solidFill>
-                  <a:latin typeface="Play"/>
-                </a:rPr>
-                <a:t>Специалист получает полную информацию для решения задачи.</a:t>
-              </a:r>
-            </a:p>
-          </p:txBody>
-        </p:sp>
-      </p:grpSp>
-    </p:spTree>
-  </p:cSld>
-  <p:clrMapOvr>
-    <a:masterClrMapping/>
-  </p:clrMapOvr>
-</p:sld>
-</file>
-
-<file path=ppt/slides/slide8.xml><?xml version="1.0" encoding="utf-8"?>
-<p:sld xmlns:a="http://schemas.openxmlformats.org/drawingml/2006/main" xmlns:p="http://schemas.openxmlformats.org/presentationml/2006/main" xmlns:r="http://schemas.openxmlformats.org/officeDocument/2006/relationships">
-  <p:cSld>
-    <p:spTree>
-      <p:nvGrpSpPr>
-        <p:cNvPr id="1" name=""/>
-        <p:cNvGrpSpPr/>
-        <p:nvPr/>
-      </p:nvGrpSpPr>
-      <p:grpSpPr/>
-      <p:sp>
-        <p:nvSpPr>
-          <p:cNvPr id="3" name="BrandDeck Text 3"/>
-          <p:cNvSpPr>
-            <a:spLocks noGrp="1"/>
-          </p:cNvSpPr>
-          <p:nvPr>
-            <p:ph type="title"/>
-          </p:nvPr>
-        </p:nvSpPr>
-        <p:spPr>
-          <a:xfrm>
-            <a:off x="677334" y="692150"/>
-            <a:ext cx="10855854" cy="644241"/>
-          </a:xfrm>
-        </p:spPr>
-        <p:txBody>
-          <a:bodyPr wrap="square" anchor="t">
-            <a:normAutofit/>
-          </a:bodyPr>
-          <a:lstStyle/>
-          <a:p>
-            <a:pPr algn="l">
-              <a:lnSpc>
-                <a:spcPct val="115000"/>
-              </a:lnSpc>
-              <a:spcBef>
-                <a:spcPts val="0"/>
-              </a:spcBef>
-              <a:spcAft>
-                <a:spcPts val="359"/>
-              </a:spcAft>
-            </a:pPr>
-            <a:r>
-              <a:rPr sz="2400">
-                <a:solidFill>
-                  <a:srgbClr val="000000"/>
-                </a:solidFill>
-              </a:rPr>
-              <a:t>Пилот охватывает 2 подразделения и 150 сотрудников</a:t>
-            </a:r>
-          </a:p>
-        </p:txBody>
-      </p:sp>
-      <p:grpSp>
-        <p:nvGrpSpPr>
-          <p:cNvPr id="2" name="BrandDeck Diagram icon_grid" descr="icon_grid: Пилот запускается в двух подразделениях.; В проекте участвуют 150 сотрудников.; Охват ограничен выбранными группами для теста."/>
-          <p:cNvGrpSpPr/>
-          <p:nvPr/>
-        </p:nvGrpSpPr>
-        <p:grpSpPr>
-          <a:xfrm>
-            <a:off x="658813" y="2663230"/>
-            <a:ext cx="10874375" cy="2105863"/>
-            <a:chOff x="658813" y="2663230"/>
-            <a:chExt cx="10874375" cy="2105863"/>
-          </a:xfrm>
-        </p:grpSpPr>
-        <p:sp>
-          <p:nvSpPr>
-            <p:cNvPr id="4" name="BrandDeck Diagram Card 1"/>
-            <p:cNvSpPr/>
-            <p:nvPr/>
-          </p:nvSpPr>
-          <p:spPr>
-            <a:xfrm>
-              <a:off x="658813" y="2663230"/>
-              <a:ext cx="3479800" cy="2105863"/>
-            </a:xfrm>
-            <a:prstGeom prst="roundRect">
-              <a:avLst>
-                <a:gd name="adj" fmla="val 8000"/>
-              </a:avLst>
-            </a:prstGeom>
-            <a:solidFill>
-              <a:srgbClr val="EDF5FF"/>
-            </a:solidFill>
-            <a:ln>
-              <a:noFill/>
-            </a:ln>
-          </p:spPr>
-          <p:txBody>
-            <a:bodyPr rtlCol="0" anchor="ctr"/>
-            <a:lstStyle/>
-            <a:p>
-              <a:pPr algn="ctr"/>
-            </a:p>
-          </p:txBody>
-        </p:sp>
-        <p:sp>
-          <p:nvSpPr>
-            <p:cNvPr id="5" name="BrandDeck Diagram Icon 1 Badge"/>
-            <p:cNvSpPr/>
-            <p:nvPr/>
-          </p:nvSpPr>
-          <p:spPr>
-            <a:xfrm>
-              <a:off x="878269" y="2882686"/>
-              <a:ext cx="603504" cy="603504"/>
-            </a:xfrm>
-            <a:prstGeom prst="ellipse">
-              <a:avLst/>
-            </a:prstGeom>
-            <a:solidFill>
-              <a:srgbClr val="006DEB"/>
-            </a:solidFill>
-            <a:ln>
-              <a:noFill/>
-            </a:ln>
-          </p:spPr>
-          <p:txBody>
-            <a:bodyPr rtlCol="0" anchor="ctr"/>
-            <a:lstStyle/>
-            <a:p>
-              <a:pPr algn="ctr"/>
-            </a:p>
-          </p:txBody>
-        </p:sp>
-        <p:sp>
-          <p:nvSpPr>
-            <p:cNvPr id="6" name="BrandDeck Icon rocket"/>
-            <p:cNvSpPr/>
-            <p:nvPr/>
-          </p:nvSpPr>
-          <p:spPr>
-            <a:xfrm>
-              <a:off x="1011039" y="3015457"/>
-              <a:ext cx="337962" cy="337962"/>
-            </a:xfrm>
-            <a:custGeom>
-              <a:avLst/>
-              <a:gdLst/>
-              <a:ahLst/>
-              <a:cxnLst/>
-              <a:rect l="l" t="t" r="r" b="b"/>
-              <a:pathLst>
-                <a:path w="24000" h="24000" fill="none">
-                  <a:moveTo>
-                    <a:pt x="4500" y="16500"/>
-                  </a:moveTo>
-                  <a:cubicBezTo>
-                    <a:pt x="3000" y="17760"/>
-                    <a:pt x="2500" y="21500"/>
-                    <a:pt x="2500" y="21500"/>
-                  </a:cubicBezTo>
-                  <a:cubicBezTo>
-                    <a:pt x="2500" y="21500"/>
-                    <a:pt x="6240" y="21000"/>
-                    <a:pt x="7500" y="19500"/>
-                  </a:cubicBezTo>
-                  <a:cubicBezTo>
-                    <a:pt x="8210" y="18660"/>
-                    <a:pt x="8200" y="17370"/>
-                    <a:pt x="7410" y="16590"/>
-                  </a:cubicBezTo>
-                  <a:cubicBezTo>
-                    <a:pt x="6605" y="15822"/>
-                    <a:pt x="5351" y="15783"/>
-                    <a:pt x="4500" y="16500"/>
-                  </a:cubicBezTo>
-                  <a:close/>
-                </a:path>
-                <a:path w="24000" h="24000" fill="none">
-                  <a:moveTo>
-                    <a:pt x="12000" y="15000"/>
-                  </a:moveTo>
-                  <a:lnTo>
-                    <a:pt x="9000" y="12000"/>
-                  </a:lnTo>
-                  <a:cubicBezTo>
-                    <a:pt x="9532" y="10619"/>
-                    <a:pt x="10202" y="9296"/>
-                    <a:pt x="11000" y="8050"/>
-                  </a:cubicBezTo>
-                  <a:cubicBezTo>
-                    <a:pt x="13369" y="4262"/>
-                    <a:pt x="17532" y="1972"/>
-                    <a:pt x="22000" y="2000"/>
-                  </a:cubicBezTo>
-                  <a:cubicBezTo>
-                    <a:pt x="22000" y="4720"/>
-                    <a:pt x="21220" y="9500"/>
-                    <a:pt x="16000" y="13000"/>
-                  </a:cubicBezTo>
-                  <a:cubicBezTo>
-                    <a:pt x="14737" y="13799"/>
-                    <a:pt x="13397" y="14469"/>
-                    <a:pt x="12000" y="15000"/>
-                  </a:cubicBezTo>
-                  <a:close/>
-                </a:path>
-                <a:path w="24000" h="24000" fill="none">
-                  <a:moveTo>
-                    <a:pt x="9000" y="12000"/>
-                  </a:moveTo>
-                  <a:lnTo>
-                    <a:pt x="4000" y="12000"/>
-                  </a:lnTo>
-                  <a:cubicBezTo>
-                    <a:pt x="4000" y="12000"/>
-                    <a:pt x="4550" y="8970"/>
-                    <a:pt x="6000" y="8000"/>
-                  </a:cubicBezTo>
-                  <a:cubicBezTo>
-                    <a:pt x="7620" y="6920"/>
-                    <a:pt x="11000" y="8000"/>
-                    <a:pt x="11000" y="8000"/>
-                  </a:cubicBezTo>
-                </a:path>
-                <a:path w="24000" h="24000" fill="none">
-                  <a:moveTo>
-                    <a:pt x="12000" y="15000"/>
-                  </a:moveTo>
-                  <a:lnTo>
-                    <a:pt x="12000" y="20000"/>
-                  </a:lnTo>
-                  <a:cubicBezTo>
-                    <a:pt x="12000" y="20000"/>
-                    <a:pt x="15030" y="19450"/>
-                    <a:pt x="16000" y="18000"/>
-                  </a:cubicBezTo>
-                  <a:cubicBezTo>
-                    <a:pt x="17080" y="16380"/>
-                    <a:pt x="16000" y="13000"/>
-                    <a:pt x="16000" y="13000"/>
-                  </a:cubicBezTo>
-                </a:path>
-              </a:pathLst>
-            </a:custGeom>
-            <a:noFill/>
-            <a:ln w="28163" cap="rnd">
-              <a:solidFill>
-                <a:srgbClr val="FFFFFF"/>
-              </a:solidFill>
-              <a:round/>
-            </a:ln>
-          </p:spPr>
-          <p:txBody>
-            <a:bodyPr rtlCol="0" anchor="ctr"/>
-            <a:lstStyle/>
-            <a:p>
-              <a:pPr algn="ctr"/>
-            </a:p>
-          </p:txBody>
-        </p:sp>
-        <p:sp>
-          <p:nvSpPr>
-            <p:cNvPr id="7" name="BrandDeck Diagram Text 1"/>
-            <p:cNvSpPr txBox="1"/>
-            <p:nvPr/>
-          </p:nvSpPr>
-          <p:spPr>
-            <a:xfrm>
-              <a:off x="812432" y="3639809"/>
-              <a:ext cx="3172561" cy="1019555"/>
-            </a:xfrm>
-            <a:prstGeom prst="rect">
-              <a:avLst/>
-            </a:prstGeom>
-            <a:noFill/>
-          </p:spPr>
-          <p:txBody>
-            <a:bodyPr wrap="square" anchor="t" lIns="36576" tIns="18288" rIns="36576" bIns="18288">
-              <a:noAutofit/>
-            </a:bodyPr>
-            <a:lstStyle/>
-            <a:p>
-              <a:pPr algn="l">
-                <a:lnSpc>
-                  <a:spcPct val="110000"/>
-                </a:lnSpc>
-              </a:pPr>
-              <a:r>
-                <a:rPr sz="1800" b="0">
-                  <a:solidFill>
-                    <a:srgbClr val="000000"/>
-                  </a:solidFill>
-                  <a:latin typeface="Play"/>
-                </a:rPr>
-                <a:t>Пилот запускается в двух подразделениях.</a:t>
-              </a:r>
-            </a:p>
-          </p:txBody>
-        </p:sp>
-        <p:sp>
-          <p:nvSpPr>
-            <p:cNvPr id="8" name="BrandDeck Diagram Card 2"/>
-            <p:cNvSpPr/>
-            <p:nvPr/>
-          </p:nvSpPr>
-          <p:spPr>
-            <a:xfrm>
-              <a:off x="4356100" y="2663230"/>
-              <a:ext cx="3479800" cy="2105863"/>
-            </a:xfrm>
-            <a:prstGeom prst="roundRect">
-              <a:avLst>
-                <a:gd name="adj" fmla="val 8000"/>
-              </a:avLst>
-            </a:prstGeom>
-            <a:solidFill>
-              <a:srgbClr val="EDF5FF"/>
-            </a:solidFill>
-            <a:ln>
-              <a:noFill/>
-            </a:ln>
-          </p:spPr>
-          <p:txBody>
-            <a:bodyPr rtlCol="0" anchor="ctr"/>
-            <a:lstStyle/>
-            <a:p>
-              <a:pPr algn="ctr"/>
-            </a:p>
-          </p:txBody>
-        </p:sp>
-        <p:sp>
-          <p:nvSpPr>
-            <p:cNvPr id="9" name="BrandDeck Diagram Icon 2 Badge"/>
-            <p:cNvSpPr/>
-            <p:nvPr/>
-          </p:nvSpPr>
-          <p:spPr>
-            <a:xfrm>
-              <a:off x="4575556" y="2882686"/>
-              <a:ext cx="603504" cy="603504"/>
-            </a:xfrm>
-            <a:prstGeom prst="ellipse">
-              <a:avLst/>
-            </a:prstGeom>
-            <a:solidFill>
-              <a:srgbClr val="006DEB"/>
-            </a:solidFill>
-            <a:ln>
-              <a:noFill/>
-            </a:ln>
-          </p:spPr>
-          <p:txBody>
-            <a:bodyPr rtlCol="0" anchor="ctr"/>
-            <a:lstStyle/>
-            <a:p>
-              <a:pPr algn="ctr"/>
-            </a:p>
-          </p:txBody>
-        </p:sp>
-        <p:sp>
-          <p:nvSpPr>
-            <p:cNvPr id="10" name="BrandDeck Icon users"/>
-            <p:cNvSpPr/>
-            <p:nvPr/>
-          </p:nvSpPr>
-          <p:spPr>
-            <a:xfrm>
-              <a:off x="4708327" y="3015457"/>
+              <a:off x="1011039" y="2125464"/>
               <a:ext cx="337962" cy="337962"/>
             </a:xfrm>
             <a:custGeom>
@@ -13819,14 +11329,14 @@
         </p:sp>
         <p:sp>
           <p:nvSpPr>
-            <p:cNvPr id="11" name="BrandDeck Diagram Text 2"/>
+            <p:cNvPr id="7" name="BrandDeck Diagram Text 1"/>
             <p:cNvSpPr txBox="1"/>
             <p:nvPr/>
           </p:nvSpPr>
           <p:spPr>
             <a:xfrm>
-              <a:off x="4509719" y="3639809"/>
-              <a:ext cx="3172561" cy="1019555"/>
+              <a:off x="812432" y="2749817"/>
+              <a:ext cx="5021205" cy="3361641"/>
             </a:xfrm>
             <a:prstGeom prst="rect">
               <a:avLst/>
@@ -13845,27 +11355,46 @@
                 </a:lnSpc>
               </a:pPr>
               <a:r>
+                <a:rPr sz="1800" b="1">
+                  <a:solidFill>
+                    <a:srgbClr val="000000"/>
+                  </a:solidFill>
+                  <a:latin typeface="Play"/>
+                </a:rPr>
+                <a:t>150 сотрудников</a:t>
+              </a:r>
+            </a:p>
+            <a:p>
+              <a:pPr algn="l">
+                <a:lnSpc>
+                  <a:spcPct val="110000"/>
+                </a:lnSpc>
+                <a:spcBef>
+                  <a:spcPts val="450"/>
+                </a:spcBef>
+              </a:pPr>
+              <a:r>
                 <a:rPr sz="1800" b="0">
                   <a:solidFill>
                     <a:srgbClr val="000000"/>
                   </a:solidFill>
                   <a:latin typeface="Play"/>
                 </a:rPr>
-                <a:t>В проекте участвуют 150 сотрудников.</a:t>
+                <a:t>Два подразделения</a:t>
               </a:r>
             </a:p>
           </p:txBody>
         </p:sp>
         <p:sp>
           <p:nvSpPr>
-            <p:cNvPr id="12" name="BrandDeck Diagram Card 3"/>
+            <p:cNvPr id="8" name="BrandDeck Diagram Card 2"/>
             <p:cNvSpPr/>
             <p:nvPr/>
           </p:nvSpPr>
           <p:spPr>
             <a:xfrm>
-              <a:off x="8053388" y="2663230"/>
-              <a:ext cx="3479800" cy="2105863"/>
+              <a:off x="6204744" y="1773238"/>
+              <a:ext cx="5328443" cy="4447949"/>
             </a:xfrm>
             <a:prstGeom prst="roundRect">
               <a:avLst>
@@ -13889,13 +11418,13 @@
         </p:sp>
         <p:sp>
           <p:nvSpPr>
-            <p:cNvPr id="13" name="BrandDeck Diagram Icon 3 Badge"/>
+            <p:cNvPr id="9" name="BrandDeck Diagram Icon 2 Badge"/>
             <p:cNvSpPr/>
             <p:nvPr/>
           </p:nvSpPr>
           <p:spPr>
             <a:xfrm>
-              <a:off x="8272844" y="2882686"/>
+              <a:off x="6424200" y="1992694"/>
               <a:ext cx="603504" cy="603504"/>
             </a:xfrm>
             <a:prstGeom prst="ellipse">
@@ -13918,13 +11447,13 @@
         </p:sp>
         <p:sp>
           <p:nvSpPr>
-            <p:cNvPr id="14" name="BrandDeck Icon circle-dot"/>
+            <p:cNvPr id="10" name="BrandDeck Icon calendar"/>
             <p:cNvSpPr/>
             <p:nvPr/>
           </p:nvSpPr>
           <p:spPr>
             <a:xfrm>
-              <a:off x="8405614" y="3015457"/>
+              <a:off x="6556971" y="2125464"/>
               <a:ext cx="337962" cy="337962"/>
             </a:xfrm>
             <a:custGeom>
@@ -13936,55 +11465,65 @@
               <a:pathLst>
                 <a:path w="24000" h="24000" fill="none">
                   <a:moveTo>
-                    <a:pt x="22000" y="12000"/>
+                    <a:pt x="8000" y="2000"/>
                   </a:moveTo>
+                  <a:lnTo>
+                    <a:pt x="8000" y="6000"/>
+                  </a:lnTo>
+                </a:path>
+                <a:path w="24000" h="24000" fill="none">
+                  <a:moveTo>
+                    <a:pt x="16000" y="2000"/>
+                  </a:moveTo>
+                  <a:lnTo>
+                    <a:pt x="16000" y="6000"/>
+                  </a:lnTo>
+                </a:path>
+                <a:path w="24000" h="24000" fill="none">
+                  <a:moveTo>
+                    <a:pt x="5000" y="4000"/>
+                  </a:moveTo>
+                  <a:lnTo>
+                    <a:pt x="19000" y="4000"/>
+                  </a:lnTo>
                   <a:cubicBezTo>
-                    <a:pt x="22000" y="17523"/>
-                    <a:pt x="17523" y="22000"/>
-                    <a:pt x="12000" y="22000"/>
+                    <a:pt x="20105" y="4000"/>
+                    <a:pt x="21000" y="4895"/>
+                    <a:pt x="21000" y="6000"/>
                   </a:cubicBezTo>
+                  <a:lnTo>
+                    <a:pt x="21000" y="20000"/>
+                  </a:lnTo>
                   <a:cubicBezTo>
-                    <a:pt x="6477" y="22000"/>
-                    <a:pt x="2000" y="17523"/>
-                    <a:pt x="2000" y="12000"/>
+                    <a:pt x="21000" y="21105"/>
+                    <a:pt x="20105" y="22000"/>
+                    <a:pt x="19000" y="22000"/>
                   </a:cubicBezTo>
+                  <a:lnTo>
+                    <a:pt x="5000" y="22000"/>
+                  </a:lnTo>
                   <a:cubicBezTo>
-                    <a:pt x="2000" y="6477"/>
-                    <a:pt x="6477" y="2000"/>
-                    <a:pt x="12000" y="2000"/>
+                    <a:pt x="3895" y="22000"/>
+                    <a:pt x="3000" y="21105"/>
+                    <a:pt x="3000" y="20000"/>
                   </a:cubicBezTo>
+                  <a:lnTo>
+                    <a:pt x="3000" y="6000"/>
+                  </a:lnTo>
                   <a:cubicBezTo>
-                    <a:pt x="17523" y="2000"/>
-                    <a:pt x="22000" y="6477"/>
-                    <a:pt x="22000" y="12000"/>
+                    <a:pt x="3000" y="4895"/>
+                    <a:pt x="3895" y="4000"/>
+                    <a:pt x="5000" y="4000"/>
                   </a:cubicBezTo>
                   <a:close/>
                 </a:path>
                 <a:path w="24000" h="24000" fill="none">
                   <a:moveTo>
-                    <a:pt x="13000" y="12000"/>
+                    <a:pt x="3000" y="10000"/>
                   </a:moveTo>
-                  <a:cubicBezTo>
-                    <a:pt x="13000" y="12552"/>
-                    <a:pt x="12552" y="13000"/>
-                    <a:pt x="12000" y="13000"/>
-                  </a:cubicBezTo>
-                  <a:cubicBezTo>
-                    <a:pt x="11448" y="13000"/>
-                    <a:pt x="11000" y="12552"/>
-                    <a:pt x="11000" y="12000"/>
-                  </a:cubicBezTo>
-                  <a:cubicBezTo>
-                    <a:pt x="11000" y="11448"/>
-                    <a:pt x="11448" y="11000"/>
-                    <a:pt x="12000" y="11000"/>
-                  </a:cubicBezTo>
-                  <a:cubicBezTo>
-                    <a:pt x="12552" y="11000"/>
-                    <a:pt x="13000" y="11448"/>
-                    <a:pt x="13000" y="12000"/>
-                  </a:cubicBezTo>
-                  <a:close/>
+                  <a:lnTo>
+                    <a:pt x="21000" y="10000"/>
+                  </a:lnTo>
                 </a:path>
               </a:pathLst>
             </a:custGeom>
@@ -14006,14 +11545,14 @@
         </p:sp>
         <p:sp>
           <p:nvSpPr>
-            <p:cNvPr id="15" name="BrandDeck Diagram Text 3"/>
+            <p:cNvPr id="11" name="BrandDeck Diagram Text 2"/>
             <p:cNvSpPr txBox="1"/>
             <p:nvPr/>
           </p:nvSpPr>
           <p:spPr>
             <a:xfrm>
-              <a:off x="8207007" y="3639809"/>
-              <a:ext cx="3172561" cy="1019555"/>
+              <a:off x="6358363" y="2749817"/>
+              <a:ext cx="5021205" cy="3361641"/>
             </a:xfrm>
             <a:prstGeom prst="rect">
               <a:avLst/>
@@ -14032,13 +11571,32 @@
                 </a:lnSpc>
               </a:pPr>
               <a:r>
+                <a:rPr sz="1800" b="1">
+                  <a:solidFill>
+                    <a:srgbClr val="000000"/>
+                  </a:solidFill>
+                  <a:latin typeface="Play"/>
+                </a:rPr>
+                <a:t>6 недель</a:t>
+              </a:r>
+            </a:p>
+            <a:p>
+              <a:pPr algn="l">
+                <a:lnSpc>
+                  <a:spcPct val="110000"/>
+                </a:lnSpc>
+                <a:spcBef>
+                  <a:spcPts val="450"/>
+                </a:spcBef>
+              </a:pPr>
+              <a:r>
                 <a:rPr sz="1800" b="0">
                   <a:solidFill>
                     <a:srgbClr val="000000"/>
                   </a:solidFill>
                   <a:latin typeface="Play"/>
                 </a:rPr>
-                <a:t>Охват ограничен выбранными группами для теста.</a:t>
+                <a:t>Период пилота</a:t>
               </a:r>
             </a:p>
           </p:txBody>
@@ -14052,7 +11610,7 @@
 </p:sld>
 </file>
 
-<file path=ppt/slides/slide9.xml><?xml version="1.0" encoding="utf-8"?>
+<file path=ppt/slides/slide4.xml><?xml version="1.0" encoding="utf-8"?>
 <p:sld xmlns:a="http://schemas.openxmlformats.org/drawingml/2006/main" xmlns:p="http://schemas.openxmlformats.org/presentationml/2006/main" xmlns:r="http://schemas.openxmlformats.org/officeDocument/2006/relationships">
   <p:cSld>
     <p:spTree>
@@ -14092,32 +11650,32 @@
                 <a:spcPts val="0"/>
               </a:spcBef>
               <a:spcAft>
-                <a:spcPts val="359"/>
+                <a:spcPts val="240"/>
               </a:spcAft>
             </a:pPr>
             <a:r>
-              <a:rPr sz="2400">
+              <a:rPr sz="1600">
                 <a:solidFill>
                   <a:srgbClr val="000000"/>
                 </a:solidFill>
               </a:rPr>
-              <a:t>Длительность пилотного проекта составляет 6 недель</a:t>
+              <a:t>ИИ-помощник отвечает на вопросы по регламентам и сразу дает ссылку на документ-источник</a:t>
             </a:r>
           </a:p>
         </p:txBody>
       </p:sp>
       <p:grpSp>
         <p:nvGrpSpPr>
-          <p:cNvPr id="2" name="BrandDeck Diagram icon_grid" descr="icon_grid: Пилотный эксперимент длится 6 недель.; В этот период тестируется работа ИИ-помощника.; За это время оценивается эффективность решения."/>
+          <p:cNvPr id="2" name="BrandDeck Diagram icon_grid" descr="icon_grid: ИИ-помощник отвечает на вопросы по регламентам и инструкциям.; Система сразу предоставляет ссылку на документ-источник.; Ответ формируется на основе внутренних корпоративных документов."/>
           <p:cNvGrpSpPr/>
           <p:nvPr/>
         </p:nvGrpSpPr>
         <p:grpSpPr>
           <a:xfrm>
-            <a:off x="658813" y="2663230"/>
-            <a:ext cx="10874375" cy="2105863"/>
-            <a:chOff x="658813" y="2663230"/>
-            <a:chExt cx="10874375" cy="2105863"/>
+            <a:off x="658813" y="2405806"/>
+            <a:ext cx="10874374" cy="2783294"/>
+            <a:chOff x="658813" y="2405806"/>
+            <a:chExt cx="10874374" cy="2783294"/>
           </a:xfrm>
         </p:grpSpPr>
         <p:sp>
@@ -14128,8 +11686,8 @@
           </p:nvSpPr>
           <p:spPr>
             <a:xfrm>
-              <a:off x="658813" y="2663230"/>
-              <a:ext cx="3479800" cy="2105863"/>
+              <a:off x="658813" y="2405806"/>
+              <a:ext cx="5328443" cy="1282903"/>
             </a:xfrm>
             <a:prstGeom prst="roundRect">
               <a:avLst>
@@ -14159,8 +11717,8 @@
           </p:nvSpPr>
           <p:spPr>
             <a:xfrm>
-              <a:off x="878269" y="2882686"/>
-              <a:ext cx="603504" cy="603504"/>
+              <a:off x="878269" y="2751126"/>
+              <a:ext cx="592264" cy="592264"/>
             </a:xfrm>
             <a:prstGeom prst="ellipse">
               <a:avLst/>
@@ -14182,14 +11740,14 @@
         </p:sp>
         <p:sp>
           <p:nvSpPr>
-            <p:cNvPr id="6" name="BrandDeck Icon rocket"/>
+            <p:cNvPr id="6" name="BrandDeck Icon file-text"/>
             <p:cNvSpPr/>
             <p:nvPr/>
           </p:nvSpPr>
           <p:spPr>
             <a:xfrm>
-              <a:off x="1011039" y="3015457"/>
-              <a:ext cx="337962" cy="337962"/>
+              <a:off x="1008567" y="2881424"/>
+              <a:ext cx="331668" cy="331668"/>
             </a:xfrm>
             <a:custGeom>
               <a:avLst/>
@@ -14200,99 +11758,81 @@
               <a:pathLst>
                 <a:path w="24000" h="24000" fill="none">
                   <a:moveTo>
-                    <a:pt x="4500" y="16500"/>
+                    <a:pt x="15000" y="2000"/>
                   </a:moveTo>
+                  <a:lnTo>
+                    <a:pt x="6000" y="2000"/>
+                  </a:lnTo>
                   <a:cubicBezTo>
-                    <a:pt x="3000" y="17760"/>
-                    <a:pt x="2500" y="21500"/>
-                    <a:pt x="2500" y="21500"/>
+                    <a:pt x="4895" y="2000"/>
+                    <a:pt x="4000" y="2895"/>
+                    <a:pt x="4000" y="4000"/>
                   </a:cubicBezTo>
+                  <a:lnTo>
+                    <a:pt x="4000" y="20000"/>
+                  </a:lnTo>
                   <a:cubicBezTo>
-                    <a:pt x="2500" y="21500"/>
-                    <a:pt x="6240" y="21000"/>
-                    <a:pt x="7500" y="19500"/>
+                    <a:pt x="4000" y="21105"/>
+                    <a:pt x="4895" y="22000"/>
+                    <a:pt x="6000" y="22000"/>
                   </a:cubicBezTo>
+                  <a:lnTo>
+                    <a:pt x="18000" y="22000"/>
+                  </a:lnTo>
                   <a:cubicBezTo>
-                    <a:pt x="8210" y="18660"/>
-                    <a:pt x="8200" y="17370"/>
-                    <a:pt x="7410" y="16590"/>
+                    <a:pt x="19105" y="22000"/>
+                    <a:pt x="20000" y="21105"/>
+                    <a:pt x="20000" y="20000"/>
                   </a:cubicBezTo>
-                  <a:cubicBezTo>
-                    <a:pt x="6605" y="15822"/>
-                    <a:pt x="5351" y="15783"/>
-                    <a:pt x="4500" y="16500"/>
-                  </a:cubicBezTo>
+                  <a:lnTo>
+                    <a:pt x="20000" y="7000"/>
+                  </a:lnTo>
                   <a:close/>
                 </a:path>
                 <a:path w="24000" h="24000" fill="none">
                   <a:moveTo>
-                    <a:pt x="12000" y="15000"/>
+                    <a:pt x="14000" y="2000"/>
                   </a:moveTo>
                   <a:lnTo>
-                    <a:pt x="9000" y="12000"/>
+                    <a:pt x="14000" y="6000"/>
                   </a:lnTo>
                   <a:cubicBezTo>
-                    <a:pt x="9532" y="10619"/>
-                    <a:pt x="10202" y="9296"/>
-                    <a:pt x="11000" y="8050"/>
+                    <a:pt x="14000" y="7105"/>
+                    <a:pt x="14895" y="8000"/>
+                    <a:pt x="16000" y="8000"/>
                   </a:cubicBezTo>
-                  <a:cubicBezTo>
-                    <a:pt x="13369" y="4262"/>
-                    <a:pt x="17532" y="1972"/>
-                    <a:pt x="22000" y="2000"/>
-                  </a:cubicBezTo>
-                  <a:cubicBezTo>
-                    <a:pt x="22000" y="4720"/>
-                    <a:pt x="21220" y="9500"/>
-                    <a:pt x="16000" y="13000"/>
-                  </a:cubicBezTo>
-                  <a:cubicBezTo>
-                    <a:pt x="14737" y="13799"/>
-                    <a:pt x="13397" y="14469"/>
-                    <a:pt x="12000" y="15000"/>
-                  </a:cubicBezTo>
-                  <a:close/>
+                  <a:lnTo>
+                    <a:pt x="20000" y="8000"/>
+                  </a:lnTo>
                 </a:path>
                 <a:path w="24000" h="24000" fill="none">
                   <a:moveTo>
-                    <a:pt x="9000" y="12000"/>
+                    <a:pt x="10000" y="9000"/>
                   </a:moveTo>
                   <a:lnTo>
-                    <a:pt x="4000" y="12000"/>
+                    <a:pt x="8000" y="9000"/>
                   </a:lnTo>
-                  <a:cubicBezTo>
-                    <a:pt x="4000" y="12000"/>
-                    <a:pt x="4550" y="8970"/>
-                    <a:pt x="6000" y="8000"/>
-                  </a:cubicBezTo>
-                  <a:cubicBezTo>
-                    <a:pt x="7620" y="6920"/>
-                    <a:pt x="11000" y="8000"/>
-                    <a:pt x="11000" y="8000"/>
-                  </a:cubicBezTo>
                 </a:path>
                 <a:path w="24000" h="24000" fill="none">
                   <a:moveTo>
-                    <a:pt x="12000" y="15000"/>
+                    <a:pt x="16000" y="13000"/>
                   </a:moveTo>
                   <a:lnTo>
-                    <a:pt x="12000" y="20000"/>
+                    <a:pt x="8000" y="13000"/>
                   </a:lnTo>
-                  <a:cubicBezTo>
-                    <a:pt x="12000" y="20000"/>
-                    <a:pt x="15030" y="19450"/>
-                    <a:pt x="16000" y="18000"/>
-                  </a:cubicBezTo>
-                  <a:cubicBezTo>
-                    <a:pt x="17080" y="16380"/>
-                    <a:pt x="16000" y="13000"/>
-                    <a:pt x="16000" y="13000"/>
-                  </a:cubicBezTo>
+                </a:path>
+                <a:path w="24000" h="24000" fill="none">
+                  <a:moveTo>
+                    <a:pt x="16000" y="17000"/>
+                  </a:moveTo>
+                  <a:lnTo>
+                    <a:pt x="8000" y="17000"/>
+                  </a:lnTo>
                 </a:path>
               </a:pathLst>
             </a:custGeom>
             <a:noFill/>
-            <a:ln w="28163" cap="rnd">
+            <a:ln w="27639" cap="rnd">
               <a:solidFill>
                 <a:srgbClr val="FFFFFF"/>
               </a:solidFill>
@@ -14315,8 +11855,8 @@
           </p:nvSpPr>
           <p:spPr>
             <a:xfrm>
-              <a:off x="812432" y="3639809"/>
-              <a:ext cx="3172561" cy="1019555"/>
+              <a:off x="1602207" y="2537480"/>
+              <a:ext cx="4165593" cy="1019556"/>
             </a:xfrm>
             <a:prstGeom prst="rect">
               <a:avLst/>
@@ -14324,7 +11864,7 @@
             <a:noFill/>
           </p:spPr>
           <p:txBody>
-            <a:bodyPr wrap="square" anchor="t" lIns="36576" tIns="18288" rIns="36576" bIns="18288">
+            <a:bodyPr wrap="square" anchor="ctr" lIns="36576" tIns="18288" rIns="36576" bIns="18288">
               <a:noAutofit/>
             </a:bodyPr>
             <a:lstStyle/>
@@ -14341,7 +11881,7 @@
                   </a:solidFill>
                   <a:latin typeface="Play"/>
                 </a:rPr>
-                <a:t>Пилотный эксперимент длится 6 недель.</a:t>
+                <a:t>ИИ-помощник отвечает на вопросы по регламентам и инструкциям.</a:t>
               </a:r>
             </a:p>
           </p:txBody>
@@ -14354,8 +11894,8 @@
           </p:nvSpPr>
           <p:spPr>
             <a:xfrm>
-              <a:off x="4356100" y="2663230"/>
-              <a:ext cx="3479800" cy="2105863"/>
+              <a:off x="6204744" y="2405806"/>
+              <a:ext cx="5328443" cy="1282903"/>
             </a:xfrm>
             <a:prstGeom prst="roundRect">
               <a:avLst>
@@ -14385,8 +11925,8 @@
           </p:nvSpPr>
           <p:spPr>
             <a:xfrm>
-              <a:off x="4575556" y="2882686"/>
-              <a:ext cx="603504" cy="603504"/>
+              <a:off x="6424200" y="2751126"/>
+              <a:ext cx="592264" cy="592264"/>
             </a:xfrm>
             <a:prstGeom prst="ellipse">
               <a:avLst/>
@@ -14408,14 +11948,14 @@
         </p:sp>
         <p:sp>
           <p:nvSpPr>
-            <p:cNvPr id="10" name="BrandDeck Icon circle-dot"/>
+            <p:cNvPr id="10" name="BrandDeck Icon link"/>
             <p:cNvSpPr/>
             <p:nvPr/>
           </p:nvSpPr>
           <p:spPr>
             <a:xfrm>
-              <a:off x="4708327" y="3015457"/>
-              <a:ext cx="337962" cy="337962"/>
+              <a:off x="6554498" y="2881424"/>
+              <a:ext cx="331668" cy="331668"/>
             </a:xfrm>
             <a:custGeom>
               <a:avLst/>
@@ -14426,60 +11966,70 @@
               <a:pathLst>
                 <a:path w="24000" h="24000" fill="none">
                   <a:moveTo>
-                    <a:pt x="22000" y="12000"/>
+                    <a:pt x="10000" y="13000"/>
                   </a:moveTo>
                   <a:cubicBezTo>
-                    <a:pt x="22000" y="17523"/>
-                    <a:pt x="17523" y="22000"/>
-                    <a:pt x="12000" y="22000"/>
+                    <a:pt x="10869" y="14162"/>
+                    <a:pt x="12200" y="14889"/>
+                    <a:pt x="13647" y="14992"/>
                   </a:cubicBezTo>
                   <a:cubicBezTo>
-                    <a:pt x="6477" y="22000"/>
-                    <a:pt x="2000" y="17523"/>
-                    <a:pt x="2000" y="12000"/>
+                    <a:pt x="15094" y="15096"/>
+                    <a:pt x="16514" y="14566"/>
+                    <a:pt x="17540" y="13540"/>
+                  </a:cubicBezTo>
+                  <a:lnTo>
+                    <a:pt x="20540" y="10540"/>
+                  </a:lnTo>
+                  <a:cubicBezTo>
+                    <a:pt x="22435" y="8578"/>
+                    <a:pt x="22408" y="5460"/>
+                    <a:pt x="20479" y="3531"/>
                   </a:cubicBezTo>
                   <a:cubicBezTo>
-                    <a:pt x="2000" y="6477"/>
-                    <a:pt x="6477" y="2000"/>
-                    <a:pt x="12000" y="2000"/>
+                    <a:pt x="18550" y="1602"/>
+                    <a:pt x="15432" y="1575"/>
+                    <a:pt x="13470" y="3470"/>
                   </a:cubicBezTo>
-                  <a:cubicBezTo>
-                    <a:pt x="17523" y="2000"/>
-                    <a:pt x="22000" y="6477"/>
-                    <a:pt x="22000" y="12000"/>
-                  </a:cubicBezTo>
-                  <a:close/>
+                  <a:lnTo>
+                    <a:pt x="11750" y="5180"/>
+                  </a:lnTo>
                 </a:path>
                 <a:path w="24000" h="24000" fill="none">
                   <a:moveTo>
-                    <a:pt x="13000" y="12000"/>
+                    <a:pt x="14000" y="11000"/>
                   </a:moveTo>
                   <a:cubicBezTo>
-                    <a:pt x="13000" y="12552"/>
-                    <a:pt x="12552" y="13000"/>
-                    <a:pt x="12000" y="13000"/>
+                    <a:pt x="13131" y="9838"/>
+                    <a:pt x="11800" y="9111"/>
+                    <a:pt x="10353" y="9008"/>
                   </a:cubicBezTo>
                   <a:cubicBezTo>
-                    <a:pt x="11448" y="13000"/>
-                    <a:pt x="11000" y="12552"/>
-                    <a:pt x="11000" y="12000"/>
+                    <a:pt x="8906" y="8904"/>
+                    <a:pt x="7486" y="9434"/>
+                    <a:pt x="6460" y="10460"/>
+                  </a:cubicBezTo>
+                  <a:lnTo>
+                    <a:pt x="3460" y="13460"/>
+                  </a:lnTo>
+                  <a:cubicBezTo>
+                    <a:pt x="1565" y="15422"/>
+                    <a:pt x="1592" y="18540"/>
+                    <a:pt x="3521" y="20469"/>
                   </a:cubicBezTo>
                   <a:cubicBezTo>
-                    <a:pt x="11000" y="11448"/>
-                    <a:pt x="11448" y="11000"/>
-                    <a:pt x="12000" y="11000"/>
+                    <a:pt x="5450" y="22398"/>
+                    <a:pt x="8568" y="22425"/>
+                    <a:pt x="10530" y="20530"/>
                   </a:cubicBezTo>
-                  <a:cubicBezTo>
-                    <a:pt x="12552" y="11000"/>
-                    <a:pt x="13000" y="11448"/>
-                    <a:pt x="13000" y="12000"/>
-                  </a:cubicBezTo>
-                  <a:close/>
+                  <a:lnTo>
+                    <a:pt x="12240" y="18820"/>
+                  </a:lnTo>
                 </a:path>
               </a:pathLst>
             </a:custGeom>
             <a:noFill/>
-            <a:ln w="28163" cap="rnd">
+            <a:ln w="27639" cap="rnd">
               <a:solidFill>
                 <a:srgbClr val="FFFFFF"/>
               </a:solidFill>
@@ -14502,8 +12052,8 @@
           </p:nvSpPr>
           <p:spPr>
             <a:xfrm>
-              <a:off x="4509719" y="3639809"/>
-              <a:ext cx="3172561" cy="1019555"/>
+              <a:off x="7148138" y="2537480"/>
+              <a:ext cx="4165593" cy="1019556"/>
             </a:xfrm>
             <a:prstGeom prst="rect">
               <a:avLst/>
@@ -14511,7 +12061,7 @@
             <a:noFill/>
           </p:spPr>
           <p:txBody>
-            <a:bodyPr wrap="square" anchor="t" lIns="36576" tIns="18288" rIns="36576" bIns="18288">
+            <a:bodyPr wrap="square" anchor="ctr" lIns="36576" tIns="18288" rIns="36576" bIns="18288">
               <a:noAutofit/>
             </a:bodyPr>
             <a:lstStyle/>
@@ -14528,7 +12078,7 @@
                   </a:solidFill>
                   <a:latin typeface="Play"/>
                 </a:rPr>
-                <a:t>В этот период тестируется работа ИИ-помощника.</a:t>
+                <a:t>Система сразу предоставляет ссылку на документ-источник.</a:t>
               </a:r>
             </a:p>
           </p:txBody>
@@ -14541,8 +12091,8 @@
           </p:nvSpPr>
           <p:spPr>
             <a:xfrm>
-              <a:off x="8053388" y="2663230"/>
-              <a:ext cx="3479800" cy="2105863"/>
+              <a:off x="658813" y="3906197"/>
+              <a:ext cx="5328443" cy="1282903"/>
             </a:xfrm>
             <a:prstGeom prst="roundRect">
               <a:avLst>
@@ -14572,8 +12122,8 @@
           </p:nvSpPr>
           <p:spPr>
             <a:xfrm>
-              <a:off x="8272844" y="2882686"/>
-              <a:ext cx="603504" cy="603504"/>
+              <a:off x="878269" y="4251516"/>
+              <a:ext cx="592264" cy="592264"/>
             </a:xfrm>
             <a:prstGeom prst="ellipse">
               <a:avLst/>
@@ -14595,14 +12145,14 @@
         </p:sp>
         <p:sp>
           <p:nvSpPr>
-            <p:cNvPr id="14" name="BrandDeck Icon clock"/>
+            <p:cNvPr id="14" name="BrandDeck Icon building"/>
             <p:cNvSpPr/>
             <p:nvPr/>
           </p:nvSpPr>
           <p:spPr>
             <a:xfrm>
-              <a:off x="8405614" y="3015457"/>
-              <a:ext cx="337962" cy="337962"/>
+              <a:off x="1008567" y="4381815"/>
+              <a:ext cx="331668" cy="331668"/>
             </a:xfrm>
             <a:custGeom>
               <a:avLst/>
@@ -14613,45 +12163,132 @@
               <a:pathLst>
                 <a:path w="24000" h="24000" fill="none">
                   <a:moveTo>
-                    <a:pt x="22000" y="12000"/>
+                    <a:pt x="6000" y="2000"/>
                   </a:moveTo>
+                  <a:lnTo>
+                    <a:pt x="18000" y="2000"/>
+                  </a:lnTo>
                   <a:cubicBezTo>
-                    <a:pt x="22000" y="17523"/>
-                    <a:pt x="17523" y="22000"/>
-                    <a:pt x="12000" y="22000"/>
+                    <a:pt x="19105" y="2000"/>
+                    <a:pt x="20000" y="2895"/>
+                    <a:pt x="20000" y="4000"/>
                   </a:cubicBezTo>
+                  <a:lnTo>
+                    <a:pt x="20000" y="20000"/>
+                  </a:lnTo>
                   <a:cubicBezTo>
-                    <a:pt x="6477" y="22000"/>
-                    <a:pt x="2000" y="17523"/>
-                    <a:pt x="2000" y="12000"/>
+                    <a:pt x="20000" y="21105"/>
+                    <a:pt x="19105" y="22000"/>
+                    <a:pt x="18000" y="22000"/>
                   </a:cubicBezTo>
+                  <a:lnTo>
+                    <a:pt x="6000" y="22000"/>
+                  </a:lnTo>
                   <a:cubicBezTo>
-                    <a:pt x="2000" y="6477"/>
-                    <a:pt x="6477" y="2000"/>
-                    <a:pt x="12000" y="2000"/>
+                    <a:pt x="4895" y="22000"/>
+                    <a:pt x="4000" y="21105"/>
+                    <a:pt x="4000" y="20000"/>
                   </a:cubicBezTo>
+                  <a:lnTo>
+                    <a:pt x="4000" y="4000"/>
+                  </a:lnTo>
                   <a:cubicBezTo>
-                    <a:pt x="17523" y="2000"/>
-                    <a:pt x="22000" y="6477"/>
-                    <a:pt x="22000" y="12000"/>
+                    <a:pt x="4000" y="2895"/>
+                    <a:pt x="4895" y="2000"/>
+                    <a:pt x="6000" y="2000"/>
                   </a:cubicBezTo>
                   <a:close/>
+                </a:path>
+                <a:path w="24000" h="24000" fill="none">
+                  <a:moveTo>
+                    <a:pt x="9000" y="22000"/>
+                  </a:moveTo>
+                  <a:lnTo>
+                    <a:pt x="9000" y="18000"/>
+                  </a:lnTo>
+                  <a:lnTo>
+                    <a:pt x="15000" y="18000"/>
+                  </a:lnTo>
+                  <a:lnTo>
+                    <a:pt x="15000" y="22000"/>
+                  </a:lnTo>
+                </a:path>
+                <a:path w="24000" h="24000" fill="none">
+                  <a:moveTo>
+                    <a:pt x="8000" y="6000"/>
+                  </a:moveTo>
+                  <a:lnTo>
+                    <a:pt x="8010" y="6000"/>
+                  </a:lnTo>
+                </a:path>
+                <a:path w="24000" h="24000" fill="none">
+                  <a:moveTo>
+                    <a:pt x="16000" y="6000"/>
+                  </a:moveTo>
+                  <a:lnTo>
+                    <a:pt x="16010" y="6000"/>
+                  </a:lnTo>
                 </a:path>
                 <a:path w="24000" h="24000" fill="none">
                   <a:moveTo>
                     <a:pt x="12000" y="6000"/>
                   </a:moveTo>
                   <a:lnTo>
-                    <a:pt x="12000" y="12000"/>
+                    <a:pt x="12010" y="6000"/>
                   </a:lnTo>
+                </a:path>
+                <a:path w="24000" h="24000" fill="none">
+                  <a:moveTo>
+                    <a:pt x="12000" y="10000"/>
+                  </a:moveTo>
                   <a:lnTo>
+                    <a:pt x="12010" y="10000"/>
+                  </a:lnTo>
+                </a:path>
+                <a:path w="24000" h="24000" fill="none">
+                  <a:moveTo>
+                    <a:pt x="12000" y="14000"/>
+                  </a:moveTo>
+                  <a:lnTo>
+                    <a:pt x="12010" y="14000"/>
+                  </a:lnTo>
+                </a:path>
+                <a:path w="24000" h="24000" fill="none">
+                  <a:moveTo>
+                    <a:pt x="16000" y="10000"/>
+                  </a:moveTo>
+                  <a:lnTo>
+                    <a:pt x="16010" y="10000"/>
+                  </a:lnTo>
+                </a:path>
+                <a:path w="24000" h="24000" fill="none">
+                  <a:moveTo>
                     <a:pt x="16000" y="14000"/>
+                  </a:moveTo>
+                  <a:lnTo>
+                    <a:pt x="16010" y="14000"/>
+                  </a:lnTo>
+                </a:path>
+                <a:path w="24000" h="24000" fill="none">
+                  <a:moveTo>
+                    <a:pt x="8000" y="10000"/>
+                  </a:moveTo>
+                  <a:lnTo>
+                    <a:pt x="8010" y="10000"/>
+                  </a:lnTo>
+                </a:path>
+                <a:path w="24000" h="24000" fill="none">
+                  <a:moveTo>
+                    <a:pt x="8000" y="14000"/>
+                  </a:moveTo>
+                  <a:lnTo>
+                    <a:pt x="8010" y="14000"/>
                   </a:lnTo>
                 </a:path>
               </a:pathLst>
             </a:custGeom>
             <a:noFill/>
-            <a:ln w="28163" cap="rnd">
+            <a:ln w="27639" cap="rnd">
               <a:solidFill>
                 <a:srgbClr val="FFFFFF"/>
               </a:solidFill>
@@ -14674,8 +12311,8 @@
           </p:nvSpPr>
           <p:spPr>
             <a:xfrm>
-              <a:off x="8207007" y="3639809"/>
-              <a:ext cx="3172561" cy="1019555"/>
+              <a:off x="1602207" y="4037871"/>
+              <a:ext cx="4165593" cy="1019556"/>
             </a:xfrm>
             <a:prstGeom prst="rect">
               <a:avLst/>
@@ -14683,7 +12320,7 @@
             <a:noFill/>
           </p:spPr>
           <p:txBody>
-            <a:bodyPr wrap="square" anchor="t" lIns="36576" tIns="18288" rIns="36576" bIns="18288">
+            <a:bodyPr wrap="square" anchor="ctr" lIns="36576" tIns="18288" rIns="36576" bIns="18288">
               <a:noAutofit/>
             </a:bodyPr>
             <a:lstStyle/>
@@ -14700,12 +12337,1803 @@
                   </a:solidFill>
                   <a:latin typeface="Play"/>
                 </a:rPr>
-                <a:t>За это время оценивается эффективность решения.</a:t>
+                <a:t>Ответ формируется на основе внутренних корпоративных документов.</a:t>
               </a:r>
             </a:p>
           </p:txBody>
         </p:sp>
       </p:grpSp>
+    </p:spTree>
+  </p:cSld>
+  <p:clrMapOvr>
+    <a:masterClrMapping/>
+  </p:clrMapOvr>
+</p:sld>
+</file>
+
+<file path=ppt/slides/slide5.xml><?xml version="1.0" encoding="utf-8"?>
+<p:sld xmlns:a="http://schemas.openxmlformats.org/drawingml/2006/main" xmlns:p="http://schemas.openxmlformats.org/presentationml/2006/main" xmlns:r="http://schemas.openxmlformats.org/officeDocument/2006/relationships">
+  <p:cSld>
+    <p:spTree>
+      <p:nvGrpSpPr>
+        <p:cNvPr id="1" name=""/>
+        <p:cNvGrpSpPr/>
+        <p:nvPr/>
+      </p:nvGrpSpPr>
+      <p:grpSpPr/>
+      <p:sp>
+        <p:nvSpPr>
+          <p:cNvPr id="1060" name="BrandDeck Text 1060"/>
+          <p:cNvSpPr txBox="1"/>
+          <p:nvPr>
+            <p:ph type="title"/>
+          </p:nvPr>
+        </p:nvSpPr>
+        <p:spPr>
+          <a:xfrm>
+            <a:off x="677334" y="692150"/>
+            <a:ext cx="10855854" cy="644241"/>
+          </a:xfrm>
+          <a:prstGeom prst="rect">
+            <a:avLst/>
+          </a:prstGeom>
+          <a:noFill/>
+          <a:ln>
+            <a:noFill/>
+          </a:ln>
+        </p:spPr>
+        <p:txBody>
+          <a:bodyPr anchorCtr="0" anchor="t" bIns="0" lIns="0" spcFirstLastPara="1" rIns="0" wrap="square" tIns="0">
+            <a:normAutofit/>
+          </a:bodyPr>
+          <a:lstStyle/>
+          <a:p>
+            <a:pPr indent="0" marL="0" rtl="0" algn="l">
+              <a:lnSpc>
+                <a:spcPct val="115000"/>
+              </a:lnSpc>
+              <a:spcBef>
+                <a:spcPts val="0"/>
+              </a:spcBef>
+              <a:spcAft>
+                <a:spcPts val="300"/>
+              </a:spcAft>
+              <a:buClr>
+                <a:schemeClr val="accent1"/>
+              </a:buClr>
+              <a:buSzPts val="3600"/>
+              <a:buFont typeface="Play"/>
+              <a:buNone/>
+            </a:pPr>
+            <a:r>
+              <a:rPr sz="2000">
+                <a:solidFill>
+                  <a:srgbClr val="000000"/>
+                </a:solidFill>
+              </a:rPr>
+              <a:t>Система работает внутри контура компании, не выводя документы наружу</a:t>
+            </a:r>
+            <a:endParaRPr/>
+          </a:p>
+        </p:txBody>
+      </p:sp>
+      <p:pic>
+        <p:nvPicPr>
+          <p:cNvPr id="1072" name="BrandDeck Image" descr="внутренний контур серверная"/>
+          <p:cNvPicPr>
+            <a:picLocks noChangeAspect="1"/>
+          </p:cNvPicPr>
+          <p:nvPr/>
+        </p:nvPicPr>
+        <p:blipFill>
+          <a:blip r:embed="rId3"/>
+          <a:srcRect l="5955" r="5955"/>
+          <a:stretch>
+            <a:fillRect/>
+          </a:stretch>
+        </p:blipFill>
+        <p:spPr>
+          <a:xfrm>
+            <a:off x="671514" y="1773238"/>
+            <a:ext cx="6929992" cy="4427537"/>
+          </a:xfrm>
+          <a:prstGeom prst="rect">
+            <a:avLst/>
+          </a:prstGeom>
+        </p:spPr>
+      </p:pic>
+      <p:sp>
+        <p:nvSpPr>
+          <p:cNvPr id="1069" name="Google Shape;1069;p83"/>
+          <p:cNvSpPr txBox="1"/>
+          <p:nvPr/>
+        </p:nvSpPr>
+        <p:spPr>
+          <a:xfrm>
+            <a:off x="8355728" y="627078"/>
+            <a:ext cx="3409196" cy="3951457"/>
+          </a:xfrm>
+          <a:prstGeom prst="rect">
+            <a:avLst/>
+          </a:prstGeom>
+          <a:noFill/>
+          <a:ln>
+            <a:noFill/>
+          </a:ln>
+        </p:spPr>
+        <p:txBody>
+          <a:bodyPr anchorCtr="0" anchor="t" bIns="36000" lIns="36000" spcFirstLastPara="1" rIns="36000" wrap="square" tIns="36000">
+            <a:normAutofit/>
+          </a:bodyPr>
+          <a:lstStyle/>
+          <a:p>
+            <a:pPr indent="0" lvl="0" marL="0" marR="0" rtl="0" algn="l">
+              <a:lnSpc>
+                <a:spcPct val="110000"/>
+              </a:lnSpc>
+              <a:spcBef>
+                <a:spcPts val="0"/>
+              </a:spcBef>
+              <a:spcAft>
+                <a:spcPts val="0"/>
+              </a:spcAft>
+              <a:buNone/>
+            </a:pPr>
+            <a:endParaRPr/>
+          </a:p>
+        </p:txBody>
+      </p:sp>
+      <p:cxnSp>
+        <p:nvCxnSpPr>
+          <p:cNvPr id="1070" name="Google Shape;1070;p83"/>
+          <p:cNvCxnSpPr/>
+          <p:nvPr/>
+        </p:nvCxnSpPr>
+        <p:spPr>
+          <a:xfrm flipH="1">
+            <a:off x="8111315" y="692150"/>
+            <a:ext cx="9261" cy="5508625"/>
+          </a:xfrm>
+          <a:prstGeom prst="straightConnector1">
+            <a:avLst/>
+          </a:prstGeom>
+          <a:noFill/>
+          <a:ln cap="flat" cmpd="sng" w="9525">
+            <a:solidFill>
+              <a:srgbClr val="F4F8FB"/>
+            </a:solidFill>
+            <a:prstDash val="solid"/>
+            <a:miter lim="8000"/>
+            <a:headEnd len="sm" w="sm" type="none"/>
+            <a:tailEnd len="sm" w="sm" type="none"/>
+          </a:ln>
+        </p:spPr>
+      </p:cxnSp>
+      <p:sp>
+        <p:nvSpPr>
+          <p:cNvPr id="1071" name="BrandDeck Body"/>
+          <p:cNvSpPr txBox="1"/>
+          <p:nvPr/>
+        </p:nvSpPr>
+        <p:spPr>
+          <a:xfrm>
+            <a:off x="8355728" y="1473551"/>
+            <a:ext cx="3409196" cy="3104984"/>
+          </a:xfrm>
+          <a:prstGeom prst="rect">
+            <a:avLst/>
+          </a:prstGeom>
+          <a:noFill/>
+        </p:spPr>
+        <p:txBody>
+          <a:bodyPr wrap="square" anchor="t" lIns="36576" rIns="36576" tIns="18288" bIns="18288">
+            <a:normAutofit/>
+          </a:bodyPr>
+          <a:lstStyle/>
+          <a:p>
+            <a:pPr algn="l">
+              <a:lnSpc>
+                <a:spcPct val="115000"/>
+              </a:lnSpc>
+              <a:spcBef>
+                <a:spcPts val="0"/>
+              </a:spcBef>
+              <a:spcAft>
+                <a:spcPts val="210"/>
+              </a:spcAft>
+            </a:pPr>
+            <a:r>
+              <a:rPr sz="1400">
+                <a:solidFill>
+                  <a:srgbClr val="000000"/>
+                </a:solidFill>
+                <a:latin typeface="Play"/>
+              </a:rPr>
+              <a:t>• Модель с открытыми весами работает внутри контура компании.</a:t>
+            </a:r>
+          </a:p>
+          <a:p>
+            <a:pPr algn="l">
+              <a:lnSpc>
+                <a:spcPct val="115000"/>
+              </a:lnSpc>
+              <a:spcBef>
+                <a:spcPts val="0"/>
+              </a:spcBef>
+              <a:spcAft>
+                <a:spcPts val="210"/>
+              </a:spcAft>
+            </a:pPr>
+            <a:r>
+              <a:rPr sz="1400">
+                <a:solidFill>
+                  <a:srgbClr val="000000"/>
+                </a:solidFill>
+                <a:latin typeface="Play"/>
+              </a:rPr>
+              <a:t>• Документы не покидают периметр и не уходят наружу.</a:t>
+            </a:r>
+          </a:p>
+          <a:p>
+            <a:pPr algn="l">
+              <a:lnSpc>
+                <a:spcPct val="115000"/>
+              </a:lnSpc>
+              <a:spcBef>
+                <a:spcPts val="0"/>
+              </a:spcBef>
+              <a:spcAft>
+                <a:spcPts val="210"/>
+              </a:spcAft>
+            </a:pPr>
+            <a:r>
+              <a:rPr sz="1400">
+                <a:solidFill>
+                  <a:srgbClr val="000000"/>
+                </a:solidFill>
+                <a:latin typeface="Play"/>
+              </a:rPr>
+              <a:t>• Обработка запросов происходит локально без передачи данных.</a:t>
+            </a:r>
+          </a:p>
+        </p:txBody>
+      </p:sp>
+    </p:spTree>
+  </p:cSld>
+  <p:clrMapOvr>
+    <a:masterClrMapping/>
+  </p:clrMapOvr>
+</p:sld>
+</file>
+
+<file path=ppt/slides/slide6.xml><?xml version="1.0" encoding="utf-8"?>
+<p:sld xmlns:a="http://schemas.openxmlformats.org/drawingml/2006/main" xmlns:p="http://schemas.openxmlformats.org/presentationml/2006/main" xmlns:r="http://schemas.openxmlformats.org/officeDocument/2006/relationships">
+  <p:cSld>
+    <p:spTree>
+      <p:nvGrpSpPr>
+        <p:cNvPr id="1" name=""/>
+        <p:cNvGrpSpPr/>
+        <p:nvPr/>
+      </p:nvGrpSpPr>
+      <p:grpSpPr/>
+      <p:sp>
+        <p:nvSpPr>
+          <p:cNvPr id="3" name="BrandDeck Text 3"/>
+          <p:cNvSpPr>
+            <a:spLocks noGrp="1"/>
+          </p:cNvSpPr>
+          <p:nvPr>
+            <p:ph type="title"/>
+          </p:nvPr>
+        </p:nvSpPr>
+        <p:spPr>
+          <a:xfrm>
+            <a:off x="677334" y="692150"/>
+            <a:ext cx="10855854" cy="644241"/>
+          </a:xfrm>
+        </p:spPr>
+        <p:txBody>
+          <a:bodyPr wrap="square" anchor="t">
+            <a:normAutofit/>
+          </a:bodyPr>
+          <a:lstStyle/>
+          <a:p>
+            <a:pPr algn="l">
+              <a:lnSpc>
+                <a:spcPct val="115000"/>
+              </a:lnSpc>
+              <a:spcBef>
+                <a:spcPts val="0"/>
+              </a:spcBef>
+              <a:spcAft>
+                <a:spcPts val="240"/>
+              </a:spcAft>
+            </a:pPr>
+            <a:r>
+              <a:rPr sz="1600">
+                <a:solidFill>
+                  <a:srgbClr val="000000"/>
+                </a:solidFill>
+              </a:rPr>
+              <a:t>При отсутствии подтвержденного ответа вопрос автоматически уходит специалисту с контекстом</a:t>
+            </a:r>
+          </a:p>
+        </p:txBody>
+      </p:sp>
+      <p:grpSp>
+        <p:nvGrpSpPr>
+          <p:cNvPr id="2" name="BrandDeck Diagram process" descr="process: Запрос сотрудника Отправляется в ИИ-помощник; Отсутствие ответа Нет подтверждённого факта в базе; Эскалация Переход к специалисту с контекстом"/>
+          <p:cNvGrpSpPr/>
+          <p:nvPr/>
+        </p:nvGrpSpPr>
+        <p:grpSpPr>
+          <a:xfrm>
+            <a:off x="658813" y="2716779"/>
+            <a:ext cx="10874374" cy="1964944"/>
+            <a:chOff x="658813" y="2716779"/>
+            <a:chExt cx="10874374" cy="1964944"/>
+          </a:xfrm>
+        </p:grpSpPr>
+        <p:sp>
+          <p:nvSpPr>
+            <p:cNvPr id="4" name="BrandDeck Diagram Step 1"/>
+            <p:cNvSpPr/>
+            <p:nvPr/>
+          </p:nvSpPr>
+          <p:spPr>
+            <a:xfrm>
+              <a:off x="658813" y="2716779"/>
+              <a:ext cx="3791822" cy="822960"/>
+            </a:xfrm>
+            <a:prstGeom prst="homePlate">
+              <a:avLst>
+                <a:gd name="adj" fmla="val 36000"/>
+              </a:avLst>
+            </a:prstGeom>
+            <a:solidFill>
+              <a:srgbClr val="006DEB"/>
+            </a:solidFill>
+            <a:ln>
+              <a:noFill/>
+            </a:ln>
+          </p:spPr>
+          <p:txBody>
+            <a:bodyPr rtlCol="0" anchor="ctr" wrap="square" tIns="18288" rIns="351129" bIns="18288">
+              <a:noAutofit/>
+            </a:bodyPr>
+            <a:lstStyle/>
+            <a:p>
+              <a:pPr algn="ctr">
+                <a:lnSpc>
+                  <a:spcPct val="110000"/>
+                </a:lnSpc>
+              </a:pPr>
+              <a:r>
+                <a:rPr sz="1600" b="1">
+                  <a:solidFill>
+                    <a:srgbClr val="FFFFFF"/>
+                  </a:solidFill>
+                  <a:latin typeface="Play"/>
+                </a:rPr>
+                <a:t>01</a:t>
+              </a:r>
+            </a:p>
+          </p:txBody>
+        </p:sp>
+        <p:sp>
+          <p:nvSpPr>
+            <p:cNvPr id="5" name="BrandDeck Diagram Detail Card 1"/>
+            <p:cNvSpPr/>
+            <p:nvPr/>
+          </p:nvSpPr>
+          <p:spPr>
+            <a:xfrm>
+              <a:off x="695389" y="3649467"/>
+              <a:ext cx="3551639" cy="1032256"/>
+            </a:xfrm>
+            <a:prstGeom prst="roundRect">
+              <a:avLst>
+                <a:gd name="adj" fmla="val 12000"/>
+              </a:avLst>
+            </a:prstGeom>
+            <a:solidFill>
+              <a:srgbClr val="EDF5FF"/>
+            </a:solidFill>
+            <a:ln>
+              <a:noFill/>
+            </a:ln>
+          </p:spPr>
+          <p:txBody>
+            <a:bodyPr rtlCol="0" anchor="ctr"/>
+            <a:lstStyle/>
+            <a:p>
+              <a:pPr algn="ctr"/>
+            </a:p>
+          </p:txBody>
+        </p:sp>
+        <p:sp>
+          <p:nvSpPr>
+            <p:cNvPr id="6" name="BrandDeck Diagram Text 1"/>
+            <p:cNvSpPr txBox="1"/>
+            <p:nvPr/>
+          </p:nvSpPr>
+          <p:spPr>
+            <a:xfrm>
+              <a:off x="768541" y="3722619"/>
+              <a:ext cx="3405335" cy="885951"/>
+            </a:xfrm>
+            <a:prstGeom prst="rect">
+              <a:avLst/>
+            </a:prstGeom>
+            <a:noFill/>
+          </p:spPr>
+          <p:txBody>
+            <a:bodyPr wrap="square" anchor="ctr" lIns="36576" tIns="18288" rIns="36576" bIns="18288">
+              <a:noAutofit/>
+            </a:bodyPr>
+            <a:lstStyle/>
+            <a:p>
+              <a:pPr algn="l">
+                <a:lnSpc>
+                  <a:spcPct val="110000"/>
+                </a:lnSpc>
+              </a:pPr>
+              <a:r>
+                <a:rPr sz="1600" b="1">
+                  <a:solidFill>
+                    <a:srgbClr val="000000"/>
+                  </a:solidFill>
+                  <a:latin typeface="Play"/>
+                </a:rPr>
+                <a:t>Запрос сотрудника</a:t>
+              </a:r>
+            </a:p>
+            <a:p>
+              <a:pPr algn="l">
+                <a:lnSpc>
+                  <a:spcPct val="110000"/>
+                </a:lnSpc>
+                <a:spcBef>
+                  <a:spcPts val="400"/>
+                </a:spcBef>
+              </a:pPr>
+              <a:r>
+                <a:rPr sz="1600" b="0">
+                  <a:solidFill>
+                    <a:srgbClr val="000000"/>
+                  </a:solidFill>
+                  <a:latin typeface="Play"/>
+                </a:rPr>
+                <a:t>Отправляется в ИИ-помощник</a:t>
+              </a:r>
+            </a:p>
+          </p:txBody>
+        </p:sp>
+        <p:sp>
+          <p:nvSpPr>
+            <p:cNvPr id="7" name="BrandDeck Diagram Step 2"/>
+            <p:cNvSpPr/>
+            <p:nvPr/>
+          </p:nvSpPr>
+          <p:spPr>
+            <a:xfrm>
+              <a:off x="4200089" y="2716779"/>
+              <a:ext cx="3791822" cy="822960"/>
+            </a:xfrm>
+            <a:prstGeom prst="chevron">
+              <a:avLst>
+                <a:gd name="adj" fmla="val 36000"/>
+              </a:avLst>
+            </a:prstGeom>
+            <a:solidFill>
+              <a:srgbClr val="2683EE"/>
+            </a:solidFill>
+            <a:ln>
+              <a:noFill/>
+            </a:ln>
+          </p:spPr>
+          <p:txBody>
+            <a:bodyPr rtlCol="0" anchor="ctr" wrap="square" lIns="351129" tIns="18288" rIns="351129" bIns="18288">
+              <a:noAutofit/>
+            </a:bodyPr>
+            <a:lstStyle/>
+            <a:p>
+              <a:pPr algn="ctr">
+                <a:lnSpc>
+                  <a:spcPct val="110000"/>
+                </a:lnSpc>
+              </a:pPr>
+              <a:r>
+                <a:rPr sz="1600" b="1">
+                  <a:solidFill>
+                    <a:srgbClr val="000000"/>
+                  </a:solidFill>
+                  <a:latin typeface="Play"/>
+                </a:rPr>
+                <a:t>02</a:t>
+              </a:r>
+            </a:p>
+          </p:txBody>
+        </p:sp>
+        <p:sp>
+          <p:nvSpPr>
+            <p:cNvPr id="8" name="BrandDeck Diagram Detail Card 2"/>
+            <p:cNvSpPr/>
+            <p:nvPr/>
+          </p:nvSpPr>
+          <p:spPr>
+            <a:xfrm>
+              <a:off x="4320180" y="3649467"/>
+              <a:ext cx="3551639" cy="1032256"/>
+            </a:xfrm>
+            <a:prstGeom prst="roundRect">
+              <a:avLst>
+                <a:gd name="adj" fmla="val 12000"/>
+              </a:avLst>
+            </a:prstGeom>
+            <a:solidFill>
+              <a:srgbClr val="EDF5FF"/>
+            </a:solidFill>
+            <a:ln>
+              <a:noFill/>
+            </a:ln>
+          </p:spPr>
+          <p:txBody>
+            <a:bodyPr rtlCol="0" anchor="ctr"/>
+            <a:lstStyle/>
+            <a:p>
+              <a:pPr algn="ctr"/>
+            </a:p>
+          </p:txBody>
+        </p:sp>
+        <p:sp>
+          <p:nvSpPr>
+            <p:cNvPr id="9" name="BrandDeck Diagram Text 2"/>
+            <p:cNvSpPr txBox="1"/>
+            <p:nvPr/>
+          </p:nvSpPr>
+          <p:spPr>
+            <a:xfrm>
+              <a:off x="4393332" y="3722619"/>
+              <a:ext cx="3405335" cy="885951"/>
+            </a:xfrm>
+            <a:prstGeom prst="rect">
+              <a:avLst/>
+            </a:prstGeom>
+            <a:noFill/>
+          </p:spPr>
+          <p:txBody>
+            <a:bodyPr wrap="square" anchor="ctr" lIns="36576" tIns="18288" rIns="36576" bIns="18288">
+              <a:noAutofit/>
+            </a:bodyPr>
+            <a:lstStyle/>
+            <a:p>
+              <a:pPr algn="l">
+                <a:lnSpc>
+                  <a:spcPct val="110000"/>
+                </a:lnSpc>
+              </a:pPr>
+              <a:r>
+                <a:rPr sz="1400" b="1">
+                  <a:solidFill>
+                    <a:srgbClr val="000000"/>
+                  </a:solidFill>
+                  <a:latin typeface="Play"/>
+                </a:rPr>
+                <a:t>Отсутствие ответа</a:t>
+              </a:r>
+            </a:p>
+            <a:p>
+              <a:pPr algn="l">
+                <a:lnSpc>
+                  <a:spcPct val="110000"/>
+                </a:lnSpc>
+                <a:spcBef>
+                  <a:spcPts val="350"/>
+                </a:spcBef>
+              </a:pPr>
+              <a:r>
+                <a:rPr sz="1400" b="0">
+                  <a:solidFill>
+                    <a:srgbClr val="000000"/>
+                  </a:solidFill>
+                  <a:latin typeface="Play"/>
+                </a:rPr>
+                <a:t>Нет подтверждённого факта в базе</a:t>
+              </a:r>
+            </a:p>
+          </p:txBody>
+        </p:sp>
+        <p:sp>
+          <p:nvSpPr>
+            <p:cNvPr id="10" name="BrandDeck Diagram Step 3"/>
+            <p:cNvSpPr/>
+            <p:nvPr/>
+          </p:nvSpPr>
+          <p:spPr>
+            <a:xfrm>
+              <a:off x="7741365" y="2716779"/>
+              <a:ext cx="3791822" cy="822960"/>
+            </a:xfrm>
+            <a:prstGeom prst="chevron">
+              <a:avLst>
+                <a:gd name="adj" fmla="val 36000"/>
+              </a:avLst>
+            </a:prstGeom>
+            <a:solidFill>
+              <a:srgbClr val="4C99F1"/>
+            </a:solidFill>
+            <a:ln>
+              <a:noFill/>
+            </a:ln>
+          </p:spPr>
+          <p:txBody>
+            <a:bodyPr rtlCol="0" anchor="ctr" wrap="square" lIns="351129" tIns="18288" rIns="351129" bIns="18288">
+              <a:noAutofit/>
+            </a:bodyPr>
+            <a:lstStyle/>
+            <a:p>
+              <a:pPr algn="ctr">
+                <a:lnSpc>
+                  <a:spcPct val="110000"/>
+                </a:lnSpc>
+              </a:pPr>
+              <a:r>
+                <a:rPr sz="1600" b="1">
+                  <a:solidFill>
+                    <a:srgbClr val="000000"/>
+                  </a:solidFill>
+                  <a:latin typeface="Play"/>
+                </a:rPr>
+                <a:t>03</a:t>
+              </a:r>
+            </a:p>
+          </p:txBody>
+        </p:sp>
+        <p:sp>
+          <p:nvSpPr>
+            <p:cNvPr id="11" name="BrandDeck Diagram Detail Card 3"/>
+            <p:cNvSpPr/>
+            <p:nvPr/>
+          </p:nvSpPr>
+          <p:spPr>
+            <a:xfrm>
+              <a:off x="7944972" y="3649467"/>
+              <a:ext cx="3551639" cy="1032256"/>
+            </a:xfrm>
+            <a:prstGeom prst="roundRect">
+              <a:avLst>
+                <a:gd name="adj" fmla="val 12000"/>
+              </a:avLst>
+            </a:prstGeom>
+            <a:solidFill>
+              <a:srgbClr val="EDF5FF"/>
+            </a:solidFill>
+            <a:ln>
+              <a:noFill/>
+            </a:ln>
+          </p:spPr>
+          <p:txBody>
+            <a:bodyPr rtlCol="0" anchor="ctr"/>
+            <a:lstStyle/>
+            <a:p>
+              <a:pPr algn="ctr"/>
+            </a:p>
+          </p:txBody>
+        </p:sp>
+        <p:sp>
+          <p:nvSpPr>
+            <p:cNvPr id="12" name="BrandDeck Diagram Text 3"/>
+            <p:cNvSpPr txBox="1"/>
+            <p:nvPr/>
+          </p:nvSpPr>
+          <p:spPr>
+            <a:xfrm>
+              <a:off x="8018124" y="3722619"/>
+              <a:ext cx="3405335" cy="885951"/>
+            </a:xfrm>
+            <a:prstGeom prst="rect">
+              <a:avLst/>
+            </a:prstGeom>
+            <a:noFill/>
+          </p:spPr>
+          <p:txBody>
+            <a:bodyPr wrap="square" anchor="ctr" lIns="36576" tIns="18288" rIns="36576" bIns="18288">
+              <a:noAutofit/>
+            </a:bodyPr>
+            <a:lstStyle/>
+            <a:p>
+              <a:pPr algn="l">
+                <a:lnSpc>
+                  <a:spcPct val="110000"/>
+                </a:lnSpc>
+              </a:pPr>
+              <a:r>
+                <a:rPr sz="1400" b="1">
+                  <a:solidFill>
+                    <a:srgbClr val="000000"/>
+                  </a:solidFill>
+                  <a:latin typeface="Play"/>
+                </a:rPr>
+                <a:t>Эскалация</a:t>
+              </a:r>
+            </a:p>
+            <a:p>
+              <a:pPr algn="l">
+                <a:lnSpc>
+                  <a:spcPct val="110000"/>
+                </a:lnSpc>
+                <a:spcBef>
+                  <a:spcPts val="350"/>
+                </a:spcBef>
+              </a:pPr>
+              <a:r>
+                <a:rPr sz="1400" b="0">
+                  <a:solidFill>
+                    <a:srgbClr val="000000"/>
+                  </a:solidFill>
+                  <a:latin typeface="Play"/>
+                </a:rPr>
+                <a:t>Переход к специалисту с контекстом</a:t>
+              </a:r>
+            </a:p>
+          </p:txBody>
+        </p:sp>
+      </p:grpSp>
+    </p:spTree>
+  </p:cSld>
+  <p:clrMapOvr>
+    <a:masterClrMapping/>
+  </p:clrMapOvr>
+</p:sld>
+</file>
+
+<file path=ppt/slides/slide7.xml><?xml version="1.0" encoding="utf-8"?>
+<p:sld xmlns:a="http://schemas.openxmlformats.org/drawingml/2006/main" xmlns:p="http://schemas.openxmlformats.org/presentationml/2006/main" xmlns:r="http://schemas.openxmlformats.org/officeDocument/2006/relationships">
+  <p:cSld>
+    <p:spTree>
+      <p:nvGrpSpPr>
+        <p:cNvPr id="1" name=""/>
+        <p:cNvGrpSpPr/>
+        <p:nvPr/>
+      </p:nvGrpSpPr>
+      <p:grpSpPr/>
+      <p:sp>
+        <p:nvSpPr>
+          <p:cNvPr id="3" name="BrandDeck Text 3"/>
+          <p:cNvSpPr>
+            <a:spLocks noGrp="1"/>
+          </p:cNvSpPr>
+          <p:nvPr>
+            <p:ph type="title"/>
+          </p:nvPr>
+        </p:nvSpPr>
+        <p:spPr>
+          <a:xfrm>
+            <a:off x="677334" y="692150"/>
+            <a:ext cx="10855854" cy="644241"/>
+          </a:xfrm>
+        </p:spPr>
+        <p:txBody>
+          <a:bodyPr wrap="square" anchor="t">
+            <a:normAutofit/>
+          </a:bodyPr>
+          <a:lstStyle/>
+          <a:p>
+            <a:pPr algn="l">
+              <a:lnSpc>
+                <a:spcPct val="115000"/>
+              </a:lnSpc>
+              <a:spcBef>
+                <a:spcPts val="0"/>
+              </a:spcBef>
+              <a:spcAft>
+                <a:spcPts val="240"/>
+              </a:spcAft>
+            </a:pPr>
+            <a:r>
+              <a:rPr sz="1600">
+                <a:solidFill>
+                  <a:srgbClr val="000000"/>
+                </a:solidFill>
+              </a:rPr>
+              <a:t>Снижение времени поиска ответа и увеличение доли обращений, закрытых без участия специалиста</a:t>
+            </a:r>
+          </a:p>
+        </p:txBody>
+      </p:sp>
+      <p:grpSp>
+        <p:nvGrpSpPr>
+          <p:cNvPr id="2" name="BrandDeck Diagram pyramid" descr="pyramid: Критерии успеха Снижение времени поиска и рост автозакрытия; Время поиска Метрика времени ответа сотрудника; Доля автозакрытия Процент вопросов без участия специалиста"/>
+          <p:cNvGrpSpPr/>
+          <p:nvPr/>
+        </p:nvGrpSpPr>
+        <p:grpSpPr>
+          <a:xfrm>
+            <a:off x="675958" y="2135749"/>
+            <a:ext cx="10857230" cy="3511295"/>
+            <a:chOff x="675958" y="2135749"/>
+            <a:chExt cx="10857230" cy="3511295"/>
+          </a:xfrm>
+        </p:grpSpPr>
+        <p:sp>
+          <p:nvSpPr>
+            <p:cNvPr id="4" name="BrandDeck Diagram Level 1"/>
+            <p:cNvSpPr/>
+            <p:nvPr/>
+          </p:nvSpPr>
+          <p:spPr>
+            <a:xfrm>
+              <a:off x="2161858" y="2135749"/>
+              <a:ext cx="1451609" cy="1133856"/>
+            </a:xfrm>
+            <a:custGeom>
+              <a:avLst/>
+              <a:gdLst/>
+              <a:ahLst/>
+              <a:cxnLst/>
+              <a:rect l="l" t="t" r="r" b="b"/>
+              <a:pathLst>
+                <a:path w="1587" h="1240" stroke="0">
+                  <a:moveTo>
+                    <a:pt x="769" y="0"/>
+                  </a:moveTo>
+                  <a:lnTo>
+                    <a:pt x="819" y="0"/>
+                  </a:lnTo>
+                  <a:lnTo>
+                    <a:pt x="1587" y="1240"/>
+                  </a:lnTo>
+                  <a:lnTo>
+                    <a:pt x="0" y="1240"/>
+                  </a:lnTo>
+                  <a:close/>
+                </a:path>
+              </a:pathLst>
+            </a:custGeom>
+            <a:solidFill>
+              <a:srgbClr val="006DEB"/>
+            </a:solidFill>
+            <a:ln w="0">
+              <a:noFill/>
+            </a:ln>
+          </p:spPr>
+          <p:txBody>
+            <a:bodyPr rtlCol="0" anchor="b" wrap="square" lIns="18288" tIns="0" rIns="18288" bIns="73152">
+              <a:noAutofit/>
+            </a:bodyPr>
+            <a:lstStyle/>
+            <a:p>
+              <a:pPr algn="ctr">
+                <a:lnSpc>
+                  <a:spcPct val="110000"/>
+                </a:lnSpc>
+              </a:pPr>
+              <a:r>
+                <a:rPr sz="1400" b="1">
+                  <a:solidFill>
+                    <a:srgbClr val="FFFFFF"/>
+                  </a:solidFill>
+                  <a:latin typeface="Play"/>
+                </a:rPr>
+                <a:t>01</a:t>
+              </a:r>
+            </a:p>
+          </p:txBody>
+        </p:sp>
+        <p:sp>
+          <p:nvSpPr>
+            <p:cNvPr id="5" name="BrandDeck Diagram Text 1"/>
+            <p:cNvSpPr txBox="1"/>
+            <p:nvPr/>
+          </p:nvSpPr>
+          <p:spPr>
+            <a:xfrm>
+              <a:off x="5390833" y="2135749"/>
+              <a:ext cx="6142355" cy="1133856"/>
+            </a:xfrm>
+            <a:prstGeom prst="rect">
+              <a:avLst/>
+            </a:prstGeom>
+            <a:noFill/>
+          </p:spPr>
+          <p:txBody>
+            <a:bodyPr wrap="square" anchor="ctr" lIns="36576" tIns="18288" rIns="36576" bIns="18288">
+              <a:noAutofit/>
+            </a:bodyPr>
+            <a:lstStyle/>
+            <a:p>
+              <a:pPr algn="l">
+                <a:lnSpc>
+                  <a:spcPct val="110000"/>
+                </a:lnSpc>
+              </a:pPr>
+              <a:r>
+                <a:rPr sz="1600" b="1">
+                  <a:solidFill>
+                    <a:srgbClr val="000000"/>
+                  </a:solidFill>
+                  <a:latin typeface="Play"/>
+                </a:rPr>
+                <a:t>Критерии успеха</a:t>
+              </a:r>
+            </a:p>
+            <a:p>
+              <a:pPr algn="l">
+                <a:lnSpc>
+                  <a:spcPct val="110000"/>
+                </a:lnSpc>
+                <a:spcBef>
+                  <a:spcPts val="400"/>
+                </a:spcBef>
+              </a:pPr>
+              <a:r>
+                <a:rPr sz="1600" b="0">
+                  <a:solidFill>
+                    <a:srgbClr val="000000"/>
+                  </a:solidFill>
+                  <a:latin typeface="Play"/>
+                </a:rPr>
+                <a:t>Снижение времени поиска и рост автозакрытия</a:t>
+              </a:r>
+            </a:p>
+          </p:txBody>
+        </p:sp>
+        <p:sp>
+          <p:nvSpPr>
+            <p:cNvPr id="6" name="BrandDeck Diagram Level 2"/>
+            <p:cNvSpPr/>
+            <p:nvPr/>
+          </p:nvSpPr>
+          <p:spPr>
+            <a:xfrm>
+              <a:off x="1418908" y="3324469"/>
+              <a:ext cx="2937510" cy="1133856"/>
+            </a:xfrm>
+            <a:custGeom>
+              <a:avLst/>
+              <a:gdLst/>
+              <a:ahLst/>
+              <a:cxnLst/>
+              <a:rect l="l" t="t" r="r" b="b"/>
+              <a:pathLst>
+                <a:path w="3213" h="1240" stroke="0">
+                  <a:moveTo>
+                    <a:pt x="775" y="0"/>
+                  </a:moveTo>
+                  <a:lnTo>
+                    <a:pt x="2438" y="0"/>
+                  </a:lnTo>
+                  <a:lnTo>
+                    <a:pt x="3213" y="1240"/>
+                  </a:lnTo>
+                  <a:lnTo>
+                    <a:pt x="0" y="1240"/>
+                  </a:lnTo>
+                  <a:close/>
+                </a:path>
+              </a:pathLst>
+            </a:custGeom>
+            <a:solidFill>
+              <a:srgbClr val="4092F0"/>
+            </a:solidFill>
+            <a:ln w="0">
+              <a:noFill/>
+            </a:ln>
+          </p:spPr>
+          <p:txBody>
+            <a:bodyPr rtlCol="0" anchor="ctr" wrap="square" lIns="18288" tIns="0" rIns="18288" bIns="0">
+              <a:noAutofit/>
+            </a:bodyPr>
+            <a:lstStyle/>
+            <a:p>
+              <a:pPr algn="ctr">
+                <a:lnSpc>
+                  <a:spcPct val="110000"/>
+                </a:lnSpc>
+              </a:pPr>
+              <a:r>
+                <a:rPr sz="1400" b="1">
+                  <a:solidFill>
+                    <a:srgbClr val="000000"/>
+                  </a:solidFill>
+                  <a:latin typeface="Play"/>
+                </a:rPr>
+                <a:t>02</a:t>
+              </a:r>
+            </a:p>
+          </p:txBody>
+        </p:sp>
+        <p:sp>
+          <p:nvSpPr>
+            <p:cNvPr id="7" name="BrandDeck Diagram Text 2"/>
+            <p:cNvSpPr txBox="1"/>
+            <p:nvPr/>
+          </p:nvSpPr>
+          <p:spPr>
+            <a:xfrm>
+              <a:off x="5390833" y="3324469"/>
+              <a:ext cx="6142355" cy="1133856"/>
+            </a:xfrm>
+            <a:prstGeom prst="rect">
+              <a:avLst/>
+            </a:prstGeom>
+            <a:noFill/>
+          </p:spPr>
+          <p:txBody>
+            <a:bodyPr wrap="square" anchor="ctr" lIns="36576" tIns="18288" rIns="36576" bIns="18288">
+              <a:noAutofit/>
+            </a:bodyPr>
+            <a:lstStyle/>
+            <a:p>
+              <a:pPr algn="l">
+                <a:lnSpc>
+                  <a:spcPct val="110000"/>
+                </a:lnSpc>
+              </a:pPr>
+              <a:r>
+                <a:rPr sz="1600" b="1">
+                  <a:solidFill>
+                    <a:srgbClr val="000000"/>
+                  </a:solidFill>
+                  <a:latin typeface="Play"/>
+                </a:rPr>
+                <a:t>Время поиска</a:t>
+              </a:r>
+            </a:p>
+            <a:p>
+              <a:pPr algn="l">
+                <a:lnSpc>
+                  <a:spcPct val="110000"/>
+                </a:lnSpc>
+                <a:spcBef>
+                  <a:spcPts val="400"/>
+                </a:spcBef>
+              </a:pPr>
+              <a:r>
+                <a:rPr sz="1600" b="0">
+                  <a:solidFill>
+                    <a:srgbClr val="000000"/>
+                  </a:solidFill>
+                  <a:latin typeface="Play"/>
+                </a:rPr>
+                <a:t>Метрика времени ответа сотрудника</a:t>
+              </a:r>
+            </a:p>
+          </p:txBody>
+        </p:sp>
+        <p:sp>
+          <p:nvSpPr>
+            <p:cNvPr id="8" name="BrandDeck Diagram Level 3"/>
+            <p:cNvSpPr/>
+            <p:nvPr/>
+          </p:nvSpPr>
+          <p:spPr>
+            <a:xfrm>
+              <a:off x="675958" y="4513189"/>
+              <a:ext cx="4423409" cy="1133855"/>
+            </a:xfrm>
+            <a:custGeom>
+              <a:avLst/>
+              <a:gdLst/>
+              <a:ahLst/>
+              <a:cxnLst/>
+              <a:rect l="l" t="t" r="r" b="b"/>
+              <a:pathLst>
+                <a:path w="4837" h="1240" stroke="0">
+                  <a:moveTo>
+                    <a:pt x="775" y="0"/>
+                  </a:moveTo>
+                  <a:lnTo>
+                    <a:pt x="4062" y="0"/>
+                  </a:lnTo>
+                  <a:lnTo>
+                    <a:pt x="4837" y="1240"/>
+                  </a:lnTo>
+                  <a:lnTo>
+                    <a:pt x="0" y="1240"/>
+                  </a:lnTo>
+                  <a:close/>
+                </a:path>
+              </a:pathLst>
+            </a:custGeom>
+            <a:solidFill>
+              <a:srgbClr val="80B6F5"/>
+            </a:solidFill>
+            <a:ln w="0">
+              <a:noFill/>
+            </a:ln>
+          </p:spPr>
+          <p:txBody>
+            <a:bodyPr rtlCol="0" anchor="ctr" wrap="square" lIns="18288" tIns="0" rIns="18288" bIns="0">
+              <a:noAutofit/>
+            </a:bodyPr>
+            <a:lstStyle/>
+            <a:p>
+              <a:pPr algn="ctr">
+                <a:lnSpc>
+                  <a:spcPct val="110000"/>
+                </a:lnSpc>
+              </a:pPr>
+              <a:r>
+                <a:rPr sz="1400" b="1">
+                  <a:solidFill>
+                    <a:srgbClr val="000000"/>
+                  </a:solidFill>
+                  <a:latin typeface="Play"/>
+                </a:rPr>
+                <a:t>03</a:t>
+              </a:r>
+            </a:p>
+          </p:txBody>
+        </p:sp>
+        <p:sp>
+          <p:nvSpPr>
+            <p:cNvPr id="9" name="BrandDeck Diagram Text 3"/>
+            <p:cNvSpPr txBox="1"/>
+            <p:nvPr/>
+          </p:nvSpPr>
+          <p:spPr>
+            <a:xfrm>
+              <a:off x="5390833" y="4513189"/>
+              <a:ext cx="6142355" cy="1133855"/>
+            </a:xfrm>
+            <a:prstGeom prst="rect">
+              <a:avLst/>
+            </a:prstGeom>
+            <a:noFill/>
+          </p:spPr>
+          <p:txBody>
+            <a:bodyPr wrap="square" anchor="ctr" lIns="36576" tIns="18288" rIns="36576" bIns="18288">
+              <a:noAutofit/>
+            </a:bodyPr>
+            <a:lstStyle/>
+            <a:p>
+              <a:pPr algn="l">
+                <a:lnSpc>
+                  <a:spcPct val="110000"/>
+                </a:lnSpc>
+              </a:pPr>
+              <a:r>
+                <a:rPr sz="1600" b="1">
+                  <a:solidFill>
+                    <a:srgbClr val="000000"/>
+                  </a:solidFill>
+                  <a:latin typeface="Play"/>
+                </a:rPr>
+                <a:t>Доля автозакрытия</a:t>
+              </a:r>
+            </a:p>
+            <a:p>
+              <a:pPr algn="l">
+                <a:lnSpc>
+                  <a:spcPct val="110000"/>
+                </a:lnSpc>
+                <a:spcBef>
+                  <a:spcPts val="400"/>
+                </a:spcBef>
+              </a:pPr>
+              <a:r>
+                <a:rPr sz="1600" b="0">
+                  <a:solidFill>
+                    <a:srgbClr val="000000"/>
+                  </a:solidFill>
+                  <a:latin typeface="Play"/>
+                </a:rPr>
+                <a:t>Процент вопросов без участия специалиста</a:t>
+              </a:r>
+            </a:p>
+          </p:txBody>
+        </p:sp>
+      </p:grpSp>
+    </p:spTree>
+  </p:cSld>
+  <p:clrMapOvr>
+    <a:masterClrMapping/>
+  </p:clrMapOvr>
+</p:sld>
+</file>
+
+<file path=ppt/slides/slide8.xml><?xml version="1.0" encoding="utf-8"?>
+<p:sld xmlns:a="http://schemas.openxmlformats.org/drawingml/2006/main" xmlns:p="http://schemas.openxmlformats.org/presentationml/2006/main" xmlns:r="http://schemas.openxmlformats.org/officeDocument/2006/relationships">
+  <p:cSld>
+    <p:spTree>
+      <p:nvGrpSpPr>
+        <p:cNvPr id="1" name=""/>
+        <p:cNvGrpSpPr/>
+        <p:nvPr/>
+      </p:nvGrpSpPr>
+      <p:grpSpPr/>
+      <p:sp>
+        <p:nvSpPr>
+          <p:cNvPr id="3" name="BrandDeck Text 3"/>
+          <p:cNvSpPr>
+            <a:spLocks noGrp="1"/>
+          </p:cNvSpPr>
+          <p:nvPr>
+            <p:ph type="title"/>
+          </p:nvPr>
+        </p:nvSpPr>
+        <p:spPr>
+          <a:xfrm>
+            <a:off x="677334" y="692150"/>
+            <a:ext cx="10855854" cy="644241"/>
+          </a:xfrm>
+        </p:spPr>
+        <p:txBody>
+          <a:bodyPr wrap="square" anchor="t">
+            <a:normAutofit/>
+          </a:bodyPr>
+          <a:lstStyle/>
+          <a:p>
+            <a:pPr algn="l">
+              <a:lnSpc>
+                <a:spcPct val="115000"/>
+              </a:lnSpc>
+              <a:spcBef>
+                <a:spcPts val="0"/>
+              </a:spcBef>
+              <a:spcAft>
+                <a:spcPts val="300"/>
+              </a:spcAft>
+            </a:pPr>
+            <a:r>
+              <a:rPr sz="2000">
+                <a:solidFill>
+                  <a:srgbClr val="000000"/>
+                </a:solidFill>
+              </a:rPr>
+              <a:t>В пилоте участвуют 2 подразделения, 150 сотрудников и 6 недель работы</a:t>
+            </a:r>
+          </a:p>
+        </p:txBody>
+      </p:sp>
+      <p:grpSp>
+        <p:nvGrpSpPr>
+          <p:cNvPr id="2" name="BrandDeck Diagram pyramid" descr="pyramid: 6 недель Длительность пилотного запуска; 150 сотрудников Всего участников пилота; 2 подразделения Охват пилотной группы"/>
+          <p:cNvGrpSpPr/>
+          <p:nvPr/>
+        </p:nvGrpSpPr>
+        <p:grpSpPr>
+          <a:xfrm>
+            <a:off x="675958" y="2135749"/>
+            <a:ext cx="10857230" cy="3511295"/>
+            <a:chOff x="675958" y="2135749"/>
+            <a:chExt cx="10857230" cy="3511295"/>
+          </a:xfrm>
+        </p:grpSpPr>
+        <p:sp>
+          <p:nvSpPr>
+            <p:cNvPr id="4" name="BrandDeck Diagram Level 1"/>
+            <p:cNvSpPr/>
+            <p:nvPr/>
+          </p:nvSpPr>
+          <p:spPr>
+            <a:xfrm>
+              <a:off x="2161858" y="2135749"/>
+              <a:ext cx="1451609" cy="1133856"/>
+            </a:xfrm>
+            <a:custGeom>
+              <a:avLst/>
+              <a:gdLst/>
+              <a:ahLst/>
+              <a:cxnLst/>
+              <a:rect l="l" t="t" r="r" b="b"/>
+              <a:pathLst>
+                <a:path w="1587" h="1240" stroke="0">
+                  <a:moveTo>
+                    <a:pt x="769" y="0"/>
+                  </a:moveTo>
+                  <a:lnTo>
+                    <a:pt x="819" y="0"/>
+                  </a:lnTo>
+                  <a:lnTo>
+                    <a:pt x="1587" y="1240"/>
+                  </a:lnTo>
+                  <a:lnTo>
+                    <a:pt x="0" y="1240"/>
+                  </a:lnTo>
+                  <a:close/>
+                </a:path>
+              </a:pathLst>
+            </a:custGeom>
+            <a:solidFill>
+              <a:srgbClr val="006DEB"/>
+            </a:solidFill>
+            <a:ln w="0">
+              <a:noFill/>
+            </a:ln>
+          </p:spPr>
+          <p:txBody>
+            <a:bodyPr rtlCol="0" anchor="b" wrap="square" lIns="18288" tIns="0" rIns="18288" bIns="73152">
+              <a:noAutofit/>
+            </a:bodyPr>
+            <a:lstStyle/>
+            <a:p>
+              <a:pPr algn="ctr">
+                <a:lnSpc>
+                  <a:spcPct val="110000"/>
+                </a:lnSpc>
+              </a:pPr>
+              <a:r>
+                <a:rPr sz="1400" b="1">
+                  <a:solidFill>
+                    <a:srgbClr val="FFFFFF"/>
+                  </a:solidFill>
+                  <a:latin typeface="Play"/>
+                </a:rPr>
+                <a:t>01</a:t>
+              </a:r>
+            </a:p>
+          </p:txBody>
+        </p:sp>
+        <p:sp>
+          <p:nvSpPr>
+            <p:cNvPr id="5" name="BrandDeck Diagram Text 1"/>
+            <p:cNvSpPr txBox="1"/>
+            <p:nvPr/>
+          </p:nvSpPr>
+          <p:spPr>
+            <a:xfrm>
+              <a:off x="5390833" y="2135749"/>
+              <a:ext cx="6142355" cy="1133856"/>
+            </a:xfrm>
+            <a:prstGeom prst="rect">
+              <a:avLst/>
+            </a:prstGeom>
+            <a:noFill/>
+          </p:spPr>
+          <p:txBody>
+            <a:bodyPr wrap="square" anchor="ctr" lIns="36576" tIns="18288" rIns="36576" bIns="18288">
+              <a:noAutofit/>
+            </a:bodyPr>
+            <a:lstStyle/>
+            <a:p>
+              <a:pPr algn="l">
+                <a:lnSpc>
+                  <a:spcPct val="110000"/>
+                </a:lnSpc>
+              </a:pPr>
+              <a:r>
+                <a:rPr sz="1600" b="1">
+                  <a:solidFill>
+                    <a:srgbClr val="000000"/>
+                  </a:solidFill>
+                  <a:latin typeface="Play"/>
+                </a:rPr>
+                <a:t>6 недель</a:t>
+              </a:r>
+            </a:p>
+            <a:p>
+              <a:pPr algn="l">
+                <a:lnSpc>
+                  <a:spcPct val="110000"/>
+                </a:lnSpc>
+                <a:spcBef>
+                  <a:spcPts val="400"/>
+                </a:spcBef>
+              </a:pPr>
+              <a:r>
+                <a:rPr sz="1600" b="0">
+                  <a:solidFill>
+                    <a:srgbClr val="000000"/>
+                  </a:solidFill>
+                  <a:latin typeface="Play"/>
+                </a:rPr>
+                <a:t>Длительность пилотного запуска</a:t>
+              </a:r>
+            </a:p>
+          </p:txBody>
+        </p:sp>
+        <p:sp>
+          <p:nvSpPr>
+            <p:cNvPr id="6" name="BrandDeck Diagram Level 2"/>
+            <p:cNvSpPr/>
+            <p:nvPr/>
+          </p:nvSpPr>
+          <p:spPr>
+            <a:xfrm>
+              <a:off x="1418908" y="3324469"/>
+              <a:ext cx="2937510" cy="1133856"/>
+            </a:xfrm>
+            <a:custGeom>
+              <a:avLst/>
+              <a:gdLst/>
+              <a:ahLst/>
+              <a:cxnLst/>
+              <a:rect l="l" t="t" r="r" b="b"/>
+              <a:pathLst>
+                <a:path w="3213" h="1240" stroke="0">
+                  <a:moveTo>
+                    <a:pt x="775" y="0"/>
+                  </a:moveTo>
+                  <a:lnTo>
+                    <a:pt x="2438" y="0"/>
+                  </a:lnTo>
+                  <a:lnTo>
+                    <a:pt x="3213" y="1240"/>
+                  </a:lnTo>
+                  <a:lnTo>
+                    <a:pt x="0" y="1240"/>
+                  </a:lnTo>
+                  <a:close/>
+                </a:path>
+              </a:pathLst>
+            </a:custGeom>
+            <a:solidFill>
+              <a:srgbClr val="4092F0"/>
+            </a:solidFill>
+            <a:ln w="0">
+              <a:noFill/>
+            </a:ln>
+          </p:spPr>
+          <p:txBody>
+            <a:bodyPr rtlCol="0" anchor="ctr" wrap="square" lIns="18288" tIns="0" rIns="18288" bIns="0">
+              <a:noAutofit/>
+            </a:bodyPr>
+            <a:lstStyle/>
+            <a:p>
+              <a:pPr algn="ctr">
+                <a:lnSpc>
+                  <a:spcPct val="110000"/>
+                </a:lnSpc>
+              </a:pPr>
+              <a:r>
+                <a:rPr sz="1400" b="1">
+                  <a:solidFill>
+                    <a:srgbClr val="000000"/>
+                  </a:solidFill>
+                  <a:latin typeface="Play"/>
+                </a:rPr>
+                <a:t>02</a:t>
+              </a:r>
+            </a:p>
+          </p:txBody>
+        </p:sp>
+        <p:sp>
+          <p:nvSpPr>
+            <p:cNvPr id="7" name="BrandDeck Diagram Text 2"/>
+            <p:cNvSpPr txBox="1"/>
+            <p:nvPr/>
+          </p:nvSpPr>
+          <p:spPr>
+            <a:xfrm>
+              <a:off x="5390833" y="3324469"/>
+              <a:ext cx="6142355" cy="1133856"/>
+            </a:xfrm>
+            <a:prstGeom prst="rect">
+              <a:avLst/>
+            </a:prstGeom>
+            <a:noFill/>
+          </p:spPr>
+          <p:txBody>
+            <a:bodyPr wrap="square" anchor="ctr" lIns="36576" tIns="18288" rIns="36576" bIns="18288">
+              <a:noAutofit/>
+            </a:bodyPr>
+            <a:lstStyle/>
+            <a:p>
+              <a:pPr algn="l">
+                <a:lnSpc>
+                  <a:spcPct val="110000"/>
+                </a:lnSpc>
+              </a:pPr>
+              <a:r>
+                <a:rPr sz="1600" b="1">
+                  <a:solidFill>
+                    <a:srgbClr val="000000"/>
+                  </a:solidFill>
+                  <a:latin typeface="Play"/>
+                </a:rPr>
+                <a:t>150 сотрудников</a:t>
+              </a:r>
+            </a:p>
+            <a:p>
+              <a:pPr algn="l">
+                <a:lnSpc>
+                  <a:spcPct val="110000"/>
+                </a:lnSpc>
+                <a:spcBef>
+                  <a:spcPts val="400"/>
+                </a:spcBef>
+              </a:pPr>
+              <a:r>
+                <a:rPr sz="1600" b="0">
+                  <a:solidFill>
+                    <a:srgbClr val="000000"/>
+                  </a:solidFill>
+                  <a:latin typeface="Play"/>
+                </a:rPr>
+                <a:t>Всего участников пилота</a:t>
+              </a:r>
+            </a:p>
+          </p:txBody>
+        </p:sp>
+        <p:sp>
+          <p:nvSpPr>
+            <p:cNvPr id="8" name="BrandDeck Diagram Level 3"/>
+            <p:cNvSpPr/>
+            <p:nvPr/>
+          </p:nvSpPr>
+          <p:spPr>
+            <a:xfrm>
+              <a:off x="675958" y="4513189"/>
+              <a:ext cx="4423409" cy="1133855"/>
+            </a:xfrm>
+            <a:custGeom>
+              <a:avLst/>
+              <a:gdLst/>
+              <a:ahLst/>
+              <a:cxnLst/>
+              <a:rect l="l" t="t" r="r" b="b"/>
+              <a:pathLst>
+                <a:path w="4837" h="1240" stroke="0">
+                  <a:moveTo>
+                    <a:pt x="775" y="0"/>
+                  </a:moveTo>
+                  <a:lnTo>
+                    <a:pt x="4062" y="0"/>
+                  </a:lnTo>
+                  <a:lnTo>
+                    <a:pt x="4837" y="1240"/>
+                  </a:lnTo>
+                  <a:lnTo>
+                    <a:pt x="0" y="1240"/>
+                  </a:lnTo>
+                  <a:close/>
+                </a:path>
+              </a:pathLst>
+            </a:custGeom>
+            <a:solidFill>
+              <a:srgbClr val="80B6F5"/>
+            </a:solidFill>
+            <a:ln w="0">
+              <a:noFill/>
+            </a:ln>
+          </p:spPr>
+          <p:txBody>
+            <a:bodyPr rtlCol="0" anchor="ctr" wrap="square" lIns="18288" tIns="0" rIns="18288" bIns="0">
+              <a:noAutofit/>
+            </a:bodyPr>
+            <a:lstStyle/>
+            <a:p>
+              <a:pPr algn="ctr">
+                <a:lnSpc>
+                  <a:spcPct val="110000"/>
+                </a:lnSpc>
+              </a:pPr>
+              <a:r>
+                <a:rPr sz="1400" b="1">
+                  <a:solidFill>
+                    <a:srgbClr val="000000"/>
+                  </a:solidFill>
+                  <a:latin typeface="Play"/>
+                </a:rPr>
+                <a:t>03</a:t>
+              </a:r>
+            </a:p>
+          </p:txBody>
+        </p:sp>
+        <p:sp>
+          <p:nvSpPr>
+            <p:cNvPr id="9" name="BrandDeck Diagram Text 3"/>
+            <p:cNvSpPr txBox="1"/>
+            <p:nvPr/>
+          </p:nvSpPr>
+          <p:spPr>
+            <a:xfrm>
+              <a:off x="5390833" y="4513189"/>
+              <a:ext cx="6142355" cy="1133855"/>
+            </a:xfrm>
+            <a:prstGeom prst="rect">
+              <a:avLst/>
+            </a:prstGeom>
+            <a:noFill/>
+          </p:spPr>
+          <p:txBody>
+            <a:bodyPr wrap="square" anchor="ctr" lIns="36576" tIns="18288" rIns="36576" bIns="18288">
+              <a:noAutofit/>
+            </a:bodyPr>
+            <a:lstStyle/>
+            <a:p>
+              <a:pPr algn="l">
+                <a:lnSpc>
+                  <a:spcPct val="110000"/>
+                </a:lnSpc>
+              </a:pPr>
+              <a:r>
+                <a:rPr sz="1600" b="1">
+                  <a:solidFill>
+                    <a:srgbClr val="000000"/>
+                  </a:solidFill>
+                  <a:latin typeface="Play"/>
+                </a:rPr>
+                <a:t>2 подразделения</a:t>
+              </a:r>
+            </a:p>
+            <a:p>
+              <a:pPr algn="l">
+                <a:lnSpc>
+                  <a:spcPct val="110000"/>
+                </a:lnSpc>
+                <a:spcBef>
+                  <a:spcPts val="400"/>
+                </a:spcBef>
+              </a:pPr>
+              <a:r>
+                <a:rPr sz="1600" b="0">
+                  <a:solidFill>
+                    <a:srgbClr val="000000"/>
+                  </a:solidFill>
+                  <a:latin typeface="Play"/>
+                </a:rPr>
+                <a:t>Охват пилотной группы</a:t>
+              </a:r>
+            </a:p>
+          </p:txBody>
+        </p:sp>
+      </p:grpSp>
+    </p:spTree>
+  </p:cSld>
+  <p:clrMapOvr>
+    <a:masterClrMapping/>
+  </p:clrMapOvr>
+</p:sld>
+</file>
+
+<file path=ppt/slides/slide9.xml><?xml version="1.0" encoding="utf-8"?>
+<p:sld xmlns:a="http://schemas.openxmlformats.org/drawingml/2006/main" xmlns:p="http://schemas.openxmlformats.org/presentationml/2006/main" xmlns:r="http://schemas.openxmlformats.org/officeDocument/2006/relationships">
+  <p:cSld>
+    <p:spTree>
+      <p:nvGrpSpPr>
+        <p:cNvPr id="1" name=""/>
+        <p:cNvGrpSpPr/>
+        <p:nvPr/>
+      </p:nvGrpSpPr>
+      <p:grpSpPr/>
+      <p:sp>
+        <p:nvSpPr>
+          <p:cNvPr id="2" name="BrandDeck Text 2"/>
+          <p:cNvSpPr>
+            <a:spLocks noGrp="1"/>
+          </p:cNvSpPr>
+          <p:nvPr>
+            <p:ph type="title"/>
+          </p:nvPr>
+        </p:nvSpPr>
+        <p:spPr>
+          <a:xfrm>
+            <a:off x="658813" y="692150"/>
+            <a:ext cx="5254307" cy="1380285"/>
+          </a:xfrm>
+        </p:spPr>
+        <p:txBody>
+          <a:bodyPr wrap="square" anchor="t">
+            <a:normAutofit/>
+          </a:bodyPr>
+          <a:lstStyle/>
+          <a:p>
+            <a:pPr algn="l">
+              <a:lnSpc>
+                <a:spcPct val="115000"/>
+              </a:lnSpc>
+              <a:spcBef>
+                <a:spcPts val="0"/>
+              </a:spcBef>
+              <a:spcAft>
+                <a:spcPts val="359"/>
+              </a:spcAft>
+            </a:pPr>
+            <a:r>
+              <a:rPr sz="2400">
+                <a:solidFill>
+                  <a:srgbClr val="000000"/>
+                </a:solidFill>
+              </a:rPr>
+              <a:t>Измерим время поиска ответа и долю обращений, закрытых без специалиста поддержки</a:t>
+            </a:r>
+          </a:p>
+        </p:txBody>
+      </p:sp>
+      <p:sp>
+        <p:nvSpPr>
+          <p:cNvPr id="3" name="BrandDeck Text 3"/>
+          <p:cNvSpPr>
+            <a:spLocks noGrp="1"/>
+          </p:cNvSpPr>
+          <p:nvPr>
+            <p:ph type="body" idx="1"/>
+          </p:nvPr>
+        </p:nvSpPr>
+        <p:spPr/>
+        <p:txBody>
+          <a:bodyPr wrap="square" anchor="t">
+            <a:normAutofit/>
+          </a:bodyPr>
+          <a:lstStyle/>
+          <a:p>
+            <a:pPr>
+              <a:lnSpc>
+                <a:spcPct val="115000"/>
+              </a:lnSpc>
+              <a:spcBef>
+                <a:spcPts val="0"/>
+              </a:spcBef>
+              <a:spcAft>
+                <a:spcPts val="270"/>
+              </a:spcAft>
+            </a:pPr>
+            <a:r>
+              <a:rPr sz="1800">
+                <a:solidFill>
+                  <a:srgbClr val="000000"/>
+                </a:solidFill>
+              </a:rPr>
+              <a:t>Измерим время поиска ответа и долю закрытых обращений.</a:t>
+            </a:r>
+          </a:p>
+          <a:p>
+            <a:pPr>
+              <a:lnSpc>
+                <a:spcPct val="115000"/>
+              </a:lnSpc>
+              <a:spcBef>
+                <a:spcPts val="0"/>
+              </a:spcBef>
+              <a:spcAft>
+                <a:spcPts val="270"/>
+              </a:spcAft>
+            </a:pPr>
+            <a:r>
+              <a:rPr sz="1800">
+                <a:solidFill>
+                  <a:srgbClr val="000000"/>
+                </a:solidFill>
+              </a:rPr>
+              <a:t>Снижение времени поиска и нагрузки на поддержку — критерии успеха.</a:t>
+            </a:r>
+          </a:p>
+          <a:p>
+            <a:pPr>
+              <a:lnSpc>
+                <a:spcPct val="115000"/>
+              </a:lnSpc>
+              <a:spcBef>
+                <a:spcPts val="0"/>
+              </a:spcBef>
+              <a:spcAft>
+                <a:spcPts val="270"/>
+              </a:spcAft>
+            </a:pPr>
+            <a:r>
+              <a:rPr sz="1800">
+                <a:solidFill>
+                  <a:srgbClr val="000000"/>
+                </a:solidFill>
+              </a:rPr>
+              <a:t>Результаты пилота определят эффективность ИИ-помощника.</a:t>
+            </a:r>
+          </a:p>
+        </p:txBody>
+      </p:sp>
+      <p:pic>
+        <p:nvPicPr>
+          <p:cNvPr id="4" name="BrandDeck Image" descr="сотрудник специалист поддержки"/>
+          <p:cNvPicPr>
+            <a:picLocks noGrp="1" noChangeAspect="1"/>
+          </p:cNvPicPr>
+          <p:nvPr>
+            <p:ph type="pic" idx="2"/>
+          </p:nvPr>
+        </p:nvPicPr>
+        <p:blipFill>
+          <a:blip r:embed="rId2"/>
+          <a:srcRect l="24987" r="24987"/>
+          <a:stretch>
+            <a:fillRect/>
+          </a:stretch>
+        </p:blipFill>
+        <p:spPr/>
+      </p:pic>
     </p:spTree>
   </p:cSld>
   <p:clrMapOvr>

--- a/deliverables/vk-education-focus.pptx
+++ b/deliverables/vk-education-focus.pptx
@@ -19,8 +19,6 @@
     <p:sldId id="318" r:id="rId71"/>
     <p:sldId id="319" r:id="rId72"/>
     <p:sldId id="320" r:id="rId73"/>
-    <p:sldId id="321" r:id="rId74"/>
-    <p:sldId id="322" r:id="rId75"/>
   </p:sldIdLst>
   <p:sldSz cy="6858000" cx="12192000"/>
   <p:notesSz cx="6858000" cy="9144000"/>
@@ -1476,7 +1474,7 @@
           <a:lstStyle/>
           <a:p>
             <a:r>
-              <a:t>Слайд вводит инициативу по внедрению ИИ-помощника для автоматизации ответов сотрудникам на вопросы по регламентам.</a:t>
+              <a:t>Данный слайд представляет инициативу по внедрению ИИ-помощника во внутренний портал для автоматизации ответов сотрудникам.</a:t>
             </a:r>
           </a:p>
         </p:txBody>
@@ -1546,7 +1544,7 @@
           <a:lstStyle/>
           <a:p>
             <a:r>
-              <a:t>Сейчас поиск информации занимает до 30 минут, а треть обращений дублирует одни и те же вопросы.</a:t>
+              <a:t>Сейчас поиск инструкции занимает до 30 минут, а треть обращений в поддержку — повторяющиеся вопросы.</a:t>
             </a:r>
           </a:p>
         </p:txBody>
@@ -1616,7 +1614,7 @@
           <a:lstStyle/>
           <a:p>
             <a:r>
-              <a:t>Пилотный проект охватывает 150 сотрудников двух подразделений в течение шести недель.</a:t>
+              <a:t>Сейчас сотрудники тратят до 30 минут на поиск инструкций, а треть обращений в поддержку — это повторяющиеся вопросы, что создает нагрузку на обе стороны.</a:t>
             </a:r>
           </a:p>
         </p:txBody>
@@ -1686,7 +1684,7 @@
           <a:lstStyle/>
           <a:p>
             <a:r>
-              <a:t>Функция автоматически отвечает сотрудникам на запросы по регламентам и сразу показывает ссылку на исходный документ.</a:t>
+              <a:t>ИИ-помощник автоматически отвечает на вопросы по регламентам, предоставляя ссылку на источник, а сложные запросы перенаправляет специалистам с полным контекстом.</a:t>
             </a:r>
           </a:p>
         </p:txBody>
@@ -1756,7 +1754,7 @@
           <a:lstStyle/>
           <a:p>
             <a:r>
-              <a:t>Система обеспечивает безопасность, обрабатывая данные внутри контура без их вывода наружу.</a:t>
+              <a:t>Модель работает внутри контура, документы не покидают его, а сложные вопросы передаются специалистам с контекстом.</a:t>
             </a:r>
           </a:p>
         </p:txBody>
@@ -1826,7 +1824,7 @@
           <a:lstStyle/>
           <a:p>
             <a:r>
-              <a:t>Если ИИ не находит подтверждённый ответ, запрос автоматически передаётся специалисту с полным контекстом диалога.</a:t>
+              <a:t>Пилотный проект охватывает 150 сотрудников из двух подразделений и длится 6 недель.</a:t>
             </a:r>
           </a:p>
         </p:txBody>
@@ -1896,7 +1894,7 @@
           <a:lstStyle/>
           <a:p>
             <a:r>
-              <a:t>Эта слайд определяет ключевые метрики для оценки эффективности пилота ИИ-помощника.</a:t>
+              <a:t>Эти две метрики позволяют оценить эффективность внедрения ИИ-помощника и снижение нагрузки на поддержку.</a:t>
             </a:r>
           </a:p>
         </p:txBody>
@@ -1966,7 +1964,7 @@
           <a:lstStyle/>
           <a:p>
             <a:r>
-              <a:t>Пилот охватывает 150 сотрудников двух подразделений и длится 6 недель.</a:t>
+              <a:t>План предусматривает запуск пилота в двух подразделениях и мониторинг метрик в течение шести недель.</a:t>
             </a:r>
           </a:p>
         </p:txBody>
@@ -2036,7 +2034,7 @@
           <a:lstStyle/>
           <a:p>
             <a:r>
-              <a:t>Мы будем отслеживать время поиска инструкций и долю обращений, решенных без участия специалиста, чтобы оценить эффективность пилота.</a:t>
+              <a:t>Архитектурное ограничение работы модели внутри контура компании минимизирует риски утечки данных.</a:t>
             </a:r>
           </a:p>
         </p:txBody>
@@ -2106,147 +2104,7 @@
           <a:lstStyle/>
           <a:p>
             <a:r>
-              <a:t>Мы используем модель с открытыми весами, которая работает исключительно внутри корпоративного контура, гарантируя, что документы не покидают периметр безопасности.</a:t>
-            </a:r>
-          </a:p>
-        </p:txBody>
-      </p:sp>
-      <p:sp>
-        <p:nvSpPr>
-          <p:cNvPr id="4" name="Slide Number Placeholder 3"/>
-          <p:cNvSpPr>
-            <a:spLocks noGrp="1"/>
-          </p:cNvSpPr>
-          <p:nvPr>
-            <p:ph type="sldNum" idx="12"/>
-          </p:nvPr>
-        </p:nvSpPr>
-        <p:spPr/>
-      </p:sp>
-    </p:spTree>
-  </p:cSld>
-  <p:clrMapOvr>
-    <a:masterClrMapping/>
-  </p:clrMapOvr>
-</p:notes>
-</file>
-
-<file path=ppt/notesSlides/notesSlide66.xml><?xml version="1.0" encoding="utf-8"?>
-<p:notes xmlns:a="http://schemas.openxmlformats.org/drawingml/2006/main" xmlns:p="http://schemas.openxmlformats.org/presentationml/2006/main" xmlns:r="http://schemas.openxmlformats.org/officeDocument/2006/relationships">
-  <p:cSld>
-    <p:spTree>
-      <p:nvGrpSpPr>
-        <p:cNvPr id="1" name=""/>
-        <p:cNvGrpSpPr/>
-        <p:nvPr/>
-      </p:nvGrpSpPr>
-      <p:grpSpPr>
-        <a:xfrm>
-          <a:off x="0" y="0"/>
-          <a:ext cx="0" cy="0"/>
-          <a:chOff x="0" y="0"/>
-          <a:chExt cx="0" cy="0"/>
-        </a:xfrm>
-      </p:grpSpPr>
-      <p:sp>
-        <p:nvSpPr>
-          <p:cNvPr id="2" name="Slide Image Placeholder 1"/>
-          <p:cNvSpPr>
-            <a:spLocks noGrp="1"/>
-          </p:cNvSpPr>
-          <p:nvPr>
-            <p:ph type="sldImg" idx="3"/>
-          </p:nvPr>
-        </p:nvSpPr>
-        <p:spPr/>
-      </p:sp>
-      <p:sp>
-        <p:nvSpPr>
-          <p:cNvPr id="3" name="Notes Placeholder 2"/>
-          <p:cNvSpPr>
-            <a:spLocks noGrp="1"/>
-          </p:cNvSpPr>
-          <p:nvPr>
-            <p:ph type="body" idx="1"/>
-          </p:nvPr>
-        </p:nvSpPr>
-        <p:spPr/>
-        <p:txBody>
-          <a:bodyPr/>
-          <a:lstStyle/>
-          <a:p>
-            <a:r>
-              <a:t>Нам необходимо ваше одобрение для старта пилота и выделение команды из трех человек.</a:t>
-            </a:r>
-          </a:p>
-        </p:txBody>
-      </p:sp>
-      <p:sp>
-        <p:nvSpPr>
-          <p:cNvPr id="4" name="Slide Number Placeholder 3"/>
-          <p:cNvSpPr>
-            <a:spLocks noGrp="1"/>
-          </p:cNvSpPr>
-          <p:nvPr>
-            <p:ph type="sldNum" idx="12"/>
-          </p:nvPr>
-        </p:nvSpPr>
-        <p:spPr/>
-      </p:sp>
-    </p:spTree>
-  </p:cSld>
-  <p:clrMapOvr>
-    <a:masterClrMapping/>
-  </p:clrMapOvr>
-</p:notes>
-</file>
-
-<file path=ppt/notesSlides/notesSlide67.xml><?xml version="1.0" encoding="utf-8"?>
-<p:notes xmlns:a="http://schemas.openxmlformats.org/drawingml/2006/main" xmlns:p="http://schemas.openxmlformats.org/presentationml/2006/main" xmlns:r="http://schemas.openxmlformats.org/officeDocument/2006/relationships">
-  <p:cSld>
-    <p:spTree>
-      <p:nvGrpSpPr>
-        <p:cNvPr id="1" name=""/>
-        <p:cNvGrpSpPr/>
-        <p:nvPr/>
-      </p:nvGrpSpPr>
-      <p:grpSpPr>
-        <a:xfrm>
-          <a:off x="0" y="0"/>
-          <a:ext cx="0" cy="0"/>
-          <a:chOff x="0" y="0"/>
-          <a:chExt cx="0" cy="0"/>
-        </a:xfrm>
-      </p:grpSpPr>
-      <p:sp>
-        <p:nvSpPr>
-          <p:cNvPr id="2" name="Slide Image Placeholder 1"/>
-          <p:cNvSpPr>
-            <a:spLocks noGrp="1"/>
-          </p:cNvSpPr>
-          <p:nvPr>
-            <p:ph type="sldImg" idx="3"/>
-          </p:nvPr>
-        </p:nvSpPr>
-        <p:spPr/>
-      </p:sp>
-      <p:sp>
-        <p:nvSpPr>
-          <p:cNvPr id="3" name="Notes Placeholder 2"/>
-          <p:cNvSpPr>
-            <a:spLocks noGrp="1"/>
-          </p:cNvSpPr>
-          <p:nvPr>
-            <p:ph type="body" idx="1"/>
-          </p:nvPr>
-        </p:nvSpPr>
-        <p:spPr/>
-        <p:txBody>
-          <a:bodyPr/>
-          <a:lstStyle/>
-          <a:p>
-            <a:r>
-              <a:t>Мы просим одобрить пилот и выделить команду из трех человек для реализации проекта.</a:t>
+              <a:t>Для запуска пилота требуется ваше одобрение и выделение команды из трех человек.</a:t>
             </a:r>
           </a:p>
         </p:txBody>
@@ -2734,568 +2592,6 @@
 </p:sldLayout>
 </file>
 
-<file path=ppt/slideLayouts/slideLayout12.xml><?xml version="1.0" encoding="utf-8"?>
-<p:sldLayout xmlns:a="http://schemas.openxmlformats.org/drawingml/2006/main" xmlns:r="http://schemas.openxmlformats.org/officeDocument/2006/relationships" xmlns:mc="http://schemas.openxmlformats.org/markup-compatibility/2006" xmlns:mv="urn:schemas-microsoft-com:mac:vml" xmlns:p="http://schemas.openxmlformats.org/presentationml/2006/main" xmlns:c="http://schemas.openxmlformats.org/drawingml/2006/chart" xmlns:dgm="http://schemas.openxmlformats.org/drawingml/2006/diagram" xmlns:o="urn:schemas-microsoft-com:office:office" xmlns:v="urn:schemas-microsoft-com:vml" xmlns:pvml="urn:schemas-microsoft-com:office:powerpoint" xmlns:com="http://schemas.openxmlformats.org/drawingml/2006/compatibility" xmlns:p14="http://schemas.microsoft.com/office/powerpoint/2010/main" xmlns:p15="http://schemas.microsoft.com/office/powerpoint/2012/main" xmlns:ahyp="http://schemas.microsoft.com/office/drawing/2018/hyperlinkcolor" matchingName="2_Заголовок + текст в две колонки">
-  <p:cSld name="2_Заголовок + текст в две колонки">
-    <p:bg>
-      <p:bgPr>
-        <a:solidFill>
-          <a:schemeClr val="lt2"/>
-        </a:solidFill>
-      </p:bgPr>
-    </p:bg>
-    <p:spTree>
-      <p:nvGrpSpPr>
-        <p:cNvPr id="107" name="Shape 107"/>
-        <p:cNvGrpSpPr/>
-        <p:nvPr/>
-      </p:nvGrpSpPr>
-      <p:grpSpPr>
-        <a:xfrm>
-          <a:off x="0" y="0"/>
-          <a:ext cx="0" cy="0"/>
-          <a:chOff x="0" y="0"/>
-          <a:chExt cx="0" cy="0"/>
-        </a:xfrm>
-      </p:grpSpPr>
-      <p:sp>
-        <p:nvSpPr>
-          <p:cNvPr id="108" name="Google Shape;108;p13"/>
-          <p:cNvSpPr txBox="1"/>
-          <p:nvPr>
-            <p:ph idx="1" type="body"/>
-          </p:nvPr>
-        </p:nvSpPr>
-        <p:spPr>
-          <a:xfrm>
-            <a:off x="677334" y="1773238"/>
-            <a:ext cx="5304365" cy="4427537"/>
-          </a:xfrm>
-          <a:prstGeom prst="rect">
-            <a:avLst/>
-          </a:prstGeom>
-          <a:noFill/>
-          <a:ln>
-            <a:noFill/>
-          </a:ln>
-        </p:spPr>
-        <p:txBody>
-          <a:bodyPr anchorCtr="0" anchor="t" bIns="0" lIns="0" spcFirstLastPara="1" rIns="0" wrap="square" tIns="0">
-            <a:normAutofit/>
-          </a:bodyPr>
-          <a:lstStyle>
-            <a:lvl1pPr indent="-228600" lvl="0" marL="457200" algn="l">
-              <a:lnSpc>
-                <a:spcPct val="110000"/>
-              </a:lnSpc>
-              <a:spcBef>
-                <a:spcPts val="1000"/>
-              </a:spcBef>
-              <a:spcAft>
-                <a:spcPts val="0"/>
-              </a:spcAft>
-              <a:buClr>
-                <a:schemeClr val="dk1"/>
-              </a:buClr>
-              <a:buSzPts val="1600"/>
-              <a:buNone/>
-              <a:defRPr b="0" i="0">
-                <a:latin typeface="Play"/>
-                <a:ea typeface="Play"/>
-                <a:cs typeface="Play"/>
-                <a:sym typeface="Play"/>
-              </a:defRPr>
-            </a:lvl1pPr>
-            <a:lvl2pPr indent="-317500" lvl="1" marL="914400" algn="l">
-              <a:lnSpc>
-                <a:spcPct val="110000"/>
-              </a:lnSpc>
-              <a:spcBef>
-                <a:spcPts val="500"/>
-              </a:spcBef>
-              <a:spcAft>
-                <a:spcPts val="0"/>
-              </a:spcAft>
-              <a:buSzPts val="1400"/>
-              <a:buChar char="•"/>
-              <a:defRPr b="0" i="0">
-                <a:latin typeface="Play"/>
-                <a:ea typeface="Play"/>
-                <a:cs typeface="Play"/>
-                <a:sym typeface="Play"/>
-              </a:defRPr>
-            </a:lvl2pPr>
-            <a:lvl3pPr indent="-304800" lvl="2" marL="1371600" algn="l">
-              <a:lnSpc>
-                <a:spcPct val="110000"/>
-              </a:lnSpc>
-              <a:spcBef>
-                <a:spcPts val="500"/>
-              </a:spcBef>
-              <a:spcAft>
-                <a:spcPts val="0"/>
-              </a:spcAft>
-              <a:buClr>
-                <a:schemeClr val="dk1"/>
-              </a:buClr>
-              <a:buSzPts val="1200"/>
-              <a:buChar char="−"/>
-              <a:defRPr b="0" i="0">
-                <a:latin typeface="Play"/>
-                <a:ea typeface="Play"/>
-                <a:cs typeface="Play"/>
-                <a:sym typeface="Play"/>
-              </a:defRPr>
-            </a:lvl3pPr>
-            <a:lvl4pPr indent="-342900" lvl="3" marL="1828800" algn="l">
-              <a:lnSpc>
-                <a:spcPct val="90000"/>
-              </a:lnSpc>
-              <a:spcBef>
-                <a:spcPts val="500"/>
-              </a:spcBef>
-              <a:spcAft>
-                <a:spcPts val="0"/>
-              </a:spcAft>
-              <a:buClr>
-                <a:schemeClr val="dk1"/>
-              </a:buClr>
-              <a:buSzPts val="1800"/>
-              <a:buChar char="•"/>
-              <a:defRPr/>
-            </a:lvl4pPr>
-            <a:lvl5pPr indent="-342900" lvl="4" marL="2286000" algn="l">
-              <a:lnSpc>
-                <a:spcPct val="90000"/>
-              </a:lnSpc>
-              <a:spcBef>
-                <a:spcPts val="500"/>
-              </a:spcBef>
-              <a:spcAft>
-                <a:spcPts val="0"/>
-              </a:spcAft>
-              <a:buClr>
-                <a:schemeClr val="dk1"/>
-              </a:buClr>
-              <a:buSzPts val="1800"/>
-              <a:buChar char="•"/>
-              <a:defRPr/>
-            </a:lvl5pPr>
-            <a:lvl6pPr indent="-342900" lvl="5" marL="2743200" algn="l">
-              <a:lnSpc>
-                <a:spcPct val="90000"/>
-              </a:lnSpc>
-              <a:spcBef>
-                <a:spcPts val="500"/>
-              </a:spcBef>
-              <a:spcAft>
-                <a:spcPts val="0"/>
-              </a:spcAft>
-              <a:buClr>
-                <a:schemeClr val="dk1"/>
-              </a:buClr>
-              <a:buSzPts val="1800"/>
-              <a:buChar char="•"/>
-              <a:defRPr/>
-            </a:lvl6pPr>
-            <a:lvl7pPr indent="-342900" lvl="6" marL="3200400" algn="l">
-              <a:lnSpc>
-                <a:spcPct val="90000"/>
-              </a:lnSpc>
-              <a:spcBef>
-                <a:spcPts val="500"/>
-              </a:spcBef>
-              <a:spcAft>
-                <a:spcPts val="0"/>
-              </a:spcAft>
-              <a:buClr>
-                <a:schemeClr val="dk1"/>
-              </a:buClr>
-              <a:buSzPts val="1800"/>
-              <a:buChar char="•"/>
-              <a:defRPr/>
-            </a:lvl7pPr>
-            <a:lvl8pPr indent="-342900" lvl="7" marL="3657600" algn="l">
-              <a:lnSpc>
-                <a:spcPct val="90000"/>
-              </a:lnSpc>
-              <a:spcBef>
-                <a:spcPts val="500"/>
-              </a:spcBef>
-              <a:spcAft>
-                <a:spcPts val="0"/>
-              </a:spcAft>
-              <a:buClr>
-                <a:schemeClr val="dk1"/>
-              </a:buClr>
-              <a:buSzPts val="1800"/>
-              <a:buChar char="•"/>
-              <a:defRPr/>
-            </a:lvl8pPr>
-            <a:lvl9pPr indent="-342900" lvl="8" marL="4114800" algn="l">
-              <a:lnSpc>
-                <a:spcPct val="90000"/>
-              </a:lnSpc>
-              <a:spcBef>
-                <a:spcPts val="500"/>
-              </a:spcBef>
-              <a:spcAft>
-                <a:spcPts val="0"/>
-              </a:spcAft>
-              <a:buClr>
-                <a:schemeClr val="dk1"/>
-              </a:buClr>
-              <a:buSzPts val="1800"/>
-              <a:buChar char="•"/>
-              <a:defRPr/>
-            </a:lvl9pPr>
-          </a:lstStyle>
-          <a:p/>
-        </p:txBody>
-      </p:sp>
-      <p:sp>
-        <p:nvSpPr>
-          <p:cNvPr id="109" name="Google Shape;109;p13"/>
-          <p:cNvSpPr txBox="1"/>
-          <p:nvPr>
-            <p:ph idx="2" type="body"/>
-          </p:nvPr>
-        </p:nvSpPr>
-        <p:spPr>
-          <a:xfrm>
-            <a:off x="6228824" y="1773239"/>
-            <a:ext cx="5304364" cy="4427537"/>
-          </a:xfrm>
-          <a:prstGeom prst="rect">
-            <a:avLst/>
-          </a:prstGeom>
-          <a:noFill/>
-          <a:ln>
-            <a:noFill/>
-          </a:ln>
-        </p:spPr>
-        <p:txBody>
-          <a:bodyPr anchorCtr="0" anchor="t" bIns="0" lIns="0" spcFirstLastPara="1" rIns="0" wrap="square" tIns="0">
-            <a:normAutofit/>
-          </a:bodyPr>
-          <a:lstStyle>
-            <a:lvl1pPr indent="-228600" lvl="0" marL="457200" algn="l">
-              <a:lnSpc>
-                <a:spcPct val="110000"/>
-              </a:lnSpc>
-              <a:spcBef>
-                <a:spcPts val="1000"/>
-              </a:spcBef>
-              <a:spcAft>
-                <a:spcPts val="0"/>
-              </a:spcAft>
-              <a:buClr>
-                <a:schemeClr val="dk1"/>
-              </a:buClr>
-              <a:buSzPts val="1600"/>
-              <a:buNone/>
-              <a:defRPr b="0" i="0">
-                <a:latin typeface="Play"/>
-                <a:ea typeface="Play"/>
-                <a:cs typeface="Play"/>
-                <a:sym typeface="Play"/>
-              </a:defRPr>
-            </a:lvl1pPr>
-            <a:lvl2pPr indent="-317500" lvl="1" marL="914400" algn="l">
-              <a:lnSpc>
-                <a:spcPct val="110000"/>
-              </a:lnSpc>
-              <a:spcBef>
-                <a:spcPts val="500"/>
-              </a:spcBef>
-              <a:spcAft>
-                <a:spcPts val="0"/>
-              </a:spcAft>
-              <a:buSzPts val="1400"/>
-              <a:buChar char="•"/>
-              <a:defRPr b="0" i="0">
-                <a:latin typeface="Play"/>
-                <a:ea typeface="Play"/>
-                <a:cs typeface="Play"/>
-                <a:sym typeface="Play"/>
-              </a:defRPr>
-            </a:lvl2pPr>
-            <a:lvl3pPr indent="-304800" lvl="2" marL="1371600" algn="l">
-              <a:lnSpc>
-                <a:spcPct val="110000"/>
-              </a:lnSpc>
-              <a:spcBef>
-                <a:spcPts val="500"/>
-              </a:spcBef>
-              <a:spcAft>
-                <a:spcPts val="0"/>
-              </a:spcAft>
-              <a:buClr>
-                <a:schemeClr val="dk1"/>
-              </a:buClr>
-              <a:buSzPts val="1200"/>
-              <a:buChar char="−"/>
-              <a:defRPr b="0" i="0">
-                <a:latin typeface="Play"/>
-                <a:ea typeface="Play"/>
-                <a:cs typeface="Play"/>
-                <a:sym typeface="Play"/>
-              </a:defRPr>
-            </a:lvl3pPr>
-            <a:lvl4pPr indent="-342900" lvl="3" marL="1828800" algn="l">
-              <a:lnSpc>
-                <a:spcPct val="90000"/>
-              </a:lnSpc>
-              <a:spcBef>
-                <a:spcPts val="500"/>
-              </a:spcBef>
-              <a:spcAft>
-                <a:spcPts val="0"/>
-              </a:spcAft>
-              <a:buClr>
-                <a:schemeClr val="dk1"/>
-              </a:buClr>
-              <a:buSzPts val="1800"/>
-              <a:buChar char="•"/>
-              <a:defRPr/>
-            </a:lvl4pPr>
-            <a:lvl5pPr indent="-342900" lvl="4" marL="2286000" algn="l">
-              <a:lnSpc>
-                <a:spcPct val="90000"/>
-              </a:lnSpc>
-              <a:spcBef>
-                <a:spcPts val="500"/>
-              </a:spcBef>
-              <a:spcAft>
-                <a:spcPts val="0"/>
-              </a:spcAft>
-              <a:buClr>
-                <a:schemeClr val="dk1"/>
-              </a:buClr>
-              <a:buSzPts val="1800"/>
-              <a:buChar char="•"/>
-              <a:defRPr/>
-            </a:lvl5pPr>
-            <a:lvl6pPr indent="-342900" lvl="5" marL="2743200" algn="l">
-              <a:lnSpc>
-                <a:spcPct val="90000"/>
-              </a:lnSpc>
-              <a:spcBef>
-                <a:spcPts val="500"/>
-              </a:spcBef>
-              <a:spcAft>
-                <a:spcPts val="0"/>
-              </a:spcAft>
-              <a:buClr>
-                <a:schemeClr val="dk1"/>
-              </a:buClr>
-              <a:buSzPts val="1800"/>
-              <a:buChar char="•"/>
-              <a:defRPr/>
-            </a:lvl6pPr>
-            <a:lvl7pPr indent="-342900" lvl="6" marL="3200400" algn="l">
-              <a:lnSpc>
-                <a:spcPct val="90000"/>
-              </a:lnSpc>
-              <a:spcBef>
-                <a:spcPts val="500"/>
-              </a:spcBef>
-              <a:spcAft>
-                <a:spcPts val="0"/>
-              </a:spcAft>
-              <a:buClr>
-                <a:schemeClr val="dk1"/>
-              </a:buClr>
-              <a:buSzPts val="1800"/>
-              <a:buChar char="•"/>
-              <a:defRPr/>
-            </a:lvl7pPr>
-            <a:lvl8pPr indent="-342900" lvl="7" marL="3657600" algn="l">
-              <a:lnSpc>
-                <a:spcPct val="90000"/>
-              </a:lnSpc>
-              <a:spcBef>
-                <a:spcPts val="500"/>
-              </a:spcBef>
-              <a:spcAft>
-                <a:spcPts val="0"/>
-              </a:spcAft>
-              <a:buClr>
-                <a:schemeClr val="dk1"/>
-              </a:buClr>
-              <a:buSzPts val="1800"/>
-              <a:buChar char="•"/>
-              <a:defRPr/>
-            </a:lvl8pPr>
-            <a:lvl9pPr indent="-342900" lvl="8" marL="4114800" algn="l">
-              <a:lnSpc>
-                <a:spcPct val="90000"/>
-              </a:lnSpc>
-              <a:spcBef>
-                <a:spcPts val="500"/>
-              </a:spcBef>
-              <a:spcAft>
-                <a:spcPts val="0"/>
-              </a:spcAft>
-              <a:buClr>
-                <a:schemeClr val="dk1"/>
-              </a:buClr>
-              <a:buSzPts val="1800"/>
-              <a:buChar char="•"/>
-              <a:defRPr/>
-            </a:lvl9pPr>
-          </a:lstStyle>
-          <a:p/>
-        </p:txBody>
-      </p:sp>
-      <p:sp>
-        <p:nvSpPr>
-          <p:cNvPr id="110" name="Google Shape;110;p13"/>
-          <p:cNvSpPr txBox="1"/>
-          <p:nvPr>
-            <p:ph type="title"/>
-          </p:nvPr>
-        </p:nvSpPr>
-        <p:spPr>
-          <a:xfrm>
-            <a:off x="677334" y="692150"/>
-            <a:ext cx="10855854" cy="644241"/>
-          </a:xfrm>
-          <a:prstGeom prst="rect">
-            <a:avLst/>
-          </a:prstGeom>
-          <a:noFill/>
-          <a:ln>
-            <a:noFill/>
-          </a:ln>
-        </p:spPr>
-        <p:txBody>
-          <a:bodyPr anchorCtr="0" anchor="t" bIns="0" lIns="0" spcFirstLastPara="1" rIns="0" wrap="square" tIns="0">
-            <a:noAutofit/>
-          </a:bodyPr>
-          <a:lstStyle>
-            <a:lvl1pPr lvl="0" algn="l">
-              <a:lnSpc>
-                <a:spcPct val="90000"/>
-              </a:lnSpc>
-              <a:spcBef>
-                <a:spcPts val="0"/>
-              </a:spcBef>
-              <a:spcAft>
-                <a:spcPts val="0"/>
-              </a:spcAft>
-              <a:buClr>
-                <a:schemeClr val="accent1"/>
-              </a:buClr>
-              <a:buSzPts val="3600"/>
-              <a:buFont typeface="Play"/>
-              <a:buNone/>
-              <a:defRPr>
-                <a:solidFill>
-                  <a:schemeClr val="accent1"/>
-                </a:solidFill>
-              </a:defRPr>
-            </a:lvl1pPr>
-            <a:lvl2pPr lvl="1">
-              <a:spcBef>
-                <a:spcPts val="0"/>
-              </a:spcBef>
-              <a:spcAft>
-                <a:spcPts val="0"/>
-              </a:spcAft>
-              <a:buSzPts val="1400"/>
-              <a:buNone/>
-              <a:defRPr/>
-            </a:lvl2pPr>
-            <a:lvl3pPr lvl="2">
-              <a:spcBef>
-                <a:spcPts val="0"/>
-              </a:spcBef>
-              <a:spcAft>
-                <a:spcPts val="0"/>
-              </a:spcAft>
-              <a:buSzPts val="1400"/>
-              <a:buNone/>
-              <a:defRPr/>
-            </a:lvl3pPr>
-            <a:lvl4pPr lvl="3">
-              <a:spcBef>
-                <a:spcPts val="0"/>
-              </a:spcBef>
-              <a:spcAft>
-                <a:spcPts val="0"/>
-              </a:spcAft>
-              <a:buSzPts val="1400"/>
-              <a:buNone/>
-              <a:defRPr/>
-            </a:lvl4pPr>
-            <a:lvl5pPr lvl="4">
-              <a:spcBef>
-                <a:spcPts val="0"/>
-              </a:spcBef>
-              <a:spcAft>
-                <a:spcPts val="0"/>
-              </a:spcAft>
-              <a:buSzPts val="1400"/>
-              <a:buNone/>
-              <a:defRPr/>
-            </a:lvl5pPr>
-            <a:lvl6pPr lvl="5">
-              <a:spcBef>
-                <a:spcPts val="0"/>
-              </a:spcBef>
-              <a:spcAft>
-                <a:spcPts val="0"/>
-              </a:spcAft>
-              <a:buSzPts val="1400"/>
-              <a:buNone/>
-              <a:defRPr/>
-            </a:lvl6pPr>
-            <a:lvl7pPr lvl="6">
-              <a:spcBef>
-                <a:spcPts val="0"/>
-              </a:spcBef>
-              <a:spcAft>
-                <a:spcPts val="0"/>
-              </a:spcAft>
-              <a:buSzPts val="1400"/>
-              <a:buNone/>
-              <a:defRPr/>
-            </a:lvl7pPr>
-            <a:lvl8pPr lvl="7">
-              <a:spcBef>
-                <a:spcPts val="0"/>
-              </a:spcBef>
-              <a:spcAft>
-                <a:spcPts val="0"/>
-              </a:spcAft>
-              <a:buSzPts val="1400"/>
-              <a:buNone/>
-              <a:defRPr/>
-            </a:lvl8pPr>
-            <a:lvl9pPr lvl="8">
-              <a:spcBef>
-                <a:spcPts val="0"/>
-              </a:spcBef>
-              <a:spcAft>
-                <a:spcPts val="0"/>
-              </a:spcAft>
-              <a:buSzPts val="1400"/>
-              <a:buNone/>
-              <a:defRPr/>
-            </a:lvl9pPr>
-          </a:lstStyle>
-          <a:p/>
-        </p:txBody>
-      </p:sp>
-    </p:spTree>
-  </p:cSld>
-  <p:clrMapOvr>
-    <a:masterClrMapping/>
-  </p:clrMapOvr>
-</p:sldLayout>
-</file>
-
 <file path=ppt/slideLayouts/slideLayout24.xml><?xml version="1.0" encoding="utf-8"?>
 <p:sldLayout xmlns:a="http://schemas.openxmlformats.org/drawingml/2006/main" xmlns:r="http://schemas.openxmlformats.org/officeDocument/2006/relationships" xmlns:mc="http://schemas.openxmlformats.org/markup-compatibility/2006" xmlns:mv="urn:schemas-microsoft-com:mac:vml" xmlns:p="http://schemas.openxmlformats.org/presentationml/2006/main" xmlns:c="http://schemas.openxmlformats.org/drawingml/2006/chart" xmlns:dgm="http://schemas.openxmlformats.org/drawingml/2006/diagram" xmlns:o="urn:schemas-microsoft-com:office:office" xmlns:v="urn:schemas-microsoft-com:vml" xmlns:pvml="urn:schemas-microsoft-com:office:powerpoint" xmlns:com="http://schemas.openxmlformats.org/drawingml/2006/compatibility" xmlns:p14="http://schemas.microsoft.com/office/powerpoint/2010/main" xmlns:p15="http://schemas.microsoft.com/office/powerpoint/2012/main" xmlns:ahyp="http://schemas.microsoft.com/office/drawing/2018/hyperlinkcolor" matchingName="Заголовок + объект">
   <p:cSld name="Заголовок + объект">
@@ -3653,19 +2949,19 @@
 </p:sldLayout>
 </file>
 
-<file path=ppt/slideLayouts/slideLayout5.xml><?xml version="1.0" encoding="utf-8"?>
-<p:sldLayout xmlns:a="http://schemas.openxmlformats.org/drawingml/2006/main" xmlns:r="http://schemas.openxmlformats.org/officeDocument/2006/relationships" xmlns:mc="http://schemas.openxmlformats.org/markup-compatibility/2006" xmlns:mv="urn:schemas-microsoft-com:mac:vml" xmlns:p="http://schemas.openxmlformats.org/presentationml/2006/main" xmlns:c="http://schemas.openxmlformats.org/drawingml/2006/chart" xmlns:dgm="http://schemas.openxmlformats.org/drawingml/2006/diagram" xmlns:o="urn:schemas-microsoft-com:office:office" xmlns:v="urn:schemas-microsoft-com:vml" xmlns:pvml="urn:schemas-microsoft-com:office:powerpoint" xmlns:com="http://schemas.openxmlformats.org/drawingml/2006/compatibility" xmlns:p14="http://schemas.microsoft.com/office/powerpoint/2010/main" xmlns:p15="http://schemas.microsoft.com/office/powerpoint/2012/main" xmlns:ahyp="http://schemas.microsoft.com/office/drawing/2018/hyperlinkcolor" matchingName="Слайд со спикером">
-  <p:cSld name="Слайд со спикером">
+<file path=ppt/slideLayouts/slideLayout25.xml><?xml version="1.0" encoding="utf-8"?>
+<p:sldLayout xmlns:a="http://schemas.openxmlformats.org/drawingml/2006/main" xmlns:r="http://schemas.openxmlformats.org/officeDocument/2006/relationships" xmlns:mc="http://schemas.openxmlformats.org/markup-compatibility/2006" xmlns:mv="urn:schemas-microsoft-com:mac:vml" xmlns:p="http://schemas.openxmlformats.org/presentationml/2006/main" xmlns:c="http://schemas.openxmlformats.org/drawingml/2006/chart" xmlns:dgm="http://schemas.openxmlformats.org/drawingml/2006/diagram" xmlns:o="urn:schemas-microsoft-com:office:office" xmlns:v="urn:schemas-microsoft-com:vml" xmlns:pvml="urn:schemas-microsoft-com:office:powerpoint" xmlns:com="http://schemas.openxmlformats.org/drawingml/2006/compatibility" xmlns:p14="http://schemas.microsoft.com/office/powerpoint/2010/main" xmlns:p15="http://schemas.microsoft.com/office/powerpoint/2012/main" xmlns:ahyp="http://schemas.microsoft.com/office/drawing/2018/hyperlinkcolor" matchingName="Заголовок + 2 объекта">
+  <p:cSld name="Заголовок + 2 объекта">
     <p:bg>
       <p:bgPr>
         <a:solidFill>
-          <a:schemeClr val="dk2"/>
+          <a:schemeClr val="lt2"/>
         </a:solidFill>
       </p:bgPr>
     </p:bg>
     <p:spTree>
       <p:nvGrpSpPr>
-        <p:cNvPr id="76" name="Shape 76"/>
+        <p:cNvPr id="165" name="Shape 165"/>
         <p:cNvGrpSpPr/>
         <p:nvPr/>
       </p:nvGrpSpPr>
@@ -3679,7 +2975,377 @@
       </p:grpSpPr>
       <p:sp>
         <p:nvSpPr>
-          <p:cNvPr id="77" name="Google Shape;77;p6"/>
+          <p:cNvPr id="166" name="Google Shape;166;p26"/>
+          <p:cNvSpPr txBox="1"/>
+          <p:nvPr>
+            <p:ph idx="1" type="body"/>
+          </p:nvPr>
+        </p:nvSpPr>
+        <p:spPr>
+          <a:xfrm>
+            <a:off x="677334" y="1773238"/>
+            <a:ext cx="5317065" cy="4427537"/>
+          </a:xfrm>
+          <a:prstGeom prst="rect">
+            <a:avLst/>
+          </a:prstGeom>
+          <a:noFill/>
+          <a:ln>
+            <a:noFill/>
+          </a:ln>
+        </p:spPr>
+        <p:txBody>
+          <a:bodyPr anchorCtr="0" anchor="t" bIns="0" lIns="0" spcFirstLastPara="1" rIns="0" wrap="square" tIns="0">
+            <a:normAutofit/>
+          </a:bodyPr>
+          <a:lstStyle>
+            <a:lvl1pPr indent="-228600" lvl="0" marL="457200" algn="l">
+              <a:lnSpc>
+                <a:spcPct val="110000"/>
+              </a:lnSpc>
+              <a:spcBef>
+                <a:spcPts val="1000"/>
+              </a:spcBef>
+              <a:spcAft>
+                <a:spcPts val="0"/>
+              </a:spcAft>
+              <a:buClr>
+                <a:schemeClr val="dk1"/>
+              </a:buClr>
+              <a:buSzPts val="1600"/>
+              <a:buNone/>
+              <a:defRPr b="0" i="0">
+                <a:latin typeface="Play"/>
+                <a:ea typeface="Play"/>
+                <a:cs typeface="Play"/>
+                <a:sym typeface="Play"/>
+              </a:defRPr>
+            </a:lvl1pPr>
+            <a:lvl2pPr indent="-342900" lvl="1" marL="914400" algn="l">
+              <a:lnSpc>
+                <a:spcPct val="110000"/>
+              </a:lnSpc>
+              <a:spcBef>
+                <a:spcPts val="500"/>
+              </a:spcBef>
+              <a:spcAft>
+                <a:spcPts val="0"/>
+              </a:spcAft>
+              <a:buSzPts val="1800"/>
+              <a:buChar char="•"/>
+              <a:defRPr/>
+            </a:lvl2pPr>
+            <a:lvl3pPr indent="-342900" lvl="2" marL="1371600" algn="l">
+              <a:lnSpc>
+                <a:spcPct val="110000"/>
+              </a:lnSpc>
+              <a:spcBef>
+                <a:spcPts val="500"/>
+              </a:spcBef>
+              <a:spcAft>
+                <a:spcPts val="0"/>
+              </a:spcAft>
+              <a:buClr>
+                <a:schemeClr val="dk1"/>
+              </a:buClr>
+              <a:buSzPts val="1800"/>
+              <a:buChar char="−"/>
+              <a:defRPr/>
+            </a:lvl3pPr>
+            <a:lvl4pPr indent="-342900" lvl="3" marL="1828800" algn="l">
+              <a:lnSpc>
+                <a:spcPct val="90000"/>
+              </a:lnSpc>
+              <a:spcBef>
+                <a:spcPts val="500"/>
+              </a:spcBef>
+              <a:spcAft>
+                <a:spcPts val="0"/>
+              </a:spcAft>
+              <a:buClr>
+                <a:schemeClr val="dk1"/>
+              </a:buClr>
+              <a:buSzPts val="1800"/>
+              <a:buChar char="•"/>
+              <a:defRPr/>
+            </a:lvl4pPr>
+            <a:lvl5pPr indent="-342900" lvl="4" marL="2286000" algn="l">
+              <a:lnSpc>
+                <a:spcPct val="90000"/>
+              </a:lnSpc>
+              <a:spcBef>
+                <a:spcPts val="500"/>
+              </a:spcBef>
+              <a:spcAft>
+                <a:spcPts val="0"/>
+              </a:spcAft>
+              <a:buClr>
+                <a:schemeClr val="dk1"/>
+              </a:buClr>
+              <a:buSzPts val="1800"/>
+              <a:buChar char="•"/>
+              <a:defRPr/>
+            </a:lvl5pPr>
+            <a:lvl6pPr indent="-342900" lvl="5" marL="2743200" algn="l">
+              <a:lnSpc>
+                <a:spcPct val="90000"/>
+              </a:lnSpc>
+              <a:spcBef>
+                <a:spcPts val="500"/>
+              </a:spcBef>
+              <a:spcAft>
+                <a:spcPts val="0"/>
+              </a:spcAft>
+              <a:buClr>
+                <a:schemeClr val="dk1"/>
+              </a:buClr>
+              <a:buSzPts val="1800"/>
+              <a:buChar char="•"/>
+              <a:defRPr/>
+            </a:lvl6pPr>
+            <a:lvl7pPr indent="-342900" lvl="6" marL="3200400" algn="l">
+              <a:lnSpc>
+                <a:spcPct val="90000"/>
+              </a:lnSpc>
+              <a:spcBef>
+                <a:spcPts val="500"/>
+              </a:spcBef>
+              <a:spcAft>
+                <a:spcPts val="0"/>
+              </a:spcAft>
+              <a:buClr>
+                <a:schemeClr val="dk1"/>
+              </a:buClr>
+              <a:buSzPts val="1800"/>
+              <a:buChar char="•"/>
+              <a:defRPr/>
+            </a:lvl7pPr>
+            <a:lvl8pPr indent="-342900" lvl="7" marL="3657600" algn="l">
+              <a:lnSpc>
+                <a:spcPct val="90000"/>
+              </a:lnSpc>
+              <a:spcBef>
+                <a:spcPts val="500"/>
+              </a:spcBef>
+              <a:spcAft>
+                <a:spcPts val="0"/>
+              </a:spcAft>
+              <a:buClr>
+                <a:schemeClr val="dk1"/>
+              </a:buClr>
+              <a:buSzPts val="1800"/>
+              <a:buChar char="•"/>
+              <a:defRPr/>
+            </a:lvl8pPr>
+            <a:lvl9pPr indent="-342900" lvl="8" marL="4114800" algn="l">
+              <a:lnSpc>
+                <a:spcPct val="90000"/>
+              </a:lnSpc>
+              <a:spcBef>
+                <a:spcPts val="500"/>
+              </a:spcBef>
+              <a:spcAft>
+                <a:spcPts val="0"/>
+              </a:spcAft>
+              <a:buClr>
+                <a:schemeClr val="dk1"/>
+              </a:buClr>
+              <a:buSzPts val="1800"/>
+              <a:buChar char="•"/>
+              <a:defRPr/>
+            </a:lvl9pPr>
+          </a:lstStyle>
+          <a:p/>
+        </p:txBody>
+      </p:sp>
+      <p:sp>
+        <p:nvSpPr>
+          <p:cNvPr id="167" name="Google Shape;167;p26"/>
+          <p:cNvSpPr txBox="1"/>
+          <p:nvPr>
+            <p:ph idx="2" type="body"/>
+          </p:nvPr>
+        </p:nvSpPr>
+        <p:spPr>
+          <a:xfrm>
+            <a:off x="6197604" y="1773238"/>
+            <a:ext cx="5317062" cy="4427537"/>
+          </a:xfrm>
+          <a:prstGeom prst="rect">
+            <a:avLst/>
+          </a:prstGeom>
+          <a:noFill/>
+          <a:ln>
+            <a:noFill/>
+          </a:ln>
+        </p:spPr>
+        <p:txBody>
+          <a:bodyPr anchorCtr="0" anchor="t" bIns="0" lIns="0" spcFirstLastPara="1" rIns="0" wrap="square" tIns="0">
+            <a:normAutofit/>
+          </a:bodyPr>
+          <a:lstStyle>
+            <a:lvl1pPr indent="-228600" lvl="0" marL="457200" algn="l">
+              <a:lnSpc>
+                <a:spcPct val="110000"/>
+              </a:lnSpc>
+              <a:spcBef>
+                <a:spcPts val="1000"/>
+              </a:spcBef>
+              <a:spcAft>
+                <a:spcPts val="0"/>
+              </a:spcAft>
+              <a:buClr>
+                <a:schemeClr val="dk1"/>
+              </a:buClr>
+              <a:buSzPts val="1600"/>
+              <a:buNone/>
+              <a:defRPr b="0" i="0">
+                <a:latin typeface="Play"/>
+                <a:ea typeface="Play"/>
+                <a:cs typeface="Play"/>
+                <a:sym typeface="Play"/>
+              </a:defRPr>
+            </a:lvl1pPr>
+            <a:lvl2pPr indent="-342900" lvl="1" marL="914400" algn="l">
+              <a:lnSpc>
+                <a:spcPct val="110000"/>
+              </a:lnSpc>
+              <a:spcBef>
+                <a:spcPts val="500"/>
+              </a:spcBef>
+              <a:spcAft>
+                <a:spcPts val="0"/>
+              </a:spcAft>
+              <a:buSzPts val="1800"/>
+              <a:buChar char="•"/>
+              <a:defRPr/>
+            </a:lvl2pPr>
+            <a:lvl3pPr indent="-342900" lvl="2" marL="1371600" algn="l">
+              <a:lnSpc>
+                <a:spcPct val="110000"/>
+              </a:lnSpc>
+              <a:spcBef>
+                <a:spcPts val="500"/>
+              </a:spcBef>
+              <a:spcAft>
+                <a:spcPts val="0"/>
+              </a:spcAft>
+              <a:buClr>
+                <a:schemeClr val="dk1"/>
+              </a:buClr>
+              <a:buSzPts val="1800"/>
+              <a:buChar char="−"/>
+              <a:defRPr/>
+            </a:lvl3pPr>
+            <a:lvl4pPr indent="-342900" lvl="3" marL="1828800" algn="l">
+              <a:lnSpc>
+                <a:spcPct val="90000"/>
+              </a:lnSpc>
+              <a:spcBef>
+                <a:spcPts val="500"/>
+              </a:spcBef>
+              <a:spcAft>
+                <a:spcPts val="0"/>
+              </a:spcAft>
+              <a:buClr>
+                <a:schemeClr val="dk1"/>
+              </a:buClr>
+              <a:buSzPts val="1800"/>
+              <a:buChar char="•"/>
+              <a:defRPr/>
+            </a:lvl4pPr>
+            <a:lvl5pPr indent="-342900" lvl="4" marL="2286000" algn="l">
+              <a:lnSpc>
+                <a:spcPct val="90000"/>
+              </a:lnSpc>
+              <a:spcBef>
+                <a:spcPts val="500"/>
+              </a:spcBef>
+              <a:spcAft>
+                <a:spcPts val="0"/>
+              </a:spcAft>
+              <a:buClr>
+                <a:schemeClr val="dk1"/>
+              </a:buClr>
+              <a:buSzPts val="1800"/>
+              <a:buChar char="•"/>
+              <a:defRPr/>
+            </a:lvl5pPr>
+            <a:lvl6pPr indent="-342900" lvl="5" marL="2743200" algn="l">
+              <a:lnSpc>
+                <a:spcPct val="90000"/>
+              </a:lnSpc>
+              <a:spcBef>
+                <a:spcPts val="500"/>
+              </a:spcBef>
+              <a:spcAft>
+                <a:spcPts val="0"/>
+              </a:spcAft>
+              <a:buClr>
+                <a:schemeClr val="dk1"/>
+              </a:buClr>
+              <a:buSzPts val="1800"/>
+              <a:buChar char="•"/>
+              <a:defRPr/>
+            </a:lvl6pPr>
+            <a:lvl7pPr indent="-342900" lvl="6" marL="3200400" algn="l">
+              <a:lnSpc>
+                <a:spcPct val="90000"/>
+              </a:lnSpc>
+              <a:spcBef>
+                <a:spcPts val="500"/>
+              </a:spcBef>
+              <a:spcAft>
+                <a:spcPts val="0"/>
+              </a:spcAft>
+              <a:buClr>
+                <a:schemeClr val="dk1"/>
+              </a:buClr>
+              <a:buSzPts val="1800"/>
+              <a:buChar char="•"/>
+              <a:defRPr/>
+            </a:lvl7pPr>
+            <a:lvl8pPr indent="-342900" lvl="7" marL="3657600" algn="l">
+              <a:lnSpc>
+                <a:spcPct val="90000"/>
+              </a:lnSpc>
+              <a:spcBef>
+                <a:spcPts val="500"/>
+              </a:spcBef>
+              <a:spcAft>
+                <a:spcPts val="0"/>
+              </a:spcAft>
+              <a:buClr>
+                <a:schemeClr val="dk1"/>
+              </a:buClr>
+              <a:buSzPts val="1800"/>
+              <a:buChar char="•"/>
+              <a:defRPr/>
+            </a:lvl8pPr>
+            <a:lvl9pPr indent="-342900" lvl="8" marL="4114800" algn="l">
+              <a:lnSpc>
+                <a:spcPct val="90000"/>
+              </a:lnSpc>
+              <a:spcBef>
+                <a:spcPts val="500"/>
+              </a:spcBef>
+              <a:spcAft>
+                <a:spcPts val="0"/>
+              </a:spcAft>
+              <a:buClr>
+                <a:schemeClr val="dk1"/>
+              </a:buClr>
+              <a:buSzPts val="1800"/>
+              <a:buChar char="•"/>
+              <a:defRPr/>
+            </a:lvl9pPr>
+          </a:lstStyle>
+          <a:p/>
+        </p:txBody>
+      </p:sp>
+      <p:sp>
+        <p:nvSpPr>
+          <p:cNvPr id="168" name="Google Shape;168;p26"/>
           <p:cNvSpPr txBox="1"/>
           <p:nvPr>
             <p:ph type="title"/>
@@ -3687,8 +3353,8 @@
         </p:nvSpPr>
         <p:spPr>
           <a:xfrm>
-            <a:off x="658813" y="692150"/>
-            <a:ext cx="6192838" cy="1380285"/>
+            <a:off x="677334" y="692150"/>
+            <a:ext cx="10855854" cy="644241"/>
           </a:xfrm>
           <a:prstGeom prst="rect">
             <a:avLst/>
@@ -3705,7 +3371,7 @@
           <a:lstStyle>
             <a:lvl1pPr lvl="0" algn="l">
               <a:lnSpc>
-                <a:spcPct val="80000"/>
+                <a:spcPct val="90000"/>
               </a:lnSpc>
               <a:spcBef>
                 <a:spcPts val="0"/>
@@ -3714,14 +3380,14 @@
                 <a:spcPts val="0"/>
               </a:spcAft>
               <a:buClr>
-                <a:schemeClr val="lt2"/>
+                <a:schemeClr val="accent1"/>
               </a:buClr>
-              <a:buSzPts val="4800"/>
+              <a:buSzPts val="3600"/>
               <a:buFont typeface="Play"/>
               <a:buNone/>
-              <a:defRPr sz="4800">
+              <a:defRPr>
                 <a:solidFill>
-                  <a:schemeClr val="lt2"/>
+                  <a:schemeClr val="accent1"/>
                 </a:solidFill>
               </a:defRPr>
             </a:lvl1pPr>
@@ -3816,253 +3482,6 @@
           </a:lstStyle>
           <a:p/>
         </p:txBody>
-      </p:sp>
-      <p:sp>
-        <p:nvSpPr>
-          <p:cNvPr id="78" name="Google Shape;78;p6"/>
-          <p:cNvSpPr txBox="1"/>
-          <p:nvPr>
-            <p:ph idx="1" type="body"/>
-          </p:nvPr>
-        </p:nvSpPr>
-        <p:spPr>
-          <a:xfrm>
-            <a:off x="658813" y="2357767"/>
-            <a:ext cx="5142954" cy="2142466"/>
-          </a:xfrm>
-          <a:prstGeom prst="rect">
-            <a:avLst/>
-          </a:prstGeom>
-          <a:noFill/>
-          <a:ln>
-            <a:noFill/>
-          </a:ln>
-        </p:spPr>
-        <p:txBody>
-          <a:bodyPr anchorCtr="0" anchor="t" bIns="0" lIns="0" spcFirstLastPara="1" rIns="0" wrap="square" tIns="0">
-            <a:noAutofit/>
-          </a:bodyPr>
-          <a:lstStyle>
-            <a:lvl1pPr indent="-228600" lvl="0" marL="457200" algn="l">
-              <a:lnSpc>
-                <a:spcPct val="100000"/>
-              </a:lnSpc>
-              <a:spcBef>
-                <a:spcPts val="0"/>
-              </a:spcBef>
-              <a:spcAft>
-                <a:spcPts val="0"/>
-              </a:spcAft>
-              <a:buClr>
-                <a:schemeClr val="lt2"/>
-              </a:buClr>
-              <a:buSzPts val="2000"/>
-              <a:buNone/>
-              <a:defRPr b="0" i="0" sz="2000">
-                <a:solidFill>
-                  <a:schemeClr val="lt2"/>
-                </a:solidFill>
-                <a:latin typeface="Play"/>
-                <a:ea typeface="Play"/>
-                <a:cs typeface="Play"/>
-                <a:sym typeface="Play"/>
-              </a:defRPr>
-            </a:lvl1pPr>
-            <a:lvl2pPr indent="-228600" lvl="1" marL="914400" algn="l">
-              <a:lnSpc>
-                <a:spcPct val="110000"/>
-              </a:lnSpc>
-              <a:spcBef>
-                <a:spcPts val="500"/>
-              </a:spcBef>
-              <a:spcAft>
-                <a:spcPts val="0"/>
-              </a:spcAft>
-              <a:buSzPts val="1400"/>
-              <a:buNone/>
-              <a:defRPr b="0" i="0">
-                <a:solidFill>
-                  <a:schemeClr val="lt2"/>
-                </a:solidFill>
-                <a:latin typeface="Play"/>
-                <a:ea typeface="Play"/>
-                <a:cs typeface="Play"/>
-                <a:sym typeface="Play"/>
-              </a:defRPr>
-            </a:lvl2pPr>
-            <a:lvl3pPr indent="-342900" lvl="2" marL="1371600" algn="l">
-              <a:lnSpc>
-                <a:spcPct val="110000"/>
-              </a:lnSpc>
-              <a:spcBef>
-                <a:spcPts val="500"/>
-              </a:spcBef>
-              <a:spcAft>
-                <a:spcPts val="0"/>
-              </a:spcAft>
-              <a:buClr>
-                <a:schemeClr val="dk1"/>
-              </a:buClr>
-              <a:buSzPts val="1800"/>
-              <a:buChar char="−"/>
-              <a:defRPr/>
-            </a:lvl3pPr>
-            <a:lvl4pPr indent="-342900" lvl="3" marL="1828800" algn="l">
-              <a:lnSpc>
-                <a:spcPct val="90000"/>
-              </a:lnSpc>
-              <a:spcBef>
-                <a:spcPts val="500"/>
-              </a:spcBef>
-              <a:spcAft>
-                <a:spcPts val="0"/>
-              </a:spcAft>
-              <a:buClr>
-                <a:schemeClr val="dk1"/>
-              </a:buClr>
-              <a:buSzPts val="1800"/>
-              <a:buChar char="•"/>
-              <a:defRPr/>
-            </a:lvl4pPr>
-            <a:lvl5pPr indent="-342900" lvl="4" marL="2286000" algn="l">
-              <a:lnSpc>
-                <a:spcPct val="90000"/>
-              </a:lnSpc>
-              <a:spcBef>
-                <a:spcPts val="500"/>
-              </a:spcBef>
-              <a:spcAft>
-                <a:spcPts val="0"/>
-              </a:spcAft>
-              <a:buClr>
-                <a:schemeClr val="dk1"/>
-              </a:buClr>
-              <a:buSzPts val="1800"/>
-              <a:buChar char="•"/>
-              <a:defRPr/>
-            </a:lvl5pPr>
-            <a:lvl6pPr indent="-342900" lvl="5" marL="2743200" algn="l">
-              <a:lnSpc>
-                <a:spcPct val="90000"/>
-              </a:lnSpc>
-              <a:spcBef>
-                <a:spcPts val="500"/>
-              </a:spcBef>
-              <a:spcAft>
-                <a:spcPts val="0"/>
-              </a:spcAft>
-              <a:buClr>
-                <a:schemeClr val="dk1"/>
-              </a:buClr>
-              <a:buSzPts val="1800"/>
-              <a:buChar char="•"/>
-              <a:defRPr/>
-            </a:lvl6pPr>
-            <a:lvl7pPr indent="-342900" lvl="6" marL="3200400" algn="l">
-              <a:lnSpc>
-                <a:spcPct val="90000"/>
-              </a:lnSpc>
-              <a:spcBef>
-                <a:spcPts val="500"/>
-              </a:spcBef>
-              <a:spcAft>
-                <a:spcPts val="0"/>
-              </a:spcAft>
-              <a:buClr>
-                <a:schemeClr val="dk1"/>
-              </a:buClr>
-              <a:buSzPts val="1800"/>
-              <a:buChar char="•"/>
-              <a:defRPr/>
-            </a:lvl7pPr>
-            <a:lvl8pPr indent="-342900" lvl="7" marL="3657600" algn="l">
-              <a:lnSpc>
-                <a:spcPct val="90000"/>
-              </a:lnSpc>
-              <a:spcBef>
-                <a:spcPts val="500"/>
-              </a:spcBef>
-              <a:spcAft>
-                <a:spcPts val="0"/>
-              </a:spcAft>
-              <a:buClr>
-                <a:schemeClr val="dk1"/>
-              </a:buClr>
-              <a:buSzPts val="1800"/>
-              <a:buChar char="•"/>
-              <a:defRPr/>
-            </a:lvl8pPr>
-            <a:lvl9pPr indent="-342900" lvl="8" marL="4114800" algn="l">
-              <a:lnSpc>
-                <a:spcPct val="90000"/>
-              </a:lnSpc>
-              <a:spcBef>
-                <a:spcPts val="500"/>
-              </a:spcBef>
-              <a:spcAft>
-                <a:spcPts val="0"/>
-              </a:spcAft>
-              <a:buClr>
-                <a:schemeClr val="dk1"/>
-              </a:buClr>
-              <a:buSzPts val="1800"/>
-              <a:buChar char="•"/>
-              <a:defRPr/>
-            </a:lvl9pPr>
-          </a:lstStyle>
-          <a:p/>
-        </p:txBody>
-      </p:sp>
-      <p:pic>
-        <p:nvPicPr>
-          <p:cNvPr id="79" name="Google Shape;79;p6"/>
-          <p:cNvPicPr preferRelativeResize="0"/>
-          <p:nvPr/>
-        </p:nvPicPr>
-        <p:blipFill rotWithShape="1">
-          <a:blip r:embed="rId2">
-            <a:alphaModFix/>
-          </a:blip>
-          <a:srcRect b="0" l="0" r="0" t="0"/>
-          <a:stretch/>
-        </p:blipFill>
-        <p:spPr>
-          <a:xfrm>
-            <a:off x="658813" y="5711140"/>
-            <a:ext cx="2772297" cy="489635"/>
-          </a:xfrm>
-          <a:prstGeom prst="rect">
-            <a:avLst/>
-          </a:prstGeom>
-          <a:noFill/>
-          <a:ln>
-            <a:noFill/>
-          </a:ln>
-        </p:spPr>
-      </p:pic>
-      <p:sp>
-        <p:nvSpPr>
-          <p:cNvPr id="80" name="Google Shape;80;p6"/>
-          <p:cNvSpPr/>
-          <p:nvPr>
-            <p:ph idx="2" type="pic"/>
-          </p:nvPr>
-        </p:nvSpPr>
-        <p:spPr>
-          <a:xfrm>
-            <a:off x="6096000" y="0"/>
-            <a:ext cx="6096000" cy="6858000"/>
-          </a:xfrm>
-          <a:prstGeom prst="rect">
-            <a:avLst/>
-          </a:prstGeom>
-          <a:solidFill>
-            <a:schemeClr val="lt2"/>
-          </a:solidFill>
-          <a:ln>
-            <a:noFill/>
-          </a:ln>
-        </p:spPr>
       </p:sp>
     </p:spTree>
   </p:cSld>
@@ -5699,10 +5118,9 @@
   <p:clrMap accent1="accent1" accent2="accent2" accent3="accent3" accent4="accent4" accent5="accent5" accent6="accent6" bg1="lt1" bg2="dk2" tx1="dk1" tx2="lt2" folHlink="folHlink" hlink="hlink"/>
   <p:sldLayoutIdLst>
     <p:sldLayoutId id="2147483648" r:id="rId1"/>
-    <p:sldLayoutId id="2147483652" r:id="rId5"/>
     <p:sldLayoutId id="2147483653" r:id="rId6"/>
-    <p:sldLayoutId id="2147483659" r:id="rId12"/>
     <p:sldLayoutId id="2147483671" r:id="rId24"/>
+    <p:sldLayoutId id="2147483672" r:id="rId25"/>
   </p:sldLayoutIdLst>
   <p:hf dt="0" ftr="0" hdr="0" sldNum="0"/>
   <p:txStyles>
@@ -8648,7 +8066,7 @@
           </a:ln>
         </p:spPr>
         <p:txBody>
-          <a:bodyPr anchorCtr="0" anchor="t" bIns="0" lIns="0" spcFirstLastPara="1" rIns="0" wrap="square" tIns="0">
+          <a:bodyPr anchorCtr="0" anchor="t" bIns="0" lIns="0" spcFirstLastPara="1" rIns="0" wrap="square" tIns="0" vert="horz">
             <a:normAutofit/>
           </a:bodyPr>
           <a:lstStyle/>
@@ -8676,7 +8094,7 @@
                   <a:srgbClr val="000000"/>
                 </a:solidFill>
               </a:rPr>
-              <a:t>Автоматизация ответов сотрудников по регламентам</a:t>
+              <a:t>Инициатива по внедрению ИИ-помощника для автоматизации ответов сотрудников</a:t>
             </a:r>
             <a:endParaRPr/>
           </a:p>
@@ -8704,7 +8122,7 @@
           </a:ln>
         </p:spPr>
         <p:txBody>
-          <a:bodyPr anchorCtr="0" anchor="t" bIns="0" lIns="0" spcFirstLastPara="1" rIns="0" wrap="square" tIns="0">
+          <a:bodyPr anchorCtr="0" anchor="t" bIns="0" lIns="0" spcFirstLastPara="1" rIns="0" wrap="square" tIns="0" vert="horz">
             <a:normAutofit/>
           </a:bodyPr>
           <a:lstStyle/>
@@ -8758,6 +8176,75 @@
       <p:grpSpPr/>
       <p:sp>
         <p:nvSpPr>
+          <p:cNvPr id="2" name="BrandDeck Text 2"/>
+          <p:cNvSpPr>
+            <a:spLocks noGrp="1"/>
+          </p:cNvSpPr>
+          <p:nvPr>
+            <p:ph type="body" idx="1"/>
+          </p:nvPr>
+        </p:nvSpPr>
+        <p:spPr/>
+        <p:txBody>
+          <a:bodyPr vert="horz" wrap="square" anchor="t">
+            <a:normAutofit/>
+          </a:bodyPr>
+          <a:lstStyle/>
+          <a:p>
+            <a:pPr>
+              <a:lnSpc>
+                <a:spcPct val="115000"/>
+              </a:lnSpc>
+              <a:spcBef>
+                <a:spcPts val="0"/>
+              </a:spcBef>
+              <a:spcAft>
+                <a:spcPts val="240"/>
+              </a:spcAft>
+            </a:pPr>
+            <a:r>
+              <a:rPr sz="1600"/>
+              <a:t>Просим одобрить запуск пилота ИИ-помощника.</a:t>
+            </a:r>
+          </a:p>
+          <a:p>
+            <a:pPr>
+              <a:lnSpc>
+                <a:spcPct val="115000"/>
+              </a:lnSpc>
+              <a:spcBef>
+                <a:spcPts val="0"/>
+              </a:spcBef>
+              <a:spcAft>
+                <a:spcPts val="240"/>
+              </a:spcAft>
+            </a:pPr>
+            <a:r>
+              <a:rPr sz="1600"/>
+              <a:t>Необходимо выделить команду из 3 человек для реализации.</a:t>
+            </a:r>
+          </a:p>
+          <a:p>
+            <a:pPr>
+              <a:lnSpc>
+                <a:spcPct val="115000"/>
+              </a:lnSpc>
+              <a:spcBef>
+                <a:spcPts val="0"/>
+              </a:spcBef>
+              <a:spcAft>
+                <a:spcPts val="240"/>
+              </a:spcAft>
+            </a:pPr>
+            <a:r>
+              <a:rPr sz="1600"/>
+              <a:t>Решение требуется для начала работ по пилоту.</a:t>
+            </a:r>
+          </a:p>
+        </p:txBody>
+      </p:sp>
+      <p:sp>
+        <p:nvSpPr>
           <p:cNvPr id="3" name="BrandDeck Text 3"/>
           <p:cNvSpPr>
             <a:spLocks noGrp="1"/>
@@ -8773,7 +8260,7 @@
           </a:xfrm>
         </p:spPr>
         <p:txBody>
-          <a:bodyPr wrap="square" anchor="t">
+          <a:bodyPr vert="horz" wrap="square" anchor="t">
             <a:normAutofit/>
           </a:bodyPr>
           <a:lstStyle/>
@@ -8786,6 +8273,68 @@
                 <a:spcPts val="0"/>
               </a:spcBef>
               <a:spcAft>
+                <a:spcPts val="359"/>
+              </a:spcAft>
+            </a:pPr>
+            <a:r>
+              <a:rPr sz="2400">
+                <a:solidFill>
+                  <a:srgbClr val="000000"/>
+                </a:solidFill>
+              </a:rPr>
+              <a:t>Одобрить пилот и выделить команду из 3 человек</a:t>
+            </a:r>
+          </a:p>
+        </p:txBody>
+      </p:sp>
+    </p:spTree>
+  </p:cSld>
+  <p:clrMapOvr>
+    <a:masterClrMapping/>
+  </p:clrMapOvr>
+</p:sld>
+</file>
+
+<file path=ppt/slides/slide2.xml><?xml version="1.0" encoding="utf-8"?>
+<p:sld xmlns:a="http://schemas.openxmlformats.org/drawingml/2006/main" xmlns:p="http://schemas.openxmlformats.org/presentationml/2006/main" xmlns:r="http://schemas.openxmlformats.org/officeDocument/2006/relationships">
+  <p:cSld>
+    <p:spTree>
+      <p:nvGrpSpPr>
+        <p:cNvPr id="1" name=""/>
+        <p:cNvGrpSpPr/>
+        <p:nvPr/>
+      </p:nvGrpSpPr>
+      <p:grpSpPr/>
+      <p:sp>
+        <p:nvSpPr>
+          <p:cNvPr id="3" name="BrandDeck Text 3"/>
+          <p:cNvSpPr>
+            <a:spLocks noGrp="1"/>
+          </p:cNvSpPr>
+          <p:nvPr>
+            <p:ph type="title"/>
+          </p:nvPr>
+        </p:nvSpPr>
+        <p:spPr>
+          <a:xfrm>
+            <a:off x="677334" y="692150"/>
+            <a:ext cx="10855854" cy="644241"/>
+          </a:xfrm>
+        </p:spPr>
+        <p:txBody>
+          <a:bodyPr vert="horz" wrap="square" anchor="t">
+            <a:normAutofit/>
+          </a:bodyPr>
+          <a:lstStyle/>
+          <a:p>
+            <a:pPr algn="l">
+              <a:lnSpc>
+                <a:spcPct val="115000"/>
+              </a:lnSpc>
+              <a:spcBef>
+                <a:spcPts val="0"/>
+              </a:spcBef>
+              <a:spcAft>
                 <a:spcPts val="254"/>
               </a:spcAft>
             </a:pPr>
@@ -8795,23 +8344,23 @@
                   <a:srgbClr val="000000"/>
                 </a:solidFill>
               </a:rPr>
-              <a:t>Модель с открытыми весами работает внутри контура, документы не покидают периметр</a:t>
+              <a:t>Поиск инструкции занимает до 30 минут, а треть обращений — повторяющиеся вопросы</a:t>
             </a:r>
           </a:p>
         </p:txBody>
       </p:sp>
       <p:grpSp>
         <p:nvGrpSpPr>
-          <p:cNvPr id="2" name="BrandDeck Diagram icon_grid" descr="icon_grid: Модель с открытыми весами работает строго внутри контура компании.; Документы не покидают периметр и не уходят наружу.; Обеспечивается безопасность данных при обработке запросов."/>
+          <p:cNvPr id="2" name="BrandDeck Diagram icon_grid" descr="icon_grid: Время поиска до 30 минут; Повторяющиеся вопросы треть обращений"/>
           <p:cNvGrpSpPr/>
           <p:nvPr/>
         </p:nvGrpSpPr>
         <p:grpSpPr>
           <a:xfrm>
-            <a:off x="658813" y="2405806"/>
-            <a:ext cx="10874374" cy="2783294"/>
-            <a:chOff x="658813" y="2405806"/>
-            <a:chExt cx="10874374" cy="2783294"/>
+            <a:off x="658813" y="2625612"/>
+            <a:ext cx="10874375" cy="2743200"/>
+            <a:chOff x="658813" y="2625612"/>
+            <a:chExt cx="10874375" cy="2743200"/>
           </a:xfrm>
         </p:grpSpPr>
         <p:sp>
@@ -8822,8 +8371,8 @@
           </p:nvSpPr>
           <p:spPr>
             <a:xfrm>
-              <a:off x="658813" y="2405806"/>
-              <a:ext cx="5328443" cy="1282903"/>
+              <a:off x="658813" y="2625612"/>
+              <a:ext cx="6307137" cy="2743200"/>
             </a:xfrm>
             <a:prstGeom prst="roundRect">
               <a:avLst>
@@ -8853,8 +8402,8 @@
           </p:nvSpPr>
           <p:spPr>
             <a:xfrm>
-              <a:off x="878269" y="2751126"/>
-              <a:ext cx="592264" cy="592264"/>
+              <a:off x="878269" y="3695460"/>
+              <a:ext cx="603504" cy="603504"/>
             </a:xfrm>
             <a:prstGeom prst="ellipse">
               <a:avLst/>
@@ -8876,14 +8425,14 @@
         </p:sp>
         <p:sp>
           <p:nvSpPr>
-            <p:cNvPr id="6" name="BrandDeck Icon brain"/>
+            <p:cNvPr id="6" name="BrandDeck Icon clock"/>
             <p:cNvSpPr/>
             <p:nvPr/>
           </p:nvSpPr>
           <p:spPr>
             <a:xfrm>
-              <a:off x="1008567" y="2881424"/>
-              <a:ext cx="331668" cy="331668"/>
+              <a:off x="1011039" y="3828231"/>
+              <a:ext cx="337962" cy="337962"/>
             </a:xfrm>
             <a:custGeom>
               <a:avLst/>
@@ -8894,195 +8443,45 @@
               <a:pathLst>
                 <a:path w="24000" h="24000" fill="none">
                   <a:moveTo>
-                    <a:pt x="12000" y="5000"/>
+                    <a:pt x="22000" y="12000"/>
                   </a:moveTo>
                   <a:cubicBezTo>
-                    <a:pt x="12003" y="3911"/>
-                    <a:pt x="11416" y="2906"/>
-                    <a:pt x="10466" y="2374"/>
+                    <a:pt x="22000" y="17523"/>
+                    <a:pt x="17523" y="22000"/>
+                    <a:pt x="12000" y="22000"/>
                   </a:cubicBezTo>
                   <a:cubicBezTo>
-                    <a:pt x="9516" y="1842"/>
-                    <a:pt x="8353" y="1866"/>
-                    <a:pt x="7426" y="2437"/>
+                    <a:pt x="6477" y="22000"/>
+                    <a:pt x="2000" y="17523"/>
+                    <a:pt x="2000" y="12000"/>
                   </a:cubicBezTo>
                   <a:cubicBezTo>
-                    <a:pt x="6499" y="3009"/>
-                    <a:pt x="5954" y="4037"/>
-                    <a:pt x="6003" y="5125"/>
+                    <a:pt x="2000" y="6477"/>
+                    <a:pt x="6477" y="2000"/>
+                    <a:pt x="12000" y="2000"/>
                   </a:cubicBezTo>
                   <a:cubicBezTo>
-                    <a:pt x="4812" y="5431"/>
-                    <a:pt x="3828" y="6268"/>
-                    <a:pt x="3335" y="7395"/>
-                  </a:cubicBezTo>
-                  <a:cubicBezTo>
-                    <a:pt x="2842" y="8521"/>
-                    <a:pt x="2894" y="9812"/>
-                    <a:pt x="3477" y="10895"/>
-                  </a:cubicBezTo>
-                  <a:cubicBezTo>
-                    <a:pt x="2450" y="11729"/>
-                    <a:pt x="1902" y="13018"/>
-                    <a:pt x="2013" y="14336"/>
-                  </a:cubicBezTo>
-                  <a:cubicBezTo>
-                    <a:pt x="2125" y="15654"/>
-                    <a:pt x="2881" y="16833"/>
-                    <a:pt x="4033" y="17483"/>
-                  </a:cubicBezTo>
-                  <a:cubicBezTo>
-                    <a:pt x="3842" y="18961"/>
-                    <a:pt x="4488" y="20422"/>
-                    <a:pt x="5710" y="21275"/>
-                  </a:cubicBezTo>
-                  <a:cubicBezTo>
-                    <a:pt x="6931" y="22128"/>
-                    <a:pt x="8526" y="22232"/>
-                    <a:pt x="9847" y="21544"/>
-                  </a:cubicBezTo>
-                  <a:cubicBezTo>
-                    <a:pt x="11169" y="20856"/>
-                    <a:pt x="11998" y="19490"/>
-                    <a:pt x="12000" y="18000"/>
+                    <a:pt x="17523" y="2000"/>
+                    <a:pt x="22000" y="6477"/>
+                    <a:pt x="22000" y="12000"/>
                   </a:cubicBezTo>
                   <a:close/>
                 </a:path>
                 <a:path w="24000" h="24000" fill="none">
                   <a:moveTo>
-                    <a:pt x="12000" y="5000"/>
+                    <a:pt x="12000" y="6000"/>
                   </a:moveTo>
-                  <a:cubicBezTo>
-                    <a:pt x="11997" y="3911"/>
-                    <a:pt x="12584" y="2906"/>
-                    <a:pt x="13534" y="2374"/>
-                  </a:cubicBezTo>
-                  <a:cubicBezTo>
-                    <a:pt x="14484" y="1842"/>
-                    <a:pt x="15647" y="1866"/>
-                    <a:pt x="16574" y="2437"/>
-                  </a:cubicBezTo>
-                  <a:cubicBezTo>
-                    <a:pt x="17501" y="3009"/>
-                    <a:pt x="18046" y="4037"/>
-                    <a:pt x="17997" y="5125"/>
-                  </a:cubicBezTo>
-                  <a:cubicBezTo>
-                    <a:pt x="19188" y="5431"/>
-                    <a:pt x="20172" y="6268"/>
-                    <a:pt x="20665" y="7395"/>
-                  </a:cubicBezTo>
-                  <a:cubicBezTo>
-                    <a:pt x="21158" y="8521"/>
-                    <a:pt x="21106" y="9812"/>
-                    <a:pt x="20523" y="10895"/>
-                  </a:cubicBezTo>
-                  <a:cubicBezTo>
-                    <a:pt x="21550" y="11729"/>
-                    <a:pt x="22098" y="13018"/>
-                    <a:pt x="21987" y="14336"/>
-                  </a:cubicBezTo>
-                  <a:cubicBezTo>
-                    <a:pt x="21875" y="15654"/>
-                    <a:pt x="21119" y="16833"/>
-                    <a:pt x="19967" y="17483"/>
-                  </a:cubicBezTo>
-                  <a:cubicBezTo>
-                    <a:pt x="20158" y="18961"/>
-                    <a:pt x="19512" y="20422"/>
-                    <a:pt x="18290" y="21275"/>
-                  </a:cubicBezTo>
-                  <a:cubicBezTo>
-                    <a:pt x="17069" y="22128"/>
-                    <a:pt x="15474" y="22232"/>
-                    <a:pt x="14153" y="21544"/>
-                  </a:cubicBezTo>
-                  <a:cubicBezTo>
-                    <a:pt x="12831" y="20856"/>
-                    <a:pt x="12002" y="19490"/>
-                    <a:pt x="12000" y="18000"/>
-                  </a:cubicBezTo>
-                  <a:close/>
-                </a:path>
-                <a:path w="24000" h="24000" fill="none">
-                  <a:moveTo>
-                    <a:pt x="15000" y="13000"/>
-                  </a:moveTo>
-                  <a:cubicBezTo>
-                    <a:pt x="13283" y="12396"/>
-                    <a:pt x="12099" y="10817"/>
-                    <a:pt x="12000" y="9000"/>
-                  </a:cubicBezTo>
-                  <a:cubicBezTo>
-                    <a:pt x="11901" y="10817"/>
-                    <a:pt x="10717" y="12396"/>
-                    <a:pt x="9000" y="13000"/>
-                  </a:cubicBezTo>
-                </a:path>
-                <a:path w="24000" h="24000" fill="none">
-                  <a:moveTo>
-                    <a:pt x="17599" y="6500"/>
-                  </a:moveTo>
-                  <a:cubicBezTo>
-                    <a:pt x="17841" y="6081"/>
-                    <a:pt x="17978" y="5609"/>
-                    <a:pt x="17998" y="5125"/>
-                  </a:cubicBezTo>
-                </a:path>
-                <a:path w="24000" h="24000" fill="none">
-                  <a:moveTo>
-                    <a:pt x="6003" y="5125"/>
-                  </a:moveTo>
-                  <a:cubicBezTo>
-                    <a:pt x="6023" y="5609"/>
-                    <a:pt x="6159" y="6080"/>
-                    <a:pt x="6401" y="6500"/>
-                  </a:cubicBezTo>
-                </a:path>
-                <a:path w="24000" h="24000" fill="none">
-                  <a:moveTo>
-                    <a:pt x="3477" y="10896"/>
-                  </a:moveTo>
-                  <a:cubicBezTo>
-                    <a:pt x="3660" y="10747"/>
-                    <a:pt x="3856" y="10614"/>
-                    <a:pt x="4062" y="10500"/>
-                  </a:cubicBezTo>
-                </a:path>
-                <a:path w="24000" h="24000" fill="none">
-                  <a:moveTo>
-                    <a:pt x="19938" y="10500"/>
-                  </a:moveTo>
-                  <a:cubicBezTo>
-                    <a:pt x="20144" y="10614"/>
-                    <a:pt x="20340" y="10747"/>
-                    <a:pt x="20523" y="10896"/>
-                  </a:cubicBezTo>
-                </a:path>
-                <a:path w="24000" h="24000" fill="none">
-                  <a:moveTo>
-                    <a:pt x="6000" y="18000"/>
-                  </a:moveTo>
-                  <a:cubicBezTo>
-                    <a:pt x="5311" y="18000"/>
-                    <a:pt x="4633" y="17823"/>
-                    <a:pt x="4033" y="17484"/>
-                  </a:cubicBezTo>
-                </a:path>
-                <a:path w="24000" h="24000" fill="none">
-                  <a:moveTo>
-                    <a:pt x="19967" y="17484"/>
-                  </a:moveTo>
-                  <a:cubicBezTo>
-                    <a:pt x="19367" y="17823"/>
-                    <a:pt x="18689" y="18000"/>
-                    <a:pt x="18000" y="18000"/>
-                  </a:cubicBezTo>
+                  <a:lnTo>
+                    <a:pt x="12000" y="12000"/>
+                  </a:lnTo>
+                  <a:lnTo>
+                    <a:pt x="16000" y="14000"/>
+                  </a:lnTo>
                 </a:path>
               </a:pathLst>
             </a:custGeom>
             <a:noFill/>
-            <a:ln w="27639" cap="rnd">
+            <a:ln w="28163" cap="rnd">
               <a:solidFill>
                 <a:srgbClr val="FFFFFF"/>
               </a:solidFill>
@@ -9105,8 +8504,8 @@
           </p:nvSpPr>
           <p:spPr>
             <a:xfrm>
-              <a:off x="1602207" y="2537480"/>
-              <a:ext cx="4165593" cy="1019556"/>
+              <a:off x="1613446" y="2757286"/>
+              <a:ext cx="5133047" cy="2479852"/>
             </a:xfrm>
             <a:prstGeom prst="rect">
               <a:avLst/>
@@ -9125,13 +8524,32 @@
                 </a:lnSpc>
               </a:pPr>
               <a:r>
+                <a:rPr sz="1800" b="1">
+                  <a:solidFill>
+                    <a:srgbClr val="000000"/>
+                  </a:solidFill>
+                  <a:latin typeface="Play"/>
+                </a:rPr>
+                <a:t>Время поиска</a:t>
+              </a:r>
+            </a:p>
+            <a:p>
+              <a:pPr algn="l">
+                <a:lnSpc>
+                  <a:spcPct val="110000"/>
+                </a:lnSpc>
+                <a:spcBef>
+                  <a:spcPts val="450"/>
+                </a:spcBef>
+              </a:pPr>
+              <a:r>
                 <a:rPr sz="1800" b="0">
                   <a:solidFill>
                     <a:srgbClr val="000000"/>
                   </a:solidFill>
                   <a:latin typeface="Play"/>
                 </a:rPr>
-                <a:t>Модель с открытыми весами работает строго внутри контура компании.</a:t>
+                <a:t>до 30 минут</a:t>
               </a:r>
             </a:p>
           </p:txBody>
@@ -9144,8 +8562,8 @@
           </p:nvSpPr>
           <p:spPr>
             <a:xfrm>
-              <a:off x="6204744" y="2405806"/>
-              <a:ext cx="5328443" cy="1282903"/>
+              <a:off x="7183438" y="2625612"/>
+              <a:ext cx="4349750" cy="2743200"/>
             </a:xfrm>
             <a:prstGeom prst="roundRect">
               <a:avLst>
@@ -9175,8 +8593,8 @@
           </p:nvSpPr>
           <p:spPr>
             <a:xfrm>
-              <a:off x="6424200" y="2751126"/>
-              <a:ext cx="592264" cy="592264"/>
+              <a:off x="7402894" y="3695460"/>
+              <a:ext cx="603504" cy="603504"/>
             </a:xfrm>
             <a:prstGeom prst="ellipse">
               <a:avLst/>
@@ -9198,14 +8616,554 @@
         </p:sp>
         <p:sp>
           <p:nvSpPr>
-            <p:cNvPr id="10" name="BrandDeck Icon file-text"/>
+            <p:cNvPr id="10" name="BrandDeck Icon repeat"/>
             <p:cNvSpPr/>
             <p:nvPr/>
           </p:nvSpPr>
           <p:spPr>
             <a:xfrm>
-              <a:off x="6554498" y="2881424"/>
-              <a:ext cx="331668" cy="331668"/>
+              <a:off x="7535664" y="3828231"/>
+              <a:ext cx="337962" cy="337962"/>
+            </a:xfrm>
+            <a:custGeom>
+              <a:avLst/>
+              <a:gdLst/>
+              <a:ahLst/>
+              <a:cxnLst/>
+              <a:rect l="l" t="t" r="r" b="b"/>
+              <a:pathLst>
+                <a:path w="24000" h="24000" fill="none">
+                  <a:moveTo>
+                    <a:pt x="17000" y="2000"/>
+                  </a:moveTo>
+                  <a:lnTo>
+                    <a:pt x="21000" y="6000"/>
+                  </a:lnTo>
+                  <a:lnTo>
+                    <a:pt x="17000" y="10000"/>
+                  </a:lnTo>
+                </a:path>
+                <a:path w="24000" h="24000" fill="none">
+                  <a:moveTo>
+                    <a:pt x="3000" y="11000"/>
+                  </a:moveTo>
+                  <a:lnTo>
+                    <a:pt x="3000" y="10000"/>
+                  </a:lnTo>
+                  <a:cubicBezTo>
+                    <a:pt x="3000" y="7791"/>
+                    <a:pt x="4791" y="6000"/>
+                    <a:pt x="7000" y="6000"/>
+                  </a:cubicBezTo>
+                  <a:lnTo>
+                    <a:pt x="21000" y="6000"/>
+                  </a:lnTo>
+                </a:path>
+                <a:path w="24000" h="24000" fill="none">
+                  <a:moveTo>
+                    <a:pt x="7000" y="22000"/>
+                  </a:moveTo>
+                  <a:lnTo>
+                    <a:pt x="3000" y="18000"/>
+                  </a:lnTo>
+                  <a:lnTo>
+                    <a:pt x="7000" y="14000"/>
+                  </a:lnTo>
+                </a:path>
+                <a:path w="24000" h="24000" fill="none">
+                  <a:moveTo>
+                    <a:pt x="21000" y="13000"/>
+                  </a:moveTo>
+                  <a:lnTo>
+                    <a:pt x="21000" y="14000"/>
+                  </a:lnTo>
+                  <a:cubicBezTo>
+                    <a:pt x="21000" y="16209"/>
+                    <a:pt x="19209" y="18000"/>
+                    <a:pt x="17000" y="18000"/>
+                  </a:cubicBezTo>
+                  <a:lnTo>
+                    <a:pt x="3000" y="18000"/>
+                  </a:lnTo>
+                </a:path>
+              </a:pathLst>
+            </a:custGeom>
+            <a:noFill/>
+            <a:ln w="28163" cap="rnd">
+              <a:solidFill>
+                <a:srgbClr val="FFFFFF"/>
+              </a:solidFill>
+              <a:round/>
+            </a:ln>
+          </p:spPr>
+          <p:txBody>
+            <a:bodyPr rtlCol="0" anchor="ctr"/>
+            <a:lstStyle/>
+            <a:p>
+              <a:pPr algn="ctr"/>
+            </a:p>
+          </p:txBody>
+        </p:sp>
+        <p:sp>
+          <p:nvSpPr>
+            <p:cNvPr id="11" name="BrandDeck Diagram Text 2"/>
+            <p:cNvSpPr txBox="1"/>
+            <p:nvPr/>
+          </p:nvSpPr>
+          <p:spPr>
+            <a:xfrm>
+              <a:off x="8138071" y="2757286"/>
+              <a:ext cx="3175660" cy="2479852"/>
+            </a:xfrm>
+            <a:prstGeom prst="rect">
+              <a:avLst/>
+            </a:prstGeom>
+            <a:noFill/>
+          </p:spPr>
+          <p:txBody>
+            <a:bodyPr wrap="square" anchor="ctr" lIns="36576" tIns="18288" rIns="36576" bIns="18288">
+              <a:noAutofit/>
+            </a:bodyPr>
+            <a:lstStyle/>
+            <a:p>
+              <a:pPr algn="l">
+                <a:lnSpc>
+                  <a:spcPct val="110000"/>
+                </a:lnSpc>
+              </a:pPr>
+              <a:r>
+                <a:rPr sz="1800" b="1">
+                  <a:solidFill>
+                    <a:srgbClr val="000000"/>
+                  </a:solidFill>
+                  <a:latin typeface="Play"/>
+                </a:rPr>
+                <a:t>Повторяющиеся вопросы</a:t>
+              </a:r>
+            </a:p>
+            <a:p>
+              <a:pPr algn="l">
+                <a:lnSpc>
+                  <a:spcPct val="110000"/>
+                </a:lnSpc>
+                <a:spcBef>
+                  <a:spcPts val="450"/>
+                </a:spcBef>
+              </a:pPr>
+              <a:r>
+                <a:rPr sz="1800" b="0">
+                  <a:solidFill>
+                    <a:srgbClr val="000000"/>
+                  </a:solidFill>
+                  <a:latin typeface="Play"/>
+                </a:rPr>
+                <a:t>треть обращений</a:t>
+              </a:r>
+            </a:p>
+          </p:txBody>
+        </p:sp>
+      </p:grpSp>
+    </p:spTree>
+  </p:cSld>
+  <p:clrMapOvr>
+    <a:masterClrMapping/>
+  </p:clrMapOvr>
+</p:sld>
+</file>
+
+<file path=ppt/slides/slide3.xml><?xml version="1.0" encoding="utf-8"?>
+<p:sld xmlns:a="http://schemas.openxmlformats.org/drawingml/2006/main" xmlns:p="http://schemas.openxmlformats.org/presentationml/2006/main" xmlns:r="http://schemas.openxmlformats.org/officeDocument/2006/relationships">
+  <p:cSld>
+    <p:spTree>
+      <p:nvGrpSpPr>
+        <p:cNvPr id="1" name=""/>
+        <p:cNvGrpSpPr/>
+        <p:nvPr/>
+      </p:nvGrpSpPr>
+      <p:grpSpPr/>
+      <p:sp>
+        <p:nvSpPr>
+          <p:cNvPr id="1060" name="BrandDeck Text 1060"/>
+          <p:cNvSpPr txBox="1"/>
+          <p:nvPr>
+            <p:ph type="title"/>
+          </p:nvPr>
+        </p:nvSpPr>
+        <p:spPr>
+          <a:xfrm>
+            <a:off x="677334" y="692150"/>
+            <a:ext cx="10855854" cy="644241"/>
+          </a:xfrm>
+          <a:prstGeom prst="rect">
+            <a:avLst/>
+          </a:prstGeom>
+          <a:noFill/>
+          <a:ln>
+            <a:noFill/>
+          </a:ln>
+        </p:spPr>
+        <p:txBody>
+          <a:bodyPr anchorCtr="0" anchor="t" bIns="0" lIns="0" spcFirstLastPara="1" rIns="0" wrap="square" tIns="0" vert="horz">
+            <a:normAutofit/>
+          </a:bodyPr>
+          <a:lstStyle/>
+          <a:p>
+            <a:pPr indent="0" marL="0" rtl="0" algn="l">
+              <a:lnSpc>
+                <a:spcPct val="115000"/>
+              </a:lnSpc>
+              <a:spcBef>
+                <a:spcPts val="0"/>
+              </a:spcBef>
+              <a:spcAft>
+                <a:spcPts val="270"/>
+              </a:spcAft>
+              <a:buClr>
+                <a:schemeClr val="accent1"/>
+              </a:buClr>
+              <a:buSzPts val="3600"/>
+              <a:buFont typeface="Play"/>
+              <a:buNone/>
+            </a:pPr>
+            <a:r>
+              <a:rPr sz="1800">
+                <a:solidFill>
+                  <a:srgbClr val="000000"/>
+                </a:solidFill>
+              </a:rPr>
+              <a:t>Сотрудники тратят время на поиск, а поддержка обрабатывает повторяющиеся запросы</a:t>
+            </a:r>
+            <a:endParaRPr/>
+          </a:p>
+        </p:txBody>
+      </p:sp>
+      <p:pic>
+        <p:nvPicPr>
+          <p:cNvPr id="1072" name="BrandDeck Image" descr="сотрудник специалист поддержки"/>
+          <p:cNvPicPr>
+            <a:picLocks noChangeAspect="1"/>
+          </p:cNvPicPr>
+          <p:nvPr/>
+        </p:nvPicPr>
+        <p:blipFill>
+          <a:blip r:embed="rId3"/>
+          <a:srcRect l="5955" r="5955"/>
+          <a:stretch>
+            <a:fillRect/>
+          </a:stretch>
+        </p:blipFill>
+        <p:spPr>
+          <a:xfrm>
+            <a:off x="671514" y="1773238"/>
+            <a:ext cx="6929992" cy="4427537"/>
+          </a:xfrm>
+          <a:prstGeom prst="rect">
+            <a:avLst/>
+          </a:prstGeom>
+        </p:spPr>
+      </p:pic>
+      <p:sp>
+        <p:nvSpPr>
+          <p:cNvPr id="1069" name="Google Shape;1069;p83"/>
+          <p:cNvSpPr txBox="1"/>
+          <p:nvPr/>
+        </p:nvSpPr>
+        <p:spPr>
+          <a:xfrm>
+            <a:off x="8355728" y="627078"/>
+            <a:ext cx="3409196" cy="3951457"/>
+          </a:xfrm>
+          <a:prstGeom prst="rect">
+            <a:avLst/>
+          </a:prstGeom>
+          <a:noFill/>
+          <a:ln>
+            <a:noFill/>
+          </a:ln>
+        </p:spPr>
+        <p:txBody>
+          <a:bodyPr anchorCtr="0" anchor="t" bIns="36000" lIns="36000" spcFirstLastPara="1" rIns="36000" wrap="square" tIns="36000">
+            <a:normAutofit/>
+          </a:bodyPr>
+          <a:lstStyle/>
+          <a:p>
+            <a:pPr indent="0" lvl="0" marL="0" marR="0" rtl="0" algn="l">
+              <a:lnSpc>
+                <a:spcPct val="110000"/>
+              </a:lnSpc>
+              <a:spcBef>
+                <a:spcPts val="0"/>
+              </a:spcBef>
+              <a:spcAft>
+                <a:spcPts val="0"/>
+              </a:spcAft>
+              <a:buNone/>
+            </a:pPr>
+            <a:endParaRPr/>
+          </a:p>
+        </p:txBody>
+      </p:sp>
+      <p:cxnSp>
+        <p:nvCxnSpPr>
+          <p:cNvPr id="1070" name="Google Shape;1070;p83"/>
+          <p:cNvCxnSpPr/>
+          <p:nvPr/>
+        </p:nvCxnSpPr>
+        <p:spPr>
+          <a:xfrm flipH="1">
+            <a:off x="8111315" y="692150"/>
+            <a:ext cx="9261" cy="5508625"/>
+          </a:xfrm>
+          <a:prstGeom prst="straightConnector1">
+            <a:avLst/>
+          </a:prstGeom>
+          <a:noFill/>
+          <a:ln cap="flat" cmpd="sng" w="9525">
+            <a:solidFill>
+              <a:srgbClr val="F4F8FB"/>
+            </a:solidFill>
+            <a:prstDash val="solid"/>
+            <a:miter lim="8000"/>
+            <a:headEnd len="sm" w="sm" type="none"/>
+            <a:tailEnd len="sm" w="sm" type="none"/>
+          </a:ln>
+        </p:spPr>
+      </p:cxnSp>
+      <p:sp>
+        <p:nvSpPr>
+          <p:cNvPr id="1071" name="BrandDeck Body"/>
+          <p:cNvSpPr txBox="1"/>
+          <p:nvPr/>
+        </p:nvSpPr>
+        <p:spPr>
+          <a:xfrm>
+            <a:off x="8355728" y="1473551"/>
+            <a:ext cx="3409196" cy="3104984"/>
+          </a:xfrm>
+          <a:prstGeom prst="rect">
+            <a:avLst/>
+          </a:prstGeom>
+          <a:noFill/>
+        </p:spPr>
+        <p:txBody>
+          <a:bodyPr wrap="square" vert="horz" anchor="t" lIns="36576" rIns="36576" tIns="18288" bIns="18288">
+            <a:normAutofit/>
+          </a:bodyPr>
+          <a:lstStyle/>
+          <a:p>
+            <a:pPr algn="l">
+              <a:lnSpc>
+                <a:spcPct val="115000"/>
+              </a:lnSpc>
+              <a:spcBef>
+                <a:spcPts val="0"/>
+              </a:spcBef>
+              <a:spcAft>
+                <a:spcPts val="210"/>
+              </a:spcAft>
+            </a:pPr>
+            <a:r>
+              <a:rPr sz="1400">
+                <a:solidFill>
+                  <a:srgbClr val="000000"/>
+                </a:solidFill>
+                <a:latin typeface="Play"/>
+              </a:rPr>
+              <a:t>• Сотрудники тратят до 30 минут на поиск инструкций.</a:t>
+            </a:r>
+          </a:p>
+          <a:p>
+            <a:pPr algn="l">
+              <a:lnSpc>
+                <a:spcPct val="115000"/>
+              </a:lnSpc>
+              <a:spcBef>
+                <a:spcPts val="0"/>
+              </a:spcBef>
+              <a:spcAft>
+                <a:spcPts val="210"/>
+              </a:spcAft>
+            </a:pPr>
+            <a:r>
+              <a:rPr sz="1400">
+                <a:solidFill>
+                  <a:srgbClr val="000000"/>
+                </a:solidFill>
+                <a:latin typeface="Play"/>
+              </a:rPr>
+              <a:t>• Треть обращений в поддержку — повторяющиеся вопросы.</a:t>
+            </a:r>
+          </a:p>
+          <a:p>
+            <a:pPr algn="l">
+              <a:lnSpc>
+                <a:spcPct val="115000"/>
+              </a:lnSpc>
+              <a:spcBef>
+                <a:spcPts val="0"/>
+              </a:spcBef>
+              <a:spcAft>
+                <a:spcPts val="210"/>
+              </a:spcAft>
+            </a:pPr>
+            <a:r>
+              <a:rPr sz="1400">
+                <a:solidFill>
+                  <a:srgbClr val="000000"/>
+                </a:solidFill>
+                <a:latin typeface="Play"/>
+              </a:rPr>
+              <a:t>• Инициатива направлена на сотрудников и специалистов поддержки.</a:t>
+            </a:r>
+          </a:p>
+        </p:txBody>
+      </p:sp>
+    </p:spTree>
+  </p:cSld>
+  <p:clrMapOvr>
+    <a:masterClrMapping/>
+  </p:clrMapOvr>
+</p:sld>
+</file>
+
+<file path=ppt/slides/slide4.xml><?xml version="1.0" encoding="utf-8"?>
+<p:sld xmlns:a="http://schemas.openxmlformats.org/drawingml/2006/main" xmlns:p="http://schemas.openxmlformats.org/presentationml/2006/main" xmlns:r="http://schemas.openxmlformats.org/officeDocument/2006/relationships">
+  <p:cSld>
+    <p:spTree>
+      <p:nvGrpSpPr>
+        <p:cNvPr id="1" name=""/>
+        <p:cNvGrpSpPr/>
+        <p:nvPr/>
+      </p:nvGrpSpPr>
+      <p:grpSpPr/>
+      <p:sp>
+        <p:nvSpPr>
+          <p:cNvPr id="3" name="BrandDeck Text 3"/>
+          <p:cNvSpPr>
+            <a:spLocks noGrp="1"/>
+          </p:cNvSpPr>
+          <p:nvPr>
+            <p:ph type="title"/>
+          </p:nvPr>
+        </p:nvSpPr>
+        <p:spPr>
+          <a:xfrm>
+            <a:off x="677334" y="692150"/>
+            <a:ext cx="10855854" cy="644241"/>
+          </a:xfrm>
+        </p:spPr>
+        <p:txBody>
+          <a:bodyPr vert="horz" wrap="square" anchor="t">
+            <a:normAutofit/>
+          </a:bodyPr>
+          <a:lstStyle/>
+          <a:p>
+            <a:pPr algn="l">
+              <a:lnSpc>
+                <a:spcPct val="115000"/>
+              </a:lnSpc>
+              <a:spcBef>
+                <a:spcPts val="0"/>
+              </a:spcBef>
+              <a:spcAft>
+                <a:spcPts val="254"/>
+              </a:spcAft>
+            </a:pPr>
+            <a:r>
+              <a:rPr sz="1700">
+                <a:solidFill>
+                  <a:srgbClr val="000000"/>
+                </a:solidFill>
+              </a:rPr>
+              <a:t>ИИ-помощник отвечает на вопросы по регламентам и дает ссылку на документ-источник</a:t>
+            </a:r>
+          </a:p>
+        </p:txBody>
+      </p:sp>
+      <p:grpSp>
+        <p:nvGrpSpPr>
+          <p:cNvPr id="2" name="BrandDeck Diagram icon_grid" descr="icon_grid: Система отвечает на вопросы по регламентам и инструкциям.; При ответе предоставляется ссылка на документ-источник.; При отсутствии ответа вопрос перенаправляется специалисту.; Перенаправление включает контекст для быстрого решения."/>
+          <p:cNvGrpSpPr/>
+          <p:nvPr/>
+        </p:nvGrpSpPr>
+        <p:grpSpPr>
+          <a:xfrm>
+            <a:off x="658813" y="1773238"/>
+            <a:ext cx="10874375" cy="4447949"/>
+            <a:chOff x="658813" y="1773238"/>
+            <a:chExt cx="10874375" cy="4447949"/>
+          </a:xfrm>
+        </p:grpSpPr>
+        <p:sp>
+          <p:nvSpPr>
+            <p:cNvPr id="4" name="BrandDeck Diagram Card 1"/>
+            <p:cNvSpPr/>
+            <p:nvPr/>
+          </p:nvSpPr>
+          <p:spPr>
+            <a:xfrm>
+              <a:off x="658813" y="1773238"/>
+              <a:ext cx="4567237" cy="4447949"/>
+            </a:xfrm>
+            <a:prstGeom prst="roundRect">
+              <a:avLst>
+                <a:gd name="adj" fmla="val 8000"/>
+              </a:avLst>
+            </a:prstGeom>
+            <a:solidFill>
+              <a:srgbClr val="EDF5FF"/>
+            </a:solidFill>
+            <a:ln>
+              <a:noFill/>
+            </a:ln>
+          </p:spPr>
+          <p:txBody>
+            <a:bodyPr rtlCol="0" anchor="ctr"/>
+            <a:lstStyle/>
+            <a:p>
+              <a:pPr algn="ctr"/>
+            </a:p>
+          </p:txBody>
+        </p:sp>
+        <p:sp>
+          <p:nvSpPr>
+            <p:cNvPr id="5" name="BrandDeck Diagram Icon 1 Badge"/>
+            <p:cNvSpPr/>
+            <p:nvPr/>
+          </p:nvSpPr>
+          <p:spPr>
+            <a:xfrm>
+              <a:off x="878269" y="1992694"/>
+              <a:ext cx="603504" cy="603504"/>
+            </a:xfrm>
+            <a:prstGeom prst="ellipse">
+              <a:avLst/>
+            </a:prstGeom>
+            <a:solidFill>
+              <a:srgbClr val="006DEB"/>
+            </a:solidFill>
+            <a:ln>
+              <a:noFill/>
+            </a:ln>
+          </p:spPr>
+          <p:txBody>
+            <a:bodyPr rtlCol="0" anchor="ctr"/>
+            <a:lstStyle/>
+            <a:p>
+              <a:pPr algn="ctr"/>
+            </a:p>
+          </p:txBody>
+        </p:sp>
+        <p:sp>
+          <p:nvSpPr>
+            <p:cNvPr id="6" name="BrandDeck Icon file-text"/>
+            <p:cNvSpPr/>
+            <p:nvPr/>
+          </p:nvSpPr>
+          <p:spPr>
+            <a:xfrm>
+              <a:off x="1011039" y="2125464"/>
+              <a:ext cx="337962" cy="337962"/>
             </a:xfrm>
             <a:custGeom>
               <a:avLst/>
@@ -9290,7 +9248,204 @@
               </a:pathLst>
             </a:custGeom>
             <a:noFill/>
-            <a:ln w="27639" cap="rnd">
+            <a:ln w="28163" cap="rnd">
+              <a:solidFill>
+                <a:srgbClr val="FFFFFF"/>
+              </a:solidFill>
+              <a:round/>
+            </a:ln>
+          </p:spPr>
+          <p:txBody>
+            <a:bodyPr rtlCol="0" anchor="ctr"/>
+            <a:lstStyle/>
+            <a:p>
+              <a:pPr algn="ctr"/>
+            </a:p>
+          </p:txBody>
+        </p:sp>
+        <p:sp>
+          <p:nvSpPr>
+            <p:cNvPr id="7" name="BrandDeck Diagram Text 1"/>
+            <p:cNvSpPr txBox="1"/>
+            <p:nvPr/>
+          </p:nvSpPr>
+          <p:spPr>
+            <a:xfrm>
+              <a:off x="812432" y="2749817"/>
+              <a:ext cx="4259999" cy="3361641"/>
+            </a:xfrm>
+            <a:prstGeom prst="rect">
+              <a:avLst/>
+            </a:prstGeom>
+            <a:noFill/>
+          </p:spPr>
+          <p:txBody>
+            <a:bodyPr wrap="square" anchor="t" lIns="36576" tIns="18288" rIns="36576" bIns="18288">
+              <a:noAutofit/>
+            </a:bodyPr>
+            <a:lstStyle/>
+            <a:p>
+              <a:pPr algn="l">
+                <a:lnSpc>
+                  <a:spcPct val="110000"/>
+                </a:lnSpc>
+              </a:pPr>
+              <a:r>
+                <a:rPr sz="1800" b="0">
+                  <a:solidFill>
+                    <a:srgbClr val="000000"/>
+                  </a:solidFill>
+                  <a:latin typeface="Play"/>
+                </a:rPr>
+                <a:t>Система отвечает на вопросы по регламентам и инструкциям.</a:t>
+              </a:r>
+            </a:p>
+          </p:txBody>
+        </p:sp>
+        <p:sp>
+          <p:nvSpPr>
+            <p:cNvPr id="8" name="BrandDeck Diagram Card 2"/>
+            <p:cNvSpPr/>
+            <p:nvPr/>
+          </p:nvSpPr>
+          <p:spPr>
+            <a:xfrm>
+              <a:off x="5443538" y="1773238"/>
+              <a:ext cx="6089650" cy="1337657"/>
+            </a:xfrm>
+            <a:prstGeom prst="roundRect">
+              <a:avLst>
+                <a:gd name="adj" fmla="val 8000"/>
+              </a:avLst>
+            </a:prstGeom>
+            <a:solidFill>
+              <a:srgbClr val="EDF5FF"/>
+            </a:solidFill>
+            <a:ln>
+              <a:noFill/>
+            </a:ln>
+          </p:spPr>
+          <p:txBody>
+            <a:bodyPr rtlCol="0" anchor="ctr"/>
+            <a:lstStyle/>
+            <a:p>
+              <a:pPr algn="ctr"/>
+            </a:p>
+          </p:txBody>
+        </p:sp>
+        <p:sp>
+          <p:nvSpPr>
+            <p:cNvPr id="9" name="BrandDeck Diagram Icon 2 Badge"/>
+            <p:cNvSpPr/>
+            <p:nvPr/>
+          </p:nvSpPr>
+          <p:spPr>
+            <a:xfrm>
+              <a:off x="5662994" y="2254794"/>
+              <a:ext cx="374544" cy="374544"/>
+            </a:xfrm>
+            <a:prstGeom prst="ellipse">
+              <a:avLst/>
+            </a:prstGeom>
+            <a:solidFill>
+              <a:srgbClr val="006DEB"/>
+            </a:solidFill>
+            <a:ln>
+              <a:noFill/>
+            </a:ln>
+          </p:spPr>
+          <p:txBody>
+            <a:bodyPr rtlCol="0" anchor="ctr"/>
+            <a:lstStyle/>
+            <a:p>
+              <a:pPr algn="ctr"/>
+            </a:p>
+          </p:txBody>
+        </p:sp>
+        <p:sp>
+          <p:nvSpPr>
+            <p:cNvPr id="10" name="BrandDeck Icon link"/>
+            <p:cNvSpPr/>
+            <p:nvPr/>
+          </p:nvSpPr>
+          <p:spPr>
+            <a:xfrm>
+              <a:off x="5745393" y="2337194"/>
+              <a:ext cx="209744" cy="209744"/>
+            </a:xfrm>
+            <a:custGeom>
+              <a:avLst/>
+              <a:gdLst/>
+              <a:ahLst/>
+              <a:cxnLst/>
+              <a:rect l="l" t="t" r="r" b="b"/>
+              <a:pathLst>
+                <a:path w="24000" h="24000" fill="none">
+                  <a:moveTo>
+                    <a:pt x="10000" y="13000"/>
+                  </a:moveTo>
+                  <a:cubicBezTo>
+                    <a:pt x="10869" y="14162"/>
+                    <a:pt x="12200" y="14889"/>
+                    <a:pt x="13647" y="14992"/>
+                  </a:cubicBezTo>
+                  <a:cubicBezTo>
+                    <a:pt x="15094" y="15096"/>
+                    <a:pt x="16514" y="14566"/>
+                    <a:pt x="17540" y="13540"/>
+                  </a:cubicBezTo>
+                  <a:lnTo>
+                    <a:pt x="20540" y="10540"/>
+                  </a:lnTo>
+                  <a:cubicBezTo>
+                    <a:pt x="22435" y="8578"/>
+                    <a:pt x="22408" y="5460"/>
+                    <a:pt x="20479" y="3531"/>
+                  </a:cubicBezTo>
+                  <a:cubicBezTo>
+                    <a:pt x="18550" y="1602"/>
+                    <a:pt x="15432" y="1575"/>
+                    <a:pt x="13470" y="3470"/>
+                  </a:cubicBezTo>
+                  <a:lnTo>
+                    <a:pt x="11750" y="5180"/>
+                  </a:lnTo>
+                </a:path>
+                <a:path w="24000" h="24000" fill="none">
+                  <a:moveTo>
+                    <a:pt x="14000" y="11000"/>
+                  </a:moveTo>
+                  <a:cubicBezTo>
+                    <a:pt x="13131" y="9838"/>
+                    <a:pt x="11800" y="9111"/>
+                    <a:pt x="10353" y="9008"/>
+                  </a:cubicBezTo>
+                  <a:cubicBezTo>
+                    <a:pt x="8906" y="8904"/>
+                    <a:pt x="7486" y="9434"/>
+                    <a:pt x="6460" y="10460"/>
+                  </a:cubicBezTo>
+                  <a:lnTo>
+                    <a:pt x="3460" y="13460"/>
+                  </a:lnTo>
+                  <a:cubicBezTo>
+                    <a:pt x="1565" y="15422"/>
+                    <a:pt x="1592" y="18540"/>
+                    <a:pt x="3521" y="20469"/>
+                  </a:cubicBezTo>
+                  <a:cubicBezTo>
+                    <a:pt x="5450" y="22398"/>
+                    <a:pt x="8568" y="22425"/>
+                    <a:pt x="10530" y="20530"/>
+                  </a:cubicBezTo>
+                  <a:lnTo>
+                    <a:pt x="12240" y="18820"/>
+                  </a:lnTo>
+                </a:path>
+              </a:pathLst>
+            </a:custGeom>
+            <a:noFill/>
+            <a:ln w="17478" cap="rnd">
               <a:solidFill>
                 <a:srgbClr val="FFFFFF"/>
               </a:solidFill>
@@ -9313,8 +9468,8 @@
           </p:nvSpPr>
           <p:spPr>
             <a:xfrm>
-              <a:off x="7148138" y="2537480"/>
-              <a:ext cx="4165593" cy="1019556"/>
+              <a:off x="6169211" y="1904911"/>
+              <a:ext cx="5144520" cy="1074310"/>
             </a:xfrm>
             <a:prstGeom prst="rect">
               <a:avLst/>
@@ -9339,7 +9494,7 @@
                   </a:solidFill>
                   <a:latin typeface="Play"/>
                 </a:rPr>
-                <a:t>Документы не покидают периметр и не уходят наружу.</a:t>
+                <a:t>При ответе предоставляется ссылка на документ-источник.</a:t>
               </a:r>
             </a:p>
           </p:txBody>
@@ -9352,8 +9507,8 @@
           </p:nvSpPr>
           <p:spPr>
             <a:xfrm>
-              <a:off x="658813" y="3906197"/>
-              <a:ext cx="5328443" cy="1282903"/>
+              <a:off x="5443538" y="3328383"/>
+              <a:ext cx="6089650" cy="1337657"/>
             </a:xfrm>
             <a:prstGeom prst="roundRect">
               <a:avLst>
@@ -9383,8 +9538,8 @@
           </p:nvSpPr>
           <p:spPr>
             <a:xfrm>
-              <a:off x="878269" y="4251516"/>
-              <a:ext cx="592264" cy="592264"/>
+              <a:off x="5662994" y="3809940"/>
+              <a:ext cx="374544" cy="374544"/>
             </a:xfrm>
             <a:prstGeom prst="ellipse">
               <a:avLst/>
@@ -9406,744 +9561,14 @@
         </p:sp>
         <p:sp>
           <p:nvSpPr>
-            <p:cNvPr id="14" name="BrandDeck Icon shield-check"/>
+            <p:cNvPr id="14" name="BrandDeck Icon circle-help"/>
             <p:cNvSpPr/>
             <p:nvPr/>
           </p:nvSpPr>
           <p:spPr>
             <a:xfrm>
-              <a:off x="1008567" y="4381815"/>
-              <a:ext cx="331668" cy="331668"/>
-            </a:xfrm>
-            <a:custGeom>
-              <a:avLst/>
-              <a:gdLst/>
-              <a:ahLst/>
-              <a:cxnLst/>
-              <a:rect l="l" t="t" r="r" b="b"/>
-              <a:pathLst>
-                <a:path w="24000" h="24000" fill="none">
-                  <a:moveTo>
-                    <a:pt x="20000" y="13000"/>
-                  </a:moveTo>
-                  <a:cubicBezTo>
-                    <a:pt x="20000" y="18000"/>
-                    <a:pt x="16500" y="20500"/>
-                    <a:pt x="12340" y="21950"/>
-                  </a:cubicBezTo>
-                  <a:cubicBezTo>
-                    <a:pt x="12122" y="22024"/>
-                    <a:pt x="11886" y="22020"/>
-                    <a:pt x="11670" y="21940"/>
-                  </a:cubicBezTo>
-                  <a:cubicBezTo>
-                    <a:pt x="7500" y="20500"/>
-                    <a:pt x="4000" y="18000"/>
-                    <a:pt x="4000" y="13000"/>
-                  </a:cubicBezTo>
-                  <a:lnTo>
-                    <a:pt x="4000" y="6000"/>
-                  </a:lnTo>
-                  <a:cubicBezTo>
-                    <a:pt x="4000" y="5448"/>
-                    <a:pt x="4448" y="5000"/>
-                    <a:pt x="5000" y="5000"/>
-                  </a:cubicBezTo>
-                  <a:cubicBezTo>
-                    <a:pt x="7000" y="5000"/>
-                    <a:pt x="9500" y="3800"/>
-                    <a:pt x="11240" y="2280"/>
-                  </a:cubicBezTo>
-                  <a:cubicBezTo>
-                    <a:pt x="11678" y="1906"/>
-                    <a:pt x="12322" y="1906"/>
-                    <a:pt x="12760" y="2280"/>
-                  </a:cubicBezTo>
-                  <a:cubicBezTo>
-                    <a:pt x="14510" y="3810"/>
-                    <a:pt x="17000" y="5000"/>
-                    <a:pt x="19000" y="5000"/>
-                  </a:cubicBezTo>
-                  <a:cubicBezTo>
-                    <a:pt x="19552" y="5000"/>
-                    <a:pt x="20000" y="5448"/>
-                    <a:pt x="20000" y="6000"/>
-                  </a:cubicBezTo>
-                  <a:close/>
-                </a:path>
-                <a:path w="24000" h="24000" fill="none">
-                  <a:moveTo>
-                    <a:pt x="9000" y="12000"/>
-                  </a:moveTo>
-                  <a:lnTo>
-                    <a:pt x="11000" y="14000"/>
-                  </a:lnTo>
-                  <a:lnTo>
-                    <a:pt x="15000" y="10000"/>
-                  </a:lnTo>
-                </a:path>
-              </a:pathLst>
-            </a:custGeom>
-            <a:noFill/>
-            <a:ln w="27639" cap="rnd">
-              <a:solidFill>
-                <a:srgbClr val="FFFFFF"/>
-              </a:solidFill>
-              <a:round/>
-            </a:ln>
-          </p:spPr>
-          <p:txBody>
-            <a:bodyPr rtlCol="0" anchor="ctr"/>
-            <a:lstStyle/>
-            <a:p>
-              <a:pPr algn="ctr"/>
-            </a:p>
-          </p:txBody>
-        </p:sp>
-        <p:sp>
-          <p:nvSpPr>
-            <p:cNvPr id="15" name="BrandDeck Diagram Text 3"/>
-            <p:cNvSpPr txBox="1"/>
-            <p:nvPr/>
-          </p:nvSpPr>
-          <p:spPr>
-            <a:xfrm>
-              <a:off x="1602207" y="4037871"/>
-              <a:ext cx="4165593" cy="1019556"/>
-            </a:xfrm>
-            <a:prstGeom prst="rect">
-              <a:avLst/>
-            </a:prstGeom>
-            <a:noFill/>
-          </p:spPr>
-          <p:txBody>
-            <a:bodyPr wrap="square" anchor="ctr" lIns="36576" tIns="18288" rIns="36576" bIns="18288">
-              <a:noAutofit/>
-            </a:bodyPr>
-            <a:lstStyle/>
-            <a:p>
-              <a:pPr algn="l">
-                <a:lnSpc>
-                  <a:spcPct val="110000"/>
-                </a:lnSpc>
-              </a:pPr>
-              <a:r>
-                <a:rPr sz="1800" b="0">
-                  <a:solidFill>
-                    <a:srgbClr val="000000"/>
-                  </a:solidFill>
-                  <a:latin typeface="Play"/>
-                </a:rPr>
-                <a:t>Обеспечивается безопасность данных при обработке запросов.</a:t>
-              </a:r>
-            </a:p>
-          </p:txBody>
-        </p:sp>
-      </p:grpSp>
-    </p:spTree>
-  </p:cSld>
-  <p:clrMapOvr>
-    <a:masterClrMapping/>
-  </p:clrMapOvr>
-</p:sld>
-</file>
-
-<file path=ppt/slides/slide11.xml><?xml version="1.0" encoding="utf-8"?>
-<p:sld xmlns:a="http://schemas.openxmlformats.org/drawingml/2006/main" xmlns:p="http://schemas.openxmlformats.org/presentationml/2006/main" xmlns:r="http://schemas.openxmlformats.org/officeDocument/2006/relationships">
-  <p:cSld>
-    <p:bg>
-      <p:bgPr>
-        <a:solidFill>
-          <a:schemeClr val="lt2"/>
-        </a:solidFill>
-      </p:bgPr>
-    </p:bg>
-    <p:spTree>
-      <p:nvGrpSpPr>
-        <p:cNvPr id="1" name=""/>
-        <p:cNvGrpSpPr/>
-        <p:nvPr/>
-      </p:nvGrpSpPr>
-      <p:grpSpPr/>
-      <p:sp>
-        <p:nvSpPr>
-          <p:cNvPr id="543" name="BrandDeck Text 543"/>
-          <p:cNvSpPr txBox="1"/>
-          <p:nvPr>
-            <p:ph type="title"/>
-          </p:nvPr>
-        </p:nvSpPr>
-        <p:spPr>
-          <a:xfrm>
-            <a:off x="677334" y="692150"/>
-            <a:ext cx="10855854" cy="644241"/>
-          </a:xfrm>
-          <a:prstGeom prst="rect">
-            <a:avLst/>
-          </a:prstGeom>
-          <a:noFill/>
-          <a:ln>
-            <a:noFill/>
-          </a:ln>
-        </p:spPr>
-        <p:txBody>
-          <a:bodyPr anchorCtr="0" anchor="t" bIns="0" lIns="0" spcFirstLastPara="1" rIns="0" wrap="square" tIns="0">
-            <a:normAutofit/>
-          </a:bodyPr>
-          <a:lstStyle/>
-          <a:p>
-            <a:pPr indent="0" marL="0" rtl="0" algn="l">
-              <a:lnSpc>
-                <a:spcPct val="115000"/>
-              </a:lnSpc>
-              <a:spcBef>
-                <a:spcPts val="0"/>
-              </a:spcBef>
-              <a:spcAft>
-                <a:spcPts val="270"/>
-              </a:spcAft>
-              <a:buClr>
-                <a:schemeClr val="accent1"/>
-              </a:buClr>
-              <a:buSzPts val="3600"/>
-              <a:buFont typeface="Play"/>
-              <a:buNone/>
-            </a:pPr>
-            <a:r>
-              <a:rPr sz="1800">
-                <a:solidFill>
-                  <a:srgbClr val="000000"/>
-                </a:solidFill>
-              </a:rPr>
-              <a:t>Требуется одобрение пилота и выделение команды из 3 человек для реализации</a:t>
-            </a:r>
-            <a:endParaRPr/>
-          </a:p>
-        </p:txBody>
-      </p:sp>
-      <p:grpSp>
-        <p:nvGrpSpPr>
-          <p:cNvPr id="2" name="BrandDeck Diagram icon_grid" descr="icon_grid: Просим одобрить запуск пилота.; Требуется выделение команды из 3 человек.; Срок пилота: 6 недель."/>
-          <p:cNvGrpSpPr/>
-          <p:nvPr/>
-        </p:nvGrpSpPr>
-        <p:grpSpPr>
-          <a:xfrm>
-            <a:off x="677334" y="2603500"/>
-            <a:ext cx="10855853" cy="3597276"/>
-            <a:chOff x="677334" y="2603500"/>
-            <a:chExt cx="10855853" cy="3597276"/>
-          </a:xfrm>
-        </p:grpSpPr>
-        <p:sp>
-          <p:nvSpPr>
-            <p:cNvPr id="544" name="BrandDeck Diagram Card 1"/>
-            <p:cNvSpPr/>
-            <p:nvPr/>
-          </p:nvSpPr>
-          <p:spPr>
-            <a:xfrm>
-              <a:off x="677334" y="2603500"/>
-              <a:ext cx="3473873" cy="3597276"/>
-            </a:xfrm>
-            <a:prstGeom prst="roundRect">
-              <a:avLst>
-                <a:gd name="adj" fmla="val 8000"/>
-              </a:avLst>
-            </a:prstGeom>
-            <a:solidFill>
-              <a:srgbClr val="EDF5FF"/>
-            </a:solidFill>
-            <a:ln>
-              <a:noFill/>
-            </a:ln>
-          </p:spPr>
-          <p:txBody>
-            <a:bodyPr rtlCol="0" anchor="ctr"/>
-            <a:lstStyle/>
-            <a:p>
-              <a:pPr algn="ctr"/>
-            </a:p>
-          </p:txBody>
-        </p:sp>
-        <p:sp>
-          <p:nvSpPr>
-            <p:cNvPr id="545" name="BrandDeck Diagram Icon 1 Badge"/>
-            <p:cNvSpPr/>
-            <p:nvPr/>
-          </p:nvSpPr>
-          <p:spPr>
-            <a:xfrm>
-              <a:off x="896789" y="2822956"/>
-              <a:ext cx="603504" cy="603504"/>
-            </a:xfrm>
-            <a:prstGeom prst="ellipse">
-              <a:avLst/>
-            </a:prstGeom>
-            <a:solidFill>
-              <a:srgbClr val="006DEB"/>
-            </a:solidFill>
-            <a:ln>
-              <a:noFill/>
-            </a:ln>
-          </p:spPr>
-          <p:txBody>
-            <a:bodyPr rtlCol="0" anchor="ctr"/>
-            <a:lstStyle/>
-            <a:p>
-              <a:pPr algn="ctr"/>
-            </a:p>
-          </p:txBody>
-        </p:sp>
-        <p:sp>
-          <p:nvSpPr>
-            <p:cNvPr id="546" name="BrandDeck Icon rocket"/>
-            <p:cNvSpPr/>
-            <p:nvPr/>
-          </p:nvSpPr>
-          <p:spPr>
-            <a:xfrm>
-              <a:off x="1029560" y="2955726"/>
-              <a:ext cx="337962" cy="337962"/>
-            </a:xfrm>
-            <a:custGeom>
-              <a:avLst/>
-              <a:gdLst/>
-              <a:ahLst/>
-              <a:cxnLst/>
-              <a:rect l="l" t="t" r="r" b="b"/>
-              <a:pathLst>
-                <a:path w="24000" h="24000" fill="none">
-                  <a:moveTo>
-                    <a:pt x="4500" y="16500"/>
-                  </a:moveTo>
-                  <a:cubicBezTo>
-                    <a:pt x="3000" y="17760"/>
-                    <a:pt x="2500" y="21500"/>
-                    <a:pt x="2500" y="21500"/>
-                  </a:cubicBezTo>
-                  <a:cubicBezTo>
-                    <a:pt x="2500" y="21500"/>
-                    <a:pt x="6240" y="21000"/>
-                    <a:pt x="7500" y="19500"/>
-                  </a:cubicBezTo>
-                  <a:cubicBezTo>
-                    <a:pt x="8210" y="18660"/>
-                    <a:pt x="8200" y="17370"/>
-                    <a:pt x="7410" y="16590"/>
-                  </a:cubicBezTo>
-                  <a:cubicBezTo>
-                    <a:pt x="6605" y="15822"/>
-                    <a:pt x="5351" y="15783"/>
-                    <a:pt x="4500" y="16500"/>
-                  </a:cubicBezTo>
-                  <a:close/>
-                </a:path>
-                <a:path w="24000" h="24000" fill="none">
-                  <a:moveTo>
-                    <a:pt x="12000" y="15000"/>
-                  </a:moveTo>
-                  <a:lnTo>
-                    <a:pt x="9000" y="12000"/>
-                  </a:lnTo>
-                  <a:cubicBezTo>
-                    <a:pt x="9532" y="10619"/>
-                    <a:pt x="10202" y="9296"/>
-                    <a:pt x="11000" y="8050"/>
-                  </a:cubicBezTo>
-                  <a:cubicBezTo>
-                    <a:pt x="13369" y="4262"/>
-                    <a:pt x="17532" y="1972"/>
-                    <a:pt x="22000" y="2000"/>
-                  </a:cubicBezTo>
-                  <a:cubicBezTo>
-                    <a:pt x="22000" y="4720"/>
-                    <a:pt x="21220" y="9500"/>
-                    <a:pt x="16000" y="13000"/>
-                  </a:cubicBezTo>
-                  <a:cubicBezTo>
-                    <a:pt x="14737" y="13799"/>
-                    <a:pt x="13397" y="14469"/>
-                    <a:pt x="12000" y="15000"/>
-                  </a:cubicBezTo>
-                  <a:close/>
-                </a:path>
-                <a:path w="24000" h="24000" fill="none">
-                  <a:moveTo>
-                    <a:pt x="9000" y="12000"/>
-                  </a:moveTo>
-                  <a:lnTo>
-                    <a:pt x="4000" y="12000"/>
-                  </a:lnTo>
-                  <a:cubicBezTo>
-                    <a:pt x="4000" y="12000"/>
-                    <a:pt x="4550" y="8970"/>
-                    <a:pt x="6000" y="8000"/>
-                  </a:cubicBezTo>
-                  <a:cubicBezTo>
-                    <a:pt x="7620" y="6920"/>
-                    <a:pt x="11000" y="8000"/>
-                    <a:pt x="11000" y="8000"/>
-                  </a:cubicBezTo>
-                </a:path>
-                <a:path w="24000" h="24000" fill="none">
-                  <a:moveTo>
-                    <a:pt x="12000" y="15000"/>
-                  </a:moveTo>
-                  <a:lnTo>
-                    <a:pt x="12000" y="20000"/>
-                  </a:lnTo>
-                  <a:cubicBezTo>
-                    <a:pt x="12000" y="20000"/>
-                    <a:pt x="15030" y="19450"/>
-                    <a:pt x="16000" y="18000"/>
-                  </a:cubicBezTo>
-                  <a:cubicBezTo>
-                    <a:pt x="17080" y="16380"/>
-                    <a:pt x="16000" y="13000"/>
-                    <a:pt x="16000" y="13000"/>
-                  </a:cubicBezTo>
-                </a:path>
-              </a:pathLst>
-            </a:custGeom>
-            <a:noFill/>
-            <a:ln w="28163" cap="rnd">
-              <a:solidFill>
-                <a:srgbClr val="FFFFFF"/>
-              </a:solidFill>
-              <a:round/>
-            </a:ln>
-          </p:spPr>
-          <p:txBody>
-            <a:bodyPr rtlCol="0" anchor="ctr"/>
-            <a:lstStyle/>
-            <a:p>
-              <a:pPr algn="ctr"/>
-            </a:p>
-          </p:txBody>
-        </p:sp>
-        <p:sp>
-          <p:nvSpPr>
-            <p:cNvPr id="547" name="BrandDeck Diagram Text 1"/>
-            <p:cNvSpPr txBox="1"/>
-            <p:nvPr/>
-          </p:nvSpPr>
-          <p:spPr>
-            <a:xfrm>
-              <a:off x="830953" y="3580079"/>
-              <a:ext cx="3166634" cy="2510968"/>
-            </a:xfrm>
-            <a:prstGeom prst="rect">
-              <a:avLst/>
-            </a:prstGeom>
-            <a:noFill/>
-          </p:spPr>
-          <p:txBody>
-            <a:bodyPr wrap="square" anchor="t" lIns="36576" tIns="18288" rIns="36576" bIns="18288">
-              <a:noAutofit/>
-            </a:bodyPr>
-            <a:lstStyle/>
-            <a:p>
-              <a:pPr algn="l">
-                <a:lnSpc>
-                  <a:spcPct val="110000"/>
-                </a:lnSpc>
-              </a:pPr>
-              <a:r>
-                <a:rPr sz="1800" b="0">
-                  <a:solidFill>
-                    <a:srgbClr val="000000"/>
-                  </a:solidFill>
-                  <a:latin typeface="Play"/>
-                </a:rPr>
-                <a:t>Просим одобрить запуск пилота.</a:t>
-              </a:r>
-            </a:p>
-          </p:txBody>
-        </p:sp>
-        <p:sp>
-          <p:nvSpPr>
-            <p:cNvPr id="548" name="BrandDeck Diagram Card 2"/>
-            <p:cNvSpPr/>
-            <p:nvPr/>
-          </p:nvSpPr>
-          <p:spPr>
-            <a:xfrm>
-              <a:off x="4368324" y="2603500"/>
-              <a:ext cx="3473873" cy="3597276"/>
-            </a:xfrm>
-            <a:prstGeom prst="roundRect">
-              <a:avLst>
-                <a:gd name="adj" fmla="val 8000"/>
-              </a:avLst>
-            </a:prstGeom>
-            <a:solidFill>
-              <a:srgbClr val="EDF5FF"/>
-            </a:solidFill>
-            <a:ln>
-              <a:noFill/>
-            </a:ln>
-          </p:spPr>
-          <p:txBody>
-            <a:bodyPr rtlCol="0" anchor="ctr"/>
-            <a:lstStyle/>
-            <a:p>
-              <a:pPr algn="ctr"/>
-            </a:p>
-          </p:txBody>
-        </p:sp>
-        <p:sp>
-          <p:nvSpPr>
-            <p:cNvPr id="549" name="BrandDeck Diagram Icon 2 Badge"/>
-            <p:cNvSpPr/>
-            <p:nvPr/>
-          </p:nvSpPr>
-          <p:spPr>
-            <a:xfrm>
-              <a:off x="4587780" y="2822956"/>
-              <a:ext cx="603504" cy="603504"/>
-            </a:xfrm>
-            <a:prstGeom prst="ellipse">
-              <a:avLst/>
-            </a:prstGeom>
-            <a:solidFill>
-              <a:srgbClr val="006DEB"/>
-            </a:solidFill>
-            <a:ln>
-              <a:noFill/>
-            </a:ln>
-          </p:spPr>
-          <p:txBody>
-            <a:bodyPr rtlCol="0" anchor="ctr"/>
-            <a:lstStyle/>
-            <a:p>
-              <a:pPr algn="ctr"/>
-            </a:p>
-          </p:txBody>
-        </p:sp>
-        <p:sp>
-          <p:nvSpPr>
-            <p:cNvPr id="550" name="BrandDeck Icon users"/>
-            <p:cNvSpPr/>
-            <p:nvPr/>
-          </p:nvSpPr>
-          <p:spPr>
-            <a:xfrm>
-              <a:off x="4720551" y="2955726"/>
-              <a:ext cx="337962" cy="337962"/>
-            </a:xfrm>
-            <a:custGeom>
-              <a:avLst/>
-              <a:gdLst/>
-              <a:ahLst/>
-              <a:cxnLst/>
-              <a:rect l="l" t="t" r="r" b="b"/>
-              <a:pathLst>
-                <a:path w="24000" h="24000" fill="none">
-                  <a:moveTo>
-                    <a:pt x="16000" y="21000"/>
-                  </a:moveTo>
-                  <a:lnTo>
-                    <a:pt x="16000" y="19000"/>
-                  </a:lnTo>
-                  <a:cubicBezTo>
-                    <a:pt x="16000" y="16791"/>
-                    <a:pt x="14209" y="15000"/>
-                    <a:pt x="12000" y="15000"/>
-                  </a:cubicBezTo>
-                  <a:lnTo>
-                    <a:pt x="6000" y="15000"/>
-                  </a:lnTo>
-                  <a:cubicBezTo>
-                    <a:pt x="3791" y="15000"/>
-                    <a:pt x="2000" y="16791"/>
-                    <a:pt x="2000" y="19000"/>
-                  </a:cubicBezTo>
-                  <a:lnTo>
-                    <a:pt x="2000" y="21000"/>
-                  </a:lnTo>
-                </a:path>
-                <a:path w="24000" h="24000" fill="none">
-                  <a:moveTo>
-                    <a:pt x="13000" y="7000"/>
-                  </a:moveTo>
-                  <a:cubicBezTo>
-                    <a:pt x="13000" y="9209"/>
-                    <a:pt x="11209" y="11000"/>
-                    <a:pt x="9000" y="11000"/>
-                  </a:cubicBezTo>
-                  <a:cubicBezTo>
-                    <a:pt x="6791" y="11000"/>
-                    <a:pt x="5000" y="9209"/>
-                    <a:pt x="5000" y="7000"/>
-                  </a:cubicBezTo>
-                  <a:cubicBezTo>
-                    <a:pt x="5000" y="4791"/>
-                    <a:pt x="6791" y="3000"/>
-                    <a:pt x="9000" y="3000"/>
-                  </a:cubicBezTo>
-                  <a:cubicBezTo>
-                    <a:pt x="11209" y="3000"/>
-                    <a:pt x="13000" y="4791"/>
-                    <a:pt x="13000" y="7000"/>
-                  </a:cubicBezTo>
-                  <a:close/>
-                </a:path>
-                <a:path w="24000" h="24000" fill="none">
-                  <a:moveTo>
-                    <a:pt x="22000" y="21000"/>
-                  </a:moveTo>
-                  <a:lnTo>
-                    <a:pt x="22000" y="19000"/>
-                  </a:lnTo>
-                  <a:cubicBezTo>
-                    <a:pt x="21999" y="17177"/>
-                    <a:pt x="20765" y="15586"/>
-                    <a:pt x="19000" y="15130"/>
-                  </a:cubicBezTo>
-                </a:path>
-                <a:path w="24000" h="24000" fill="none">
-                  <a:moveTo>
-                    <a:pt x="16000" y="3130"/>
-                  </a:moveTo>
-                  <a:cubicBezTo>
-                    <a:pt x="17770" y="3583"/>
-                    <a:pt x="19008" y="5178"/>
-                    <a:pt x="19008" y="7005"/>
-                  </a:cubicBezTo>
-                  <a:cubicBezTo>
-                    <a:pt x="19008" y="8832"/>
-                    <a:pt x="17770" y="10427"/>
-                    <a:pt x="16000" y="10880"/>
-                  </a:cubicBezTo>
-                </a:path>
-              </a:pathLst>
-            </a:custGeom>
-            <a:noFill/>
-            <a:ln w="28163" cap="rnd">
-              <a:solidFill>
-                <a:srgbClr val="FFFFFF"/>
-              </a:solidFill>
-              <a:round/>
-            </a:ln>
-          </p:spPr>
-          <p:txBody>
-            <a:bodyPr rtlCol="0" anchor="ctr"/>
-            <a:lstStyle/>
-            <a:p>
-              <a:pPr algn="ctr"/>
-            </a:p>
-          </p:txBody>
-        </p:sp>
-        <p:sp>
-          <p:nvSpPr>
-            <p:cNvPr id="551" name="BrandDeck Diagram Text 2"/>
-            <p:cNvSpPr txBox="1"/>
-            <p:nvPr/>
-          </p:nvSpPr>
-          <p:spPr>
-            <a:xfrm>
-              <a:off x="4521943" y="3580079"/>
-              <a:ext cx="3166634" cy="2510968"/>
-            </a:xfrm>
-            <a:prstGeom prst="rect">
-              <a:avLst/>
-            </a:prstGeom>
-            <a:noFill/>
-          </p:spPr>
-          <p:txBody>
-            <a:bodyPr wrap="square" anchor="t" lIns="36576" tIns="18288" rIns="36576" bIns="18288">
-              <a:noAutofit/>
-            </a:bodyPr>
-            <a:lstStyle/>
-            <a:p>
-              <a:pPr algn="l">
-                <a:lnSpc>
-                  <a:spcPct val="110000"/>
-                </a:lnSpc>
-              </a:pPr>
-              <a:r>
-                <a:rPr sz="1800" b="0">
-                  <a:solidFill>
-                    <a:srgbClr val="000000"/>
-                  </a:solidFill>
-                  <a:latin typeface="Play"/>
-                </a:rPr>
-                <a:t>Требуется выделение команды из 3 человек.</a:t>
-              </a:r>
-            </a:p>
-          </p:txBody>
-        </p:sp>
-        <p:sp>
-          <p:nvSpPr>
-            <p:cNvPr id="552" name="BrandDeck Diagram Card 3"/>
-            <p:cNvSpPr/>
-            <p:nvPr/>
-          </p:nvSpPr>
-          <p:spPr>
-            <a:xfrm>
-              <a:off x="8059314" y="2603500"/>
-              <a:ext cx="3473873" cy="3597276"/>
-            </a:xfrm>
-            <a:prstGeom prst="roundRect">
-              <a:avLst>
-                <a:gd name="adj" fmla="val 8000"/>
-              </a:avLst>
-            </a:prstGeom>
-            <a:solidFill>
-              <a:srgbClr val="EDF5FF"/>
-            </a:solidFill>
-            <a:ln>
-              <a:noFill/>
-            </a:ln>
-          </p:spPr>
-          <p:txBody>
-            <a:bodyPr rtlCol="0" anchor="ctr"/>
-            <a:lstStyle/>
-            <a:p>
-              <a:pPr algn="ctr"/>
-            </a:p>
-          </p:txBody>
-        </p:sp>
-        <p:sp>
-          <p:nvSpPr>
-            <p:cNvPr id="553" name="BrandDeck Diagram Icon 3 Badge"/>
-            <p:cNvSpPr/>
-            <p:nvPr/>
-          </p:nvSpPr>
-          <p:spPr>
-            <a:xfrm>
-              <a:off x="8278770" y="2822956"/>
-              <a:ext cx="603504" cy="603504"/>
-            </a:xfrm>
-            <a:prstGeom prst="ellipse">
-              <a:avLst/>
-            </a:prstGeom>
-            <a:solidFill>
-              <a:srgbClr val="006DEB"/>
-            </a:solidFill>
-            <a:ln>
-              <a:noFill/>
-            </a:ln>
-          </p:spPr>
-          <p:txBody>
-            <a:bodyPr rtlCol="0" anchor="ctr"/>
-            <a:lstStyle/>
-            <a:p>
-              <a:pPr algn="ctr"/>
-            </a:p>
-          </p:txBody>
-        </p:sp>
-        <p:sp>
-          <p:nvSpPr>
-            <p:cNvPr id="554" name="BrandDeck Icon clock"/>
-            <p:cNvSpPr/>
-            <p:nvPr/>
-          </p:nvSpPr>
-          <p:spPr>
-            <a:xfrm>
-              <a:off x="8411541" y="2955726"/>
-              <a:ext cx="337962" cy="337962"/>
+              <a:off x="5745393" y="3892340"/>
+              <a:ext cx="209744" cy="209744"/>
             </a:xfrm>
             <a:custGeom>
               <a:avLst/>
@@ -10180,19 +9605,36 @@
                 </a:path>
                 <a:path w="24000" h="24000" fill="none">
                   <a:moveTo>
-                    <a:pt x="12000" y="6000"/>
+                    <a:pt x="9090" y="9000"/>
+                  </a:moveTo>
+                  <a:cubicBezTo>
+                    <a:pt x="9575" y="7620"/>
+                    <a:pt x="10985" y="6791"/>
+                    <a:pt x="12427" y="7039"/>
+                  </a:cubicBezTo>
+                  <a:cubicBezTo>
+                    <a:pt x="13869" y="7286"/>
+                    <a:pt x="14922" y="8537"/>
+                    <a:pt x="14920" y="10000"/>
+                  </a:cubicBezTo>
+                  <a:cubicBezTo>
+                    <a:pt x="14920" y="12000"/>
+                    <a:pt x="11920" y="13000"/>
+                    <a:pt x="11920" y="13000"/>
+                  </a:cubicBezTo>
+                </a:path>
+                <a:path w="24000" h="24000" fill="none">
+                  <a:moveTo>
+                    <a:pt x="12000" y="17000"/>
                   </a:moveTo>
                   <a:lnTo>
-                    <a:pt x="12000" y="12000"/>
-                  </a:lnTo>
-                  <a:lnTo>
-                    <a:pt x="16000" y="14000"/>
+                    <a:pt x="12010" y="17000"/>
                   </a:lnTo>
                 </a:path>
               </a:pathLst>
             </a:custGeom>
             <a:noFill/>
-            <a:ln w="28163" cap="rnd">
+            <a:ln w="17478" cap="rnd">
               <a:solidFill>
                 <a:srgbClr val="FFFFFF"/>
               </a:solidFill>
@@ -10209,14 +9651,14 @@
         </p:sp>
         <p:sp>
           <p:nvSpPr>
-            <p:cNvPr id="555" name="BrandDeck Diagram Text 3"/>
+            <p:cNvPr id="15" name="BrandDeck Diagram Text 3"/>
             <p:cNvSpPr txBox="1"/>
             <p:nvPr/>
           </p:nvSpPr>
           <p:spPr>
             <a:xfrm>
-              <a:off x="8212933" y="3580079"/>
-              <a:ext cx="3166634" cy="2510968"/>
+              <a:off x="6169211" y="3460057"/>
+              <a:ext cx="5144520" cy="1074310"/>
             </a:xfrm>
             <a:prstGeom prst="rect">
               <a:avLst/>
@@ -10224,7 +9666,7 @@
             <a:noFill/>
           </p:spPr>
           <p:txBody>
-            <a:bodyPr wrap="square" anchor="t" lIns="36576" tIns="18288" rIns="36576" bIns="18288">
+            <a:bodyPr wrap="square" anchor="ctr" lIns="36576" tIns="18288" rIns="36576" bIns="18288">
               <a:noAutofit/>
             </a:bodyPr>
             <a:lstStyle/>
@@ -10235,14 +9677,182 @@
                 </a:lnSpc>
               </a:pPr>
               <a:r>
-                <a:rPr sz="1800" b="1">
+                <a:rPr sz="1800" b="0">
                   <a:solidFill>
                     <a:srgbClr val="000000"/>
                   </a:solidFill>
                   <a:latin typeface="Play"/>
                 </a:rPr>
-                <a:t>Срок пилота:</a:t>
+                <a:t>При отсутствии ответа вопрос перенаправляется специалисту.</a:t>
               </a:r>
+            </a:p>
+          </p:txBody>
+        </p:sp>
+        <p:sp>
+          <p:nvSpPr>
+            <p:cNvPr id="16" name="BrandDeck Diagram Card 4"/>
+            <p:cNvSpPr/>
+            <p:nvPr/>
+          </p:nvSpPr>
+          <p:spPr>
+            <a:xfrm>
+              <a:off x="5443538" y="4883529"/>
+              <a:ext cx="6089650" cy="1337657"/>
+            </a:xfrm>
+            <a:prstGeom prst="roundRect">
+              <a:avLst>
+                <a:gd name="adj" fmla="val 8000"/>
+              </a:avLst>
+            </a:prstGeom>
+            <a:solidFill>
+              <a:srgbClr val="EDF5FF"/>
+            </a:solidFill>
+            <a:ln>
+              <a:noFill/>
+            </a:ln>
+          </p:spPr>
+          <p:txBody>
+            <a:bodyPr rtlCol="0" anchor="ctr"/>
+            <a:lstStyle/>
+            <a:p>
+              <a:pPr algn="ctr"/>
+            </a:p>
+          </p:txBody>
+        </p:sp>
+        <p:sp>
+          <p:nvSpPr>
+            <p:cNvPr id="17" name="BrandDeck Diagram Icon 4 Badge"/>
+            <p:cNvSpPr/>
+            <p:nvPr/>
+          </p:nvSpPr>
+          <p:spPr>
+            <a:xfrm>
+              <a:off x="5662994" y="5365085"/>
+              <a:ext cx="374544" cy="374544"/>
+            </a:xfrm>
+            <a:prstGeom prst="ellipse">
+              <a:avLst/>
+            </a:prstGeom>
+            <a:solidFill>
+              <a:srgbClr val="006DEB"/>
+            </a:solidFill>
+            <a:ln>
+              <a:noFill/>
+            </a:ln>
+          </p:spPr>
+          <p:txBody>
+            <a:bodyPr rtlCol="0" anchor="ctr"/>
+            <a:lstStyle/>
+            <a:p>
+              <a:pPr algn="ctr"/>
+            </a:p>
+          </p:txBody>
+        </p:sp>
+        <p:sp>
+          <p:nvSpPr>
+            <p:cNvPr id="18" name="BrandDeck Icon timer"/>
+            <p:cNvSpPr/>
+            <p:nvPr/>
+          </p:nvSpPr>
+          <p:spPr>
+            <a:xfrm>
+              <a:off x="5745393" y="5447485"/>
+              <a:ext cx="209744" cy="209744"/>
+            </a:xfrm>
+            <a:custGeom>
+              <a:avLst/>
+              <a:gdLst/>
+              <a:ahLst/>
+              <a:cxnLst/>
+              <a:rect l="l" t="t" r="r" b="b"/>
+              <a:pathLst>
+                <a:path w="24000" h="24000" fill="none">
+                  <a:moveTo>
+                    <a:pt x="10000" y="2000"/>
+                  </a:moveTo>
+                  <a:lnTo>
+                    <a:pt x="14000" y="2000"/>
+                  </a:lnTo>
+                </a:path>
+                <a:path w="24000" h="24000" fill="none">
+                  <a:moveTo>
+                    <a:pt x="12000" y="14000"/>
+                  </a:moveTo>
+                  <a:lnTo>
+                    <a:pt x="15000" y="11000"/>
+                  </a:lnTo>
+                </a:path>
+                <a:path w="24000" h="24000" fill="none">
+                  <a:moveTo>
+                    <a:pt x="20000" y="14000"/>
+                  </a:moveTo>
+                  <a:cubicBezTo>
+                    <a:pt x="20000" y="18418"/>
+                    <a:pt x="16418" y="22000"/>
+                    <a:pt x="12000" y="22000"/>
+                  </a:cubicBezTo>
+                  <a:cubicBezTo>
+                    <a:pt x="7582" y="22000"/>
+                    <a:pt x="4000" y="18418"/>
+                    <a:pt x="4000" y="14000"/>
+                  </a:cubicBezTo>
+                  <a:cubicBezTo>
+                    <a:pt x="4000" y="9582"/>
+                    <a:pt x="7582" y="6000"/>
+                    <a:pt x="12000" y="6000"/>
+                  </a:cubicBezTo>
+                  <a:cubicBezTo>
+                    <a:pt x="16418" y="6000"/>
+                    <a:pt x="20000" y="9582"/>
+                    <a:pt x="20000" y="14000"/>
+                  </a:cubicBezTo>
+                  <a:close/>
+                </a:path>
+              </a:pathLst>
+            </a:custGeom>
+            <a:noFill/>
+            <a:ln w="17478" cap="rnd">
+              <a:solidFill>
+                <a:srgbClr val="FFFFFF"/>
+              </a:solidFill>
+              <a:round/>
+            </a:ln>
+          </p:spPr>
+          <p:txBody>
+            <a:bodyPr rtlCol="0" anchor="ctr"/>
+            <a:lstStyle/>
+            <a:p>
+              <a:pPr algn="ctr"/>
+            </a:p>
+          </p:txBody>
+        </p:sp>
+        <p:sp>
+          <p:nvSpPr>
+            <p:cNvPr id="19" name="BrandDeck Diagram Text 4"/>
+            <p:cNvSpPr txBox="1"/>
+            <p:nvPr/>
+          </p:nvSpPr>
+          <p:spPr>
+            <a:xfrm>
+              <a:off x="6169211" y="5015202"/>
+              <a:ext cx="5144520" cy="1074310"/>
+            </a:xfrm>
+            <a:prstGeom prst="rect">
+              <a:avLst/>
+            </a:prstGeom>
+            <a:noFill/>
+          </p:spPr>
+          <p:txBody>
+            <a:bodyPr wrap="square" anchor="ctr" lIns="36576" tIns="18288" rIns="36576" bIns="18288">
+              <a:noAutofit/>
+            </a:bodyPr>
+            <a:lstStyle/>
+            <a:p>
+              <a:pPr algn="l">
+                <a:lnSpc>
+                  <a:spcPct val="110000"/>
+                </a:lnSpc>
+              </a:pPr>
               <a:r>
                 <a:rPr sz="1800" b="0">
                   <a:solidFill>
@@ -10250,7 +9860,7 @@
                   </a:solidFill>
                   <a:latin typeface="Play"/>
                 </a:rPr>
-                <a:t> 6 недель.</a:t>
+                <a:t>Перенаправление включает контекст для быстрого решения.</a:t>
               </a:r>
             </a:p>
           </p:txBody>
@@ -10264,7 +9874,7 @@
 </p:sld>
 </file>
 
-<file path=ppt/slides/slide12.xml><?xml version="1.0" encoding="utf-8"?>
+<file path=ppt/slides/slide5.xml><?xml version="1.0" encoding="utf-8"?>
 <p:sld xmlns:a="http://schemas.openxmlformats.org/drawingml/2006/main" xmlns:p="http://schemas.openxmlformats.org/presentationml/2006/main" xmlns:r="http://schemas.openxmlformats.org/officeDocument/2006/relationships">
   <p:cSld>
     <p:spTree>
@@ -10276,79 +9886,8 @@
       <p:grpSpPr/>
       <p:sp>
         <p:nvSpPr>
-          <p:cNvPr id="2" name="BrandDeck Text 2"/>
-          <p:cNvSpPr>
-            <a:spLocks noGrp="1"/>
-          </p:cNvSpPr>
-          <p:nvPr>
-            <p:ph type="body" idx="1"/>
-          </p:nvPr>
-        </p:nvSpPr>
-        <p:spPr/>
-        <p:txBody>
-          <a:bodyPr wrap="square" anchor="t">
-            <a:normAutofit/>
-          </a:bodyPr>
-          <a:lstStyle/>
-          <a:p>
-            <a:pPr>
-              <a:lnSpc>
-                <a:spcPct val="115000"/>
-              </a:lnSpc>
-              <a:spcBef>
-                <a:spcPts val="0"/>
-              </a:spcBef>
-              <a:spcAft>
-                <a:spcPts val="240"/>
-              </a:spcAft>
-            </a:pPr>
-            <a:r>
-              <a:rPr sz="1600"/>
-              <a:t>Просим одобрить запуск пилота с командой из 3 человек.</a:t>
-            </a:r>
-          </a:p>
-          <a:p>
-            <a:pPr>
-              <a:lnSpc>
-                <a:spcPct val="115000"/>
-              </a:lnSpc>
-              <a:spcBef>
-                <a:spcPts val="0"/>
-              </a:spcBef>
-              <a:spcAft>
-                <a:spcPts val="240"/>
-              </a:spcAft>
-            </a:pPr>
-            <a:r>
-              <a:rPr sz="1600"/>
-              <a:t>Пилот продлится 6 недель в двух подразделениях.</a:t>
-            </a:r>
-          </a:p>
-          <a:p>
-            <a:pPr>
-              <a:lnSpc>
-                <a:spcPct val="115000"/>
-              </a:lnSpc>
-              <a:spcBef>
-                <a:spcPts val="0"/>
-              </a:spcBef>
-              <a:spcAft>
-                <a:spcPts val="240"/>
-              </a:spcAft>
-            </a:pPr>
-            <a:r>
-              <a:rPr sz="1600"/>
-              <a:t>Измерим время поиска ответа и долю закрытых обращений.</a:t>
-            </a:r>
-          </a:p>
-        </p:txBody>
-      </p:sp>
-      <p:sp>
-        <p:nvSpPr>
-          <p:cNvPr id="3" name="BrandDeck Text 3"/>
-          <p:cNvSpPr>
-            <a:spLocks noGrp="1"/>
-          </p:cNvSpPr>
+          <p:cNvPr id="1060" name="BrandDeck Text 1060"/>
+          <p:cNvSpPr txBox="1"/>
           <p:nvPr>
             <p:ph type="title"/>
           </p:nvPr>
@@ -10358,9 +9897,159 @@
             <a:off x="677334" y="692150"/>
             <a:ext cx="10855854" cy="644241"/>
           </a:xfrm>
+          <a:prstGeom prst="rect">
+            <a:avLst/>
+          </a:prstGeom>
+          <a:noFill/>
+          <a:ln>
+            <a:noFill/>
+          </a:ln>
         </p:spPr>
         <p:txBody>
-          <a:bodyPr wrap="square" anchor="t">
+          <a:bodyPr anchorCtr="0" anchor="t" bIns="0" lIns="0" spcFirstLastPara="1" rIns="0" wrap="square" tIns="0" vert="horz">
+            <a:normAutofit/>
+          </a:bodyPr>
+          <a:lstStyle/>
+          <a:p>
+            <a:pPr indent="0" marL="0" rtl="0" algn="l">
+              <a:lnSpc>
+                <a:spcPct val="115000"/>
+              </a:lnSpc>
+              <a:spcBef>
+                <a:spcPts val="0"/>
+              </a:spcBef>
+              <a:spcAft>
+                <a:spcPts val="270"/>
+              </a:spcAft>
+              <a:buClr>
+                <a:schemeClr val="accent1"/>
+              </a:buClr>
+              <a:buSzPts val="3600"/>
+              <a:buFont typeface="Play"/>
+              <a:buNone/>
+            </a:pPr>
+            <a:r>
+              <a:rPr sz="1800">
+                <a:solidFill>
+                  <a:srgbClr val="000000"/>
+                </a:solidFill>
+              </a:rPr>
+              <a:t>Модель работает внутри контура компании, а подтвержденные вопросы уходят к специалисту</a:t>
+            </a:r>
+            <a:endParaRPr/>
+          </a:p>
+        </p:txBody>
+      </p:sp>
+      <p:pic>
+        <p:nvPicPr>
+          <p:cNvPr id="1072" name="BrandDeck Image" descr="внутренний контур серверная"/>
+          <p:cNvPicPr>
+            <a:picLocks noChangeAspect="1"/>
+          </p:cNvPicPr>
+          <p:nvPr/>
+        </p:nvPicPr>
+        <p:blipFill>
+          <a:blip r:embed="rId3"/>
+          <a:srcRect l="5955" r="5955"/>
+          <a:stretch>
+            <a:fillRect/>
+          </a:stretch>
+        </p:blipFill>
+        <p:spPr>
+          <a:xfrm>
+            <a:off x="671514" y="1773238"/>
+            <a:ext cx="6929992" cy="4427537"/>
+          </a:xfrm>
+          <a:prstGeom prst="rect">
+            <a:avLst/>
+          </a:prstGeom>
+        </p:spPr>
+      </p:pic>
+      <p:sp>
+        <p:nvSpPr>
+          <p:cNvPr id="1069" name="Google Shape;1069;p83"/>
+          <p:cNvSpPr txBox="1"/>
+          <p:nvPr/>
+        </p:nvSpPr>
+        <p:spPr>
+          <a:xfrm>
+            <a:off x="8355728" y="627078"/>
+            <a:ext cx="3409196" cy="3951457"/>
+          </a:xfrm>
+          <a:prstGeom prst="rect">
+            <a:avLst/>
+          </a:prstGeom>
+          <a:noFill/>
+          <a:ln>
+            <a:noFill/>
+          </a:ln>
+        </p:spPr>
+        <p:txBody>
+          <a:bodyPr anchorCtr="0" anchor="t" bIns="36000" lIns="36000" spcFirstLastPara="1" rIns="36000" wrap="square" tIns="36000">
+            <a:normAutofit/>
+          </a:bodyPr>
+          <a:lstStyle/>
+          <a:p>
+            <a:pPr indent="0" lvl="0" marL="0" marR="0" rtl="0" algn="l">
+              <a:lnSpc>
+                <a:spcPct val="110000"/>
+              </a:lnSpc>
+              <a:spcBef>
+                <a:spcPts val="0"/>
+              </a:spcBef>
+              <a:spcAft>
+                <a:spcPts val="0"/>
+              </a:spcAft>
+              <a:buNone/>
+            </a:pPr>
+            <a:endParaRPr/>
+          </a:p>
+        </p:txBody>
+      </p:sp>
+      <p:cxnSp>
+        <p:nvCxnSpPr>
+          <p:cNvPr id="1070" name="Google Shape;1070;p83"/>
+          <p:cNvCxnSpPr/>
+          <p:nvPr/>
+        </p:nvCxnSpPr>
+        <p:spPr>
+          <a:xfrm flipH="1">
+            <a:off x="8111315" y="692150"/>
+            <a:ext cx="9261" cy="5508625"/>
+          </a:xfrm>
+          <a:prstGeom prst="straightConnector1">
+            <a:avLst/>
+          </a:prstGeom>
+          <a:noFill/>
+          <a:ln cap="flat" cmpd="sng" w="9525">
+            <a:solidFill>
+              <a:srgbClr val="F4F8FB"/>
+            </a:solidFill>
+            <a:prstDash val="solid"/>
+            <a:miter lim="8000"/>
+            <a:headEnd len="sm" w="sm" type="none"/>
+            <a:tailEnd len="sm" w="sm" type="none"/>
+          </a:ln>
+        </p:spPr>
+      </p:cxnSp>
+      <p:sp>
+        <p:nvSpPr>
+          <p:cNvPr id="1071" name="BrandDeck Body"/>
+          <p:cNvSpPr txBox="1"/>
+          <p:nvPr/>
+        </p:nvSpPr>
+        <p:spPr>
+          <a:xfrm>
+            <a:off x="8355728" y="1473551"/>
+            <a:ext cx="3409196" cy="3104984"/>
+          </a:xfrm>
+          <a:prstGeom prst="rect">
+            <a:avLst/>
+          </a:prstGeom>
+          <a:noFill/>
+        </p:spPr>
+        <p:txBody>
+          <a:bodyPr wrap="square" vert="horz" anchor="t" lIns="36576" rIns="36576" tIns="18288" bIns="18288">
             <a:normAutofit/>
           </a:bodyPr>
           <a:lstStyle/>
@@ -10373,16 +10062,61 @@
                 <a:spcPts val="0"/>
               </a:spcBef>
               <a:spcAft>
-                <a:spcPts val="359"/>
+                <a:spcPts val="210"/>
               </a:spcAft>
             </a:pPr>
             <a:r>
-              <a:rPr sz="2400">
+              <a:rPr sz="1400">
                 <a:solidFill>
                   <a:srgbClr val="000000"/>
                 </a:solidFill>
+                <a:latin typeface="Play"/>
               </a:rPr>
-              <a:t>Просим одобрить пилот и выделить команду из 3 человек</a:t>
+              <a:t>• Модель с открытыми весами работает внутри контура компании.</a:t>
+            </a:r>
+          </a:p>
+          <a:p>
+            <a:pPr algn="l">
+              <a:lnSpc>
+                <a:spcPct val="115000"/>
+              </a:lnSpc>
+              <a:spcBef>
+                <a:spcPts val="0"/>
+              </a:spcBef>
+              <a:spcAft>
+                <a:spcPts val="210"/>
+              </a:spcAft>
+            </a:pPr>
+            <a:r>
+              <a:rPr sz="1400">
+                <a:solidFill>
+                  <a:srgbClr val="000000"/>
+                </a:solidFill>
+                <a:latin typeface="Play"/>
+              </a:rPr>
+              <a:t>• Документы не уходят наружу при обработке запросов.</a:t>
+            </a:r>
+          </a:p>
+          <a:p>
+            <a:pPr algn="l">
+              <a:lnSpc>
+                <a:spcPct val="115000"/>
+              </a:lnSpc>
+              <a:spcBef>
+                <a:spcPts val="0"/>
+              </a:spcBef>
+              <a:spcAft>
+                <a:spcPts val="210"/>
+              </a:spcAft>
+            </a:pPr>
+            <a:r>
+              <a:rPr sz="1400">
+                <a:solidFill>
+                  <a:srgbClr val="000000"/>
+                </a:solidFill>
+                <a:latin typeface="Play"/>
+              </a:rPr>
+              <a:t>• Вопросы без подтверждённого ответа уходят специалисту с контекстом.</a:t>
             </a:r>
           </a:p>
         </p:txBody>
@@ -10395,7 +10129,7 @@
 </p:sld>
 </file>
 
-<file path=ppt/slides/slide2.xml><?xml version="1.0" encoding="utf-8"?>
+<file path=ppt/slides/slide6.xml><?xml version="1.0" encoding="utf-8"?>
 <p:sld xmlns:a="http://schemas.openxmlformats.org/drawingml/2006/main" xmlns:p="http://schemas.openxmlformats.org/presentationml/2006/main" xmlns:r="http://schemas.openxmlformats.org/officeDocument/2006/relationships">
   <p:cSld>
     <p:spTree>
@@ -10422,7 +10156,7 @@
           </a:xfrm>
         </p:spPr>
         <p:txBody>
-          <a:bodyPr wrap="square" anchor="t">
+          <a:bodyPr vert="horz" wrap="square" anchor="t">
             <a:normAutofit/>
           </a:bodyPr>
           <a:lstStyle/>
@@ -10435,32 +10169,32 @@
                 <a:spcPts val="0"/>
               </a:spcBef>
               <a:spcAft>
-                <a:spcPts val="240"/>
+                <a:spcPts val="300"/>
               </a:spcAft>
             </a:pPr>
             <a:r>
-              <a:rPr sz="1600">
+              <a:rPr sz="2000">
                 <a:solidFill>
                   <a:srgbClr val="000000"/>
                 </a:solidFill>
               </a:rPr>
-              <a:t>Сотрудники тратят до 30 минут на поиск инструкции, а треть обращений — повторяющиеся вопросы</a:t>
+              <a:t>Пилот охватывает 2 подразделения и 150 сотрудников в течение 6 недель</a:t>
             </a:r>
           </a:p>
         </p:txBody>
       </p:sp>
       <p:grpSp>
         <p:nvGrpSpPr>
-          <p:cNvPr id="2" name="BrandDeck Diagram icon_grid" descr="icon_grid: Сотрудники тратят до 30 минут на поиск инструкции.; Треть всех обращений в поддержку — повторяющиеся вопросы.; Это создает высокую нагрузку на специалистов поддержки."/>
+          <p:cNvPr id="2" name="BrandDeck Diagram icon_grid" descr="icon_grid: Длительность 6 недель; Участники 150 сотрудников; Охват 2 подразделения"/>
           <p:cNvGrpSpPr/>
           <p:nvPr/>
         </p:nvGrpSpPr>
         <p:grpSpPr>
           <a:xfrm>
-            <a:off x="658813" y="2405806"/>
-            <a:ext cx="10874374" cy="2783294"/>
-            <a:chOff x="658813" y="2405806"/>
-            <a:chExt cx="10874374" cy="2783294"/>
+            <a:off x="658813" y="1773238"/>
+            <a:ext cx="10874375" cy="4447949"/>
+            <a:chOff x="658813" y="1773238"/>
+            <a:chExt cx="10874375" cy="4447949"/>
           </a:xfrm>
         </p:grpSpPr>
         <p:sp>
@@ -10471,8 +10205,8 @@
           </p:nvSpPr>
           <p:spPr>
             <a:xfrm>
-              <a:off x="658813" y="2405806"/>
-              <a:ext cx="5328443" cy="1282903"/>
+              <a:off x="658813" y="1773238"/>
+              <a:ext cx="4567237" cy="4447949"/>
             </a:xfrm>
             <a:prstGeom prst="roundRect">
               <a:avLst>
@@ -10502,8 +10236,8 @@
           </p:nvSpPr>
           <p:spPr>
             <a:xfrm>
-              <a:off x="878269" y="2751126"/>
-              <a:ext cx="592264" cy="592264"/>
+              <a:off x="878269" y="1992694"/>
+              <a:ext cx="603504" cy="603504"/>
             </a:xfrm>
             <a:prstGeom prst="ellipse">
               <a:avLst/>
@@ -10525,13 +10259,237 @@
         </p:sp>
         <p:sp>
           <p:nvSpPr>
-            <p:cNvPr id="6" name="BrandDeck Icon users"/>
+            <p:cNvPr id="6" name="BrandDeck Icon hourglass"/>
             <p:cNvSpPr/>
             <p:nvPr/>
           </p:nvSpPr>
           <p:spPr>
             <a:xfrm>
-              <a:off x="1008567" y="2881424"/>
+              <a:off x="1011039" y="2125464"/>
+              <a:ext cx="337962" cy="337962"/>
+            </a:xfrm>
+            <a:custGeom>
+              <a:avLst/>
+              <a:gdLst/>
+              <a:ahLst/>
+              <a:cxnLst/>
+              <a:rect l="l" t="t" r="r" b="b"/>
+              <a:pathLst>
+                <a:path w="24000" h="24000" fill="none">
+                  <a:moveTo>
+                    <a:pt x="5000" y="22000"/>
+                  </a:moveTo>
+                  <a:lnTo>
+                    <a:pt x="19000" y="22000"/>
+                  </a:lnTo>
+                </a:path>
+                <a:path w="24000" h="24000" fill="none">
+                  <a:moveTo>
+                    <a:pt x="5000" y="2000"/>
+                  </a:moveTo>
+                  <a:lnTo>
+                    <a:pt x="19000" y="2000"/>
+                  </a:lnTo>
+                </a:path>
+                <a:path w="24000" h="24000" fill="none">
+                  <a:moveTo>
+                    <a:pt x="17000" y="22000"/>
+                  </a:moveTo>
+                  <a:lnTo>
+                    <a:pt x="17000" y="17828"/>
+                  </a:lnTo>
+                  <a:cubicBezTo>
+                    <a:pt x="17000" y="17298"/>
+                    <a:pt x="16789" y="16789"/>
+                    <a:pt x="16414" y="16414"/>
+                  </a:cubicBezTo>
+                  <a:lnTo>
+                    <a:pt x="12000" y="12000"/>
+                  </a:lnTo>
+                  <a:lnTo>
+                    <a:pt x="7586" y="16414"/>
+                  </a:lnTo>
+                  <a:cubicBezTo>
+                    <a:pt x="7211" y="16789"/>
+                    <a:pt x="7000" y="17298"/>
+                    <a:pt x="7000" y="17828"/>
+                  </a:cubicBezTo>
+                  <a:lnTo>
+                    <a:pt x="7000" y="22000"/>
+                  </a:lnTo>
+                </a:path>
+                <a:path w="24000" h="24000" fill="none">
+                  <a:moveTo>
+                    <a:pt x="7000" y="2000"/>
+                  </a:moveTo>
+                  <a:lnTo>
+                    <a:pt x="7000" y="6172"/>
+                  </a:lnTo>
+                  <a:cubicBezTo>
+                    <a:pt x="7000" y="6702"/>
+                    <a:pt x="7211" y="7211"/>
+                    <a:pt x="7586" y="7586"/>
+                  </a:cubicBezTo>
+                  <a:lnTo>
+                    <a:pt x="12000" y="12000"/>
+                  </a:lnTo>
+                  <a:lnTo>
+                    <a:pt x="16414" y="7586"/>
+                  </a:lnTo>
+                  <a:cubicBezTo>
+                    <a:pt x="16789" y="7211"/>
+                    <a:pt x="17000" y="6702"/>
+                    <a:pt x="17000" y="6172"/>
+                  </a:cubicBezTo>
+                  <a:lnTo>
+                    <a:pt x="17000" y="2000"/>
+                  </a:lnTo>
+                </a:path>
+              </a:pathLst>
+            </a:custGeom>
+            <a:noFill/>
+            <a:ln w="28163" cap="rnd">
+              <a:solidFill>
+                <a:srgbClr val="FFFFFF"/>
+              </a:solidFill>
+              <a:round/>
+            </a:ln>
+          </p:spPr>
+          <p:txBody>
+            <a:bodyPr rtlCol="0" anchor="ctr"/>
+            <a:lstStyle/>
+            <a:p>
+              <a:pPr algn="ctr"/>
+            </a:p>
+          </p:txBody>
+        </p:sp>
+        <p:sp>
+          <p:nvSpPr>
+            <p:cNvPr id="7" name="BrandDeck Diagram Text 1"/>
+            <p:cNvSpPr txBox="1"/>
+            <p:nvPr/>
+          </p:nvSpPr>
+          <p:spPr>
+            <a:xfrm>
+              <a:off x="812432" y="2749817"/>
+              <a:ext cx="4259999" cy="3361641"/>
+            </a:xfrm>
+            <a:prstGeom prst="rect">
+              <a:avLst/>
+            </a:prstGeom>
+            <a:noFill/>
+          </p:spPr>
+          <p:txBody>
+            <a:bodyPr wrap="square" anchor="t" lIns="36576" tIns="18288" rIns="36576" bIns="18288">
+              <a:noAutofit/>
+            </a:bodyPr>
+            <a:lstStyle/>
+            <a:p>
+              <a:pPr algn="l">
+                <a:lnSpc>
+                  <a:spcPct val="110000"/>
+                </a:lnSpc>
+              </a:pPr>
+              <a:r>
+                <a:rPr sz="1800" b="1">
+                  <a:solidFill>
+                    <a:srgbClr val="000000"/>
+                  </a:solidFill>
+                  <a:latin typeface="Play"/>
+                </a:rPr>
+                <a:t>Длительность</a:t>
+              </a:r>
+            </a:p>
+            <a:p>
+              <a:pPr algn="l">
+                <a:lnSpc>
+                  <a:spcPct val="110000"/>
+                </a:lnSpc>
+                <a:spcBef>
+                  <a:spcPts val="450"/>
+                </a:spcBef>
+              </a:pPr>
+              <a:r>
+                <a:rPr sz="1800" b="0">
+                  <a:solidFill>
+                    <a:srgbClr val="000000"/>
+                  </a:solidFill>
+                  <a:latin typeface="Play"/>
+                </a:rPr>
+                <a:t>6 недель</a:t>
+              </a:r>
+            </a:p>
+          </p:txBody>
+        </p:sp>
+        <p:sp>
+          <p:nvSpPr>
+            <p:cNvPr id="8" name="BrandDeck Diagram Card 2"/>
+            <p:cNvSpPr/>
+            <p:nvPr/>
+          </p:nvSpPr>
+          <p:spPr>
+            <a:xfrm>
+              <a:off x="5443538" y="1773238"/>
+              <a:ext cx="6089650" cy="2115230"/>
+            </a:xfrm>
+            <a:prstGeom prst="roundRect">
+              <a:avLst>
+                <a:gd name="adj" fmla="val 8000"/>
+              </a:avLst>
+            </a:prstGeom>
+            <a:solidFill>
+              <a:srgbClr val="EDF5FF"/>
+            </a:solidFill>
+            <a:ln>
+              <a:noFill/>
+            </a:ln>
+          </p:spPr>
+          <p:txBody>
+            <a:bodyPr rtlCol="0" anchor="ctr"/>
+            <a:lstStyle/>
+            <a:p>
+              <a:pPr algn="ctr"/>
+            </a:p>
+          </p:txBody>
+        </p:sp>
+        <p:sp>
+          <p:nvSpPr>
+            <p:cNvPr id="9" name="BrandDeck Diagram Icon 2 Badge"/>
+            <p:cNvSpPr/>
+            <p:nvPr/>
+          </p:nvSpPr>
+          <p:spPr>
+            <a:xfrm>
+              <a:off x="5662994" y="2534721"/>
+              <a:ext cx="592264" cy="592264"/>
+            </a:xfrm>
+            <a:prstGeom prst="ellipse">
+              <a:avLst/>
+            </a:prstGeom>
+            <a:solidFill>
+              <a:srgbClr val="006DEB"/>
+            </a:solidFill>
+            <a:ln>
+              <a:noFill/>
+            </a:ln>
+          </p:spPr>
+          <p:txBody>
+            <a:bodyPr rtlCol="0" anchor="ctr"/>
+            <a:lstStyle/>
+            <a:p>
+              <a:pPr algn="ctr"/>
+            </a:p>
+          </p:txBody>
+        </p:sp>
+        <p:sp>
+          <p:nvSpPr>
+            <p:cNvPr id="10" name="BrandDeck Icon users"/>
+            <p:cNvSpPr/>
+            <p:nvPr/>
+          </p:nvSpPr>
+          <p:spPr>
+            <a:xfrm>
+              <a:off x="5793292" y="2665019"/>
               <a:ext cx="331668" cy="331668"/>
             </a:xfrm>
             <a:custGeom>
@@ -10639,242 +10597,14 @@
         </p:sp>
         <p:sp>
           <p:nvSpPr>
-            <p:cNvPr id="7" name="BrandDeck Diagram Text 1"/>
-            <p:cNvSpPr txBox="1"/>
-            <p:nvPr/>
-          </p:nvSpPr>
-          <p:spPr>
-            <a:xfrm>
-              <a:off x="1602207" y="2537480"/>
-              <a:ext cx="4165593" cy="1019556"/>
-            </a:xfrm>
-            <a:prstGeom prst="rect">
-              <a:avLst/>
-            </a:prstGeom>
-            <a:noFill/>
-          </p:spPr>
-          <p:txBody>
-            <a:bodyPr wrap="square" anchor="ctr" lIns="36576" tIns="18288" rIns="36576" bIns="18288">
-              <a:noAutofit/>
-            </a:bodyPr>
-            <a:lstStyle/>
-            <a:p>
-              <a:pPr algn="l">
-                <a:lnSpc>
-                  <a:spcPct val="110000"/>
-                </a:lnSpc>
-              </a:pPr>
-              <a:r>
-                <a:rPr sz="1800" b="0">
-                  <a:solidFill>
-                    <a:srgbClr val="000000"/>
-                  </a:solidFill>
-                  <a:latin typeface="Play"/>
-                </a:rPr>
-                <a:t>Сотрудники тратят до 30 минут на поиск инструкции.</a:t>
-              </a:r>
-            </a:p>
-          </p:txBody>
-        </p:sp>
-        <p:sp>
-          <p:nvSpPr>
-            <p:cNvPr id="8" name="BrandDeck Diagram Card 2"/>
-            <p:cNvSpPr/>
-            <p:nvPr/>
-          </p:nvSpPr>
-          <p:spPr>
-            <a:xfrm>
-              <a:off x="6204744" y="2405806"/>
-              <a:ext cx="5328443" cy="1282903"/>
-            </a:xfrm>
-            <a:prstGeom prst="roundRect">
-              <a:avLst>
-                <a:gd name="adj" fmla="val 8000"/>
-              </a:avLst>
-            </a:prstGeom>
-            <a:solidFill>
-              <a:srgbClr val="EDF5FF"/>
-            </a:solidFill>
-            <a:ln>
-              <a:noFill/>
-            </a:ln>
-          </p:spPr>
-          <p:txBody>
-            <a:bodyPr rtlCol="0" anchor="ctr"/>
-            <a:lstStyle/>
-            <a:p>
-              <a:pPr algn="ctr"/>
-            </a:p>
-          </p:txBody>
-        </p:sp>
-        <p:sp>
-          <p:nvSpPr>
-            <p:cNvPr id="9" name="BrandDeck Diagram Icon 2 Badge"/>
-            <p:cNvSpPr/>
-            <p:nvPr/>
-          </p:nvSpPr>
-          <p:spPr>
-            <a:xfrm>
-              <a:off x="6424200" y="2751126"/>
-              <a:ext cx="592264" cy="592264"/>
-            </a:xfrm>
-            <a:prstGeom prst="ellipse">
-              <a:avLst/>
-            </a:prstGeom>
-            <a:solidFill>
-              <a:srgbClr val="006DEB"/>
-            </a:solidFill>
-            <a:ln>
-              <a:noFill/>
-            </a:ln>
-          </p:spPr>
-          <p:txBody>
-            <a:bodyPr rtlCol="0" anchor="ctr"/>
-            <a:lstStyle/>
-            <a:p>
-              <a:pPr algn="ctr"/>
-            </a:p>
-          </p:txBody>
-        </p:sp>
-        <p:sp>
-          <p:nvSpPr>
-            <p:cNvPr id="10" name="BrandDeck Icon headset"/>
-            <p:cNvSpPr/>
-            <p:nvPr/>
-          </p:nvSpPr>
-          <p:spPr>
-            <a:xfrm>
-              <a:off x="6554498" y="2881424"/>
-              <a:ext cx="331668" cy="331668"/>
-            </a:xfrm>
-            <a:custGeom>
-              <a:avLst/>
-              <a:gdLst/>
-              <a:ahLst/>
-              <a:cxnLst/>
-              <a:rect l="l" t="t" r="r" b="b"/>
-              <a:pathLst>
-                <a:path w="24000" h="24000" fill="none">
-                  <a:moveTo>
-                    <a:pt x="3000" y="11000"/>
-                  </a:moveTo>
-                  <a:lnTo>
-                    <a:pt x="6000" y="11000"/>
-                  </a:lnTo>
-                  <a:cubicBezTo>
-                    <a:pt x="7105" y="11000"/>
-                    <a:pt x="8000" y="11895"/>
-                    <a:pt x="8000" y="13000"/>
-                  </a:cubicBezTo>
-                  <a:lnTo>
-                    <a:pt x="8000" y="16000"/>
-                  </a:lnTo>
-                  <a:cubicBezTo>
-                    <a:pt x="8000" y="17105"/>
-                    <a:pt x="7105" y="18000"/>
-                    <a:pt x="6000" y="18000"/>
-                  </a:cubicBezTo>
-                  <a:lnTo>
-                    <a:pt x="5000" y="18000"/>
-                  </a:lnTo>
-                  <a:cubicBezTo>
-                    <a:pt x="3895" y="18000"/>
-                    <a:pt x="3000" y="17105"/>
-                    <a:pt x="3000" y="16000"/>
-                  </a:cubicBezTo>
-                  <a:lnTo>
-                    <a:pt x="3000" y="11000"/>
-                  </a:lnTo>
-                  <a:close/>
-                  <a:moveTo>
-                    <a:pt x="3000" y="11000"/>
-                  </a:moveTo>
-                  <a:cubicBezTo>
-                    <a:pt x="3000" y="6029"/>
-                    <a:pt x="7029" y="2000"/>
-                    <a:pt x="12000" y="2000"/>
-                  </a:cubicBezTo>
-                  <a:cubicBezTo>
-                    <a:pt x="16971" y="2000"/>
-                    <a:pt x="21000" y="6029"/>
-                    <a:pt x="21000" y="11000"/>
-                  </a:cubicBezTo>
-                  <a:moveTo>
-                    <a:pt x="21000" y="11000"/>
-                  </a:moveTo>
-                  <a:lnTo>
-                    <a:pt x="21000" y="16000"/>
-                  </a:lnTo>
-                  <a:cubicBezTo>
-                    <a:pt x="21000" y="17105"/>
-                    <a:pt x="20105" y="18000"/>
-                    <a:pt x="19000" y="18000"/>
-                  </a:cubicBezTo>
-                  <a:lnTo>
-                    <a:pt x="18000" y="18000"/>
-                  </a:lnTo>
-                  <a:cubicBezTo>
-                    <a:pt x="16895" y="18000"/>
-                    <a:pt x="16000" y="17105"/>
-                    <a:pt x="16000" y="16000"/>
-                  </a:cubicBezTo>
-                  <a:lnTo>
-                    <a:pt x="16000" y="13000"/>
-                  </a:lnTo>
-                  <a:cubicBezTo>
-                    <a:pt x="16000" y="11895"/>
-                    <a:pt x="16895" y="11000"/>
-                    <a:pt x="18000" y="11000"/>
-                  </a:cubicBezTo>
-                  <a:lnTo>
-                    <a:pt x="21000" y="11000"/>
-                  </a:lnTo>
-                  <a:close/>
-                </a:path>
-                <a:path w="24000" h="24000" fill="none">
-                  <a:moveTo>
-                    <a:pt x="21000" y="16000"/>
-                  </a:moveTo>
-                  <a:lnTo>
-                    <a:pt x="21000" y="18000"/>
-                  </a:lnTo>
-                  <a:cubicBezTo>
-                    <a:pt x="21000" y="20209"/>
-                    <a:pt x="19209" y="22000"/>
-                    <a:pt x="17000" y="22000"/>
-                  </a:cubicBezTo>
-                  <a:lnTo>
-                    <a:pt x="12000" y="22000"/>
-                  </a:lnTo>
-                </a:path>
-              </a:pathLst>
-            </a:custGeom>
-            <a:noFill/>
-            <a:ln w="27639" cap="rnd">
-              <a:solidFill>
-                <a:srgbClr val="FFFFFF"/>
-              </a:solidFill>
-              <a:round/>
-            </a:ln>
-          </p:spPr>
-          <p:txBody>
-            <a:bodyPr rtlCol="0" anchor="ctr"/>
-            <a:lstStyle/>
-            <a:p>
-              <a:pPr algn="ctr"/>
-            </a:p>
-          </p:txBody>
-        </p:sp>
-        <p:sp>
-          <p:nvSpPr>
             <p:cNvPr id="11" name="BrandDeck Diagram Text 2"/>
             <p:cNvSpPr txBox="1"/>
             <p:nvPr/>
           </p:nvSpPr>
           <p:spPr>
             <a:xfrm>
-              <a:off x="7148138" y="2537480"/>
-              <a:ext cx="4165593" cy="1019556"/>
+              <a:off x="6386932" y="1904911"/>
+              <a:ext cx="4926799" cy="1851883"/>
             </a:xfrm>
             <a:prstGeom prst="rect">
               <a:avLst/>
@@ -10899,469 +10629,7 @@
                   </a:solidFill>
                   <a:latin typeface="Play"/>
                 </a:rPr>
-                <a:t>Треть всех обращений в поддержку —</a:t>
-              </a:r>
-              <a:r>
-                <a:rPr sz="1800" b="0">
-                  <a:solidFill>
-                    <a:srgbClr val="000000"/>
-                  </a:solidFill>
-                  <a:latin typeface="Play"/>
-                </a:rPr>
-                <a:t> повторяющиеся вопросы.</a:t>
-              </a:r>
-            </a:p>
-          </p:txBody>
-        </p:sp>
-        <p:sp>
-          <p:nvSpPr>
-            <p:cNvPr id="12" name="BrandDeck Diagram Card 3"/>
-            <p:cNvSpPr/>
-            <p:nvPr/>
-          </p:nvSpPr>
-          <p:spPr>
-            <a:xfrm>
-              <a:off x="658813" y="3906197"/>
-              <a:ext cx="5328443" cy="1282903"/>
-            </a:xfrm>
-            <a:prstGeom prst="roundRect">
-              <a:avLst>
-                <a:gd name="adj" fmla="val 8000"/>
-              </a:avLst>
-            </a:prstGeom>
-            <a:solidFill>
-              <a:srgbClr val="EDF5FF"/>
-            </a:solidFill>
-            <a:ln>
-              <a:noFill/>
-            </a:ln>
-          </p:spPr>
-          <p:txBody>
-            <a:bodyPr rtlCol="0" anchor="ctr"/>
-            <a:lstStyle/>
-            <a:p>
-              <a:pPr algn="ctr"/>
-            </a:p>
-          </p:txBody>
-        </p:sp>
-        <p:sp>
-          <p:nvSpPr>
-            <p:cNvPr id="13" name="BrandDeck Diagram Icon 3 Badge"/>
-            <p:cNvSpPr/>
-            <p:nvPr/>
-          </p:nvSpPr>
-          <p:spPr>
-            <a:xfrm>
-              <a:off x="878269" y="4251516"/>
-              <a:ext cx="592264" cy="592264"/>
-            </a:xfrm>
-            <a:prstGeom prst="ellipse">
-              <a:avLst/>
-            </a:prstGeom>
-            <a:solidFill>
-              <a:srgbClr val="006DEB"/>
-            </a:solidFill>
-            <a:ln>
-              <a:noFill/>
-            </a:ln>
-          </p:spPr>
-          <p:txBody>
-            <a:bodyPr rtlCol="0" anchor="ctr"/>
-            <a:lstStyle/>
-            <a:p>
-              <a:pPr algn="ctr"/>
-            </a:p>
-          </p:txBody>
-        </p:sp>
-        <p:sp>
-          <p:nvSpPr>
-            <p:cNvPr id="14" name="BrandDeck Icon gauge"/>
-            <p:cNvSpPr/>
-            <p:nvPr/>
-          </p:nvSpPr>
-          <p:spPr>
-            <a:xfrm>
-              <a:off x="1008567" y="4381815"/>
-              <a:ext cx="331668" cy="331668"/>
-            </a:xfrm>
-            <a:custGeom>
-              <a:avLst/>
-              <a:gdLst/>
-              <a:ahLst/>
-              <a:cxnLst/>
-              <a:rect l="l" t="t" r="r" b="b"/>
-              <a:pathLst>
-                <a:path w="24000" h="24000" fill="none">
-                  <a:moveTo>
-                    <a:pt x="12000" y="14000"/>
-                  </a:moveTo>
-                  <a:lnTo>
-                    <a:pt x="16000" y="10000"/>
-                  </a:lnTo>
-                </a:path>
-                <a:path w="24000" h="24000" fill="none">
-                  <a:moveTo>
-                    <a:pt x="3340" y="19000"/>
-                  </a:moveTo>
-                  <a:cubicBezTo>
-                    <a:pt x="913" y="14797"/>
-                    <a:pt x="1854" y="9459"/>
-                    <a:pt x="5572" y="6339"/>
-                  </a:cubicBezTo>
-                  <a:cubicBezTo>
-                    <a:pt x="9290" y="3220"/>
-                    <a:pt x="14710" y="3220"/>
-                    <a:pt x="18428" y="6339"/>
-                  </a:cubicBezTo>
-                  <a:cubicBezTo>
-                    <a:pt x="22146" y="9459"/>
-                    <a:pt x="23087" y="14797"/>
-                    <a:pt x="20660" y="19000"/>
-                  </a:cubicBezTo>
-                </a:path>
-              </a:pathLst>
-            </a:custGeom>
-            <a:noFill/>
-            <a:ln w="27639" cap="rnd">
-              <a:solidFill>
-                <a:srgbClr val="FFFFFF"/>
-              </a:solidFill>
-              <a:round/>
-            </a:ln>
-          </p:spPr>
-          <p:txBody>
-            <a:bodyPr rtlCol="0" anchor="ctr"/>
-            <a:lstStyle/>
-            <a:p>
-              <a:pPr algn="ctr"/>
-            </a:p>
-          </p:txBody>
-        </p:sp>
-        <p:sp>
-          <p:nvSpPr>
-            <p:cNvPr id="15" name="BrandDeck Diagram Text 3"/>
-            <p:cNvSpPr txBox="1"/>
-            <p:nvPr/>
-          </p:nvSpPr>
-          <p:spPr>
-            <a:xfrm>
-              <a:off x="1602207" y="4037871"/>
-              <a:ext cx="4165593" cy="1019556"/>
-            </a:xfrm>
-            <a:prstGeom prst="rect">
-              <a:avLst/>
-            </a:prstGeom>
-            <a:noFill/>
-          </p:spPr>
-          <p:txBody>
-            <a:bodyPr wrap="square" anchor="ctr" lIns="36576" tIns="18288" rIns="36576" bIns="18288">
-              <a:noAutofit/>
-            </a:bodyPr>
-            <a:lstStyle/>
-            <a:p>
-              <a:pPr algn="l">
-                <a:lnSpc>
-                  <a:spcPct val="110000"/>
-                </a:lnSpc>
-              </a:pPr>
-              <a:r>
-                <a:rPr sz="1800" b="0">
-                  <a:solidFill>
-                    <a:srgbClr val="000000"/>
-                  </a:solidFill>
-                  <a:latin typeface="Play"/>
-                </a:rPr>
-                <a:t>Это создает высокую нагрузку на специалистов поддержки.</a:t>
-              </a:r>
-            </a:p>
-          </p:txBody>
-        </p:sp>
-      </p:grpSp>
-    </p:spTree>
-  </p:cSld>
-  <p:clrMapOvr>
-    <a:masterClrMapping/>
-  </p:clrMapOvr>
-</p:sld>
-</file>
-
-<file path=ppt/slides/slide3.xml><?xml version="1.0" encoding="utf-8"?>
-<p:sld xmlns:a="http://schemas.openxmlformats.org/drawingml/2006/main" xmlns:p="http://schemas.openxmlformats.org/presentationml/2006/main" xmlns:r="http://schemas.openxmlformats.org/officeDocument/2006/relationships">
-  <p:cSld>
-    <p:spTree>
-      <p:nvGrpSpPr>
-        <p:cNvPr id="1" name=""/>
-        <p:cNvGrpSpPr/>
-        <p:nvPr/>
-      </p:nvGrpSpPr>
-      <p:grpSpPr/>
-      <p:sp>
-        <p:nvSpPr>
-          <p:cNvPr id="3" name="BrandDeck Text 3"/>
-          <p:cNvSpPr>
-            <a:spLocks noGrp="1"/>
-          </p:cNvSpPr>
-          <p:nvPr>
-            <p:ph type="title"/>
-          </p:nvPr>
-        </p:nvSpPr>
-        <p:spPr>
-          <a:xfrm>
-            <a:off x="677334" y="692150"/>
-            <a:ext cx="10855854" cy="644241"/>
-          </a:xfrm>
-        </p:spPr>
-        <p:txBody>
-          <a:bodyPr wrap="square" anchor="t">
-            <a:normAutofit/>
-          </a:bodyPr>
-          <a:lstStyle/>
-          <a:p>
-            <a:pPr algn="l">
-              <a:lnSpc>
-                <a:spcPct val="115000"/>
-              </a:lnSpc>
-              <a:spcBef>
-                <a:spcPts val="0"/>
-              </a:spcBef>
-              <a:spcAft>
-                <a:spcPts val="240"/>
-              </a:spcAft>
-            </a:pPr>
-            <a:r>
-              <a:rPr sz="1600">
-                <a:solidFill>
-                  <a:srgbClr val="000000"/>
-                </a:solidFill>
-              </a:rPr>
-              <a:t>Влияет на 150 сотрудников двух подразделений при ежедневном обращении к регламентам</a:t>
-            </a:r>
-          </a:p>
-        </p:txBody>
-      </p:sp>
-      <p:grpSp>
-        <p:nvGrpSpPr>
-          <p:cNvPr id="2" name="BrandDeck Diagram icon_grid" descr="icon_grid: 150 сотрудников Два подразделения; 6 недель Период пилота"/>
-          <p:cNvGrpSpPr/>
-          <p:nvPr/>
-        </p:nvGrpSpPr>
-        <p:grpSpPr>
-          <a:xfrm>
-            <a:off x="658813" y="1773238"/>
-            <a:ext cx="10874374" cy="4447949"/>
-            <a:chOff x="658813" y="1773238"/>
-            <a:chExt cx="10874374" cy="4447949"/>
-          </a:xfrm>
-        </p:grpSpPr>
-        <p:sp>
-          <p:nvSpPr>
-            <p:cNvPr id="4" name="BrandDeck Diagram Card 1"/>
-            <p:cNvSpPr/>
-            <p:nvPr/>
-          </p:nvSpPr>
-          <p:spPr>
-            <a:xfrm>
-              <a:off x="658813" y="1773238"/>
-              <a:ext cx="5328443" cy="4447949"/>
-            </a:xfrm>
-            <a:prstGeom prst="roundRect">
-              <a:avLst>
-                <a:gd name="adj" fmla="val 8000"/>
-              </a:avLst>
-            </a:prstGeom>
-            <a:solidFill>
-              <a:srgbClr val="EDF5FF"/>
-            </a:solidFill>
-            <a:ln>
-              <a:noFill/>
-            </a:ln>
-          </p:spPr>
-          <p:txBody>
-            <a:bodyPr rtlCol="0" anchor="ctr"/>
-            <a:lstStyle/>
-            <a:p>
-              <a:pPr algn="ctr"/>
-            </a:p>
-          </p:txBody>
-        </p:sp>
-        <p:sp>
-          <p:nvSpPr>
-            <p:cNvPr id="5" name="BrandDeck Diagram Icon 1 Badge"/>
-            <p:cNvSpPr/>
-            <p:nvPr/>
-          </p:nvSpPr>
-          <p:spPr>
-            <a:xfrm>
-              <a:off x="878269" y="1992694"/>
-              <a:ext cx="603504" cy="603504"/>
-            </a:xfrm>
-            <a:prstGeom prst="ellipse">
-              <a:avLst/>
-            </a:prstGeom>
-            <a:solidFill>
-              <a:srgbClr val="006DEB"/>
-            </a:solidFill>
-            <a:ln>
-              <a:noFill/>
-            </a:ln>
-          </p:spPr>
-          <p:txBody>
-            <a:bodyPr rtlCol="0" anchor="ctr"/>
-            <a:lstStyle/>
-            <a:p>
-              <a:pPr algn="ctr"/>
-            </a:p>
-          </p:txBody>
-        </p:sp>
-        <p:sp>
-          <p:nvSpPr>
-            <p:cNvPr id="6" name="BrandDeck Icon users"/>
-            <p:cNvSpPr/>
-            <p:nvPr/>
-          </p:nvSpPr>
-          <p:spPr>
-            <a:xfrm>
-              <a:off x="1011039" y="2125464"/>
-              <a:ext cx="337962" cy="337962"/>
-            </a:xfrm>
-            <a:custGeom>
-              <a:avLst/>
-              <a:gdLst/>
-              <a:ahLst/>
-              <a:cxnLst/>
-              <a:rect l="l" t="t" r="r" b="b"/>
-              <a:pathLst>
-                <a:path w="24000" h="24000" fill="none">
-                  <a:moveTo>
-                    <a:pt x="16000" y="21000"/>
-                  </a:moveTo>
-                  <a:lnTo>
-                    <a:pt x="16000" y="19000"/>
-                  </a:lnTo>
-                  <a:cubicBezTo>
-                    <a:pt x="16000" y="16791"/>
-                    <a:pt x="14209" y="15000"/>
-                    <a:pt x="12000" y="15000"/>
-                  </a:cubicBezTo>
-                  <a:lnTo>
-                    <a:pt x="6000" y="15000"/>
-                  </a:lnTo>
-                  <a:cubicBezTo>
-                    <a:pt x="3791" y="15000"/>
-                    <a:pt x="2000" y="16791"/>
-                    <a:pt x="2000" y="19000"/>
-                  </a:cubicBezTo>
-                  <a:lnTo>
-                    <a:pt x="2000" y="21000"/>
-                  </a:lnTo>
-                </a:path>
-                <a:path w="24000" h="24000" fill="none">
-                  <a:moveTo>
-                    <a:pt x="13000" y="7000"/>
-                  </a:moveTo>
-                  <a:cubicBezTo>
-                    <a:pt x="13000" y="9209"/>
-                    <a:pt x="11209" y="11000"/>
-                    <a:pt x="9000" y="11000"/>
-                  </a:cubicBezTo>
-                  <a:cubicBezTo>
-                    <a:pt x="6791" y="11000"/>
-                    <a:pt x="5000" y="9209"/>
-                    <a:pt x="5000" y="7000"/>
-                  </a:cubicBezTo>
-                  <a:cubicBezTo>
-                    <a:pt x="5000" y="4791"/>
-                    <a:pt x="6791" y="3000"/>
-                    <a:pt x="9000" y="3000"/>
-                  </a:cubicBezTo>
-                  <a:cubicBezTo>
-                    <a:pt x="11209" y="3000"/>
-                    <a:pt x="13000" y="4791"/>
-                    <a:pt x="13000" y="7000"/>
-                  </a:cubicBezTo>
-                  <a:close/>
-                </a:path>
-                <a:path w="24000" h="24000" fill="none">
-                  <a:moveTo>
-                    <a:pt x="22000" y="21000"/>
-                  </a:moveTo>
-                  <a:lnTo>
-                    <a:pt x="22000" y="19000"/>
-                  </a:lnTo>
-                  <a:cubicBezTo>
-                    <a:pt x="21999" y="17177"/>
-                    <a:pt x="20765" y="15586"/>
-                    <a:pt x="19000" y="15130"/>
-                  </a:cubicBezTo>
-                </a:path>
-                <a:path w="24000" h="24000" fill="none">
-                  <a:moveTo>
-                    <a:pt x="16000" y="3130"/>
-                  </a:moveTo>
-                  <a:cubicBezTo>
-                    <a:pt x="17770" y="3583"/>
-                    <a:pt x="19008" y="5178"/>
-                    <a:pt x="19008" y="7005"/>
-                  </a:cubicBezTo>
-                  <a:cubicBezTo>
-                    <a:pt x="19008" y="8832"/>
-                    <a:pt x="17770" y="10427"/>
-                    <a:pt x="16000" y="10880"/>
-                  </a:cubicBezTo>
-                </a:path>
-              </a:pathLst>
-            </a:custGeom>
-            <a:noFill/>
-            <a:ln w="28163" cap="rnd">
-              <a:solidFill>
-                <a:srgbClr val="FFFFFF"/>
-              </a:solidFill>
-              <a:round/>
-            </a:ln>
-          </p:spPr>
-          <p:txBody>
-            <a:bodyPr rtlCol="0" anchor="ctr"/>
-            <a:lstStyle/>
-            <a:p>
-              <a:pPr algn="ctr"/>
-            </a:p>
-          </p:txBody>
-        </p:sp>
-        <p:sp>
-          <p:nvSpPr>
-            <p:cNvPr id="7" name="BrandDeck Diagram Text 1"/>
-            <p:cNvSpPr txBox="1"/>
-            <p:nvPr/>
-          </p:nvSpPr>
-          <p:spPr>
-            <a:xfrm>
-              <a:off x="812432" y="2749817"/>
-              <a:ext cx="5021205" cy="3361641"/>
-            </a:xfrm>
-            <a:prstGeom prst="rect">
-              <a:avLst/>
-            </a:prstGeom>
-            <a:noFill/>
-          </p:spPr>
-          <p:txBody>
-            <a:bodyPr wrap="square" anchor="t" lIns="36576" tIns="18288" rIns="36576" bIns="18288">
-              <a:noAutofit/>
-            </a:bodyPr>
-            <a:lstStyle/>
-            <a:p>
-              <a:pPr algn="l">
-                <a:lnSpc>
-                  <a:spcPct val="110000"/>
-                </a:lnSpc>
-              </a:pPr>
-              <a:r>
-                <a:rPr sz="1800" b="1">
-                  <a:solidFill>
-                    <a:srgbClr val="000000"/>
-                  </a:solidFill>
-                  <a:latin typeface="Play"/>
-                </a:rPr>
-                <a:t>150 сотрудников</a:t>
+                <a:t>Участники</a:t>
               </a:r>
             </a:p>
             <a:p>
@@ -11380,21 +10648,21 @@
                   </a:solidFill>
                   <a:latin typeface="Play"/>
                 </a:rPr>
-                <a:t>Два подразделения</a:t>
+                <a:t>150 сотрудников</a:t>
               </a:r>
             </a:p>
           </p:txBody>
         </p:sp>
         <p:sp>
           <p:nvSpPr>
-            <p:cNvPr id="8" name="BrandDeck Diagram Card 2"/>
+            <p:cNvPr id="12" name="BrandDeck Diagram Card 3"/>
             <p:cNvSpPr/>
             <p:nvPr/>
           </p:nvSpPr>
           <p:spPr>
             <a:xfrm>
-              <a:off x="6204744" y="1773238"/>
-              <a:ext cx="5328443" cy="4447949"/>
+              <a:off x="5443538" y="4105956"/>
+              <a:ext cx="6089650" cy="2115230"/>
             </a:xfrm>
             <a:prstGeom prst="roundRect">
               <a:avLst>
@@ -11418,14 +10686,14 @@
         </p:sp>
         <p:sp>
           <p:nvSpPr>
-            <p:cNvPr id="9" name="BrandDeck Diagram Icon 2 Badge"/>
+            <p:cNvPr id="13" name="BrandDeck Diagram Icon 3 Badge"/>
             <p:cNvSpPr/>
             <p:nvPr/>
           </p:nvSpPr>
           <p:spPr>
             <a:xfrm>
-              <a:off x="6424200" y="1992694"/>
-              <a:ext cx="603504" cy="603504"/>
+              <a:off x="5662994" y="4867439"/>
+              <a:ext cx="592264" cy="592264"/>
             </a:xfrm>
             <a:prstGeom prst="ellipse">
               <a:avLst/>
@@ -11447,14 +10715,14 @@
         </p:sp>
         <p:sp>
           <p:nvSpPr>
-            <p:cNvPr id="10" name="BrandDeck Icon calendar"/>
+            <p:cNvPr id="14" name="BrandDeck Icon building-2"/>
             <p:cNvSpPr/>
             <p:nvPr/>
           </p:nvSpPr>
           <p:spPr>
             <a:xfrm>
-              <a:off x="6556971" y="2125464"/>
-              <a:ext cx="337962" cy="337962"/>
+              <a:off x="5793292" y="4997737"/>
+              <a:ext cx="331668" cy="331668"/>
             </a:xfrm>
             <a:custGeom>
               <a:avLst/>
@@ -11465,70 +10733,113 @@
               <a:pathLst>
                 <a:path w="24000" h="24000" fill="none">
                   <a:moveTo>
-                    <a:pt x="8000" y="2000"/>
+                    <a:pt x="6000" y="22000"/>
                   </a:moveTo>
                   <a:lnTo>
-                    <a:pt x="8000" y="6000"/>
+                    <a:pt x="6000" y="4000"/>
+                  </a:lnTo>
+                  <a:cubicBezTo>
+                    <a:pt x="6000" y="2895"/>
+                    <a:pt x="6895" y="2000"/>
+                    <a:pt x="8000" y="2000"/>
+                  </a:cubicBezTo>
+                  <a:lnTo>
+                    <a:pt x="16000" y="2000"/>
+                  </a:lnTo>
+                  <a:cubicBezTo>
+                    <a:pt x="17105" y="2000"/>
+                    <a:pt x="18000" y="2895"/>
+                    <a:pt x="18000" y="4000"/>
+                  </a:cubicBezTo>
+                  <a:lnTo>
+                    <a:pt x="18000" y="22000"/>
+                  </a:lnTo>
+                  <a:close/>
+                </a:path>
+                <a:path w="24000" h="24000" fill="none">
+                  <a:moveTo>
+                    <a:pt x="6000" y="12000"/>
+                  </a:moveTo>
+                  <a:lnTo>
+                    <a:pt x="4000" y="12000"/>
+                  </a:lnTo>
+                  <a:cubicBezTo>
+                    <a:pt x="2895" y="12000"/>
+                    <a:pt x="2000" y="12895"/>
+                    <a:pt x="2000" y="14000"/>
+                  </a:cubicBezTo>
+                  <a:lnTo>
+                    <a:pt x="2000" y="20000"/>
+                  </a:lnTo>
+                  <a:cubicBezTo>
+                    <a:pt x="2000" y="21105"/>
+                    <a:pt x="2895" y="22000"/>
+                    <a:pt x="4000" y="22000"/>
+                  </a:cubicBezTo>
+                  <a:lnTo>
+                    <a:pt x="6000" y="22000"/>
                   </a:lnTo>
                 </a:path>
                 <a:path w="24000" h="24000" fill="none">
                   <a:moveTo>
-                    <a:pt x="16000" y="2000"/>
+                    <a:pt x="18000" y="9000"/>
                   </a:moveTo>
                   <a:lnTo>
-                    <a:pt x="16000" y="6000"/>
+                    <a:pt x="20000" y="9000"/>
+                  </a:lnTo>
+                  <a:cubicBezTo>
+                    <a:pt x="21105" y="9000"/>
+                    <a:pt x="22000" y="9895"/>
+                    <a:pt x="22000" y="11000"/>
+                  </a:cubicBezTo>
+                  <a:lnTo>
+                    <a:pt x="22000" y="20000"/>
+                  </a:lnTo>
+                  <a:cubicBezTo>
+                    <a:pt x="22000" y="21105"/>
+                    <a:pt x="21105" y="22000"/>
+                    <a:pt x="20000" y="22000"/>
+                  </a:cubicBezTo>
+                  <a:lnTo>
+                    <a:pt x="18000" y="22000"/>
                   </a:lnTo>
                 </a:path>
                 <a:path w="24000" h="24000" fill="none">
                   <a:moveTo>
-                    <a:pt x="5000" y="4000"/>
+                    <a:pt x="10000" y="6000"/>
                   </a:moveTo>
                   <a:lnTo>
-                    <a:pt x="19000" y="4000"/>
+                    <a:pt x="14000" y="6000"/>
                   </a:lnTo>
-                  <a:cubicBezTo>
-                    <a:pt x="20105" y="4000"/>
-                    <a:pt x="21000" y="4895"/>
-                    <a:pt x="21000" y="6000"/>
-                  </a:cubicBezTo>
-                  <a:lnTo>
-                    <a:pt x="21000" y="20000"/>
-                  </a:lnTo>
-                  <a:cubicBezTo>
-                    <a:pt x="21000" y="21105"/>
-                    <a:pt x="20105" y="22000"/>
-                    <a:pt x="19000" y="22000"/>
-                  </a:cubicBezTo>
-                  <a:lnTo>
-                    <a:pt x="5000" y="22000"/>
-                  </a:lnTo>
-                  <a:cubicBezTo>
-                    <a:pt x="3895" y="22000"/>
-                    <a:pt x="3000" y="21105"/>
-                    <a:pt x="3000" y="20000"/>
-                  </a:cubicBezTo>
-                  <a:lnTo>
-                    <a:pt x="3000" y="6000"/>
-                  </a:lnTo>
-                  <a:cubicBezTo>
-                    <a:pt x="3000" y="4895"/>
-                    <a:pt x="3895" y="4000"/>
-                    <a:pt x="5000" y="4000"/>
-                  </a:cubicBezTo>
-                  <a:close/>
                 </a:path>
                 <a:path w="24000" h="24000" fill="none">
                   <a:moveTo>
-                    <a:pt x="3000" y="10000"/>
+                    <a:pt x="10000" y="10000"/>
                   </a:moveTo>
                   <a:lnTo>
-                    <a:pt x="21000" y="10000"/>
+                    <a:pt x="14000" y="10000"/>
+                  </a:lnTo>
+                </a:path>
+                <a:path w="24000" h="24000" fill="none">
+                  <a:moveTo>
+                    <a:pt x="10000" y="14000"/>
+                  </a:moveTo>
+                  <a:lnTo>
+                    <a:pt x="14000" y="14000"/>
+                  </a:lnTo>
+                </a:path>
+                <a:path w="24000" h="24000" fill="none">
+                  <a:moveTo>
+                    <a:pt x="10000" y="18000"/>
+                  </a:moveTo>
+                  <a:lnTo>
+                    <a:pt x="14000" y="18000"/>
                   </a:lnTo>
                 </a:path>
               </a:pathLst>
             </a:custGeom>
             <a:noFill/>
-            <a:ln w="28163" cap="rnd">
+            <a:ln w="27639" cap="rnd">
               <a:solidFill>
                 <a:srgbClr val="FFFFFF"/>
               </a:solidFill>
@@ -11545,14 +10856,14 @@
         </p:sp>
         <p:sp>
           <p:nvSpPr>
-            <p:cNvPr id="11" name="BrandDeck Diagram Text 2"/>
+            <p:cNvPr id="15" name="BrandDeck Diagram Text 3"/>
             <p:cNvSpPr txBox="1"/>
             <p:nvPr/>
           </p:nvSpPr>
           <p:spPr>
             <a:xfrm>
-              <a:off x="6358363" y="2749817"/>
-              <a:ext cx="5021205" cy="3361641"/>
+              <a:off x="6386932" y="4237629"/>
+              <a:ext cx="4926799" cy="1851883"/>
             </a:xfrm>
             <a:prstGeom prst="rect">
               <a:avLst/>
@@ -11560,7 +10871,7 @@
             <a:noFill/>
           </p:spPr>
           <p:txBody>
-            <a:bodyPr wrap="square" anchor="t" lIns="36576" tIns="18288" rIns="36576" bIns="18288">
+            <a:bodyPr wrap="square" anchor="ctr" lIns="36576" tIns="18288" rIns="36576" bIns="18288">
               <a:noAutofit/>
             </a:bodyPr>
             <a:lstStyle/>
@@ -11577,7 +10888,7 @@
                   </a:solidFill>
                   <a:latin typeface="Play"/>
                 </a:rPr>
-                <a:t>6 недель</a:t>
+                <a:t>Охват</a:t>
               </a:r>
             </a:p>
             <a:p>
@@ -11596,1485 +10907,7 @@
                   </a:solidFill>
                   <a:latin typeface="Play"/>
                 </a:rPr>
-                <a:t>Период пилота</a:t>
-              </a:r>
-            </a:p>
-          </p:txBody>
-        </p:sp>
-      </p:grpSp>
-    </p:spTree>
-  </p:cSld>
-  <p:clrMapOvr>
-    <a:masterClrMapping/>
-  </p:clrMapOvr>
-</p:sld>
-</file>
-
-<file path=ppt/slides/slide4.xml><?xml version="1.0" encoding="utf-8"?>
-<p:sld xmlns:a="http://schemas.openxmlformats.org/drawingml/2006/main" xmlns:p="http://schemas.openxmlformats.org/presentationml/2006/main" xmlns:r="http://schemas.openxmlformats.org/officeDocument/2006/relationships">
-  <p:cSld>
-    <p:spTree>
-      <p:nvGrpSpPr>
-        <p:cNvPr id="1" name=""/>
-        <p:cNvGrpSpPr/>
-        <p:nvPr/>
-      </p:nvGrpSpPr>
-      <p:grpSpPr/>
-      <p:sp>
-        <p:nvSpPr>
-          <p:cNvPr id="3" name="BrandDeck Text 3"/>
-          <p:cNvSpPr>
-            <a:spLocks noGrp="1"/>
-          </p:cNvSpPr>
-          <p:nvPr>
-            <p:ph type="title"/>
-          </p:nvPr>
-        </p:nvSpPr>
-        <p:spPr>
-          <a:xfrm>
-            <a:off x="677334" y="692150"/>
-            <a:ext cx="10855854" cy="644241"/>
-          </a:xfrm>
-        </p:spPr>
-        <p:txBody>
-          <a:bodyPr wrap="square" anchor="t">
-            <a:normAutofit/>
-          </a:bodyPr>
-          <a:lstStyle/>
-          <a:p>
-            <a:pPr algn="l">
-              <a:lnSpc>
-                <a:spcPct val="115000"/>
-              </a:lnSpc>
-              <a:spcBef>
-                <a:spcPts val="0"/>
-              </a:spcBef>
-              <a:spcAft>
-                <a:spcPts val="240"/>
-              </a:spcAft>
-            </a:pPr>
-            <a:r>
-              <a:rPr sz="1600">
-                <a:solidFill>
-                  <a:srgbClr val="000000"/>
-                </a:solidFill>
-              </a:rPr>
-              <a:t>ИИ-помощник отвечает на вопросы по регламентам и сразу дает ссылку на документ-источник</a:t>
-            </a:r>
-          </a:p>
-        </p:txBody>
-      </p:sp>
-      <p:grpSp>
-        <p:nvGrpSpPr>
-          <p:cNvPr id="2" name="BrandDeck Diagram icon_grid" descr="icon_grid: ИИ-помощник отвечает на вопросы по регламентам и инструкциям.; Система сразу предоставляет ссылку на документ-источник.; Ответ формируется на основе внутренних корпоративных документов."/>
-          <p:cNvGrpSpPr/>
-          <p:nvPr/>
-        </p:nvGrpSpPr>
-        <p:grpSpPr>
-          <a:xfrm>
-            <a:off x="658813" y="2405806"/>
-            <a:ext cx="10874374" cy="2783294"/>
-            <a:chOff x="658813" y="2405806"/>
-            <a:chExt cx="10874374" cy="2783294"/>
-          </a:xfrm>
-        </p:grpSpPr>
-        <p:sp>
-          <p:nvSpPr>
-            <p:cNvPr id="4" name="BrandDeck Diagram Card 1"/>
-            <p:cNvSpPr/>
-            <p:nvPr/>
-          </p:nvSpPr>
-          <p:spPr>
-            <a:xfrm>
-              <a:off x="658813" y="2405806"/>
-              <a:ext cx="5328443" cy="1282903"/>
-            </a:xfrm>
-            <a:prstGeom prst="roundRect">
-              <a:avLst>
-                <a:gd name="adj" fmla="val 8000"/>
-              </a:avLst>
-            </a:prstGeom>
-            <a:solidFill>
-              <a:srgbClr val="EDF5FF"/>
-            </a:solidFill>
-            <a:ln>
-              <a:noFill/>
-            </a:ln>
-          </p:spPr>
-          <p:txBody>
-            <a:bodyPr rtlCol="0" anchor="ctr"/>
-            <a:lstStyle/>
-            <a:p>
-              <a:pPr algn="ctr"/>
-            </a:p>
-          </p:txBody>
-        </p:sp>
-        <p:sp>
-          <p:nvSpPr>
-            <p:cNvPr id="5" name="BrandDeck Diagram Icon 1 Badge"/>
-            <p:cNvSpPr/>
-            <p:nvPr/>
-          </p:nvSpPr>
-          <p:spPr>
-            <a:xfrm>
-              <a:off x="878269" y="2751126"/>
-              <a:ext cx="592264" cy="592264"/>
-            </a:xfrm>
-            <a:prstGeom prst="ellipse">
-              <a:avLst/>
-            </a:prstGeom>
-            <a:solidFill>
-              <a:srgbClr val="006DEB"/>
-            </a:solidFill>
-            <a:ln>
-              <a:noFill/>
-            </a:ln>
-          </p:spPr>
-          <p:txBody>
-            <a:bodyPr rtlCol="0" anchor="ctr"/>
-            <a:lstStyle/>
-            <a:p>
-              <a:pPr algn="ctr"/>
-            </a:p>
-          </p:txBody>
-        </p:sp>
-        <p:sp>
-          <p:nvSpPr>
-            <p:cNvPr id="6" name="BrandDeck Icon file-text"/>
-            <p:cNvSpPr/>
-            <p:nvPr/>
-          </p:nvSpPr>
-          <p:spPr>
-            <a:xfrm>
-              <a:off x="1008567" y="2881424"/>
-              <a:ext cx="331668" cy="331668"/>
-            </a:xfrm>
-            <a:custGeom>
-              <a:avLst/>
-              <a:gdLst/>
-              <a:ahLst/>
-              <a:cxnLst/>
-              <a:rect l="l" t="t" r="r" b="b"/>
-              <a:pathLst>
-                <a:path w="24000" h="24000" fill="none">
-                  <a:moveTo>
-                    <a:pt x="15000" y="2000"/>
-                  </a:moveTo>
-                  <a:lnTo>
-                    <a:pt x="6000" y="2000"/>
-                  </a:lnTo>
-                  <a:cubicBezTo>
-                    <a:pt x="4895" y="2000"/>
-                    <a:pt x="4000" y="2895"/>
-                    <a:pt x="4000" y="4000"/>
-                  </a:cubicBezTo>
-                  <a:lnTo>
-                    <a:pt x="4000" y="20000"/>
-                  </a:lnTo>
-                  <a:cubicBezTo>
-                    <a:pt x="4000" y="21105"/>
-                    <a:pt x="4895" y="22000"/>
-                    <a:pt x="6000" y="22000"/>
-                  </a:cubicBezTo>
-                  <a:lnTo>
-                    <a:pt x="18000" y="22000"/>
-                  </a:lnTo>
-                  <a:cubicBezTo>
-                    <a:pt x="19105" y="22000"/>
-                    <a:pt x="20000" y="21105"/>
-                    <a:pt x="20000" y="20000"/>
-                  </a:cubicBezTo>
-                  <a:lnTo>
-                    <a:pt x="20000" y="7000"/>
-                  </a:lnTo>
-                  <a:close/>
-                </a:path>
-                <a:path w="24000" h="24000" fill="none">
-                  <a:moveTo>
-                    <a:pt x="14000" y="2000"/>
-                  </a:moveTo>
-                  <a:lnTo>
-                    <a:pt x="14000" y="6000"/>
-                  </a:lnTo>
-                  <a:cubicBezTo>
-                    <a:pt x="14000" y="7105"/>
-                    <a:pt x="14895" y="8000"/>
-                    <a:pt x="16000" y="8000"/>
-                  </a:cubicBezTo>
-                  <a:lnTo>
-                    <a:pt x="20000" y="8000"/>
-                  </a:lnTo>
-                </a:path>
-                <a:path w="24000" h="24000" fill="none">
-                  <a:moveTo>
-                    <a:pt x="10000" y="9000"/>
-                  </a:moveTo>
-                  <a:lnTo>
-                    <a:pt x="8000" y="9000"/>
-                  </a:lnTo>
-                </a:path>
-                <a:path w="24000" h="24000" fill="none">
-                  <a:moveTo>
-                    <a:pt x="16000" y="13000"/>
-                  </a:moveTo>
-                  <a:lnTo>
-                    <a:pt x="8000" y="13000"/>
-                  </a:lnTo>
-                </a:path>
-                <a:path w="24000" h="24000" fill="none">
-                  <a:moveTo>
-                    <a:pt x="16000" y="17000"/>
-                  </a:moveTo>
-                  <a:lnTo>
-                    <a:pt x="8000" y="17000"/>
-                  </a:lnTo>
-                </a:path>
-              </a:pathLst>
-            </a:custGeom>
-            <a:noFill/>
-            <a:ln w="27639" cap="rnd">
-              <a:solidFill>
-                <a:srgbClr val="FFFFFF"/>
-              </a:solidFill>
-              <a:round/>
-            </a:ln>
-          </p:spPr>
-          <p:txBody>
-            <a:bodyPr rtlCol="0" anchor="ctr"/>
-            <a:lstStyle/>
-            <a:p>
-              <a:pPr algn="ctr"/>
-            </a:p>
-          </p:txBody>
-        </p:sp>
-        <p:sp>
-          <p:nvSpPr>
-            <p:cNvPr id="7" name="BrandDeck Diagram Text 1"/>
-            <p:cNvSpPr txBox="1"/>
-            <p:nvPr/>
-          </p:nvSpPr>
-          <p:spPr>
-            <a:xfrm>
-              <a:off x="1602207" y="2537480"/>
-              <a:ext cx="4165593" cy="1019556"/>
-            </a:xfrm>
-            <a:prstGeom prst="rect">
-              <a:avLst/>
-            </a:prstGeom>
-            <a:noFill/>
-          </p:spPr>
-          <p:txBody>
-            <a:bodyPr wrap="square" anchor="ctr" lIns="36576" tIns="18288" rIns="36576" bIns="18288">
-              <a:noAutofit/>
-            </a:bodyPr>
-            <a:lstStyle/>
-            <a:p>
-              <a:pPr algn="l">
-                <a:lnSpc>
-                  <a:spcPct val="110000"/>
-                </a:lnSpc>
-              </a:pPr>
-              <a:r>
-                <a:rPr sz="1800" b="0">
-                  <a:solidFill>
-                    <a:srgbClr val="000000"/>
-                  </a:solidFill>
-                  <a:latin typeface="Play"/>
-                </a:rPr>
-                <a:t>ИИ-помощник отвечает на вопросы по регламентам и инструкциям.</a:t>
-              </a:r>
-            </a:p>
-          </p:txBody>
-        </p:sp>
-        <p:sp>
-          <p:nvSpPr>
-            <p:cNvPr id="8" name="BrandDeck Diagram Card 2"/>
-            <p:cNvSpPr/>
-            <p:nvPr/>
-          </p:nvSpPr>
-          <p:spPr>
-            <a:xfrm>
-              <a:off x="6204744" y="2405806"/>
-              <a:ext cx="5328443" cy="1282903"/>
-            </a:xfrm>
-            <a:prstGeom prst="roundRect">
-              <a:avLst>
-                <a:gd name="adj" fmla="val 8000"/>
-              </a:avLst>
-            </a:prstGeom>
-            <a:solidFill>
-              <a:srgbClr val="EDF5FF"/>
-            </a:solidFill>
-            <a:ln>
-              <a:noFill/>
-            </a:ln>
-          </p:spPr>
-          <p:txBody>
-            <a:bodyPr rtlCol="0" anchor="ctr"/>
-            <a:lstStyle/>
-            <a:p>
-              <a:pPr algn="ctr"/>
-            </a:p>
-          </p:txBody>
-        </p:sp>
-        <p:sp>
-          <p:nvSpPr>
-            <p:cNvPr id="9" name="BrandDeck Diagram Icon 2 Badge"/>
-            <p:cNvSpPr/>
-            <p:nvPr/>
-          </p:nvSpPr>
-          <p:spPr>
-            <a:xfrm>
-              <a:off x="6424200" y="2751126"/>
-              <a:ext cx="592264" cy="592264"/>
-            </a:xfrm>
-            <a:prstGeom prst="ellipse">
-              <a:avLst/>
-            </a:prstGeom>
-            <a:solidFill>
-              <a:srgbClr val="006DEB"/>
-            </a:solidFill>
-            <a:ln>
-              <a:noFill/>
-            </a:ln>
-          </p:spPr>
-          <p:txBody>
-            <a:bodyPr rtlCol="0" anchor="ctr"/>
-            <a:lstStyle/>
-            <a:p>
-              <a:pPr algn="ctr"/>
-            </a:p>
-          </p:txBody>
-        </p:sp>
-        <p:sp>
-          <p:nvSpPr>
-            <p:cNvPr id="10" name="BrandDeck Icon link"/>
-            <p:cNvSpPr/>
-            <p:nvPr/>
-          </p:nvSpPr>
-          <p:spPr>
-            <a:xfrm>
-              <a:off x="6554498" y="2881424"/>
-              <a:ext cx="331668" cy="331668"/>
-            </a:xfrm>
-            <a:custGeom>
-              <a:avLst/>
-              <a:gdLst/>
-              <a:ahLst/>
-              <a:cxnLst/>
-              <a:rect l="l" t="t" r="r" b="b"/>
-              <a:pathLst>
-                <a:path w="24000" h="24000" fill="none">
-                  <a:moveTo>
-                    <a:pt x="10000" y="13000"/>
-                  </a:moveTo>
-                  <a:cubicBezTo>
-                    <a:pt x="10869" y="14162"/>
-                    <a:pt x="12200" y="14889"/>
-                    <a:pt x="13647" y="14992"/>
-                  </a:cubicBezTo>
-                  <a:cubicBezTo>
-                    <a:pt x="15094" y="15096"/>
-                    <a:pt x="16514" y="14566"/>
-                    <a:pt x="17540" y="13540"/>
-                  </a:cubicBezTo>
-                  <a:lnTo>
-                    <a:pt x="20540" y="10540"/>
-                  </a:lnTo>
-                  <a:cubicBezTo>
-                    <a:pt x="22435" y="8578"/>
-                    <a:pt x="22408" y="5460"/>
-                    <a:pt x="20479" y="3531"/>
-                  </a:cubicBezTo>
-                  <a:cubicBezTo>
-                    <a:pt x="18550" y="1602"/>
-                    <a:pt x="15432" y="1575"/>
-                    <a:pt x="13470" y="3470"/>
-                  </a:cubicBezTo>
-                  <a:lnTo>
-                    <a:pt x="11750" y="5180"/>
-                  </a:lnTo>
-                </a:path>
-                <a:path w="24000" h="24000" fill="none">
-                  <a:moveTo>
-                    <a:pt x="14000" y="11000"/>
-                  </a:moveTo>
-                  <a:cubicBezTo>
-                    <a:pt x="13131" y="9838"/>
-                    <a:pt x="11800" y="9111"/>
-                    <a:pt x="10353" y="9008"/>
-                  </a:cubicBezTo>
-                  <a:cubicBezTo>
-                    <a:pt x="8906" y="8904"/>
-                    <a:pt x="7486" y="9434"/>
-                    <a:pt x="6460" y="10460"/>
-                  </a:cubicBezTo>
-                  <a:lnTo>
-                    <a:pt x="3460" y="13460"/>
-                  </a:lnTo>
-                  <a:cubicBezTo>
-                    <a:pt x="1565" y="15422"/>
-                    <a:pt x="1592" y="18540"/>
-                    <a:pt x="3521" y="20469"/>
-                  </a:cubicBezTo>
-                  <a:cubicBezTo>
-                    <a:pt x="5450" y="22398"/>
-                    <a:pt x="8568" y="22425"/>
-                    <a:pt x="10530" y="20530"/>
-                  </a:cubicBezTo>
-                  <a:lnTo>
-                    <a:pt x="12240" y="18820"/>
-                  </a:lnTo>
-                </a:path>
-              </a:pathLst>
-            </a:custGeom>
-            <a:noFill/>
-            <a:ln w="27639" cap="rnd">
-              <a:solidFill>
-                <a:srgbClr val="FFFFFF"/>
-              </a:solidFill>
-              <a:round/>
-            </a:ln>
-          </p:spPr>
-          <p:txBody>
-            <a:bodyPr rtlCol="0" anchor="ctr"/>
-            <a:lstStyle/>
-            <a:p>
-              <a:pPr algn="ctr"/>
-            </a:p>
-          </p:txBody>
-        </p:sp>
-        <p:sp>
-          <p:nvSpPr>
-            <p:cNvPr id="11" name="BrandDeck Diagram Text 2"/>
-            <p:cNvSpPr txBox="1"/>
-            <p:nvPr/>
-          </p:nvSpPr>
-          <p:spPr>
-            <a:xfrm>
-              <a:off x="7148138" y="2537480"/>
-              <a:ext cx="4165593" cy="1019556"/>
-            </a:xfrm>
-            <a:prstGeom prst="rect">
-              <a:avLst/>
-            </a:prstGeom>
-            <a:noFill/>
-          </p:spPr>
-          <p:txBody>
-            <a:bodyPr wrap="square" anchor="ctr" lIns="36576" tIns="18288" rIns="36576" bIns="18288">
-              <a:noAutofit/>
-            </a:bodyPr>
-            <a:lstStyle/>
-            <a:p>
-              <a:pPr algn="l">
-                <a:lnSpc>
-                  <a:spcPct val="110000"/>
-                </a:lnSpc>
-              </a:pPr>
-              <a:r>
-                <a:rPr sz="1800" b="0">
-                  <a:solidFill>
-                    <a:srgbClr val="000000"/>
-                  </a:solidFill>
-                  <a:latin typeface="Play"/>
-                </a:rPr>
-                <a:t>Система сразу предоставляет ссылку на документ-источник.</a:t>
-              </a:r>
-            </a:p>
-          </p:txBody>
-        </p:sp>
-        <p:sp>
-          <p:nvSpPr>
-            <p:cNvPr id="12" name="BrandDeck Diagram Card 3"/>
-            <p:cNvSpPr/>
-            <p:nvPr/>
-          </p:nvSpPr>
-          <p:spPr>
-            <a:xfrm>
-              <a:off x="658813" y="3906197"/>
-              <a:ext cx="5328443" cy="1282903"/>
-            </a:xfrm>
-            <a:prstGeom prst="roundRect">
-              <a:avLst>
-                <a:gd name="adj" fmla="val 8000"/>
-              </a:avLst>
-            </a:prstGeom>
-            <a:solidFill>
-              <a:srgbClr val="EDF5FF"/>
-            </a:solidFill>
-            <a:ln>
-              <a:noFill/>
-            </a:ln>
-          </p:spPr>
-          <p:txBody>
-            <a:bodyPr rtlCol="0" anchor="ctr"/>
-            <a:lstStyle/>
-            <a:p>
-              <a:pPr algn="ctr"/>
-            </a:p>
-          </p:txBody>
-        </p:sp>
-        <p:sp>
-          <p:nvSpPr>
-            <p:cNvPr id="13" name="BrandDeck Diagram Icon 3 Badge"/>
-            <p:cNvSpPr/>
-            <p:nvPr/>
-          </p:nvSpPr>
-          <p:spPr>
-            <a:xfrm>
-              <a:off x="878269" y="4251516"/>
-              <a:ext cx="592264" cy="592264"/>
-            </a:xfrm>
-            <a:prstGeom prst="ellipse">
-              <a:avLst/>
-            </a:prstGeom>
-            <a:solidFill>
-              <a:srgbClr val="006DEB"/>
-            </a:solidFill>
-            <a:ln>
-              <a:noFill/>
-            </a:ln>
-          </p:spPr>
-          <p:txBody>
-            <a:bodyPr rtlCol="0" anchor="ctr"/>
-            <a:lstStyle/>
-            <a:p>
-              <a:pPr algn="ctr"/>
-            </a:p>
-          </p:txBody>
-        </p:sp>
-        <p:sp>
-          <p:nvSpPr>
-            <p:cNvPr id="14" name="BrandDeck Icon building"/>
-            <p:cNvSpPr/>
-            <p:nvPr/>
-          </p:nvSpPr>
-          <p:spPr>
-            <a:xfrm>
-              <a:off x="1008567" y="4381815"/>
-              <a:ext cx="331668" cy="331668"/>
-            </a:xfrm>
-            <a:custGeom>
-              <a:avLst/>
-              <a:gdLst/>
-              <a:ahLst/>
-              <a:cxnLst/>
-              <a:rect l="l" t="t" r="r" b="b"/>
-              <a:pathLst>
-                <a:path w="24000" h="24000" fill="none">
-                  <a:moveTo>
-                    <a:pt x="6000" y="2000"/>
-                  </a:moveTo>
-                  <a:lnTo>
-                    <a:pt x="18000" y="2000"/>
-                  </a:lnTo>
-                  <a:cubicBezTo>
-                    <a:pt x="19105" y="2000"/>
-                    <a:pt x="20000" y="2895"/>
-                    <a:pt x="20000" y="4000"/>
-                  </a:cubicBezTo>
-                  <a:lnTo>
-                    <a:pt x="20000" y="20000"/>
-                  </a:lnTo>
-                  <a:cubicBezTo>
-                    <a:pt x="20000" y="21105"/>
-                    <a:pt x="19105" y="22000"/>
-                    <a:pt x="18000" y="22000"/>
-                  </a:cubicBezTo>
-                  <a:lnTo>
-                    <a:pt x="6000" y="22000"/>
-                  </a:lnTo>
-                  <a:cubicBezTo>
-                    <a:pt x="4895" y="22000"/>
-                    <a:pt x="4000" y="21105"/>
-                    <a:pt x="4000" y="20000"/>
-                  </a:cubicBezTo>
-                  <a:lnTo>
-                    <a:pt x="4000" y="4000"/>
-                  </a:lnTo>
-                  <a:cubicBezTo>
-                    <a:pt x="4000" y="2895"/>
-                    <a:pt x="4895" y="2000"/>
-                    <a:pt x="6000" y="2000"/>
-                  </a:cubicBezTo>
-                  <a:close/>
-                </a:path>
-                <a:path w="24000" h="24000" fill="none">
-                  <a:moveTo>
-                    <a:pt x="9000" y="22000"/>
-                  </a:moveTo>
-                  <a:lnTo>
-                    <a:pt x="9000" y="18000"/>
-                  </a:lnTo>
-                  <a:lnTo>
-                    <a:pt x="15000" y="18000"/>
-                  </a:lnTo>
-                  <a:lnTo>
-                    <a:pt x="15000" y="22000"/>
-                  </a:lnTo>
-                </a:path>
-                <a:path w="24000" h="24000" fill="none">
-                  <a:moveTo>
-                    <a:pt x="8000" y="6000"/>
-                  </a:moveTo>
-                  <a:lnTo>
-                    <a:pt x="8010" y="6000"/>
-                  </a:lnTo>
-                </a:path>
-                <a:path w="24000" h="24000" fill="none">
-                  <a:moveTo>
-                    <a:pt x="16000" y="6000"/>
-                  </a:moveTo>
-                  <a:lnTo>
-                    <a:pt x="16010" y="6000"/>
-                  </a:lnTo>
-                </a:path>
-                <a:path w="24000" h="24000" fill="none">
-                  <a:moveTo>
-                    <a:pt x="12000" y="6000"/>
-                  </a:moveTo>
-                  <a:lnTo>
-                    <a:pt x="12010" y="6000"/>
-                  </a:lnTo>
-                </a:path>
-                <a:path w="24000" h="24000" fill="none">
-                  <a:moveTo>
-                    <a:pt x="12000" y="10000"/>
-                  </a:moveTo>
-                  <a:lnTo>
-                    <a:pt x="12010" y="10000"/>
-                  </a:lnTo>
-                </a:path>
-                <a:path w="24000" h="24000" fill="none">
-                  <a:moveTo>
-                    <a:pt x="12000" y="14000"/>
-                  </a:moveTo>
-                  <a:lnTo>
-                    <a:pt x="12010" y="14000"/>
-                  </a:lnTo>
-                </a:path>
-                <a:path w="24000" h="24000" fill="none">
-                  <a:moveTo>
-                    <a:pt x="16000" y="10000"/>
-                  </a:moveTo>
-                  <a:lnTo>
-                    <a:pt x="16010" y="10000"/>
-                  </a:lnTo>
-                </a:path>
-                <a:path w="24000" h="24000" fill="none">
-                  <a:moveTo>
-                    <a:pt x="16000" y="14000"/>
-                  </a:moveTo>
-                  <a:lnTo>
-                    <a:pt x="16010" y="14000"/>
-                  </a:lnTo>
-                </a:path>
-                <a:path w="24000" h="24000" fill="none">
-                  <a:moveTo>
-                    <a:pt x="8000" y="10000"/>
-                  </a:moveTo>
-                  <a:lnTo>
-                    <a:pt x="8010" y="10000"/>
-                  </a:lnTo>
-                </a:path>
-                <a:path w="24000" h="24000" fill="none">
-                  <a:moveTo>
-                    <a:pt x="8000" y="14000"/>
-                  </a:moveTo>
-                  <a:lnTo>
-                    <a:pt x="8010" y="14000"/>
-                  </a:lnTo>
-                </a:path>
-              </a:pathLst>
-            </a:custGeom>
-            <a:noFill/>
-            <a:ln w="27639" cap="rnd">
-              <a:solidFill>
-                <a:srgbClr val="FFFFFF"/>
-              </a:solidFill>
-              <a:round/>
-            </a:ln>
-          </p:spPr>
-          <p:txBody>
-            <a:bodyPr rtlCol="0" anchor="ctr"/>
-            <a:lstStyle/>
-            <a:p>
-              <a:pPr algn="ctr"/>
-            </a:p>
-          </p:txBody>
-        </p:sp>
-        <p:sp>
-          <p:nvSpPr>
-            <p:cNvPr id="15" name="BrandDeck Diagram Text 3"/>
-            <p:cNvSpPr txBox="1"/>
-            <p:nvPr/>
-          </p:nvSpPr>
-          <p:spPr>
-            <a:xfrm>
-              <a:off x="1602207" y="4037871"/>
-              <a:ext cx="4165593" cy="1019556"/>
-            </a:xfrm>
-            <a:prstGeom prst="rect">
-              <a:avLst/>
-            </a:prstGeom>
-            <a:noFill/>
-          </p:spPr>
-          <p:txBody>
-            <a:bodyPr wrap="square" anchor="ctr" lIns="36576" tIns="18288" rIns="36576" bIns="18288">
-              <a:noAutofit/>
-            </a:bodyPr>
-            <a:lstStyle/>
-            <a:p>
-              <a:pPr algn="l">
-                <a:lnSpc>
-                  <a:spcPct val="110000"/>
-                </a:lnSpc>
-              </a:pPr>
-              <a:r>
-                <a:rPr sz="1800" b="0">
-                  <a:solidFill>
-                    <a:srgbClr val="000000"/>
-                  </a:solidFill>
-                  <a:latin typeface="Play"/>
-                </a:rPr>
-                <a:t>Ответ формируется на основе внутренних корпоративных документов.</a:t>
-              </a:r>
-            </a:p>
-          </p:txBody>
-        </p:sp>
-      </p:grpSp>
-    </p:spTree>
-  </p:cSld>
-  <p:clrMapOvr>
-    <a:masterClrMapping/>
-  </p:clrMapOvr>
-</p:sld>
-</file>
-
-<file path=ppt/slides/slide5.xml><?xml version="1.0" encoding="utf-8"?>
-<p:sld xmlns:a="http://schemas.openxmlformats.org/drawingml/2006/main" xmlns:p="http://schemas.openxmlformats.org/presentationml/2006/main" xmlns:r="http://schemas.openxmlformats.org/officeDocument/2006/relationships">
-  <p:cSld>
-    <p:spTree>
-      <p:nvGrpSpPr>
-        <p:cNvPr id="1" name=""/>
-        <p:cNvGrpSpPr/>
-        <p:nvPr/>
-      </p:nvGrpSpPr>
-      <p:grpSpPr/>
-      <p:sp>
-        <p:nvSpPr>
-          <p:cNvPr id="1060" name="BrandDeck Text 1060"/>
-          <p:cNvSpPr txBox="1"/>
-          <p:nvPr>
-            <p:ph type="title"/>
-          </p:nvPr>
-        </p:nvSpPr>
-        <p:spPr>
-          <a:xfrm>
-            <a:off x="677334" y="692150"/>
-            <a:ext cx="10855854" cy="644241"/>
-          </a:xfrm>
-          <a:prstGeom prst="rect">
-            <a:avLst/>
-          </a:prstGeom>
-          <a:noFill/>
-          <a:ln>
-            <a:noFill/>
-          </a:ln>
-        </p:spPr>
-        <p:txBody>
-          <a:bodyPr anchorCtr="0" anchor="t" bIns="0" lIns="0" spcFirstLastPara="1" rIns="0" wrap="square" tIns="0">
-            <a:normAutofit/>
-          </a:bodyPr>
-          <a:lstStyle/>
-          <a:p>
-            <a:pPr indent="0" marL="0" rtl="0" algn="l">
-              <a:lnSpc>
-                <a:spcPct val="115000"/>
-              </a:lnSpc>
-              <a:spcBef>
-                <a:spcPts val="0"/>
-              </a:spcBef>
-              <a:spcAft>
-                <a:spcPts val="300"/>
-              </a:spcAft>
-              <a:buClr>
-                <a:schemeClr val="accent1"/>
-              </a:buClr>
-              <a:buSzPts val="3600"/>
-              <a:buFont typeface="Play"/>
-              <a:buNone/>
-            </a:pPr>
-            <a:r>
-              <a:rPr sz="2000">
-                <a:solidFill>
-                  <a:srgbClr val="000000"/>
-                </a:solidFill>
-              </a:rPr>
-              <a:t>Система работает внутри контура компании, не выводя документы наружу</a:t>
-            </a:r>
-            <a:endParaRPr/>
-          </a:p>
-        </p:txBody>
-      </p:sp>
-      <p:pic>
-        <p:nvPicPr>
-          <p:cNvPr id="1072" name="BrandDeck Image" descr="внутренний контур серверная"/>
-          <p:cNvPicPr>
-            <a:picLocks noChangeAspect="1"/>
-          </p:cNvPicPr>
-          <p:nvPr/>
-        </p:nvPicPr>
-        <p:blipFill>
-          <a:blip r:embed="rId3"/>
-          <a:srcRect l="5955" r="5955"/>
-          <a:stretch>
-            <a:fillRect/>
-          </a:stretch>
-        </p:blipFill>
-        <p:spPr>
-          <a:xfrm>
-            <a:off x="671514" y="1773238"/>
-            <a:ext cx="6929992" cy="4427537"/>
-          </a:xfrm>
-          <a:prstGeom prst="rect">
-            <a:avLst/>
-          </a:prstGeom>
-        </p:spPr>
-      </p:pic>
-      <p:sp>
-        <p:nvSpPr>
-          <p:cNvPr id="1069" name="Google Shape;1069;p83"/>
-          <p:cNvSpPr txBox="1"/>
-          <p:nvPr/>
-        </p:nvSpPr>
-        <p:spPr>
-          <a:xfrm>
-            <a:off x="8355728" y="627078"/>
-            <a:ext cx="3409196" cy="3951457"/>
-          </a:xfrm>
-          <a:prstGeom prst="rect">
-            <a:avLst/>
-          </a:prstGeom>
-          <a:noFill/>
-          <a:ln>
-            <a:noFill/>
-          </a:ln>
-        </p:spPr>
-        <p:txBody>
-          <a:bodyPr anchorCtr="0" anchor="t" bIns="36000" lIns="36000" spcFirstLastPara="1" rIns="36000" wrap="square" tIns="36000">
-            <a:normAutofit/>
-          </a:bodyPr>
-          <a:lstStyle/>
-          <a:p>
-            <a:pPr indent="0" lvl="0" marL="0" marR="0" rtl="0" algn="l">
-              <a:lnSpc>
-                <a:spcPct val="110000"/>
-              </a:lnSpc>
-              <a:spcBef>
-                <a:spcPts val="0"/>
-              </a:spcBef>
-              <a:spcAft>
-                <a:spcPts val="0"/>
-              </a:spcAft>
-              <a:buNone/>
-            </a:pPr>
-            <a:endParaRPr/>
-          </a:p>
-        </p:txBody>
-      </p:sp>
-      <p:cxnSp>
-        <p:nvCxnSpPr>
-          <p:cNvPr id="1070" name="Google Shape;1070;p83"/>
-          <p:cNvCxnSpPr/>
-          <p:nvPr/>
-        </p:nvCxnSpPr>
-        <p:spPr>
-          <a:xfrm flipH="1">
-            <a:off x="8111315" y="692150"/>
-            <a:ext cx="9261" cy="5508625"/>
-          </a:xfrm>
-          <a:prstGeom prst="straightConnector1">
-            <a:avLst/>
-          </a:prstGeom>
-          <a:noFill/>
-          <a:ln cap="flat" cmpd="sng" w="9525">
-            <a:solidFill>
-              <a:srgbClr val="F4F8FB"/>
-            </a:solidFill>
-            <a:prstDash val="solid"/>
-            <a:miter lim="8000"/>
-            <a:headEnd len="sm" w="sm" type="none"/>
-            <a:tailEnd len="sm" w="sm" type="none"/>
-          </a:ln>
-        </p:spPr>
-      </p:cxnSp>
-      <p:sp>
-        <p:nvSpPr>
-          <p:cNvPr id="1071" name="BrandDeck Body"/>
-          <p:cNvSpPr txBox="1"/>
-          <p:nvPr/>
-        </p:nvSpPr>
-        <p:spPr>
-          <a:xfrm>
-            <a:off x="8355728" y="1473551"/>
-            <a:ext cx="3409196" cy="3104984"/>
-          </a:xfrm>
-          <a:prstGeom prst="rect">
-            <a:avLst/>
-          </a:prstGeom>
-          <a:noFill/>
-        </p:spPr>
-        <p:txBody>
-          <a:bodyPr wrap="square" anchor="t" lIns="36576" rIns="36576" tIns="18288" bIns="18288">
-            <a:normAutofit/>
-          </a:bodyPr>
-          <a:lstStyle/>
-          <a:p>
-            <a:pPr algn="l">
-              <a:lnSpc>
-                <a:spcPct val="115000"/>
-              </a:lnSpc>
-              <a:spcBef>
-                <a:spcPts val="0"/>
-              </a:spcBef>
-              <a:spcAft>
-                <a:spcPts val="210"/>
-              </a:spcAft>
-            </a:pPr>
-            <a:r>
-              <a:rPr sz="1400">
-                <a:solidFill>
-                  <a:srgbClr val="000000"/>
-                </a:solidFill>
-                <a:latin typeface="Play"/>
-              </a:rPr>
-              <a:t>• Модель с открытыми весами работает внутри контура компании.</a:t>
-            </a:r>
-          </a:p>
-          <a:p>
-            <a:pPr algn="l">
-              <a:lnSpc>
-                <a:spcPct val="115000"/>
-              </a:lnSpc>
-              <a:spcBef>
-                <a:spcPts val="0"/>
-              </a:spcBef>
-              <a:spcAft>
-                <a:spcPts val="210"/>
-              </a:spcAft>
-            </a:pPr>
-            <a:r>
-              <a:rPr sz="1400">
-                <a:solidFill>
-                  <a:srgbClr val="000000"/>
-                </a:solidFill>
-                <a:latin typeface="Play"/>
-              </a:rPr>
-              <a:t>• Документы не покидают периметр и не уходят наружу.</a:t>
-            </a:r>
-          </a:p>
-          <a:p>
-            <a:pPr algn="l">
-              <a:lnSpc>
-                <a:spcPct val="115000"/>
-              </a:lnSpc>
-              <a:spcBef>
-                <a:spcPts val="0"/>
-              </a:spcBef>
-              <a:spcAft>
-                <a:spcPts val="210"/>
-              </a:spcAft>
-            </a:pPr>
-            <a:r>
-              <a:rPr sz="1400">
-                <a:solidFill>
-                  <a:srgbClr val="000000"/>
-                </a:solidFill>
-                <a:latin typeface="Play"/>
-              </a:rPr>
-              <a:t>• Обработка запросов происходит локально без передачи данных.</a:t>
-            </a:r>
-          </a:p>
-        </p:txBody>
-      </p:sp>
-    </p:spTree>
-  </p:cSld>
-  <p:clrMapOvr>
-    <a:masterClrMapping/>
-  </p:clrMapOvr>
-</p:sld>
-</file>
-
-<file path=ppt/slides/slide6.xml><?xml version="1.0" encoding="utf-8"?>
-<p:sld xmlns:a="http://schemas.openxmlformats.org/drawingml/2006/main" xmlns:p="http://schemas.openxmlformats.org/presentationml/2006/main" xmlns:r="http://schemas.openxmlformats.org/officeDocument/2006/relationships">
-  <p:cSld>
-    <p:spTree>
-      <p:nvGrpSpPr>
-        <p:cNvPr id="1" name=""/>
-        <p:cNvGrpSpPr/>
-        <p:nvPr/>
-      </p:nvGrpSpPr>
-      <p:grpSpPr/>
-      <p:sp>
-        <p:nvSpPr>
-          <p:cNvPr id="3" name="BrandDeck Text 3"/>
-          <p:cNvSpPr>
-            <a:spLocks noGrp="1"/>
-          </p:cNvSpPr>
-          <p:nvPr>
-            <p:ph type="title"/>
-          </p:nvPr>
-        </p:nvSpPr>
-        <p:spPr>
-          <a:xfrm>
-            <a:off x="677334" y="692150"/>
-            <a:ext cx="10855854" cy="644241"/>
-          </a:xfrm>
-        </p:spPr>
-        <p:txBody>
-          <a:bodyPr wrap="square" anchor="t">
-            <a:normAutofit/>
-          </a:bodyPr>
-          <a:lstStyle/>
-          <a:p>
-            <a:pPr algn="l">
-              <a:lnSpc>
-                <a:spcPct val="115000"/>
-              </a:lnSpc>
-              <a:spcBef>
-                <a:spcPts val="0"/>
-              </a:spcBef>
-              <a:spcAft>
-                <a:spcPts val="240"/>
-              </a:spcAft>
-            </a:pPr>
-            <a:r>
-              <a:rPr sz="1600">
-                <a:solidFill>
-                  <a:srgbClr val="000000"/>
-                </a:solidFill>
-              </a:rPr>
-              <a:t>При отсутствии подтвержденного ответа вопрос автоматически уходит специалисту с контекстом</a:t>
-            </a:r>
-          </a:p>
-        </p:txBody>
-      </p:sp>
-      <p:grpSp>
-        <p:nvGrpSpPr>
-          <p:cNvPr id="2" name="BrandDeck Diagram process" descr="process: Запрос сотрудника Отправляется в ИИ-помощник; Отсутствие ответа Нет подтверждённого факта в базе; Эскалация Переход к специалисту с контекстом"/>
-          <p:cNvGrpSpPr/>
-          <p:nvPr/>
-        </p:nvGrpSpPr>
-        <p:grpSpPr>
-          <a:xfrm>
-            <a:off x="658813" y="2716779"/>
-            <a:ext cx="10874374" cy="1964944"/>
-            <a:chOff x="658813" y="2716779"/>
-            <a:chExt cx="10874374" cy="1964944"/>
-          </a:xfrm>
-        </p:grpSpPr>
-        <p:sp>
-          <p:nvSpPr>
-            <p:cNvPr id="4" name="BrandDeck Diagram Step 1"/>
-            <p:cNvSpPr/>
-            <p:nvPr/>
-          </p:nvSpPr>
-          <p:spPr>
-            <a:xfrm>
-              <a:off x="658813" y="2716779"/>
-              <a:ext cx="3791822" cy="822960"/>
-            </a:xfrm>
-            <a:prstGeom prst="homePlate">
-              <a:avLst>
-                <a:gd name="adj" fmla="val 36000"/>
-              </a:avLst>
-            </a:prstGeom>
-            <a:solidFill>
-              <a:srgbClr val="006DEB"/>
-            </a:solidFill>
-            <a:ln>
-              <a:noFill/>
-            </a:ln>
-          </p:spPr>
-          <p:txBody>
-            <a:bodyPr rtlCol="0" anchor="ctr" wrap="square" tIns="18288" rIns="351129" bIns="18288">
-              <a:noAutofit/>
-            </a:bodyPr>
-            <a:lstStyle/>
-            <a:p>
-              <a:pPr algn="ctr">
-                <a:lnSpc>
-                  <a:spcPct val="110000"/>
-                </a:lnSpc>
-              </a:pPr>
-              <a:r>
-                <a:rPr sz="1600" b="1">
-                  <a:solidFill>
-                    <a:srgbClr val="FFFFFF"/>
-                  </a:solidFill>
-                  <a:latin typeface="Play"/>
-                </a:rPr>
-                <a:t>01</a:t>
-              </a:r>
-            </a:p>
-          </p:txBody>
-        </p:sp>
-        <p:sp>
-          <p:nvSpPr>
-            <p:cNvPr id="5" name="BrandDeck Diagram Detail Card 1"/>
-            <p:cNvSpPr/>
-            <p:nvPr/>
-          </p:nvSpPr>
-          <p:spPr>
-            <a:xfrm>
-              <a:off x="695389" y="3649467"/>
-              <a:ext cx="3551639" cy="1032256"/>
-            </a:xfrm>
-            <a:prstGeom prst="roundRect">
-              <a:avLst>
-                <a:gd name="adj" fmla="val 12000"/>
-              </a:avLst>
-            </a:prstGeom>
-            <a:solidFill>
-              <a:srgbClr val="EDF5FF"/>
-            </a:solidFill>
-            <a:ln>
-              <a:noFill/>
-            </a:ln>
-          </p:spPr>
-          <p:txBody>
-            <a:bodyPr rtlCol="0" anchor="ctr"/>
-            <a:lstStyle/>
-            <a:p>
-              <a:pPr algn="ctr"/>
-            </a:p>
-          </p:txBody>
-        </p:sp>
-        <p:sp>
-          <p:nvSpPr>
-            <p:cNvPr id="6" name="BrandDeck Diagram Text 1"/>
-            <p:cNvSpPr txBox="1"/>
-            <p:nvPr/>
-          </p:nvSpPr>
-          <p:spPr>
-            <a:xfrm>
-              <a:off x="768541" y="3722619"/>
-              <a:ext cx="3405335" cy="885951"/>
-            </a:xfrm>
-            <a:prstGeom prst="rect">
-              <a:avLst/>
-            </a:prstGeom>
-            <a:noFill/>
-          </p:spPr>
-          <p:txBody>
-            <a:bodyPr wrap="square" anchor="ctr" lIns="36576" tIns="18288" rIns="36576" bIns="18288">
-              <a:noAutofit/>
-            </a:bodyPr>
-            <a:lstStyle/>
-            <a:p>
-              <a:pPr algn="l">
-                <a:lnSpc>
-                  <a:spcPct val="110000"/>
-                </a:lnSpc>
-              </a:pPr>
-              <a:r>
-                <a:rPr sz="1600" b="1">
-                  <a:solidFill>
-                    <a:srgbClr val="000000"/>
-                  </a:solidFill>
-                  <a:latin typeface="Play"/>
-                </a:rPr>
-                <a:t>Запрос сотрудника</a:t>
-              </a:r>
-            </a:p>
-            <a:p>
-              <a:pPr algn="l">
-                <a:lnSpc>
-                  <a:spcPct val="110000"/>
-                </a:lnSpc>
-                <a:spcBef>
-                  <a:spcPts val="400"/>
-                </a:spcBef>
-              </a:pPr>
-              <a:r>
-                <a:rPr sz="1600" b="0">
-                  <a:solidFill>
-                    <a:srgbClr val="000000"/>
-                  </a:solidFill>
-                  <a:latin typeface="Play"/>
-                </a:rPr>
-                <a:t>Отправляется в ИИ-помощник</a:t>
-              </a:r>
-            </a:p>
-          </p:txBody>
-        </p:sp>
-        <p:sp>
-          <p:nvSpPr>
-            <p:cNvPr id="7" name="BrandDeck Diagram Step 2"/>
-            <p:cNvSpPr/>
-            <p:nvPr/>
-          </p:nvSpPr>
-          <p:spPr>
-            <a:xfrm>
-              <a:off x="4200089" y="2716779"/>
-              <a:ext cx="3791822" cy="822960"/>
-            </a:xfrm>
-            <a:prstGeom prst="chevron">
-              <a:avLst>
-                <a:gd name="adj" fmla="val 36000"/>
-              </a:avLst>
-            </a:prstGeom>
-            <a:solidFill>
-              <a:srgbClr val="2683EE"/>
-            </a:solidFill>
-            <a:ln>
-              <a:noFill/>
-            </a:ln>
-          </p:spPr>
-          <p:txBody>
-            <a:bodyPr rtlCol="0" anchor="ctr" wrap="square" lIns="351129" tIns="18288" rIns="351129" bIns="18288">
-              <a:noAutofit/>
-            </a:bodyPr>
-            <a:lstStyle/>
-            <a:p>
-              <a:pPr algn="ctr">
-                <a:lnSpc>
-                  <a:spcPct val="110000"/>
-                </a:lnSpc>
-              </a:pPr>
-              <a:r>
-                <a:rPr sz="1600" b="1">
-                  <a:solidFill>
-                    <a:srgbClr val="000000"/>
-                  </a:solidFill>
-                  <a:latin typeface="Play"/>
-                </a:rPr>
-                <a:t>02</a:t>
-              </a:r>
-            </a:p>
-          </p:txBody>
-        </p:sp>
-        <p:sp>
-          <p:nvSpPr>
-            <p:cNvPr id="8" name="BrandDeck Diagram Detail Card 2"/>
-            <p:cNvSpPr/>
-            <p:nvPr/>
-          </p:nvSpPr>
-          <p:spPr>
-            <a:xfrm>
-              <a:off x="4320180" y="3649467"/>
-              <a:ext cx="3551639" cy="1032256"/>
-            </a:xfrm>
-            <a:prstGeom prst="roundRect">
-              <a:avLst>
-                <a:gd name="adj" fmla="val 12000"/>
-              </a:avLst>
-            </a:prstGeom>
-            <a:solidFill>
-              <a:srgbClr val="EDF5FF"/>
-            </a:solidFill>
-            <a:ln>
-              <a:noFill/>
-            </a:ln>
-          </p:spPr>
-          <p:txBody>
-            <a:bodyPr rtlCol="0" anchor="ctr"/>
-            <a:lstStyle/>
-            <a:p>
-              <a:pPr algn="ctr"/>
-            </a:p>
-          </p:txBody>
-        </p:sp>
-        <p:sp>
-          <p:nvSpPr>
-            <p:cNvPr id="9" name="BrandDeck Diagram Text 2"/>
-            <p:cNvSpPr txBox="1"/>
-            <p:nvPr/>
-          </p:nvSpPr>
-          <p:spPr>
-            <a:xfrm>
-              <a:off x="4393332" y="3722619"/>
-              <a:ext cx="3405335" cy="885951"/>
-            </a:xfrm>
-            <a:prstGeom prst="rect">
-              <a:avLst/>
-            </a:prstGeom>
-            <a:noFill/>
-          </p:spPr>
-          <p:txBody>
-            <a:bodyPr wrap="square" anchor="ctr" lIns="36576" tIns="18288" rIns="36576" bIns="18288">
-              <a:noAutofit/>
-            </a:bodyPr>
-            <a:lstStyle/>
-            <a:p>
-              <a:pPr algn="l">
-                <a:lnSpc>
-                  <a:spcPct val="110000"/>
-                </a:lnSpc>
-              </a:pPr>
-              <a:r>
-                <a:rPr sz="1400" b="1">
-                  <a:solidFill>
-                    <a:srgbClr val="000000"/>
-                  </a:solidFill>
-                  <a:latin typeface="Play"/>
-                </a:rPr>
-                <a:t>Отсутствие ответа</a:t>
-              </a:r>
-            </a:p>
-            <a:p>
-              <a:pPr algn="l">
-                <a:lnSpc>
-                  <a:spcPct val="110000"/>
-                </a:lnSpc>
-                <a:spcBef>
-                  <a:spcPts val="350"/>
-                </a:spcBef>
-              </a:pPr>
-              <a:r>
-                <a:rPr sz="1400" b="0">
-                  <a:solidFill>
-                    <a:srgbClr val="000000"/>
-                  </a:solidFill>
-                  <a:latin typeface="Play"/>
-                </a:rPr>
-                <a:t>Нет подтверждённого факта в базе</a:t>
-              </a:r>
-            </a:p>
-          </p:txBody>
-        </p:sp>
-        <p:sp>
-          <p:nvSpPr>
-            <p:cNvPr id="10" name="BrandDeck Diagram Step 3"/>
-            <p:cNvSpPr/>
-            <p:nvPr/>
-          </p:nvSpPr>
-          <p:spPr>
-            <a:xfrm>
-              <a:off x="7741365" y="2716779"/>
-              <a:ext cx="3791822" cy="822960"/>
-            </a:xfrm>
-            <a:prstGeom prst="chevron">
-              <a:avLst>
-                <a:gd name="adj" fmla="val 36000"/>
-              </a:avLst>
-            </a:prstGeom>
-            <a:solidFill>
-              <a:srgbClr val="4C99F1"/>
-            </a:solidFill>
-            <a:ln>
-              <a:noFill/>
-            </a:ln>
-          </p:spPr>
-          <p:txBody>
-            <a:bodyPr rtlCol="0" anchor="ctr" wrap="square" lIns="351129" tIns="18288" rIns="351129" bIns="18288">
-              <a:noAutofit/>
-            </a:bodyPr>
-            <a:lstStyle/>
-            <a:p>
-              <a:pPr algn="ctr">
-                <a:lnSpc>
-                  <a:spcPct val="110000"/>
-                </a:lnSpc>
-              </a:pPr>
-              <a:r>
-                <a:rPr sz="1600" b="1">
-                  <a:solidFill>
-                    <a:srgbClr val="000000"/>
-                  </a:solidFill>
-                  <a:latin typeface="Play"/>
-                </a:rPr>
-                <a:t>03</a:t>
-              </a:r>
-            </a:p>
-          </p:txBody>
-        </p:sp>
-        <p:sp>
-          <p:nvSpPr>
-            <p:cNvPr id="11" name="BrandDeck Diagram Detail Card 3"/>
-            <p:cNvSpPr/>
-            <p:nvPr/>
-          </p:nvSpPr>
-          <p:spPr>
-            <a:xfrm>
-              <a:off x="7944972" y="3649467"/>
-              <a:ext cx="3551639" cy="1032256"/>
-            </a:xfrm>
-            <a:prstGeom prst="roundRect">
-              <a:avLst>
-                <a:gd name="adj" fmla="val 12000"/>
-              </a:avLst>
-            </a:prstGeom>
-            <a:solidFill>
-              <a:srgbClr val="EDF5FF"/>
-            </a:solidFill>
-            <a:ln>
-              <a:noFill/>
-            </a:ln>
-          </p:spPr>
-          <p:txBody>
-            <a:bodyPr rtlCol="0" anchor="ctr"/>
-            <a:lstStyle/>
-            <a:p>
-              <a:pPr algn="ctr"/>
-            </a:p>
-          </p:txBody>
-        </p:sp>
-        <p:sp>
-          <p:nvSpPr>
-            <p:cNvPr id="12" name="BrandDeck Diagram Text 3"/>
-            <p:cNvSpPr txBox="1"/>
-            <p:nvPr/>
-          </p:nvSpPr>
-          <p:spPr>
-            <a:xfrm>
-              <a:off x="8018124" y="3722619"/>
-              <a:ext cx="3405335" cy="885951"/>
-            </a:xfrm>
-            <a:prstGeom prst="rect">
-              <a:avLst/>
-            </a:prstGeom>
-            <a:noFill/>
-          </p:spPr>
-          <p:txBody>
-            <a:bodyPr wrap="square" anchor="ctr" lIns="36576" tIns="18288" rIns="36576" bIns="18288">
-              <a:noAutofit/>
-            </a:bodyPr>
-            <a:lstStyle/>
-            <a:p>
-              <a:pPr algn="l">
-                <a:lnSpc>
-                  <a:spcPct val="110000"/>
-                </a:lnSpc>
-              </a:pPr>
-              <a:r>
-                <a:rPr sz="1400" b="1">
-                  <a:solidFill>
-                    <a:srgbClr val="000000"/>
-                  </a:solidFill>
-                  <a:latin typeface="Play"/>
-                </a:rPr>
-                <a:t>Эскалация</a:t>
-              </a:r>
-            </a:p>
-            <a:p>
-              <a:pPr algn="l">
-                <a:lnSpc>
-                  <a:spcPct val="110000"/>
-                </a:lnSpc>
-                <a:spcBef>
-                  <a:spcPts val="350"/>
-                </a:spcBef>
-              </a:pPr>
-              <a:r>
-                <a:rPr sz="1400" b="0">
-                  <a:solidFill>
-                    <a:srgbClr val="000000"/>
-                  </a:solidFill>
-                  <a:latin typeface="Play"/>
-                </a:rPr>
-                <a:t>Переход к специалисту с контекстом</a:t>
+                <a:t>2 подразделения</a:t>
               </a:r>
             </a:p>
           </p:txBody>
@@ -13115,7 +10948,7 @@
           </a:xfrm>
         </p:spPr>
         <p:txBody>
-          <a:bodyPr wrap="square" anchor="t">
+          <a:bodyPr vert="horz" wrap="square" anchor="t">
             <a:normAutofit/>
           </a:bodyPr>
           <a:lstStyle/>
@@ -13137,35 +10970,95 @@
                   <a:srgbClr val="000000"/>
                 </a:solidFill>
               </a:rPr>
-              <a:t>Снижение времени поиска ответа и увеличение доли обращений, закрытых без участия специалиста</a:t>
+              <a:t>Успех пилота измеряется временем поиска ответа и долей обращений, закрытых без специалиста</a:t>
             </a:r>
           </a:p>
         </p:txBody>
       </p:sp>
       <p:grpSp>
         <p:nvGrpSpPr>
-          <p:cNvPr id="2" name="BrandDeck Diagram pyramid" descr="pyramid: Критерии успеха Снижение времени поиска и рост автозакрытия; Время поиска Метрика времени ответа сотрудника; Доля автозакрытия Процент вопросов без участия специалиста"/>
+          <p:cNvPr id="2" name="BrandDeck Diagram icon_grid" descr="icon_grid: Время поиска ответа измеряется для оценки скорости работы.; Доля обращений, закрытых без специалиста, отслеживается как метрика.; Эти показатели определяют успешность пилотного проекта."/>
           <p:cNvGrpSpPr/>
           <p:nvPr/>
         </p:nvGrpSpPr>
         <p:grpSpPr>
           <a:xfrm>
-            <a:off x="675958" y="2135749"/>
-            <a:ext cx="10857230" cy="3511295"/>
-            <a:chOff x="675958" y="2135749"/>
-            <a:chExt cx="10857230" cy="3511295"/>
+            <a:off x="658813" y="1773238"/>
+            <a:ext cx="10874375" cy="4447949"/>
+            <a:chOff x="658813" y="1773238"/>
+            <a:chExt cx="10874375" cy="4447949"/>
           </a:xfrm>
         </p:grpSpPr>
         <p:sp>
           <p:nvSpPr>
-            <p:cNvPr id="4" name="BrandDeck Diagram Level 1"/>
+            <p:cNvPr id="4" name="BrandDeck Diagram Card 1"/>
             <p:cNvSpPr/>
             <p:nvPr/>
           </p:nvSpPr>
           <p:spPr>
             <a:xfrm>
-              <a:off x="2161858" y="2135749"/>
-              <a:ext cx="1451609" cy="1133856"/>
+              <a:off x="658813" y="1773238"/>
+              <a:ext cx="4567237" cy="4447949"/>
+            </a:xfrm>
+            <a:prstGeom prst="roundRect">
+              <a:avLst>
+                <a:gd name="adj" fmla="val 8000"/>
+              </a:avLst>
+            </a:prstGeom>
+            <a:solidFill>
+              <a:srgbClr val="EDF5FF"/>
+            </a:solidFill>
+            <a:ln>
+              <a:noFill/>
+            </a:ln>
+          </p:spPr>
+          <p:txBody>
+            <a:bodyPr rtlCol="0" anchor="ctr"/>
+            <a:lstStyle/>
+            <a:p>
+              <a:pPr algn="ctr"/>
+            </a:p>
+          </p:txBody>
+        </p:sp>
+        <p:sp>
+          <p:nvSpPr>
+            <p:cNvPr id="5" name="BrandDeck Diagram Icon 1 Badge"/>
+            <p:cNvSpPr/>
+            <p:nvPr/>
+          </p:nvSpPr>
+          <p:spPr>
+            <a:xfrm>
+              <a:off x="878269" y="1992694"/>
+              <a:ext cx="603504" cy="603504"/>
+            </a:xfrm>
+            <a:prstGeom prst="ellipse">
+              <a:avLst/>
+            </a:prstGeom>
+            <a:solidFill>
+              <a:srgbClr val="006DEB"/>
+            </a:solidFill>
+            <a:ln>
+              <a:noFill/>
+            </a:ln>
+          </p:spPr>
+          <p:txBody>
+            <a:bodyPr rtlCol="0" anchor="ctr"/>
+            <a:lstStyle/>
+            <a:p>
+              <a:pPr algn="ctr"/>
+            </a:p>
+          </p:txBody>
+        </p:sp>
+        <p:sp>
+          <p:nvSpPr>
+            <p:cNvPr id="6" name="BrandDeck Icon clock"/>
+            <p:cNvSpPr/>
+            <p:nvPr/>
+          </p:nvSpPr>
+          <p:spPr>
+            <a:xfrm>
+              <a:off x="1011039" y="2125464"/>
+              <a:ext cx="337962" cy="337962"/>
             </a:xfrm>
             <a:custGeom>
               <a:avLst/>
@@ -13174,63 +11067,256 @@
               <a:cxnLst/>
               <a:rect l="l" t="t" r="r" b="b"/>
               <a:pathLst>
-                <a:path w="1587" h="1240" stroke="0">
+                <a:path w="24000" h="24000" fill="none">
                   <a:moveTo>
-                    <a:pt x="769" y="0"/>
+                    <a:pt x="22000" y="12000"/>
+                  </a:moveTo>
+                  <a:cubicBezTo>
+                    <a:pt x="22000" y="17523"/>
+                    <a:pt x="17523" y="22000"/>
+                    <a:pt x="12000" y="22000"/>
+                  </a:cubicBezTo>
+                  <a:cubicBezTo>
+                    <a:pt x="6477" y="22000"/>
+                    <a:pt x="2000" y="17523"/>
+                    <a:pt x="2000" y="12000"/>
+                  </a:cubicBezTo>
+                  <a:cubicBezTo>
+                    <a:pt x="2000" y="6477"/>
+                    <a:pt x="6477" y="2000"/>
+                    <a:pt x="12000" y="2000"/>
+                  </a:cubicBezTo>
+                  <a:cubicBezTo>
+                    <a:pt x="17523" y="2000"/>
+                    <a:pt x="22000" y="6477"/>
+                    <a:pt x="22000" y="12000"/>
+                  </a:cubicBezTo>
+                  <a:close/>
+                </a:path>
+                <a:path w="24000" h="24000" fill="none">
+                  <a:moveTo>
+                    <a:pt x="12000" y="6000"/>
                   </a:moveTo>
                   <a:lnTo>
-                    <a:pt x="819" y="0"/>
+                    <a:pt x="12000" y="12000"/>
                   </a:lnTo>
                   <a:lnTo>
-                    <a:pt x="1587" y="1240"/>
+                    <a:pt x="16000" y="14000"/>
                   </a:lnTo>
-                  <a:lnTo>
-                    <a:pt x="0" y="1240"/>
-                  </a:lnTo>
-                  <a:close/>
                 </a:path>
               </a:pathLst>
             </a:custGeom>
-            <a:solidFill>
-              <a:srgbClr val="006DEB"/>
-            </a:solidFill>
-            <a:ln w="0">
-              <a:noFill/>
+            <a:noFill/>
+            <a:ln w="28163" cap="rnd">
+              <a:solidFill>
+                <a:srgbClr val="FFFFFF"/>
+              </a:solidFill>
+              <a:round/>
             </a:ln>
           </p:spPr>
           <p:txBody>
-            <a:bodyPr rtlCol="0" anchor="b" wrap="square" lIns="18288" tIns="0" rIns="18288" bIns="73152">
+            <a:bodyPr rtlCol="0" anchor="ctr"/>
+            <a:lstStyle/>
+            <a:p>
+              <a:pPr algn="ctr"/>
+            </a:p>
+          </p:txBody>
+        </p:sp>
+        <p:sp>
+          <p:nvSpPr>
+            <p:cNvPr id="7" name="BrandDeck Diagram Text 1"/>
+            <p:cNvSpPr txBox="1"/>
+            <p:nvPr/>
+          </p:nvSpPr>
+          <p:spPr>
+            <a:xfrm>
+              <a:off x="812432" y="2749817"/>
+              <a:ext cx="4259999" cy="3361641"/>
+            </a:xfrm>
+            <a:prstGeom prst="rect">
+              <a:avLst/>
+            </a:prstGeom>
+            <a:noFill/>
+          </p:spPr>
+          <p:txBody>
+            <a:bodyPr wrap="square" anchor="t" lIns="36576" tIns="18288" rIns="36576" bIns="18288">
               <a:noAutofit/>
             </a:bodyPr>
             <a:lstStyle/>
             <a:p>
-              <a:pPr algn="ctr">
+              <a:pPr algn="l">
                 <a:lnSpc>
                   <a:spcPct val="110000"/>
                 </a:lnSpc>
               </a:pPr>
               <a:r>
-                <a:rPr sz="1400" b="1">
+                <a:rPr sz="1800" b="0">
                   <a:solidFill>
-                    <a:srgbClr val="FFFFFF"/>
+                    <a:srgbClr val="000000"/>
                   </a:solidFill>
                   <a:latin typeface="Play"/>
                 </a:rPr>
-                <a:t>01</a:t>
+                <a:t>Время поиска ответа измеряется для оценки скорости работы.</a:t>
               </a:r>
             </a:p>
           </p:txBody>
         </p:sp>
         <p:sp>
           <p:nvSpPr>
-            <p:cNvPr id="5" name="BrandDeck Diagram Text 1"/>
+            <p:cNvPr id="8" name="BrandDeck Diagram Card 2"/>
+            <p:cNvSpPr/>
+            <p:nvPr/>
+          </p:nvSpPr>
+          <p:spPr>
+            <a:xfrm>
+              <a:off x="5443538" y="1773238"/>
+              <a:ext cx="6089650" cy="2115230"/>
+            </a:xfrm>
+            <a:prstGeom prst="roundRect">
+              <a:avLst>
+                <a:gd name="adj" fmla="val 8000"/>
+              </a:avLst>
+            </a:prstGeom>
+            <a:solidFill>
+              <a:srgbClr val="EDF5FF"/>
+            </a:solidFill>
+            <a:ln>
+              <a:noFill/>
+            </a:ln>
+          </p:spPr>
+          <p:txBody>
+            <a:bodyPr rtlCol="0" anchor="ctr"/>
+            <a:lstStyle/>
+            <a:p>
+              <a:pPr algn="ctr"/>
+            </a:p>
+          </p:txBody>
+        </p:sp>
+        <p:sp>
+          <p:nvSpPr>
+            <p:cNvPr id="9" name="BrandDeck Diagram Icon 2 Badge"/>
+            <p:cNvSpPr/>
+            <p:nvPr/>
+          </p:nvSpPr>
+          <p:spPr>
+            <a:xfrm>
+              <a:off x="5662994" y="2534721"/>
+              <a:ext cx="592264" cy="592264"/>
+            </a:xfrm>
+            <a:prstGeom prst="ellipse">
+              <a:avLst/>
+            </a:prstGeom>
+            <a:solidFill>
+              <a:srgbClr val="006DEB"/>
+            </a:solidFill>
+            <a:ln>
+              <a:noFill/>
+            </a:ln>
+          </p:spPr>
+          <p:txBody>
+            <a:bodyPr rtlCol="0" anchor="ctr"/>
+            <a:lstStyle/>
+            <a:p>
+              <a:pPr algn="ctr"/>
+            </a:p>
+          </p:txBody>
+        </p:sp>
+        <p:sp>
+          <p:nvSpPr>
+            <p:cNvPr id="10" name="BrandDeck Icon user"/>
+            <p:cNvSpPr/>
+            <p:nvPr/>
+          </p:nvSpPr>
+          <p:spPr>
+            <a:xfrm>
+              <a:off x="5793292" y="2665019"/>
+              <a:ext cx="331668" cy="331668"/>
+            </a:xfrm>
+            <a:custGeom>
+              <a:avLst/>
+              <a:gdLst/>
+              <a:ahLst/>
+              <a:cxnLst/>
+              <a:rect l="l" t="t" r="r" b="b"/>
+              <a:pathLst>
+                <a:path w="24000" h="24000" fill="none">
+                  <a:moveTo>
+                    <a:pt x="19000" y="21000"/>
+                  </a:moveTo>
+                  <a:lnTo>
+                    <a:pt x="19000" y="19000"/>
+                  </a:lnTo>
+                  <a:cubicBezTo>
+                    <a:pt x="19000" y="16791"/>
+                    <a:pt x="17209" y="15000"/>
+                    <a:pt x="15000" y="15000"/>
+                  </a:cubicBezTo>
+                  <a:lnTo>
+                    <a:pt x="9000" y="15000"/>
+                  </a:lnTo>
+                  <a:cubicBezTo>
+                    <a:pt x="6791" y="15000"/>
+                    <a:pt x="5000" y="16791"/>
+                    <a:pt x="5000" y="19000"/>
+                  </a:cubicBezTo>
+                  <a:lnTo>
+                    <a:pt x="5000" y="21000"/>
+                  </a:lnTo>
+                </a:path>
+                <a:path w="24000" h="24000" fill="none">
+                  <a:moveTo>
+                    <a:pt x="16000" y="7000"/>
+                  </a:moveTo>
+                  <a:cubicBezTo>
+                    <a:pt x="16000" y="9209"/>
+                    <a:pt x="14209" y="11000"/>
+                    <a:pt x="12000" y="11000"/>
+                  </a:cubicBezTo>
+                  <a:cubicBezTo>
+                    <a:pt x="9791" y="11000"/>
+                    <a:pt x="8000" y="9209"/>
+                    <a:pt x="8000" y="7000"/>
+                  </a:cubicBezTo>
+                  <a:cubicBezTo>
+                    <a:pt x="8000" y="4791"/>
+                    <a:pt x="9791" y="3000"/>
+                    <a:pt x="12000" y="3000"/>
+                  </a:cubicBezTo>
+                  <a:cubicBezTo>
+                    <a:pt x="14209" y="3000"/>
+                    <a:pt x="16000" y="4791"/>
+                    <a:pt x="16000" y="7000"/>
+                  </a:cubicBezTo>
+                  <a:close/>
+                </a:path>
+              </a:pathLst>
+            </a:custGeom>
+            <a:noFill/>
+            <a:ln w="27639" cap="rnd">
+              <a:solidFill>
+                <a:srgbClr val="FFFFFF"/>
+              </a:solidFill>
+              <a:round/>
+            </a:ln>
+          </p:spPr>
+          <p:txBody>
+            <a:bodyPr rtlCol="0" anchor="ctr"/>
+            <a:lstStyle/>
+            <a:p>
+              <a:pPr algn="ctr"/>
+            </a:p>
+          </p:txBody>
+        </p:sp>
+        <p:sp>
+          <p:nvSpPr>
+            <p:cNvPr id="11" name="BrandDeck Diagram Text 2"/>
             <p:cNvSpPr txBox="1"/>
             <p:nvPr/>
           </p:nvSpPr>
           <p:spPr>
             <a:xfrm>
-              <a:off x="5390833" y="2135749"/>
-              <a:ext cx="6142355" cy="1133856"/>
+              <a:off x="6386932" y="1904911"/>
+              <a:ext cx="4926799" cy="1851883"/>
             </a:xfrm>
             <a:prstGeom prst="rect">
               <a:avLst/>
@@ -13249,46 +11335,87 @@
                 </a:lnSpc>
               </a:pPr>
               <a:r>
-                <a:rPr sz="1600" b="1">
+                <a:rPr sz="1800" b="0">
                   <a:solidFill>
                     <a:srgbClr val="000000"/>
                   </a:solidFill>
                   <a:latin typeface="Play"/>
                 </a:rPr>
-                <a:t>Критерии успеха</a:t>
-              </a:r>
-            </a:p>
-            <a:p>
-              <a:pPr algn="l">
-                <a:lnSpc>
-                  <a:spcPct val="110000"/>
-                </a:lnSpc>
-                <a:spcBef>
-                  <a:spcPts val="400"/>
-                </a:spcBef>
-              </a:pPr>
-              <a:r>
-                <a:rPr sz="1600" b="0">
-                  <a:solidFill>
-                    <a:srgbClr val="000000"/>
-                  </a:solidFill>
-                  <a:latin typeface="Play"/>
-                </a:rPr>
-                <a:t>Снижение времени поиска и рост автозакрытия</a:t>
+                <a:t>Доля обращений, закрытых без специалиста, отслеживается как метрика.</a:t>
               </a:r>
             </a:p>
           </p:txBody>
         </p:sp>
         <p:sp>
           <p:nvSpPr>
-            <p:cNvPr id="6" name="BrandDeck Diagram Level 2"/>
+            <p:cNvPr id="12" name="BrandDeck Diagram Card 3"/>
             <p:cNvSpPr/>
             <p:nvPr/>
           </p:nvSpPr>
           <p:spPr>
             <a:xfrm>
-              <a:off x="1418908" y="3324469"/>
-              <a:ext cx="2937510" cy="1133856"/>
+              <a:off x="5443538" y="4105956"/>
+              <a:ext cx="6089650" cy="2115230"/>
+            </a:xfrm>
+            <a:prstGeom prst="roundRect">
+              <a:avLst>
+                <a:gd name="adj" fmla="val 8000"/>
+              </a:avLst>
+            </a:prstGeom>
+            <a:solidFill>
+              <a:srgbClr val="EDF5FF"/>
+            </a:solidFill>
+            <a:ln>
+              <a:noFill/>
+            </a:ln>
+          </p:spPr>
+          <p:txBody>
+            <a:bodyPr rtlCol="0" anchor="ctr"/>
+            <a:lstStyle/>
+            <a:p>
+              <a:pPr algn="ctr"/>
+            </a:p>
+          </p:txBody>
+        </p:sp>
+        <p:sp>
+          <p:nvSpPr>
+            <p:cNvPr id="13" name="BrandDeck Diagram Icon 3 Badge"/>
+            <p:cNvSpPr/>
+            <p:nvPr/>
+          </p:nvSpPr>
+          <p:spPr>
+            <a:xfrm>
+              <a:off x="5662994" y="4867439"/>
+              <a:ext cx="592264" cy="592264"/>
+            </a:xfrm>
+            <a:prstGeom prst="ellipse">
+              <a:avLst/>
+            </a:prstGeom>
+            <a:solidFill>
+              <a:srgbClr val="006DEB"/>
+            </a:solidFill>
+            <a:ln>
+              <a:noFill/>
+            </a:ln>
+          </p:spPr>
+          <p:txBody>
+            <a:bodyPr rtlCol="0" anchor="ctr"/>
+            <a:lstStyle/>
+            <a:p>
+              <a:pPr algn="ctr"/>
+            </a:p>
+          </p:txBody>
+        </p:sp>
+        <p:sp>
+          <p:nvSpPr>
+            <p:cNvPr id="14" name="BrandDeck Icon chart-column"/>
+            <p:cNvSpPr/>
+            <p:nvPr/>
+          </p:nvSpPr>
+          <p:spPr>
+            <a:xfrm>
+              <a:off x="5793292" y="4997737"/>
+              <a:ext cx="331668" cy="331668"/>
             </a:xfrm>
             <a:custGeom>
               <a:avLst/>
@@ -13297,63 +11424,74 @@
               <a:cxnLst/>
               <a:rect l="l" t="t" r="r" b="b"/>
               <a:pathLst>
-                <a:path w="3213" h="1240" stroke="0">
+                <a:path w="24000" h="24000" fill="none">
                   <a:moveTo>
-                    <a:pt x="775" y="0"/>
+                    <a:pt x="3000" y="3000"/>
                   </a:moveTo>
                   <a:lnTo>
-                    <a:pt x="2438" y="0"/>
+                    <a:pt x="3000" y="19000"/>
                   </a:lnTo>
+                  <a:cubicBezTo>
+                    <a:pt x="3000" y="20105"/>
+                    <a:pt x="3895" y="21000"/>
+                    <a:pt x="5000" y="21000"/>
+                  </a:cubicBezTo>
                   <a:lnTo>
-                    <a:pt x="3213" y="1240"/>
+                    <a:pt x="21000" y="21000"/>
                   </a:lnTo>
+                </a:path>
+                <a:path w="24000" h="24000" fill="none">
+                  <a:moveTo>
+                    <a:pt x="18000" y="17000"/>
+                  </a:moveTo>
                   <a:lnTo>
-                    <a:pt x="0" y="1240"/>
+                    <a:pt x="18000" y="9000"/>
                   </a:lnTo>
-                  <a:close/>
+                </a:path>
+                <a:path w="24000" h="24000" fill="none">
+                  <a:moveTo>
+                    <a:pt x="13000" y="17000"/>
+                  </a:moveTo>
+                  <a:lnTo>
+                    <a:pt x="13000" y="5000"/>
+                  </a:lnTo>
+                </a:path>
+                <a:path w="24000" h="24000" fill="none">
+                  <a:moveTo>
+                    <a:pt x="8000" y="17000"/>
+                  </a:moveTo>
+                  <a:lnTo>
+                    <a:pt x="8000" y="14000"/>
+                  </a:lnTo>
                 </a:path>
               </a:pathLst>
             </a:custGeom>
-            <a:solidFill>
-              <a:srgbClr val="4092F0"/>
-            </a:solidFill>
-            <a:ln w="0">
-              <a:noFill/>
+            <a:noFill/>
+            <a:ln w="27639" cap="rnd">
+              <a:solidFill>
+                <a:srgbClr val="FFFFFF"/>
+              </a:solidFill>
+              <a:round/>
             </a:ln>
           </p:spPr>
           <p:txBody>
-            <a:bodyPr rtlCol="0" anchor="ctr" wrap="square" lIns="18288" tIns="0" rIns="18288" bIns="0">
-              <a:noAutofit/>
-            </a:bodyPr>
+            <a:bodyPr rtlCol="0" anchor="ctr"/>
             <a:lstStyle/>
             <a:p>
-              <a:pPr algn="ctr">
-                <a:lnSpc>
-                  <a:spcPct val="110000"/>
-                </a:lnSpc>
-              </a:pPr>
-              <a:r>
-                <a:rPr sz="1400" b="1">
-                  <a:solidFill>
-                    <a:srgbClr val="000000"/>
-                  </a:solidFill>
-                  <a:latin typeface="Play"/>
-                </a:rPr>
-                <a:t>02</a:t>
-              </a:r>
+              <a:pPr algn="ctr"/>
             </a:p>
           </p:txBody>
         </p:sp>
         <p:sp>
           <p:nvSpPr>
-            <p:cNvPr id="7" name="BrandDeck Diagram Text 2"/>
+            <p:cNvPr id="15" name="BrandDeck Diagram Text 3"/>
             <p:cNvSpPr txBox="1"/>
             <p:nvPr/>
           </p:nvSpPr>
           <p:spPr>
             <a:xfrm>
-              <a:off x="5390833" y="3324469"/>
-              <a:ext cx="6142355" cy="1133856"/>
+              <a:off x="6386932" y="4237629"/>
+              <a:ext cx="4926799" cy="1851883"/>
             </a:xfrm>
             <a:prstGeom prst="rect">
               <a:avLst/>
@@ -13372,155 +11510,13 @@
                 </a:lnSpc>
               </a:pPr>
               <a:r>
-                <a:rPr sz="1600" b="1">
+                <a:rPr sz="1800" b="0">
                   <a:solidFill>
                     <a:srgbClr val="000000"/>
                   </a:solidFill>
                   <a:latin typeface="Play"/>
                 </a:rPr>
-                <a:t>Время поиска</a:t>
-              </a:r>
-            </a:p>
-            <a:p>
-              <a:pPr algn="l">
-                <a:lnSpc>
-                  <a:spcPct val="110000"/>
-                </a:lnSpc>
-                <a:spcBef>
-                  <a:spcPts val="400"/>
-                </a:spcBef>
-              </a:pPr>
-              <a:r>
-                <a:rPr sz="1600" b="0">
-                  <a:solidFill>
-                    <a:srgbClr val="000000"/>
-                  </a:solidFill>
-                  <a:latin typeface="Play"/>
-                </a:rPr>
-                <a:t>Метрика времени ответа сотрудника</a:t>
-              </a:r>
-            </a:p>
-          </p:txBody>
-        </p:sp>
-        <p:sp>
-          <p:nvSpPr>
-            <p:cNvPr id="8" name="BrandDeck Diagram Level 3"/>
-            <p:cNvSpPr/>
-            <p:nvPr/>
-          </p:nvSpPr>
-          <p:spPr>
-            <a:xfrm>
-              <a:off x="675958" y="4513189"/>
-              <a:ext cx="4423409" cy="1133855"/>
-            </a:xfrm>
-            <a:custGeom>
-              <a:avLst/>
-              <a:gdLst/>
-              <a:ahLst/>
-              <a:cxnLst/>
-              <a:rect l="l" t="t" r="r" b="b"/>
-              <a:pathLst>
-                <a:path w="4837" h="1240" stroke="0">
-                  <a:moveTo>
-                    <a:pt x="775" y="0"/>
-                  </a:moveTo>
-                  <a:lnTo>
-                    <a:pt x="4062" y="0"/>
-                  </a:lnTo>
-                  <a:lnTo>
-                    <a:pt x="4837" y="1240"/>
-                  </a:lnTo>
-                  <a:lnTo>
-                    <a:pt x="0" y="1240"/>
-                  </a:lnTo>
-                  <a:close/>
-                </a:path>
-              </a:pathLst>
-            </a:custGeom>
-            <a:solidFill>
-              <a:srgbClr val="80B6F5"/>
-            </a:solidFill>
-            <a:ln w="0">
-              <a:noFill/>
-            </a:ln>
-          </p:spPr>
-          <p:txBody>
-            <a:bodyPr rtlCol="0" anchor="ctr" wrap="square" lIns="18288" tIns="0" rIns="18288" bIns="0">
-              <a:noAutofit/>
-            </a:bodyPr>
-            <a:lstStyle/>
-            <a:p>
-              <a:pPr algn="ctr">
-                <a:lnSpc>
-                  <a:spcPct val="110000"/>
-                </a:lnSpc>
-              </a:pPr>
-              <a:r>
-                <a:rPr sz="1400" b="1">
-                  <a:solidFill>
-                    <a:srgbClr val="000000"/>
-                  </a:solidFill>
-                  <a:latin typeface="Play"/>
-                </a:rPr>
-                <a:t>03</a:t>
-              </a:r>
-            </a:p>
-          </p:txBody>
-        </p:sp>
-        <p:sp>
-          <p:nvSpPr>
-            <p:cNvPr id="9" name="BrandDeck Diagram Text 3"/>
-            <p:cNvSpPr txBox="1"/>
-            <p:nvPr/>
-          </p:nvSpPr>
-          <p:spPr>
-            <a:xfrm>
-              <a:off x="5390833" y="4513189"/>
-              <a:ext cx="6142355" cy="1133855"/>
-            </a:xfrm>
-            <a:prstGeom prst="rect">
-              <a:avLst/>
-            </a:prstGeom>
-            <a:noFill/>
-          </p:spPr>
-          <p:txBody>
-            <a:bodyPr wrap="square" anchor="ctr" lIns="36576" tIns="18288" rIns="36576" bIns="18288">
-              <a:noAutofit/>
-            </a:bodyPr>
-            <a:lstStyle/>
-            <a:p>
-              <a:pPr algn="l">
-                <a:lnSpc>
-                  <a:spcPct val="110000"/>
-                </a:lnSpc>
-              </a:pPr>
-              <a:r>
-                <a:rPr sz="1600" b="1">
-                  <a:solidFill>
-                    <a:srgbClr val="000000"/>
-                  </a:solidFill>
-                  <a:latin typeface="Play"/>
-                </a:rPr>
-                <a:t>Доля автозакрытия</a:t>
-              </a:r>
-            </a:p>
-            <a:p>
-              <a:pPr algn="l">
-                <a:lnSpc>
-                  <a:spcPct val="110000"/>
-                </a:lnSpc>
-                <a:spcBef>
-                  <a:spcPts val="400"/>
-                </a:spcBef>
-              </a:pPr>
-              <a:r>
-                <a:rPr sz="1600" b="0">
-                  <a:solidFill>
-                    <a:srgbClr val="000000"/>
-                  </a:solidFill>
-                  <a:latin typeface="Play"/>
-                </a:rPr>
-                <a:t>Процент вопросов без участия специалиста</a:t>
+                <a:t>Эти показатели определяют успешность пилотного проекта.</a:t>
               </a:r>
             </a:p>
           </p:txBody>
@@ -13561,7 +11557,7 @@
           </a:xfrm>
         </p:spPr>
         <p:txBody>
-          <a:bodyPr wrap="square" anchor="t">
+          <a:bodyPr vert="horz" wrap="square" anchor="t">
             <a:normAutofit/>
           </a:bodyPr>
           <a:lstStyle/>
@@ -13574,78 +11570,173 @@
                 <a:spcPts val="0"/>
               </a:spcBef>
               <a:spcAft>
-                <a:spcPts val="300"/>
+                <a:spcPts val="240"/>
               </a:spcAft>
             </a:pPr>
             <a:r>
-              <a:rPr sz="2000">
+              <a:rPr sz="1600">
                 <a:solidFill>
                   <a:srgbClr val="000000"/>
                 </a:solidFill>
               </a:rPr>
-              <a:t>В пилоте участвуют 2 подразделения, 150 сотрудников и 6 недель работы</a:t>
+              <a:t>План включает запуск пилота в двух подразделениях и мониторинг метрик в течение 6 недель</a:t>
             </a:r>
           </a:p>
         </p:txBody>
       </p:sp>
       <p:grpSp>
         <p:nvGrpSpPr>
-          <p:cNvPr id="2" name="BrandDeck Diagram pyramid" descr="pyramid: 6 недель Длительность пилотного запуска; 150 сотрудников Всего участников пилота; 2 подразделения Охват пилотной группы"/>
+          <p:cNvPr id="2" name="BrandDeck Diagram cycle" descr="cycle: Запуск 2 подразделения; Мониторинг 6 недель; Анализ Время поиска и доля закрытых"/>
           <p:cNvGrpSpPr/>
           <p:nvPr/>
         </p:nvGrpSpPr>
         <p:grpSpPr>
           <a:xfrm>
-            <a:off x="675958" y="2135749"/>
-            <a:ext cx="10857230" cy="3511295"/>
-            <a:chOff x="675958" y="2135749"/>
-            <a:chExt cx="10857230" cy="3511295"/>
+            <a:off x="912666" y="1773238"/>
+            <a:ext cx="10620521" cy="4402228"/>
+            <a:chOff x="912666" y="1773238"/>
+            <a:chExt cx="10620521" cy="4402228"/>
           </a:xfrm>
         </p:grpSpPr>
         <p:sp>
           <p:nvSpPr>
-            <p:cNvPr id="4" name="BrandDeck Diagram Level 1"/>
+            <p:cNvPr id="4" name="BrandDeck Diagram Ring"/>
             <p:cNvSpPr/>
             <p:nvPr/>
           </p:nvSpPr>
           <p:spPr>
             <a:xfrm>
-              <a:off x="2161858" y="2135749"/>
-              <a:ext cx="1451609" cy="1133856"/>
-            </a:xfrm>
-            <a:custGeom>
+              <a:off x="987997" y="2102422"/>
+              <a:ext cx="3789581" cy="3789581"/>
+            </a:xfrm>
+            <a:prstGeom prst="ellipse">
               <a:avLst/>
-              <a:gdLst/>
-              <a:ahLst/>
-              <a:cxnLst/>
-              <a:rect l="l" t="t" r="r" b="b"/>
-              <a:pathLst>
-                <a:path w="1587" h="1240" stroke="0">
-                  <a:moveTo>
-                    <a:pt x="769" y="0"/>
-                  </a:moveTo>
-                  <a:lnTo>
-                    <a:pt x="819" y="0"/>
-                  </a:lnTo>
-                  <a:lnTo>
-                    <a:pt x="1587" y="1240"/>
-                  </a:lnTo>
-                  <a:lnTo>
-                    <a:pt x="0" y="1240"/>
-                  </a:lnTo>
-                  <a:close/>
-                </a:path>
-              </a:pathLst>
-            </a:custGeom>
+            </a:prstGeom>
+            <a:noFill/>
+            <a:ln w="28575">
+              <a:solidFill>
+                <a:srgbClr val="59A7FF"/>
+              </a:solidFill>
+            </a:ln>
+          </p:spPr>
+          <p:txBody>
+            <a:bodyPr rtlCol="0" anchor="ctr"/>
+            <a:lstStyle/>
+            <a:p>
+              <a:pPr algn="ctr"/>
+            </a:p>
+          </p:txBody>
+        </p:sp>
+        <p:sp>
+          <p:nvSpPr>
+            <p:cNvPr id="5" name="BrandDeck Diagram Arrow 1"/>
+            <p:cNvSpPr/>
+            <p:nvPr/>
+          </p:nvSpPr>
+          <p:spPr>
+            <a:xfrm rot="9000000">
+              <a:off x="4423140" y="2949233"/>
+              <a:ext cx="201168" cy="201168"/>
+            </a:xfrm>
+            <a:prstGeom prst="triangle">
+              <a:avLst/>
+            </a:prstGeom>
+            <a:solidFill>
+              <a:srgbClr val="59A7FF"/>
+            </a:solidFill>
+            <a:ln>
+              <a:noFill/>
+            </a:ln>
+          </p:spPr>
+          <p:txBody>
+            <a:bodyPr rtlCol="0" anchor="ctr"/>
+            <a:lstStyle/>
+            <a:p>
+              <a:pPr algn="ctr"/>
+            </a:p>
+          </p:txBody>
+        </p:sp>
+        <p:sp>
+          <p:nvSpPr>
+            <p:cNvPr id="6" name="BrandDeck Diagram Arrow 2"/>
+            <p:cNvSpPr/>
+            <p:nvPr/>
+          </p:nvSpPr>
+          <p:spPr>
+            <a:xfrm rot="16200000">
+              <a:off x="2782203" y="5791419"/>
+              <a:ext cx="201168" cy="201168"/>
+            </a:xfrm>
+            <a:prstGeom prst="triangle">
+              <a:avLst/>
+            </a:prstGeom>
+            <a:solidFill>
+              <a:srgbClr val="59A7FF"/>
+            </a:solidFill>
+            <a:ln>
+              <a:noFill/>
+            </a:ln>
+          </p:spPr>
+          <p:txBody>
+            <a:bodyPr rtlCol="0" anchor="ctr"/>
+            <a:lstStyle/>
+            <a:p>
+              <a:pPr algn="ctr"/>
+            </a:p>
+          </p:txBody>
+        </p:sp>
+        <p:sp>
+          <p:nvSpPr>
+            <p:cNvPr id="7" name="BrandDeck Diagram Arrow 3"/>
+            <p:cNvSpPr/>
+            <p:nvPr/>
+          </p:nvSpPr>
+          <p:spPr>
+            <a:xfrm rot="1800000">
+              <a:off x="1141266" y="2949233"/>
+              <a:ext cx="201168" cy="201168"/>
+            </a:xfrm>
+            <a:prstGeom prst="triangle">
+              <a:avLst/>
+            </a:prstGeom>
+            <a:solidFill>
+              <a:srgbClr val="59A7FF"/>
+            </a:solidFill>
+            <a:ln>
+              <a:noFill/>
+            </a:ln>
+          </p:spPr>
+          <p:txBody>
+            <a:bodyPr rtlCol="0" anchor="ctr"/>
+            <a:lstStyle/>
+            <a:p>
+              <a:pPr algn="ctr"/>
+            </a:p>
+          </p:txBody>
+        </p:sp>
+        <p:sp>
+          <p:nvSpPr>
+            <p:cNvPr id="8" name="BrandDeck Diagram Node 1 Badge"/>
+            <p:cNvSpPr/>
+            <p:nvPr/>
+          </p:nvSpPr>
+          <p:spPr>
+            <a:xfrm>
+              <a:off x="2553603" y="1773238"/>
+              <a:ext cx="658368" cy="658368"/>
+            </a:xfrm>
+            <a:prstGeom prst="ellipse">
+              <a:avLst/>
+            </a:prstGeom>
             <a:solidFill>
               <a:srgbClr val="006DEB"/>
             </a:solidFill>
-            <a:ln w="0">
+            <a:ln>
               <a:noFill/>
             </a:ln>
           </p:spPr>
           <p:txBody>
-            <a:bodyPr rtlCol="0" anchor="b" wrap="square" lIns="18288" tIns="0" rIns="18288" bIns="73152">
+            <a:bodyPr rtlCol="0" anchor="ctr" wrap="square" lIns="0" tIns="0" rIns="0" bIns="0">
               <a:noAutofit/>
             </a:bodyPr>
             <a:lstStyle/>
@@ -13656,7 +11747,7 @@
                 </a:lnSpc>
               </a:pPr>
               <a:r>
-                <a:rPr sz="1400" b="1">
+                <a:rPr sz="1600" b="1">
                   <a:solidFill>
                     <a:srgbClr val="FFFFFF"/>
                   </a:solidFill>
@@ -13669,14 +11760,177 @@
         </p:sp>
         <p:sp>
           <p:nvSpPr>
-            <p:cNvPr id="5" name="BrandDeck Diagram Text 1"/>
+            <p:cNvPr id="9" name="BrandDeck Diagram Node 2 Badge"/>
+            <p:cNvSpPr/>
+            <p:nvPr/>
+          </p:nvSpPr>
+          <p:spPr>
+            <a:xfrm>
+              <a:off x="4194540" y="4615423"/>
+              <a:ext cx="658368" cy="658368"/>
+            </a:xfrm>
+            <a:prstGeom prst="ellipse">
+              <a:avLst/>
+            </a:prstGeom>
+            <a:solidFill>
+              <a:srgbClr val="006DEB"/>
+            </a:solidFill>
+            <a:ln>
+              <a:noFill/>
+            </a:ln>
+          </p:spPr>
+          <p:txBody>
+            <a:bodyPr rtlCol="0" anchor="ctr" wrap="square" lIns="0" tIns="0" rIns="0" bIns="0">
+              <a:noAutofit/>
+            </a:bodyPr>
+            <a:lstStyle/>
+            <a:p>
+              <a:pPr algn="ctr">
+                <a:lnSpc>
+                  <a:spcPct val="110000"/>
+                </a:lnSpc>
+              </a:pPr>
+              <a:r>
+                <a:rPr sz="1600" b="1">
+                  <a:solidFill>
+                    <a:srgbClr val="FFFFFF"/>
+                  </a:solidFill>
+                  <a:latin typeface="Play"/>
+                </a:rPr>
+                <a:t>02</a:t>
+              </a:r>
+            </a:p>
+          </p:txBody>
+        </p:sp>
+        <p:sp>
+          <p:nvSpPr>
+            <p:cNvPr id="10" name="BrandDeck Diagram Node 3 Badge"/>
+            <p:cNvSpPr/>
+            <p:nvPr/>
+          </p:nvSpPr>
+          <p:spPr>
+            <a:xfrm>
+              <a:off x="912666" y="4615423"/>
+              <a:ext cx="658368" cy="658368"/>
+            </a:xfrm>
+            <a:prstGeom prst="ellipse">
+              <a:avLst/>
+            </a:prstGeom>
+            <a:solidFill>
+              <a:srgbClr val="006DEB"/>
+            </a:solidFill>
+            <a:ln>
+              <a:noFill/>
+            </a:ln>
+          </p:spPr>
+          <p:txBody>
+            <a:bodyPr rtlCol="0" anchor="ctr" wrap="square" lIns="0" tIns="0" rIns="0" bIns="0">
+              <a:noAutofit/>
+            </a:bodyPr>
+            <a:lstStyle/>
+            <a:p>
+              <a:pPr algn="ctr">
+                <a:lnSpc>
+                  <a:spcPct val="110000"/>
+                </a:lnSpc>
+              </a:pPr>
+              <a:r>
+                <a:rPr sz="1600" b="1">
+                  <a:solidFill>
+                    <a:srgbClr val="FFFFFF"/>
+                  </a:solidFill>
+                  <a:latin typeface="Play"/>
+                </a:rPr>
+                <a:t>03</a:t>
+              </a:r>
+            </a:p>
+          </p:txBody>
+        </p:sp>
+        <p:sp>
+          <p:nvSpPr>
+            <p:cNvPr id="11" name="BrandDeck Diagram Legend Card 1"/>
+            <p:cNvSpPr/>
+            <p:nvPr/>
+          </p:nvSpPr>
+          <p:spPr>
+            <a:xfrm>
+              <a:off x="5426801" y="1818958"/>
+              <a:ext cx="6106386" cy="1391209"/>
+            </a:xfrm>
+            <a:prstGeom prst="roundRect">
+              <a:avLst>
+                <a:gd name="adj" fmla="val 12000"/>
+              </a:avLst>
+            </a:prstGeom>
+            <a:solidFill>
+              <a:srgbClr val="EDF5FF"/>
+            </a:solidFill>
+            <a:ln>
+              <a:noFill/>
+            </a:ln>
+          </p:spPr>
+          <p:txBody>
+            <a:bodyPr rtlCol="0" anchor="ctr"/>
+            <a:lstStyle/>
+            <a:p>
+              <a:pPr algn="ctr"/>
+            </a:p>
+          </p:txBody>
+        </p:sp>
+        <p:sp>
+          <p:nvSpPr>
+            <p:cNvPr id="12" name="BrandDeck Diagram Legend 1 Badge"/>
+            <p:cNvSpPr/>
+            <p:nvPr/>
+          </p:nvSpPr>
+          <p:spPr>
+            <a:xfrm>
+              <a:off x="5554817" y="2359114"/>
+              <a:ext cx="310896" cy="310896"/>
+            </a:xfrm>
+            <a:prstGeom prst="ellipse">
+              <a:avLst/>
+            </a:prstGeom>
+            <a:solidFill>
+              <a:srgbClr val="006DEB"/>
+            </a:solidFill>
+            <a:ln>
+              <a:noFill/>
+            </a:ln>
+          </p:spPr>
+          <p:txBody>
+            <a:bodyPr rtlCol="0" anchor="ctr" wrap="square" lIns="0" tIns="0" rIns="0" bIns="0">
+              <a:noAutofit/>
+            </a:bodyPr>
+            <a:lstStyle/>
+            <a:p>
+              <a:pPr algn="ctr">
+                <a:lnSpc>
+                  <a:spcPct val="110000"/>
+                </a:lnSpc>
+              </a:pPr>
+              <a:r>
+                <a:rPr sz="1200" b="1">
+                  <a:solidFill>
+                    <a:srgbClr val="FFFFFF"/>
+                  </a:solidFill>
+                  <a:latin typeface="Play"/>
+                </a:rPr>
+                <a:t>01</a:t>
+              </a:r>
+            </a:p>
+          </p:txBody>
+        </p:sp>
+        <p:sp>
+          <p:nvSpPr>
+            <p:cNvPr id="13" name="BrandDeck Diagram Text 1"/>
             <p:cNvSpPr txBox="1"/>
             <p:nvPr/>
           </p:nvSpPr>
           <p:spPr>
             <a:xfrm>
-              <a:off x="5390833" y="2135749"/>
-              <a:ext cx="6142355" cy="1133856"/>
+              <a:off x="6012017" y="1828102"/>
+              <a:ext cx="5393154" cy="1372921"/>
             </a:xfrm>
             <a:prstGeom prst="rect">
               <a:avLst/>
@@ -13695,13 +11949,13 @@
                 </a:lnSpc>
               </a:pPr>
               <a:r>
-                <a:rPr sz="1600" b="1">
+                <a:rPr sz="1400" b="1">
                   <a:solidFill>
                     <a:srgbClr val="000000"/>
                   </a:solidFill>
                   <a:latin typeface="Play"/>
                 </a:rPr>
-                <a:t>6 недель</a:t>
+                <a:t>Запуск</a:t>
               </a:r>
             </a:p>
             <a:p>
@@ -13710,65 +11964,75 @@
                   <a:spcPct val="110000"/>
                 </a:lnSpc>
                 <a:spcBef>
-                  <a:spcPts val="400"/>
+                  <a:spcPts val="350"/>
                 </a:spcBef>
               </a:pPr>
               <a:r>
-                <a:rPr sz="1600" b="0">
+                <a:rPr sz="1400" b="0">
                   <a:solidFill>
                     <a:srgbClr val="000000"/>
                   </a:solidFill>
                   <a:latin typeface="Play"/>
                 </a:rPr>
-                <a:t>Длительность пилотного запуска</a:t>
+                <a:t>2 подразделения</a:t>
               </a:r>
             </a:p>
           </p:txBody>
         </p:sp>
         <p:sp>
           <p:nvSpPr>
-            <p:cNvPr id="6" name="BrandDeck Diagram Level 2"/>
+            <p:cNvPr id="14" name="BrandDeck Diagram Legend Card 2"/>
             <p:cNvSpPr/>
             <p:nvPr/>
           </p:nvSpPr>
           <p:spPr>
             <a:xfrm>
-              <a:off x="1418908" y="3324469"/>
-              <a:ext cx="2937510" cy="1133856"/>
-            </a:xfrm>
-            <a:custGeom>
-              <a:avLst/>
-              <a:gdLst/>
-              <a:ahLst/>
-              <a:cxnLst/>
-              <a:rect l="l" t="t" r="r" b="b"/>
-              <a:pathLst>
-                <a:path w="3213" h="1240" stroke="0">
-                  <a:moveTo>
-                    <a:pt x="775" y="0"/>
-                  </a:moveTo>
-                  <a:lnTo>
-                    <a:pt x="2438" y="0"/>
-                  </a:lnTo>
-                  <a:lnTo>
-                    <a:pt x="3213" y="1240"/>
-                  </a:lnTo>
-                  <a:lnTo>
-                    <a:pt x="0" y="1240"/>
-                  </a:lnTo>
-                  <a:close/>
-                </a:path>
-              </a:pathLst>
-            </a:custGeom>
+              <a:off x="5426801" y="3301607"/>
+              <a:ext cx="6106386" cy="1391209"/>
+            </a:xfrm>
+            <a:prstGeom prst="roundRect">
+              <a:avLst>
+                <a:gd name="adj" fmla="val 12000"/>
+              </a:avLst>
+            </a:prstGeom>
             <a:solidFill>
-              <a:srgbClr val="4092F0"/>
+              <a:srgbClr val="EDF5FF"/>
             </a:solidFill>
-            <a:ln w="0">
+            <a:ln>
               <a:noFill/>
             </a:ln>
           </p:spPr>
           <p:txBody>
-            <a:bodyPr rtlCol="0" anchor="ctr" wrap="square" lIns="18288" tIns="0" rIns="18288" bIns="0">
+            <a:bodyPr rtlCol="0" anchor="ctr"/>
+            <a:lstStyle/>
+            <a:p>
+              <a:pPr algn="ctr"/>
+            </a:p>
+          </p:txBody>
+        </p:sp>
+        <p:sp>
+          <p:nvSpPr>
+            <p:cNvPr id="15" name="BrandDeck Diagram Legend 2 Badge"/>
+            <p:cNvSpPr/>
+            <p:nvPr/>
+          </p:nvSpPr>
+          <p:spPr>
+            <a:xfrm>
+              <a:off x="5554817" y="3841764"/>
+              <a:ext cx="310896" cy="310896"/>
+            </a:xfrm>
+            <a:prstGeom prst="ellipse">
+              <a:avLst/>
+            </a:prstGeom>
+            <a:solidFill>
+              <a:srgbClr val="006DEB"/>
+            </a:solidFill>
+            <a:ln>
+              <a:noFill/>
+            </a:ln>
+          </p:spPr>
+          <p:txBody>
+            <a:bodyPr rtlCol="0" anchor="ctr" wrap="square" lIns="0" tIns="0" rIns="0" bIns="0">
               <a:noAutofit/>
             </a:bodyPr>
             <a:lstStyle/>
@@ -13779,9 +12043,9 @@
                 </a:lnSpc>
               </a:pPr>
               <a:r>
-                <a:rPr sz="1400" b="1">
+                <a:rPr sz="1200" b="1">
                   <a:solidFill>
-                    <a:srgbClr val="000000"/>
+                    <a:srgbClr val="FFFFFF"/>
                   </a:solidFill>
                   <a:latin typeface="Play"/>
                 </a:rPr>
@@ -13792,14 +12056,14 @@
         </p:sp>
         <p:sp>
           <p:nvSpPr>
-            <p:cNvPr id="7" name="BrandDeck Diagram Text 2"/>
+            <p:cNvPr id="16" name="BrandDeck Diagram Text 2"/>
             <p:cNvSpPr txBox="1"/>
             <p:nvPr/>
           </p:nvSpPr>
           <p:spPr>
             <a:xfrm>
-              <a:off x="5390833" y="3324469"/>
-              <a:ext cx="6142355" cy="1133856"/>
+              <a:off x="6012017" y="3310751"/>
+              <a:ext cx="5393154" cy="1372921"/>
             </a:xfrm>
             <a:prstGeom prst="rect">
               <a:avLst/>
@@ -13818,13 +12082,13 @@
                 </a:lnSpc>
               </a:pPr>
               <a:r>
-                <a:rPr sz="1600" b="1">
+                <a:rPr sz="1400" b="1">
                   <a:solidFill>
                     <a:srgbClr val="000000"/>
                   </a:solidFill>
                   <a:latin typeface="Play"/>
                 </a:rPr>
-                <a:t>150 сотрудников</a:t>
+                <a:t>Мониторинг</a:t>
               </a:r>
             </a:p>
             <a:p>
@@ -13833,65 +12097,75 @@
                   <a:spcPct val="110000"/>
                 </a:lnSpc>
                 <a:spcBef>
-                  <a:spcPts val="400"/>
+                  <a:spcPts val="350"/>
                 </a:spcBef>
               </a:pPr>
               <a:r>
-                <a:rPr sz="1600" b="0">
+                <a:rPr sz="1400" b="0">
                   <a:solidFill>
                     <a:srgbClr val="000000"/>
                   </a:solidFill>
                   <a:latin typeface="Play"/>
                 </a:rPr>
-                <a:t>Всего участников пилота</a:t>
+                <a:t>6 недель</a:t>
               </a:r>
             </a:p>
           </p:txBody>
         </p:sp>
         <p:sp>
           <p:nvSpPr>
-            <p:cNvPr id="8" name="BrandDeck Diagram Level 3"/>
+            <p:cNvPr id="17" name="BrandDeck Diagram Legend Card 3"/>
             <p:cNvSpPr/>
             <p:nvPr/>
           </p:nvSpPr>
           <p:spPr>
             <a:xfrm>
-              <a:off x="675958" y="4513189"/>
-              <a:ext cx="4423409" cy="1133855"/>
-            </a:xfrm>
-            <a:custGeom>
-              <a:avLst/>
-              <a:gdLst/>
-              <a:ahLst/>
-              <a:cxnLst/>
-              <a:rect l="l" t="t" r="r" b="b"/>
-              <a:pathLst>
-                <a:path w="4837" h="1240" stroke="0">
-                  <a:moveTo>
-                    <a:pt x="775" y="0"/>
-                  </a:moveTo>
-                  <a:lnTo>
-                    <a:pt x="4062" y="0"/>
-                  </a:lnTo>
-                  <a:lnTo>
-                    <a:pt x="4837" y="1240"/>
-                  </a:lnTo>
-                  <a:lnTo>
-                    <a:pt x="0" y="1240"/>
-                  </a:lnTo>
-                  <a:close/>
-                </a:path>
-              </a:pathLst>
-            </a:custGeom>
+              <a:off x="5426801" y="4784257"/>
+              <a:ext cx="6106386" cy="1391209"/>
+            </a:xfrm>
+            <a:prstGeom prst="roundRect">
+              <a:avLst>
+                <a:gd name="adj" fmla="val 12000"/>
+              </a:avLst>
+            </a:prstGeom>
             <a:solidFill>
-              <a:srgbClr val="80B6F5"/>
+              <a:srgbClr val="EDF5FF"/>
             </a:solidFill>
-            <a:ln w="0">
+            <a:ln>
               <a:noFill/>
             </a:ln>
           </p:spPr>
           <p:txBody>
-            <a:bodyPr rtlCol="0" anchor="ctr" wrap="square" lIns="18288" tIns="0" rIns="18288" bIns="0">
+            <a:bodyPr rtlCol="0" anchor="ctr"/>
+            <a:lstStyle/>
+            <a:p>
+              <a:pPr algn="ctr"/>
+            </a:p>
+          </p:txBody>
+        </p:sp>
+        <p:sp>
+          <p:nvSpPr>
+            <p:cNvPr id="18" name="BrandDeck Diagram Legend 3 Badge"/>
+            <p:cNvSpPr/>
+            <p:nvPr/>
+          </p:nvSpPr>
+          <p:spPr>
+            <a:xfrm>
+              <a:off x="5554817" y="5324414"/>
+              <a:ext cx="310896" cy="310896"/>
+            </a:xfrm>
+            <a:prstGeom prst="ellipse">
+              <a:avLst/>
+            </a:prstGeom>
+            <a:solidFill>
+              <a:srgbClr val="006DEB"/>
+            </a:solidFill>
+            <a:ln>
+              <a:noFill/>
+            </a:ln>
+          </p:spPr>
+          <p:txBody>
+            <a:bodyPr rtlCol="0" anchor="ctr" wrap="square" lIns="0" tIns="0" rIns="0" bIns="0">
               <a:noAutofit/>
             </a:bodyPr>
             <a:lstStyle/>
@@ -13902,9 +12176,9 @@
                 </a:lnSpc>
               </a:pPr>
               <a:r>
-                <a:rPr sz="1400" b="1">
+                <a:rPr sz="1200" b="1">
                   <a:solidFill>
-                    <a:srgbClr val="000000"/>
+                    <a:srgbClr val="FFFFFF"/>
                   </a:solidFill>
                   <a:latin typeface="Play"/>
                 </a:rPr>
@@ -13915,14 +12189,14 @@
         </p:sp>
         <p:sp>
           <p:nvSpPr>
-            <p:cNvPr id="9" name="BrandDeck Diagram Text 3"/>
+            <p:cNvPr id="19" name="BrandDeck Diagram Text 3"/>
             <p:cNvSpPr txBox="1"/>
             <p:nvPr/>
           </p:nvSpPr>
           <p:spPr>
             <a:xfrm>
-              <a:off x="5390833" y="4513189"/>
-              <a:ext cx="6142355" cy="1133855"/>
+              <a:off x="6012017" y="4793401"/>
+              <a:ext cx="5393154" cy="1372921"/>
             </a:xfrm>
             <a:prstGeom prst="rect">
               <a:avLst/>
@@ -13941,13 +12215,13 @@
                 </a:lnSpc>
               </a:pPr>
               <a:r>
-                <a:rPr sz="1600" b="1">
+                <a:rPr sz="1400" b="1">
                   <a:solidFill>
                     <a:srgbClr val="000000"/>
                   </a:solidFill>
                   <a:latin typeface="Play"/>
                 </a:rPr>
-                <a:t>2 подразделения</a:t>
+                <a:t>Анализ</a:t>
               </a:r>
             </a:p>
             <a:p>
@@ -13956,17 +12230,17 @@
                   <a:spcPct val="110000"/>
                 </a:lnSpc>
                 <a:spcBef>
-                  <a:spcPts val="400"/>
+                  <a:spcPts val="350"/>
                 </a:spcBef>
               </a:pPr>
               <a:r>
-                <a:rPr sz="1600" b="0">
+                <a:rPr sz="1400" b="0">
                   <a:solidFill>
                     <a:srgbClr val="000000"/>
                   </a:solidFill>
                   <a:latin typeface="Play"/>
                 </a:rPr>
-                <a:t>Охват пилотной группы</a:t>
+                <a:t>Время поиска и доля закрытых</a:t>
               </a:r>
             </a:p>
           </p:txBody>
@@ -13992,7 +12266,7 @@
       <p:grpSpPr/>
       <p:sp>
         <p:nvSpPr>
-          <p:cNvPr id="2" name="BrandDeck Text 2"/>
+          <p:cNvPr id="4" name="BrandDeck Text 4"/>
           <p:cNvSpPr>
             <a:spLocks noGrp="1"/>
           </p:cNvSpPr>
@@ -14002,12 +12276,12 @@
         </p:nvSpPr>
         <p:spPr>
           <a:xfrm>
-            <a:off x="658813" y="692150"/>
-            <a:ext cx="5254307" cy="1380285"/>
+            <a:off x="677334" y="692150"/>
+            <a:ext cx="10855854" cy="644241"/>
           </a:xfrm>
         </p:spPr>
         <p:txBody>
-          <a:bodyPr wrap="square" anchor="t">
+          <a:bodyPr vert="horz" wrap="square" anchor="t">
             <a:normAutofit/>
           </a:bodyPr>
           <a:lstStyle/>
@@ -14020,120 +12294,373 @@
                 <a:spcPts val="0"/>
               </a:spcBef>
               <a:spcAft>
-                <a:spcPts val="359"/>
+                <a:spcPts val="240"/>
               </a:spcAft>
             </a:pPr>
             <a:r>
-              <a:rPr sz="2400">
+              <a:rPr sz="1600">
                 <a:solidFill>
                   <a:srgbClr val="000000"/>
                 </a:solidFill>
               </a:rPr>
-              <a:t>Измерим время поиска ответа и долю обращений, закрытых без специалиста поддержки</a:t>
+              <a:t>Основные риски связаны с безопасностью данных, которые контролируются работой внутри контура</a:t>
             </a:r>
           </a:p>
         </p:txBody>
       </p:sp>
-      <p:sp>
-        <p:nvSpPr>
-          <p:cNvPr id="3" name="BrandDeck Text 3"/>
-          <p:cNvSpPr>
-            <a:spLocks noGrp="1"/>
-          </p:cNvSpPr>
-          <p:nvPr>
-            <p:ph type="body" idx="1"/>
-          </p:nvPr>
-        </p:nvSpPr>
-        <p:spPr/>
-        <p:txBody>
-          <a:bodyPr wrap="square" anchor="t">
-            <a:normAutofit/>
-          </a:bodyPr>
-          <a:lstStyle/>
-          <a:p>
-            <a:pPr>
-              <a:lnSpc>
-                <a:spcPct val="115000"/>
-              </a:lnSpc>
-              <a:spcBef>
-                <a:spcPts val="0"/>
-              </a:spcBef>
-              <a:spcAft>
-                <a:spcPts val="270"/>
-              </a:spcAft>
-            </a:pPr>
-            <a:r>
-              <a:rPr sz="1800">
-                <a:solidFill>
-                  <a:srgbClr val="000000"/>
-                </a:solidFill>
-              </a:rPr>
-              <a:t>Измерим время поиска ответа и долю закрытых обращений.</a:t>
-            </a:r>
-          </a:p>
-          <a:p>
-            <a:pPr>
-              <a:lnSpc>
-                <a:spcPct val="115000"/>
-              </a:lnSpc>
-              <a:spcBef>
-                <a:spcPts val="0"/>
-              </a:spcBef>
-              <a:spcAft>
-                <a:spcPts val="270"/>
-              </a:spcAft>
-            </a:pPr>
-            <a:r>
-              <a:rPr sz="1800">
-                <a:solidFill>
-                  <a:srgbClr val="000000"/>
-                </a:solidFill>
-              </a:rPr>
-              <a:t>Снижение времени поиска и нагрузки на поддержку — критерии успеха.</a:t>
-            </a:r>
-          </a:p>
-          <a:p>
-            <a:pPr>
-              <a:lnSpc>
-                <a:spcPct val="115000"/>
-              </a:lnSpc>
-              <a:spcBef>
-                <a:spcPts val="0"/>
-              </a:spcBef>
-              <a:spcAft>
-                <a:spcPts val="270"/>
-              </a:spcAft>
-            </a:pPr>
-            <a:r>
-              <a:rPr sz="1800">
-                <a:solidFill>
-                  <a:srgbClr val="000000"/>
-                </a:solidFill>
-              </a:rPr>
-              <a:t>Результаты пилота определят эффективность ИИ-помощника.</a:t>
-            </a:r>
-          </a:p>
-        </p:txBody>
-      </p:sp>
-      <p:pic>
-        <p:nvPicPr>
-          <p:cNvPr id="4" name="BrandDeck Image" descr="сотрудник специалист поддержки"/>
-          <p:cNvPicPr>
-            <a:picLocks noGrp="1" noChangeAspect="1"/>
-          </p:cNvPicPr>
-          <p:nvPr>
-            <p:ph type="pic" idx="2"/>
-          </p:nvPr>
-        </p:nvPicPr>
-        <p:blipFill>
-          <a:blip r:embed="rId2"/>
-          <a:srcRect l="24987" r="24987"/>
-          <a:stretch>
-            <a:fillRect/>
-          </a:stretch>
-        </p:blipFill>
-        <p:spPr/>
-      </p:pic>
+      <p:grpSp>
+        <p:nvGrpSpPr>
+          <p:cNvPr id="2" name="BrandDeck Diagram matrix" descr="matrix: Риск Утечка данных наружу; Мера Работа модели внутри контура; Риск Отсутствие контекста; Мера Передача вопроса специалисту"/>
+          <p:cNvGrpSpPr/>
+          <p:nvPr/>
+        </p:nvGrpSpPr>
+        <p:grpSpPr>
+          <a:xfrm>
+            <a:off x="677334" y="1773238"/>
+            <a:ext cx="10837332" cy="4427537"/>
+            <a:chOff x="677334" y="1773238"/>
+            <a:chExt cx="10837332" cy="4427537"/>
+          </a:xfrm>
+        </p:grpSpPr>
+        <p:sp>
+          <p:nvSpPr>
+            <p:cNvPr id="5" name="BrandDeck Diagram Axis Y"/>
+            <p:cNvSpPr txBox="1"/>
+            <p:nvPr/>
+          </p:nvSpPr>
+          <p:spPr>
+            <a:xfrm>
+              <a:off x="677334" y="1773238"/>
+              <a:ext cx="10837332" cy="274320"/>
+            </a:xfrm>
+            <a:prstGeom prst="rect">
+              <a:avLst/>
+            </a:prstGeom>
+            <a:noFill/>
+          </p:spPr>
+          <p:txBody>
+            <a:bodyPr wrap="square" anchor="t" lIns="36576" tIns="18288" rIns="36576" bIns="18288">
+              <a:noAutofit/>
+            </a:bodyPr>
+            <a:lstStyle/>
+            <a:p>
+              <a:pPr algn="l">
+                <a:lnSpc>
+                  <a:spcPct val="110000"/>
+                </a:lnSpc>
+              </a:pPr>
+              <a:r>
+                <a:rPr sz="1200" b="0">
+                  <a:solidFill>
+                    <a:srgbClr val="000000"/>
+                  </a:solidFill>
+                  <a:latin typeface="Play"/>
+                </a:rPr>
+                <a:t>Риск</a:t>
+              </a:r>
+            </a:p>
+          </p:txBody>
+        </p:sp>
+        <p:sp>
+          <p:nvSpPr>
+            <p:cNvPr id="6" name="BrandDeck Diagram Quadrant 1"/>
+            <p:cNvSpPr/>
+            <p:nvPr/>
+          </p:nvSpPr>
+          <p:spPr>
+            <a:xfrm>
+              <a:off x="677334" y="2084134"/>
+              <a:ext cx="5354658" cy="1838864"/>
+            </a:xfrm>
+            <a:prstGeom prst="roundRect">
+              <a:avLst>
+                <a:gd name="adj" fmla="val 6000"/>
+              </a:avLst>
+            </a:prstGeom>
+            <a:solidFill>
+              <a:srgbClr val="006DEB"/>
+            </a:solidFill>
+            <a:ln>
+              <a:noFill/>
+            </a:ln>
+          </p:spPr>
+          <p:txBody>
+            <a:bodyPr rtlCol="0" anchor="t" wrap="square" lIns="164592" tIns="128016" rIns="164592" bIns="109728">
+              <a:noAutofit/>
+            </a:bodyPr>
+            <a:lstStyle/>
+            <a:p>
+              <a:pPr algn="l">
+                <a:lnSpc>
+                  <a:spcPct val="110000"/>
+                </a:lnSpc>
+              </a:pPr>
+              <a:r>
+                <a:rPr sz="1600" b="1">
+                  <a:solidFill>
+                    <a:srgbClr val="FFFFFF"/>
+                  </a:solidFill>
+                  <a:latin typeface="Play"/>
+                </a:rPr>
+                <a:t>Риск</a:t>
+              </a:r>
+            </a:p>
+            <a:p>
+              <a:pPr algn="l">
+                <a:lnSpc>
+                  <a:spcPct val="110000"/>
+                </a:lnSpc>
+                <a:spcBef>
+                  <a:spcPts val="400"/>
+                </a:spcBef>
+              </a:pPr>
+              <a:r>
+                <a:rPr sz="1600" b="0">
+                  <a:solidFill>
+                    <a:srgbClr val="FFFFFF"/>
+                  </a:solidFill>
+                  <a:latin typeface="Play"/>
+                </a:rPr>
+                <a:t>Утечка данных наружу</a:t>
+              </a:r>
+            </a:p>
+          </p:txBody>
+        </p:sp>
+        <p:sp>
+          <p:nvSpPr>
+            <p:cNvPr id="7" name="BrandDeck Diagram Quadrant 2"/>
+            <p:cNvSpPr/>
+            <p:nvPr/>
+          </p:nvSpPr>
+          <p:spPr>
+            <a:xfrm>
+              <a:off x="6160008" y="2084134"/>
+              <a:ext cx="5354658" cy="1838864"/>
+            </a:xfrm>
+            <a:prstGeom prst="roundRect">
+              <a:avLst>
+                <a:gd name="adj" fmla="val 6000"/>
+              </a:avLst>
+            </a:prstGeom>
+            <a:solidFill>
+              <a:srgbClr val="358BEF"/>
+            </a:solidFill>
+            <a:ln>
+              <a:noFill/>
+            </a:ln>
+          </p:spPr>
+          <p:txBody>
+            <a:bodyPr rtlCol="0" anchor="t" wrap="square" lIns="164592" tIns="128016" rIns="164592" bIns="109728">
+              <a:noAutofit/>
+            </a:bodyPr>
+            <a:lstStyle/>
+            <a:p>
+              <a:pPr algn="l">
+                <a:lnSpc>
+                  <a:spcPct val="110000"/>
+                </a:lnSpc>
+              </a:pPr>
+              <a:r>
+                <a:rPr sz="1600" b="1">
+                  <a:solidFill>
+                    <a:srgbClr val="000000"/>
+                  </a:solidFill>
+                  <a:latin typeface="Play"/>
+                </a:rPr>
+                <a:t>Мера</a:t>
+              </a:r>
+            </a:p>
+            <a:p>
+              <a:pPr algn="l">
+                <a:lnSpc>
+                  <a:spcPct val="110000"/>
+                </a:lnSpc>
+                <a:spcBef>
+                  <a:spcPts val="400"/>
+                </a:spcBef>
+              </a:pPr>
+              <a:r>
+                <a:rPr sz="1600" b="0">
+                  <a:solidFill>
+                    <a:srgbClr val="000000"/>
+                  </a:solidFill>
+                  <a:latin typeface="Play"/>
+                </a:rPr>
+                <a:t>Работа модели внутри контура</a:t>
+              </a:r>
+            </a:p>
+          </p:txBody>
+        </p:sp>
+        <p:sp>
+          <p:nvSpPr>
+            <p:cNvPr id="8" name="BrandDeck Diagram Quadrant 3"/>
+            <p:cNvSpPr/>
+            <p:nvPr/>
+          </p:nvSpPr>
+          <p:spPr>
+            <a:xfrm>
+              <a:off x="677334" y="4051014"/>
+              <a:ext cx="5354658" cy="1838864"/>
+            </a:xfrm>
+            <a:prstGeom prst="roundRect">
+              <a:avLst>
+                <a:gd name="adj" fmla="val 6000"/>
+              </a:avLst>
+            </a:prstGeom>
+            <a:solidFill>
+              <a:srgbClr val="69A9F3"/>
+            </a:solidFill>
+            <a:ln>
+              <a:noFill/>
+            </a:ln>
+          </p:spPr>
+          <p:txBody>
+            <a:bodyPr rtlCol="0" anchor="t" wrap="square" lIns="164592" tIns="128016" rIns="164592" bIns="109728">
+              <a:noAutofit/>
+            </a:bodyPr>
+            <a:lstStyle/>
+            <a:p>
+              <a:pPr algn="l">
+                <a:lnSpc>
+                  <a:spcPct val="110000"/>
+                </a:lnSpc>
+              </a:pPr>
+              <a:r>
+                <a:rPr sz="1600" b="1">
+                  <a:solidFill>
+                    <a:srgbClr val="000000"/>
+                  </a:solidFill>
+                  <a:latin typeface="Play"/>
+                </a:rPr>
+                <a:t>Риск</a:t>
+              </a:r>
+            </a:p>
+            <a:p>
+              <a:pPr algn="l">
+                <a:lnSpc>
+                  <a:spcPct val="110000"/>
+                </a:lnSpc>
+                <a:spcBef>
+                  <a:spcPts val="400"/>
+                </a:spcBef>
+              </a:pPr>
+              <a:r>
+                <a:rPr sz="1600" b="0">
+                  <a:solidFill>
+                    <a:srgbClr val="000000"/>
+                  </a:solidFill>
+                  <a:latin typeface="Play"/>
+                </a:rPr>
+                <a:t>Отсутствие контекста</a:t>
+              </a:r>
+            </a:p>
+          </p:txBody>
+        </p:sp>
+        <p:sp>
+          <p:nvSpPr>
+            <p:cNvPr id="9" name="BrandDeck Diagram Quadrant 4"/>
+            <p:cNvSpPr/>
+            <p:nvPr/>
+          </p:nvSpPr>
+          <p:spPr>
+            <a:xfrm>
+              <a:off x="6160008" y="4051014"/>
+              <a:ext cx="5354658" cy="1838864"/>
+            </a:xfrm>
+            <a:prstGeom prst="roundRect">
+              <a:avLst>
+                <a:gd name="adj" fmla="val 6000"/>
+              </a:avLst>
+            </a:prstGeom>
+            <a:solidFill>
+              <a:srgbClr val="9EC8F7"/>
+            </a:solidFill>
+            <a:ln>
+              <a:noFill/>
+            </a:ln>
+          </p:spPr>
+          <p:txBody>
+            <a:bodyPr rtlCol="0" anchor="t" wrap="square" lIns="164592" tIns="128016" rIns="164592" bIns="109728">
+              <a:noAutofit/>
+            </a:bodyPr>
+            <a:lstStyle/>
+            <a:p>
+              <a:pPr algn="l">
+                <a:lnSpc>
+                  <a:spcPct val="110000"/>
+                </a:lnSpc>
+              </a:pPr>
+              <a:r>
+                <a:rPr sz="1600" b="1">
+                  <a:solidFill>
+                    <a:srgbClr val="000000"/>
+                  </a:solidFill>
+                  <a:latin typeface="Play"/>
+                </a:rPr>
+                <a:t>Мера</a:t>
+              </a:r>
+            </a:p>
+            <a:p>
+              <a:pPr algn="l">
+                <a:lnSpc>
+                  <a:spcPct val="110000"/>
+                </a:lnSpc>
+                <a:spcBef>
+                  <a:spcPts val="400"/>
+                </a:spcBef>
+              </a:pPr>
+              <a:r>
+                <a:rPr sz="1600" b="0">
+                  <a:solidFill>
+                    <a:srgbClr val="000000"/>
+                  </a:solidFill>
+                  <a:latin typeface="Play"/>
+                </a:rPr>
+                <a:t>Передача вопроса специалисту</a:t>
+              </a:r>
+            </a:p>
+          </p:txBody>
+        </p:sp>
+        <p:sp>
+          <p:nvSpPr>
+            <p:cNvPr id="10" name="BrandDeck Diagram Axis X"/>
+            <p:cNvSpPr txBox="1"/>
+            <p:nvPr/>
+          </p:nvSpPr>
+          <p:spPr>
+            <a:xfrm>
+              <a:off x="677334" y="5926455"/>
+              <a:ext cx="10837332" cy="274320"/>
+            </a:xfrm>
+            <a:prstGeom prst="rect">
+              <a:avLst/>
+            </a:prstGeom>
+            <a:noFill/>
+          </p:spPr>
+          <p:txBody>
+            <a:bodyPr wrap="square" anchor="t" lIns="36576" tIns="18288" rIns="36576" bIns="18288">
+              <a:noAutofit/>
+            </a:bodyPr>
+            <a:lstStyle/>
+            <a:p>
+              <a:pPr algn="ctr">
+                <a:lnSpc>
+                  <a:spcPct val="110000"/>
+                </a:lnSpc>
+              </a:pPr>
+              <a:r>
+                <a:rPr sz="1200" b="0">
+                  <a:solidFill>
+                    <a:srgbClr val="000000"/>
+                  </a:solidFill>
+                  <a:latin typeface="Play"/>
+                </a:rPr>
+                <a:t>Мера</a:t>
+              </a:r>
+            </a:p>
+          </p:txBody>
+        </p:sp>
+      </p:grpSp>
     </p:spTree>
   </p:cSld>
   <p:clrMapOvr>
